--- a/modules/module-01-industrial-demand-generation/delivery-pack/slide-decks/exports/lesson-02-industrial-buyer-reality.pptx
+++ b/modules/module-01-industrial-demand-generation/delivery-pack/slide-decks/exports/lesson-02-industrial-buyer-reality.pptx
@@ -2,27 +2,27 @@
 <file path=ppt/presentation.xml><?xml version="1.0" encoding="utf-8"?>
 <p:presentation xmlns:p="http://schemas.openxmlformats.org/presentationml/2006/main">
   <p:sldMasterIdLst>
-    <p:sldMasterId xmlns:r="http://schemas.openxmlformats.org/officeDocument/2006/relationships" id="2147483648" r:id="Re28ced8ffcf44010"/>
+    <p:sldMasterId xmlns:r="http://schemas.openxmlformats.org/officeDocument/2006/relationships" id="2147483648" r:id="R33b468f3db674f9b"/>
   </p:sldMasterIdLst>
   <p:notesMasterIdLst>
-    <p:notesMasterId xmlns:r="http://schemas.openxmlformats.org/officeDocument/2006/relationships" r:id="Rf26a3627785b4e89"/>
+    <p:notesMasterId xmlns:r="http://schemas.openxmlformats.org/officeDocument/2006/relationships" r:id="R9d3ba795e0354eb8"/>
   </p:notesMasterIdLst>
   <p:sldIdLst>
-    <p:sldId xmlns:r="http://schemas.openxmlformats.org/officeDocument/2006/relationships" id="256" r:id="R56131da6ad8f4dbc"/>
-    <p:sldId xmlns:r="http://schemas.openxmlformats.org/officeDocument/2006/relationships" id="257" r:id="Rc015e1ab23be4592"/>
-    <p:sldId xmlns:r="http://schemas.openxmlformats.org/officeDocument/2006/relationships" id="258" r:id="R1584996d17e945bd"/>
-    <p:sldId xmlns:r="http://schemas.openxmlformats.org/officeDocument/2006/relationships" id="259" r:id="Rdf3d085dfce84b54"/>
-    <p:sldId xmlns:r="http://schemas.openxmlformats.org/officeDocument/2006/relationships" id="260" r:id="Rba42163fb72d439c"/>
-    <p:sldId xmlns:r="http://schemas.openxmlformats.org/officeDocument/2006/relationships" id="261" r:id="R4543c1a424314c1f"/>
-    <p:sldId xmlns:r="http://schemas.openxmlformats.org/officeDocument/2006/relationships" id="262" r:id="R92f7ebbe39124eb3"/>
-    <p:sldId xmlns:r="http://schemas.openxmlformats.org/officeDocument/2006/relationships" id="263" r:id="Ra59ee10d4e074e03"/>
-    <p:sldId xmlns:r="http://schemas.openxmlformats.org/officeDocument/2006/relationships" id="264" r:id="R3ed32f8ed5c14f71"/>
-    <p:sldId xmlns:r="http://schemas.openxmlformats.org/officeDocument/2006/relationships" id="265" r:id="Re24b3c15ac274ef4"/>
-    <p:sldId xmlns:r="http://schemas.openxmlformats.org/officeDocument/2006/relationships" id="266" r:id="R22faff1260b246b5"/>
-    <p:sldId xmlns:r="http://schemas.openxmlformats.org/officeDocument/2006/relationships" id="267" r:id="Rd9d1230910a4480e"/>
-    <p:sldId xmlns:r="http://schemas.openxmlformats.org/officeDocument/2006/relationships" id="268" r:id="R7672d2205c764c51"/>
-    <p:sldId xmlns:r="http://schemas.openxmlformats.org/officeDocument/2006/relationships" id="269" r:id="Reb090a5bb7d9416c"/>
-    <p:sldId xmlns:r="http://schemas.openxmlformats.org/officeDocument/2006/relationships" id="270" r:id="R02f4f51a2c494076"/>
+    <p:sldId xmlns:r="http://schemas.openxmlformats.org/officeDocument/2006/relationships" id="256" r:id="R58fbcb9fc0b44b45"/>
+    <p:sldId xmlns:r="http://schemas.openxmlformats.org/officeDocument/2006/relationships" id="257" r:id="R1988f7f8ae2c4e61"/>
+    <p:sldId xmlns:r="http://schemas.openxmlformats.org/officeDocument/2006/relationships" id="258" r:id="Rd8c1e082a8154896"/>
+    <p:sldId xmlns:r="http://schemas.openxmlformats.org/officeDocument/2006/relationships" id="259" r:id="R7197d79646514edd"/>
+    <p:sldId xmlns:r="http://schemas.openxmlformats.org/officeDocument/2006/relationships" id="260" r:id="R301eab466a9241ee"/>
+    <p:sldId xmlns:r="http://schemas.openxmlformats.org/officeDocument/2006/relationships" id="261" r:id="R29325b8b4b88458a"/>
+    <p:sldId xmlns:r="http://schemas.openxmlformats.org/officeDocument/2006/relationships" id="262" r:id="R4dabd8738b094ac7"/>
+    <p:sldId xmlns:r="http://schemas.openxmlformats.org/officeDocument/2006/relationships" id="263" r:id="R24b54e24f6274e96"/>
+    <p:sldId xmlns:r="http://schemas.openxmlformats.org/officeDocument/2006/relationships" id="264" r:id="Rc21c0b2a253b436a"/>
+    <p:sldId xmlns:r="http://schemas.openxmlformats.org/officeDocument/2006/relationships" id="265" r:id="R24185963fc214035"/>
+    <p:sldId xmlns:r="http://schemas.openxmlformats.org/officeDocument/2006/relationships" id="266" r:id="Rf5f5dd5368fb4a0c"/>
+    <p:sldId xmlns:r="http://schemas.openxmlformats.org/officeDocument/2006/relationships" id="267" r:id="R0aed7785879e4904"/>
+    <p:sldId xmlns:r="http://schemas.openxmlformats.org/officeDocument/2006/relationships" id="268" r:id="R103dcad674f9415c"/>
+    <p:sldId xmlns:r="http://schemas.openxmlformats.org/officeDocument/2006/relationships" id="269" r:id="Rb49d1cd1170c41f2"/>
+    <p:sldId xmlns:r="http://schemas.openxmlformats.org/officeDocument/2006/relationships" id="270" r:id="R30e7f9488f054640"/>
   </p:sldIdLst>
   <p:sldSz cx="12192000" cy="6858000"/>
   <p:notesSz cx="6858000" cy="9144000"/>
@@ -1493,7 +1493,7 @@
   </p:cSld>
   <p:clrMap bg1="lt1" tx1="dk1" bg2="lt2" tx2="dk2" accent1="accent1" accent2="accent2" accent3="accent3" accent4="accent4" accent5="accent5" accent6="accent6" hlink="hlink" folHlink="folHlink"/>
   <p:sldLayoutIdLst>
-    <p:sldLayoutId xmlns:r="http://schemas.openxmlformats.org/officeDocument/2006/relationships" id="2147483649" r:id="Ra3b9bc1c3b16433c"/>
+    <p:sldLayoutId xmlns:r="http://schemas.openxmlformats.org/officeDocument/2006/relationships" id="2147483649" r:id="Ra9f7cc20123c4403"/>
   </p:sldLayoutIdLst>
   <p:txStyles>
     <p:titleStyle>
@@ -1792,7 +1792,7 @@
           <p:cNvPr id="1" name="">
             <a:extLst xmlns:a="http://schemas.openxmlformats.org/drawingml/2006/main">
               <a:ext uri="{FF2B5EF4-FFF2-40B4-BE49-F238E27FC236}">
-                <a16:creationId xmlns:a16="http://schemas.microsoft.com/office/drawing/2014/main" id="{462528F8-F165-47F4-BDB0-11958B6B0E15}"/>
+                <a16:creationId xmlns:a16="http://schemas.microsoft.com/office/drawing/2014/main" id="{139C900F-0AD0-4B10-BC44-C0DD21A43990}"/>
               </a:ext>
             </a:extLst>
           </p:cNvPr>
@@ -1827,7 +1827,7 @@
           <p:cNvPr id="2" name="">
             <a:extLst xmlns:a="http://schemas.openxmlformats.org/drawingml/2006/main">
               <a:ext uri="{FF2B5EF4-FFF2-40B4-BE49-F238E27FC236}">
-                <a16:creationId xmlns:a16="http://schemas.microsoft.com/office/drawing/2014/main" id="{C867DEBA-A331-4C90-9575-F0B26E43789C}"/>
+                <a16:creationId xmlns:a16="http://schemas.microsoft.com/office/drawing/2014/main" id="{7D7B39F0-2924-4ADC-8966-BBF0D27226FB}"/>
               </a:ext>
             </a:extLst>
           </p:cNvPr>
@@ -1862,7 +1862,7 @@
           <p:cNvPr id="3" name="">
             <a:extLst xmlns:a="http://schemas.openxmlformats.org/drawingml/2006/main">
               <a:ext uri="{FF2B5EF4-FFF2-40B4-BE49-F238E27FC236}">
-                <a16:creationId xmlns:a16="http://schemas.microsoft.com/office/drawing/2014/main" id="{BC899C5E-CEC3-499C-8601-1E1AD4A32646}"/>
+                <a16:creationId xmlns:a16="http://schemas.microsoft.com/office/drawing/2014/main" id="{1C2AEFF5-BDD9-4310-872C-A5C0F669D32E}"/>
               </a:ext>
             </a:extLst>
           </p:cNvPr>
@@ -1897,7 +1897,7 @@
           <p:cNvPr id="4" name="kicker-02-marker">
             <a:extLst xmlns:a="http://schemas.openxmlformats.org/drawingml/2006/main">
               <a:ext uri="{FF2B5EF4-FFF2-40B4-BE49-F238E27FC236}">
-                <a16:creationId xmlns:a16="http://schemas.microsoft.com/office/drawing/2014/main" id="{64445FA4-8FAE-45C4-AB15-22224C8C6A60}"/>
+                <a16:creationId xmlns:a16="http://schemas.microsoft.com/office/drawing/2014/main" id="{750B0967-D13B-4816-8B3B-FB59AFEFE5BC}"/>
               </a:ext>
             </a:extLst>
           </p:cNvPr>
@@ -1932,7 +1932,7 @@
           <p:cNvPr id="5" name="kicker-02-label">
             <a:extLst xmlns:a="http://schemas.openxmlformats.org/drawingml/2006/main">
               <a:ext uri="{FF2B5EF4-FFF2-40B4-BE49-F238E27FC236}">
-                <a16:creationId xmlns:a16="http://schemas.microsoft.com/office/drawing/2014/main" id="{90FA483F-DA4B-480F-A735-A8A9308BA41B}"/>
+                <a16:creationId xmlns:a16="http://schemas.microsoft.com/office/drawing/2014/main" id="{A013328E-C7E8-4F6A-B887-7F94A2562F9B}"/>
               </a:ext>
             </a:extLst>
           </p:cNvPr>
@@ -1996,7 +1996,7 @@
           <p:cNvPr id="6" name="">
             <a:extLst xmlns:a="http://schemas.openxmlformats.org/drawingml/2006/main">
               <a:ext uri="{FF2B5EF4-FFF2-40B4-BE49-F238E27FC236}">
-                <a16:creationId xmlns:a16="http://schemas.microsoft.com/office/drawing/2014/main" id="{39F8F89F-E714-47DB-AD0D-3FB78BE18BD2}"/>
+                <a16:creationId xmlns:a16="http://schemas.microsoft.com/office/drawing/2014/main" id="{206D4050-E403-4756-8B7A-CC52D70B888F}"/>
               </a:ext>
             </a:extLst>
           </p:cNvPr>
@@ -2060,7 +2060,7 @@
           <p:cNvPr id="7" name="">
             <a:extLst xmlns:a="http://schemas.openxmlformats.org/drawingml/2006/main">
               <a:ext uri="{FF2B5EF4-FFF2-40B4-BE49-F238E27FC236}">
-                <a16:creationId xmlns:a16="http://schemas.microsoft.com/office/drawing/2014/main" id="{7CA6A792-1CD3-4332-9DC0-BAE42F89DC79}"/>
+                <a16:creationId xmlns:a16="http://schemas.microsoft.com/office/drawing/2014/main" id="{DAE67E87-DA83-4234-9F51-DBA3C4EB94DA}"/>
               </a:ext>
             </a:extLst>
           </p:cNvPr>
@@ -2124,7 +2124,7 @@
           <p:cNvPr id="8" name="">
             <a:extLst xmlns:a="http://schemas.openxmlformats.org/drawingml/2006/main">
               <a:ext uri="{FF2B5EF4-FFF2-40B4-BE49-F238E27FC236}">
-                <a16:creationId xmlns:a16="http://schemas.microsoft.com/office/drawing/2014/main" id="{A65E0A1B-EC63-4C4C-A108-14C2DC10CEEF}"/>
+                <a16:creationId xmlns:a16="http://schemas.microsoft.com/office/drawing/2014/main" id="{59489FF3-C37C-4F8C-BB60-7A84FF8435D8}"/>
               </a:ext>
             </a:extLst>
           </p:cNvPr>
@@ -2157,7 +2157,7 @@
           <p:cNvPr id="9" name="">
             <a:extLst xmlns:a="http://schemas.openxmlformats.org/drawingml/2006/main">
               <a:ext uri="{FF2B5EF4-FFF2-40B4-BE49-F238E27FC236}">
-                <a16:creationId xmlns:a16="http://schemas.microsoft.com/office/drawing/2014/main" id="{5C806671-61E7-4037-A676-D294EEC33FCE}"/>
+                <a16:creationId xmlns:a16="http://schemas.microsoft.com/office/drawing/2014/main" id="{53992A6A-AB34-4499-A754-C7B7C58E2B75}"/>
               </a:ext>
             </a:extLst>
           </p:cNvPr>
@@ -2221,7 +2221,7 @@
           <p:cNvPr id="10" name="">
             <a:extLst xmlns:a="http://schemas.openxmlformats.org/drawingml/2006/main">
               <a:ext uri="{FF2B5EF4-FFF2-40B4-BE49-F238E27FC236}">
-                <a16:creationId xmlns:a16="http://schemas.microsoft.com/office/drawing/2014/main" id="{3A9F08DB-42AC-4FD0-B690-21333B8B2B47}"/>
+                <a16:creationId xmlns:a16="http://schemas.microsoft.com/office/drawing/2014/main" id="{FAA3CDB9-1FC3-475B-894B-38661235AFC1}"/>
               </a:ext>
             </a:extLst>
           </p:cNvPr>
@@ -2254,7 +2254,7 @@
           <p:cNvPr id="11" name="">
             <a:extLst xmlns:a="http://schemas.openxmlformats.org/drawingml/2006/main">
               <a:ext uri="{FF2B5EF4-FFF2-40B4-BE49-F238E27FC236}">
-                <a16:creationId xmlns:a16="http://schemas.microsoft.com/office/drawing/2014/main" id="{295D92E9-3D8A-48D3-9DBA-27EDECC0E704}"/>
+                <a16:creationId xmlns:a16="http://schemas.microsoft.com/office/drawing/2014/main" id="{91AEF198-C57E-4EB0-A2B2-0F82BF7F3480}"/>
               </a:ext>
             </a:extLst>
           </p:cNvPr>
@@ -2318,7 +2318,7 @@
           <p:cNvPr id="12" name="">
             <a:extLst xmlns:a="http://schemas.openxmlformats.org/drawingml/2006/main">
               <a:ext uri="{FF2B5EF4-FFF2-40B4-BE49-F238E27FC236}">
-                <a16:creationId xmlns:a16="http://schemas.microsoft.com/office/drawing/2014/main" id="{6037D4BB-52C8-4C86-8B07-8A8348D31C58}"/>
+                <a16:creationId xmlns:a16="http://schemas.microsoft.com/office/drawing/2014/main" id="{16F240C8-EB8F-46E4-B8A7-1541ED309A1D}"/>
               </a:ext>
             </a:extLst>
           </p:cNvPr>
@@ -2351,7 +2351,7 @@
           <p:cNvPr id="13" name="">
             <a:extLst xmlns:a="http://schemas.openxmlformats.org/drawingml/2006/main">
               <a:ext uri="{FF2B5EF4-FFF2-40B4-BE49-F238E27FC236}">
-                <a16:creationId xmlns:a16="http://schemas.microsoft.com/office/drawing/2014/main" id="{769CB521-B734-48E1-BB60-B1058A68A5D9}"/>
+                <a16:creationId xmlns:a16="http://schemas.microsoft.com/office/drawing/2014/main" id="{97FB4DA8-B774-46B3-A858-9EF5B24D312A}"/>
               </a:ext>
             </a:extLst>
           </p:cNvPr>
@@ -2415,7 +2415,7 @@
           <p:cNvPr id="14" name="">
             <a:extLst xmlns:a="http://schemas.openxmlformats.org/drawingml/2006/main">
               <a:ext uri="{FF2B5EF4-FFF2-40B4-BE49-F238E27FC236}">
-                <a16:creationId xmlns:a16="http://schemas.microsoft.com/office/drawing/2014/main" id="{68845110-3B0D-4946-8D2E-FD9C15F4ADF3}"/>
+                <a16:creationId xmlns:a16="http://schemas.microsoft.com/office/drawing/2014/main" id="{EA7DEB2F-3168-494D-8794-4E8DB3BD92F5}"/>
               </a:ext>
             </a:extLst>
           </p:cNvPr>
@@ -2448,7 +2448,7 @@
           <p:cNvPr id="15" name="">
             <a:extLst xmlns:a="http://schemas.openxmlformats.org/drawingml/2006/main">
               <a:ext uri="{FF2B5EF4-FFF2-40B4-BE49-F238E27FC236}">
-                <a16:creationId xmlns:a16="http://schemas.microsoft.com/office/drawing/2014/main" id="{4A6F8664-4458-4177-A972-8887BBCD72E8}"/>
+                <a16:creationId xmlns:a16="http://schemas.microsoft.com/office/drawing/2014/main" id="{2C6CE056-8767-43FD-8E4B-5B8C00E0E92E}"/>
               </a:ext>
             </a:extLst>
           </p:cNvPr>
@@ -2483,7 +2483,7 @@
           <p:cNvPr id="16" name="">
             <a:extLst xmlns:a="http://schemas.openxmlformats.org/drawingml/2006/main">
               <a:ext uri="{FF2B5EF4-FFF2-40B4-BE49-F238E27FC236}">
-                <a16:creationId xmlns:a16="http://schemas.microsoft.com/office/drawing/2014/main" id="{8E75D1F2-2B55-4EC7-A5B4-D2F3314DFFC5}"/>
+                <a16:creationId xmlns:a16="http://schemas.microsoft.com/office/drawing/2014/main" id="{0E0669F1-1364-4713-8002-769B5FB3E7CB}"/>
               </a:ext>
             </a:extLst>
           </p:cNvPr>
@@ -2547,7 +2547,7 @@
           <p:cNvPr id="17" name="">
             <a:extLst xmlns:a="http://schemas.openxmlformats.org/drawingml/2006/main">
               <a:ext uri="{FF2B5EF4-FFF2-40B4-BE49-F238E27FC236}">
-                <a16:creationId xmlns:a16="http://schemas.microsoft.com/office/drawing/2014/main" id="{8B683C53-279F-4B78-A9E0-818E73771C9D}"/>
+                <a16:creationId xmlns:a16="http://schemas.microsoft.com/office/drawing/2014/main" id="{EE8E3153-746D-47EF-A785-D2DD44917D29}"/>
               </a:ext>
             </a:extLst>
           </p:cNvPr>
@@ -2611,7 +2611,7 @@
           <p:cNvPr id="18" name="">
             <a:extLst xmlns:a="http://schemas.openxmlformats.org/drawingml/2006/main">
               <a:ext uri="{FF2B5EF4-FFF2-40B4-BE49-F238E27FC236}">
-                <a16:creationId xmlns:a16="http://schemas.microsoft.com/office/drawing/2014/main" id="{56C6B983-ECFA-4ECB-944F-D861A4A21D28}"/>
+                <a16:creationId xmlns:a16="http://schemas.microsoft.com/office/drawing/2014/main" id="{F9DB1170-AAD3-4F63-B932-63DDA6D0BD54}"/>
               </a:ext>
             </a:extLst>
           </p:cNvPr>
@@ -2646,7 +2646,7 @@
           <p:cNvPr id="19" name="">
             <a:extLst xmlns:a="http://schemas.openxmlformats.org/drawingml/2006/main">
               <a:ext uri="{FF2B5EF4-FFF2-40B4-BE49-F238E27FC236}">
-                <a16:creationId xmlns:a16="http://schemas.microsoft.com/office/drawing/2014/main" id="{89F726EF-B780-47AF-A6E2-0AF14C3BE01A}"/>
+                <a16:creationId xmlns:a16="http://schemas.microsoft.com/office/drawing/2014/main" id="{A9B76F3E-E789-4833-9B90-63A39934991C}"/>
               </a:ext>
             </a:extLst>
           </p:cNvPr>
@@ -2710,7 +2710,7 @@
           <p:cNvPr id="20" name="">
             <a:extLst xmlns:a="http://schemas.openxmlformats.org/drawingml/2006/main">
               <a:ext uri="{FF2B5EF4-FFF2-40B4-BE49-F238E27FC236}">
-                <a16:creationId xmlns:a16="http://schemas.microsoft.com/office/drawing/2014/main" id="{4226AE6C-1126-4277-96A0-CDDB62E3B7B8}"/>
+                <a16:creationId xmlns:a16="http://schemas.microsoft.com/office/drawing/2014/main" id="{A16BA134-6F47-4107-9D52-5B530E7D937B}"/>
               </a:ext>
             </a:extLst>
           </p:cNvPr>
@@ -2764,7 +2764,7 @@
                 <a:ea typeface="Aptos"/>
                 <a:cs typeface="Aptos"/>
               </a:rPr>
-              <a:t>Teach the operating decision, run the diagnostic, then force a usable artifact. The slide is a prompt, not the handout.</a:t>
+              <a:t>Teach the operating decision, run the diagnostic, then force a usable artifact. The slide is a teaching cue, not the handout.</a:t>
             </a:r>
           </a:p>
         </p:txBody>
@@ -2774,7 +2774,7 @@
           <p:cNvPr id="21" name="">
             <a:extLst xmlns:a="http://schemas.openxmlformats.org/drawingml/2006/main">
               <a:ext uri="{FF2B5EF4-FFF2-40B4-BE49-F238E27FC236}">
-                <a16:creationId xmlns:a16="http://schemas.microsoft.com/office/drawing/2014/main" id="{5AA405A1-BEA5-4BED-A79F-19245146BBCB}"/>
+                <a16:creationId xmlns:a16="http://schemas.microsoft.com/office/drawing/2014/main" id="{727C7500-A9C6-4451-95D7-CCD78B04F54F}"/>
               </a:ext>
             </a:extLst>
           </p:cNvPr>
@@ -2809,7 +2809,7 @@
           <p:cNvPr id="22" name="">
             <a:extLst xmlns:a="http://schemas.openxmlformats.org/drawingml/2006/main">
               <a:ext uri="{FF2B5EF4-FFF2-40B4-BE49-F238E27FC236}">
-                <a16:creationId xmlns:a16="http://schemas.microsoft.com/office/drawing/2014/main" id="{E7E54D80-57FC-4FA7-8581-27FA3F13C983}"/>
+                <a16:creationId xmlns:a16="http://schemas.microsoft.com/office/drawing/2014/main" id="{F9554122-0E89-4436-AF97-8C19C14FB46B}"/>
               </a:ext>
             </a:extLst>
           </p:cNvPr>
@@ -2873,7 +2873,7 @@
           <p:cNvPr id="23" name="">
             <a:extLst xmlns:a="http://schemas.openxmlformats.org/drawingml/2006/main">
               <a:ext uri="{FF2B5EF4-FFF2-40B4-BE49-F238E27FC236}">
-                <a16:creationId xmlns:a16="http://schemas.microsoft.com/office/drawing/2014/main" id="{F7B10ED8-ABDF-4D46-859D-E9620B162210}"/>
+                <a16:creationId xmlns:a16="http://schemas.microsoft.com/office/drawing/2014/main" id="{AD70E304-41D2-4988-9DE7-CC2A8E6118E0}"/>
               </a:ext>
             </a:extLst>
           </p:cNvPr>
@@ -2937,7 +2937,7 @@
           <p:cNvPr id="24" name="">
             <a:extLst xmlns:a="http://schemas.openxmlformats.org/drawingml/2006/main">
               <a:ext uri="{FF2B5EF4-FFF2-40B4-BE49-F238E27FC236}">
-                <a16:creationId xmlns:a16="http://schemas.microsoft.com/office/drawing/2014/main" id="{12E7ABD8-9E5E-4E3C-9B04-67A0C376CE91}"/>
+                <a16:creationId xmlns:a16="http://schemas.microsoft.com/office/drawing/2014/main" id="{B47189AF-EE28-4B93-B37C-5FF286E4EEE8}"/>
               </a:ext>
             </a:extLst>
           </p:cNvPr>
@@ -2972,7 +2972,7 @@
           <p:cNvPr id="25" name="">
             <a:extLst xmlns:a="http://schemas.openxmlformats.org/drawingml/2006/main">
               <a:ext uri="{FF2B5EF4-FFF2-40B4-BE49-F238E27FC236}">
-                <a16:creationId xmlns:a16="http://schemas.microsoft.com/office/drawing/2014/main" id="{4A321B6A-113D-4BF4-8BEA-151DB8827311}"/>
+                <a16:creationId xmlns:a16="http://schemas.microsoft.com/office/drawing/2014/main" id="{E50A9635-38AB-48EE-B039-B3A48B321145}"/>
               </a:ext>
             </a:extLst>
           </p:cNvPr>
@@ -3036,7 +3036,7 @@
           <p:cNvPr id="26" name="">
             <a:extLst xmlns:a="http://schemas.openxmlformats.org/drawingml/2006/main">
               <a:ext uri="{FF2B5EF4-FFF2-40B4-BE49-F238E27FC236}">
-                <a16:creationId xmlns:a16="http://schemas.microsoft.com/office/drawing/2014/main" id="{2D60412A-95EF-4335-A216-F067056650BF}"/>
+                <a16:creationId xmlns:a16="http://schemas.microsoft.com/office/drawing/2014/main" id="{3BE5B9C5-FD21-4DC7-A190-714B784E7F88}"/>
               </a:ext>
             </a:extLst>
           </p:cNvPr>
@@ -3100,7 +3100,7 @@
           <p:cNvPr id="27" name="">
             <a:extLst xmlns:a="http://schemas.openxmlformats.org/drawingml/2006/main">
               <a:ext uri="{FF2B5EF4-FFF2-40B4-BE49-F238E27FC236}">
-                <a16:creationId xmlns:a16="http://schemas.microsoft.com/office/drawing/2014/main" id="{CC252E49-FB1D-4DF5-A056-4DC6F55B12CF}"/>
+                <a16:creationId xmlns:a16="http://schemas.microsoft.com/office/drawing/2014/main" id="{A637AF01-7216-447E-98F6-4B34F1AC9EC6}"/>
               </a:ext>
             </a:extLst>
           </p:cNvPr>
@@ -3162,7 +3162,7 @@
     </p:spTree>
     <p:extLst>
       <p:ext uri="{BB962C8B-B14F-4D97-AF65-F5344CB8AC3E}">
-        <p14:creationId xmlns:p14="http://schemas.microsoft.com/office/powerpoint/2010/main" val="105076851"/>
+        <p14:creationId xmlns:p14="http://schemas.microsoft.com/office/powerpoint/2010/main" val="2055624220"/>
       </p:ext>
     </p:extLst>
   </p:cSld>
@@ -3186,7 +3186,7 @@
           <p:cNvPr id="1" name="">
             <a:extLst xmlns:a="http://schemas.openxmlformats.org/drawingml/2006/main">
               <a:ext uri="{FF2B5EF4-FFF2-40B4-BE49-F238E27FC236}">
-                <a16:creationId xmlns:a16="http://schemas.microsoft.com/office/drawing/2014/main" id="{77B79C31-7881-46D2-B96B-2E413F85D156}"/>
+                <a16:creationId xmlns:a16="http://schemas.microsoft.com/office/drawing/2014/main" id="{101D93E2-7EF2-437D-9ADE-17C9B2AB93DF}"/>
               </a:ext>
             </a:extLst>
           </p:cNvPr>
@@ -3221,7 +3221,7 @@
           <p:cNvPr id="2" name="">
             <a:extLst xmlns:a="http://schemas.openxmlformats.org/drawingml/2006/main">
               <a:ext uri="{FF2B5EF4-FFF2-40B4-BE49-F238E27FC236}">
-                <a16:creationId xmlns:a16="http://schemas.microsoft.com/office/drawing/2014/main" id="{B6C46934-97B4-4248-B7F6-4AF89E7FB680}"/>
+                <a16:creationId xmlns:a16="http://schemas.microsoft.com/office/drawing/2014/main" id="{747AF020-6D33-49C9-87FA-CDB551D454CA}"/>
               </a:ext>
             </a:extLst>
           </p:cNvPr>
@@ -3256,7 +3256,7 @@
           <p:cNvPr id="3" name="">
             <a:extLst xmlns:a="http://schemas.openxmlformats.org/drawingml/2006/main">
               <a:ext uri="{FF2B5EF4-FFF2-40B4-BE49-F238E27FC236}">
-                <a16:creationId xmlns:a16="http://schemas.microsoft.com/office/drawing/2014/main" id="{010B9846-CD8E-459C-9777-FC141AD942A2}"/>
+                <a16:creationId xmlns:a16="http://schemas.microsoft.com/office/drawing/2014/main" id="{CD2AA8CF-EBDF-43C5-BFF5-2B3F6E281353}"/>
               </a:ext>
             </a:extLst>
           </p:cNvPr>
@@ -3291,7 +3291,7 @@
           <p:cNvPr id="4" name="kicker-02-marker">
             <a:extLst xmlns:a="http://schemas.openxmlformats.org/drawingml/2006/main">
               <a:ext uri="{FF2B5EF4-FFF2-40B4-BE49-F238E27FC236}">
-                <a16:creationId xmlns:a16="http://schemas.microsoft.com/office/drawing/2014/main" id="{D7BB8E04-CA20-481F-814E-835550B2CA69}"/>
+                <a16:creationId xmlns:a16="http://schemas.microsoft.com/office/drawing/2014/main" id="{7D82AFB0-D70F-442D-A67A-F6C0A76C5643}"/>
               </a:ext>
             </a:extLst>
           </p:cNvPr>
@@ -3326,7 +3326,7 @@
           <p:cNvPr id="5" name="kicker-02-label">
             <a:extLst xmlns:a="http://schemas.openxmlformats.org/drawingml/2006/main">
               <a:ext uri="{FF2B5EF4-FFF2-40B4-BE49-F238E27FC236}">
-                <a16:creationId xmlns:a16="http://schemas.microsoft.com/office/drawing/2014/main" id="{7C0BCA78-C7E7-4A0D-9731-64D4BC13D355}"/>
+                <a16:creationId xmlns:a16="http://schemas.microsoft.com/office/drawing/2014/main" id="{FDDC6EDE-2E1F-41F6-8F80-5CACCAF26EBD}"/>
               </a:ext>
             </a:extLst>
           </p:cNvPr>
@@ -3380,7 +3380,7 @@
                 <a:ea typeface="Aptos"/>
                 <a:cs typeface="Aptos"/>
               </a:rPr>
-              <a:t>MODULE 1 / LESSON 02 / AI-ASSISTED EXERCISE</a:t>
+              <a:t>MODULE 1 / LESSON 02 / STRUCTURED DRAFTING DRILL</a:t>
             </a:r>
           </a:p>
         </p:txBody>
@@ -3390,7 +3390,7 @@
           <p:cNvPr id="6" name="">
             <a:extLst xmlns:a="http://schemas.openxmlformats.org/drawingml/2006/main">
               <a:ext uri="{FF2B5EF4-FFF2-40B4-BE49-F238E27FC236}">
-                <a16:creationId xmlns:a16="http://schemas.microsoft.com/office/drawing/2014/main" id="{E417D4B7-1AC2-4543-A4CE-4C8253E397DD}"/>
+                <a16:creationId xmlns:a16="http://schemas.microsoft.com/office/drawing/2014/main" id="{0FAB7EA1-7CF2-4B65-8647-E732641F4205}"/>
               </a:ext>
             </a:extLst>
           </p:cNvPr>
@@ -3444,7 +3444,7 @@
                 <a:ea typeface="Aptos Display"/>
                 <a:cs typeface="Aptos Display"/>
               </a:rPr>
-              <a:t>Use AI to structure the attempt, then make humans responsible for judgment.</a:t>
+              <a:t>Structure the first draft before the room critiques it.</a:t>
             </a:r>
           </a:p>
         </p:txBody>
@@ -3454,7 +3454,7 @@
           <p:cNvPr id="7" name="">
             <a:extLst xmlns:a="http://schemas.openxmlformats.org/drawingml/2006/main">
               <a:ext uri="{FF2B5EF4-FFF2-40B4-BE49-F238E27FC236}">
-                <a16:creationId xmlns:a16="http://schemas.microsoft.com/office/drawing/2014/main" id="{A407BBFB-F3C3-4983-A6DC-29ACAA85A2B2}"/>
+                <a16:creationId xmlns:a16="http://schemas.microsoft.com/office/drawing/2014/main" id="{656686D2-1A55-4B24-91BE-15752F952B30}"/>
               </a:ext>
             </a:extLst>
           </p:cNvPr>
@@ -3508,7 +3508,7 @@
                 <a:ea typeface="Aptos"/>
                 <a:cs typeface="Aptos"/>
               </a:rPr>
-              <a:t>The prompt is constrained by source, assumptions, output standard, and human validation.</a:t>
+              <a:t>The brief is constrained by source evidence, assumptions, output standard, and validation.</a:t>
             </a:r>
           </a:p>
         </p:txBody>
@@ -3518,7 +3518,7 @@
           <p:cNvPr id="8" name="">
             <a:extLst xmlns:a="http://schemas.openxmlformats.org/drawingml/2006/main">
               <a:ext uri="{FF2B5EF4-FFF2-40B4-BE49-F238E27FC236}">
-                <a16:creationId xmlns:a16="http://schemas.microsoft.com/office/drawing/2014/main" id="{5F044C4E-8966-433E-B47F-C47A27B35A8B}"/>
+                <a16:creationId xmlns:a16="http://schemas.microsoft.com/office/drawing/2014/main" id="{9448EBA2-024B-44BB-9E5F-DB0F7DEF6E07}"/>
               </a:ext>
             </a:extLst>
           </p:cNvPr>
@@ -3553,7 +3553,7 @@
           <p:cNvPr id="9" name="">
             <a:extLst xmlns:a="http://schemas.openxmlformats.org/drawingml/2006/main">
               <a:ext uri="{FF2B5EF4-FFF2-40B4-BE49-F238E27FC236}">
-                <a16:creationId xmlns:a16="http://schemas.microsoft.com/office/drawing/2014/main" id="{659156FE-BBD7-412B-AE6A-9A720C93AB49}"/>
+                <a16:creationId xmlns:a16="http://schemas.microsoft.com/office/drawing/2014/main" id="{7EB38156-5108-489B-AC66-AB1DCDED2917}"/>
               </a:ext>
             </a:extLst>
           </p:cNvPr>
@@ -3617,7 +3617,7 @@
           <p:cNvPr id="10" name="">
             <a:extLst xmlns:a="http://schemas.openxmlformats.org/drawingml/2006/main">
               <a:ext uri="{FF2B5EF4-FFF2-40B4-BE49-F238E27FC236}">
-                <a16:creationId xmlns:a16="http://schemas.microsoft.com/office/drawing/2014/main" id="{E93556DE-4899-4379-B335-68B1FF461376}"/>
+                <a16:creationId xmlns:a16="http://schemas.microsoft.com/office/drawing/2014/main" id="{E7C53D13-F350-4074-8AB7-948180615B32}"/>
               </a:ext>
             </a:extLst>
           </p:cNvPr>
@@ -3681,7 +3681,7 @@
           <p:cNvPr id="11" name="">
             <a:extLst xmlns:a="http://schemas.openxmlformats.org/drawingml/2006/main">
               <a:ext uri="{FF2B5EF4-FFF2-40B4-BE49-F238E27FC236}">
-                <a16:creationId xmlns:a16="http://schemas.microsoft.com/office/drawing/2014/main" id="{54C0BC47-2FDB-431E-9E01-ED939B31BD93}"/>
+                <a16:creationId xmlns:a16="http://schemas.microsoft.com/office/drawing/2014/main" id="{95C31A84-6711-46FB-A36A-6DCB711DF2BA}"/>
               </a:ext>
             </a:extLst>
           </p:cNvPr>
@@ -3745,19 +3745,19 @@
           <p:cNvPr id="12" name="">
             <a:extLst xmlns:a="http://schemas.openxmlformats.org/drawingml/2006/main">
               <a:ext uri="{FF2B5EF4-FFF2-40B4-BE49-F238E27FC236}">
-                <a16:creationId xmlns:a16="http://schemas.microsoft.com/office/drawing/2014/main" id="{785D2340-4AF0-4751-BC3C-C39BB42A76DF}"/>
-              </a:ext>
-            </a:extLst>
-          </p:cNvPr>
-          <p:cNvSpPr>
-            <a:spLocks xmlns:a="http://schemas.openxmlformats.org/drawingml/2006/main" noGrp="1"/>
-          </p:cNvSpPr>
-          <p:nvPr/>
-        </p:nvSpPr>
-        <p:spPr>
-          <a:xfrm xmlns:a="http://schemas.openxmlformats.org/drawingml/2006/main">
-            <a:off x="228600" y="1809750"/>
-            <a:ext cx="11963400" cy="4591050"/>
+                <a16:creationId xmlns:a16="http://schemas.microsoft.com/office/drawing/2014/main" id="{AB108F7D-7B4F-4EF9-9702-5F00A0B198D6}"/>
+              </a:ext>
+            </a:extLst>
+          </p:cNvPr>
+          <p:cNvSpPr>
+            <a:spLocks xmlns:a="http://schemas.openxmlformats.org/drawingml/2006/main" noGrp="1"/>
+          </p:cNvSpPr>
+          <p:nvPr/>
+        </p:nvSpPr>
+        <p:spPr>
+          <a:xfrm xmlns:a="http://schemas.openxmlformats.org/drawingml/2006/main">
+            <a:off x="0" y="1809750"/>
+            <a:ext cx="12192000" cy="4591050"/>
           </a:xfrm>
           <a:prstGeom xmlns:a="http://schemas.openxmlformats.org/drawingml/2006/main" prst="rect">
             <a:avLst/>
@@ -3765,11 +3765,9 @@
           <a:solidFill xmlns:a="http://schemas.openxmlformats.org/drawingml/2006/main">
             <a:srgbClr val="F5F6F2"/>
           </a:solidFill>
-          <a:ln xmlns:a="http://schemas.openxmlformats.org/drawingml/2006/main" w="0">
-            <a:solidFill>
-              <a:srgbClr val="000000">
-                <a:alpha val="0"/>
-              </a:srgbClr>
+          <a:ln xmlns:a="http://schemas.openxmlformats.org/drawingml/2006/main" w="9525">
+            <a:solidFill>
+              <a:srgbClr val="F5F6F2"/>
             </a:solidFill>
             <a:prstDash val="solid"/>
           </a:ln>
@@ -3780,29 +3778,29 @@
           <p:cNvPr id="13" name="">
             <a:extLst xmlns:a="http://schemas.openxmlformats.org/drawingml/2006/main">
               <a:ext uri="{FF2B5EF4-FFF2-40B4-BE49-F238E27FC236}">
-                <a16:creationId xmlns:a16="http://schemas.microsoft.com/office/drawing/2014/main" id="{EA9DDC39-0000-4039-BBC7-5D06B8CF8C17}"/>
-              </a:ext>
-            </a:extLst>
-          </p:cNvPr>
-          <p:cNvSpPr>
-            <a:spLocks xmlns:a="http://schemas.openxmlformats.org/drawingml/2006/main" noGrp="1"/>
-          </p:cNvSpPr>
-          <p:nvPr/>
-        </p:nvSpPr>
-        <p:spPr>
-          <a:xfrm xmlns:a="http://schemas.openxmlformats.org/drawingml/2006/main">
-            <a:off x="228600" y="1809750"/>
-            <a:ext cx="6096000" cy="4591050"/>
-          </a:xfrm>
-          <a:prstGeom xmlns:a="http://schemas.openxmlformats.org/drawingml/2006/main" prst="rect">
-            <a:avLst/>
-          </a:prstGeom>
-          <a:solidFill xmlns:a="http://schemas.openxmlformats.org/drawingml/2006/main">
-            <a:srgbClr val="12232B"/>
+                <a16:creationId xmlns:a16="http://schemas.microsoft.com/office/drawing/2014/main" id="{2306ADA7-A814-44EB-BA47-7CEE585858B9}"/>
+              </a:ext>
+            </a:extLst>
+          </p:cNvPr>
+          <p:cNvSpPr>
+            <a:spLocks xmlns:a="http://schemas.openxmlformats.org/drawingml/2006/main" noGrp="1"/>
+          </p:cNvSpPr>
+          <p:nvPr/>
+        </p:nvSpPr>
+        <p:spPr>
+          <a:xfrm xmlns:a="http://schemas.openxmlformats.org/drawingml/2006/main">
+            <a:off x="514350" y="2038350"/>
+            <a:ext cx="5619750" cy="3181350"/>
+          </a:xfrm>
+          <a:prstGeom xmlns:a="http://schemas.openxmlformats.org/drawingml/2006/main" prst="rect">
+            <a:avLst/>
+          </a:prstGeom>
+          <a:solidFill xmlns:a="http://schemas.openxmlformats.org/drawingml/2006/main">
+            <a:srgbClr val="FFFFFF"/>
           </a:solidFill>
           <a:ln xmlns:a="http://schemas.openxmlformats.org/drawingml/2006/main" w="9525">
             <a:solidFill>
-              <a:srgbClr val="12232B"/>
+              <a:srgbClr val="D9DDD6"/>
             </a:solidFill>
             <a:prstDash val="solid"/>
           </a:ln>
@@ -3813,25 +3811,25 @@
           <p:cNvPr id="14" name="">
             <a:extLst xmlns:a="http://schemas.openxmlformats.org/drawingml/2006/main">
               <a:ext uri="{FF2B5EF4-FFF2-40B4-BE49-F238E27FC236}">
-                <a16:creationId xmlns:a16="http://schemas.microsoft.com/office/drawing/2014/main" id="{FCC2EF2A-64F7-43F6-9E46-8334E556D8E9}"/>
-              </a:ext>
-            </a:extLst>
-          </p:cNvPr>
-          <p:cNvSpPr>
-            <a:spLocks xmlns:a="http://schemas.openxmlformats.org/drawingml/2006/main" noGrp="1"/>
-          </p:cNvSpPr>
-          <p:nvPr/>
-        </p:nvSpPr>
-        <p:spPr>
-          <a:xfrm xmlns:a="http://schemas.openxmlformats.org/drawingml/2006/main">
-            <a:off x="609600" y="2266950"/>
+                <a16:creationId xmlns:a16="http://schemas.microsoft.com/office/drawing/2014/main" id="{468A30C3-B4F0-423E-82FB-D61D3566FCE9}"/>
+              </a:ext>
+            </a:extLst>
+          </p:cNvPr>
+          <p:cNvSpPr>
+            <a:spLocks xmlns:a="http://schemas.openxmlformats.org/drawingml/2006/main" noGrp="1"/>
+          </p:cNvSpPr>
+          <p:nvPr/>
+        </p:nvSpPr>
+        <p:spPr>
+          <a:xfrm xmlns:a="http://schemas.openxmlformats.org/drawingml/2006/main">
+            <a:off x="819150" y="2419350"/>
             <a:ext cx="266700" cy="19050"/>
           </a:xfrm>
           <a:prstGeom xmlns:a="http://schemas.openxmlformats.org/drawingml/2006/main" prst="rect">
             <a:avLst/>
           </a:prstGeom>
           <a:solidFill xmlns:a="http://schemas.openxmlformats.org/drawingml/2006/main">
-            <a:srgbClr val="B7953B"/>
+            <a:srgbClr val="A85D2A"/>
           </a:solidFill>
           <a:ln xmlns:a="http://schemas.openxmlformats.org/drawingml/2006/main" w="0">
             <a:solidFill>
@@ -3848,18 +3846,18 @@
           <p:cNvPr id="15" name="">
             <a:extLst xmlns:a="http://schemas.openxmlformats.org/drawingml/2006/main">
               <a:ext uri="{FF2B5EF4-FFF2-40B4-BE49-F238E27FC236}">
-                <a16:creationId xmlns:a16="http://schemas.microsoft.com/office/drawing/2014/main" id="{8A4041F4-D65A-49AF-9CBF-82E406EC752F}"/>
-              </a:ext>
-            </a:extLst>
-          </p:cNvPr>
-          <p:cNvSpPr>
-            <a:spLocks xmlns:a="http://schemas.openxmlformats.org/drawingml/2006/main" noGrp="1"/>
-          </p:cNvSpPr>
-          <p:nvPr/>
-        </p:nvSpPr>
-        <p:spPr>
-          <a:xfrm xmlns:a="http://schemas.openxmlformats.org/drawingml/2006/main">
-            <a:off x="971550" y="2190750"/>
+                <a16:creationId xmlns:a16="http://schemas.microsoft.com/office/drawing/2014/main" id="{887EC590-9440-4879-B206-34A91454A192}"/>
+              </a:ext>
+            </a:extLst>
+          </p:cNvPr>
+          <p:cNvSpPr>
+            <a:spLocks xmlns:a="http://schemas.openxmlformats.org/drawingml/2006/main" noGrp="1"/>
+          </p:cNvSpPr>
+          <p:nvPr/>
+        </p:nvSpPr>
+        <p:spPr>
+          <a:xfrm xmlns:a="http://schemas.openxmlformats.org/drawingml/2006/main">
+            <a:off x="1181100" y="2343150"/>
             <a:ext cx="2476500" cy="171450"/>
           </a:xfrm>
           <a:prstGeom xmlns:a="http://schemas.openxmlformats.org/drawingml/2006/main" prst="rect">
@@ -3902,7 +3900,7 @@
                 <a:ea typeface="Aptos"/>
                 <a:cs typeface="Aptos"/>
               </a:rPr>
-              <a:t>PROMPT TO GIVE AI</a:t>
+              <a:t>DRAFTING BRIEF</a:t>
             </a:r>
           </a:p>
         </p:txBody>
@@ -3912,19 +3910,19 @@
           <p:cNvPr id="16" name="">
             <a:extLst xmlns:a="http://schemas.openxmlformats.org/drawingml/2006/main">
               <a:ext uri="{FF2B5EF4-FFF2-40B4-BE49-F238E27FC236}">
-                <a16:creationId xmlns:a16="http://schemas.microsoft.com/office/drawing/2014/main" id="{A6ABF419-6E2D-46D2-8B0F-A98529275A0F}"/>
-              </a:ext>
-            </a:extLst>
-          </p:cNvPr>
-          <p:cNvSpPr>
-            <a:spLocks xmlns:a="http://schemas.openxmlformats.org/drawingml/2006/main" noGrp="1"/>
-          </p:cNvSpPr>
-          <p:nvPr/>
-        </p:nvSpPr>
-        <p:spPr>
-          <a:xfrm xmlns:a="http://schemas.openxmlformats.org/drawingml/2006/main">
-            <a:off x="609600" y="2647950"/>
-            <a:ext cx="5048250" cy="2190750"/>
+                <a16:creationId xmlns:a16="http://schemas.microsoft.com/office/drawing/2014/main" id="{307B7FBC-CD20-447F-8EC9-1A4F6D708793}"/>
+              </a:ext>
+            </a:extLst>
+          </p:cNvPr>
+          <p:cNvSpPr>
+            <a:spLocks xmlns:a="http://schemas.openxmlformats.org/drawingml/2006/main" noGrp="1"/>
+          </p:cNvSpPr>
+          <p:nvPr/>
+        </p:nvSpPr>
+        <p:spPr>
+          <a:xfrm xmlns:a="http://schemas.openxmlformats.org/drawingml/2006/main">
+            <a:off x="819150" y="2762250"/>
+            <a:ext cx="4610100" cy="1752600"/>
           </a:xfrm>
           <a:prstGeom xmlns:a="http://schemas.openxmlformats.org/drawingml/2006/main" prst="rect">
             <a:avLst/>
@@ -3948,9 +3946,240 @@
           <a:lstStyle xmlns:a="http://schemas.openxmlformats.org/drawingml/2006/main"/>
           <a:p xmlns:a="http://schemas.openxmlformats.org/drawingml/2006/main">
             <a:pPr algn="l">
+              <a:defRPr sz="1200" b="0">
+                <a:solidFill>
+                  <a:srgbClr val="172026"/>
+                </a:solidFill>
+                <a:latin typeface="Aptos"/>
+                <a:ea typeface="Aptos"/>
+                <a:cs typeface="Aptos"/>
+              </a:defRPr>
+            </a:pPr>
+            <a:r>
+              <a:rPr sz="1200" b="0">
+                <a:solidFill>
+                  <a:srgbClr val="172026"/>
+                </a:solidFill>
+                <a:latin typeface="Aptos"/>
+                <a:ea typeface="Aptos"/>
+                <a:cs typeface="Aptos"/>
+              </a:rPr>
+              <a:t>For the selected industrial category, map buying committee roles, role concerns, proof needs, likely blocker hypotheses, buyer-circulatable enablement assets, and unknowns that require sales or SME validation. Do not invent a named-company case.</a:t>
+            </a:r>
+          </a:p>
+        </p:txBody>
+      </p:sp>
+      <p:sp>
+        <p:nvSpPr>
+          <p:cNvPr id="17" name="">
+            <a:extLst xmlns:a="http://schemas.openxmlformats.org/drawingml/2006/main">
+              <a:ext uri="{FF2B5EF4-FFF2-40B4-BE49-F238E27FC236}">
+                <a16:creationId xmlns:a16="http://schemas.microsoft.com/office/drawing/2014/main" id="{EAA66505-784A-44C1-AC17-D05B85BB9D1F}"/>
+              </a:ext>
+            </a:extLst>
+          </p:cNvPr>
+          <p:cNvSpPr>
+            <a:spLocks xmlns:a="http://schemas.openxmlformats.org/drawingml/2006/main" noGrp="1"/>
+          </p:cNvSpPr>
+          <p:nvPr/>
+        </p:nvSpPr>
+        <p:spPr>
+          <a:xfrm xmlns:a="http://schemas.openxmlformats.org/drawingml/2006/main">
+            <a:off x="6496050" y="2038350"/>
+            <a:ext cx="4933950" cy="3181350"/>
+          </a:xfrm>
+          <a:prstGeom xmlns:a="http://schemas.openxmlformats.org/drawingml/2006/main" prst="rect">
+            <a:avLst/>
+          </a:prstGeom>
+          <a:solidFill xmlns:a="http://schemas.openxmlformats.org/drawingml/2006/main">
+            <a:srgbClr val="F9FAF7"/>
+          </a:solidFill>
+          <a:ln xmlns:a="http://schemas.openxmlformats.org/drawingml/2006/main" w="9525">
+            <a:solidFill>
+              <a:srgbClr val="D9DDD6"/>
+            </a:solidFill>
+            <a:prstDash val="solid"/>
+          </a:ln>
+        </p:spPr>
+      </p:sp>
+      <p:sp>
+        <p:nvSpPr>
+          <p:cNvPr id="18" name="">
+            <a:extLst xmlns:a="http://schemas.openxmlformats.org/drawingml/2006/main">
+              <a:ext uri="{FF2B5EF4-FFF2-40B4-BE49-F238E27FC236}">
+                <a16:creationId xmlns:a16="http://schemas.microsoft.com/office/drawing/2014/main" id="{6441CA1D-2B89-48F7-B222-D994EB1A8532}"/>
+              </a:ext>
+            </a:extLst>
+          </p:cNvPr>
+          <p:cNvSpPr>
+            <a:spLocks xmlns:a="http://schemas.openxmlformats.org/drawingml/2006/main" noGrp="1"/>
+          </p:cNvSpPr>
+          <p:nvPr/>
+        </p:nvSpPr>
+        <p:spPr>
+          <a:xfrm xmlns:a="http://schemas.openxmlformats.org/drawingml/2006/main">
+            <a:off x="6819900" y="2419350"/>
+            <a:ext cx="266700" cy="19050"/>
+          </a:xfrm>
+          <a:prstGeom xmlns:a="http://schemas.openxmlformats.org/drawingml/2006/main" prst="rect">
+            <a:avLst/>
+          </a:prstGeom>
+          <a:solidFill xmlns:a="http://schemas.openxmlformats.org/drawingml/2006/main">
+            <a:srgbClr val="1D6072"/>
+          </a:solidFill>
+          <a:ln xmlns:a="http://schemas.openxmlformats.org/drawingml/2006/main" w="0">
+            <a:solidFill>
+              <a:srgbClr val="000000">
+                <a:alpha val="0"/>
+              </a:srgbClr>
+            </a:solidFill>
+            <a:prstDash val="solid"/>
+          </a:ln>
+        </p:spPr>
+      </p:sp>
+      <p:sp>
+        <p:nvSpPr>
+          <p:cNvPr id="19" name="">
+            <a:extLst xmlns:a="http://schemas.openxmlformats.org/drawingml/2006/main">
+              <a:ext uri="{FF2B5EF4-FFF2-40B4-BE49-F238E27FC236}">
+                <a16:creationId xmlns:a16="http://schemas.microsoft.com/office/drawing/2014/main" id="{89CD9272-0B19-47A2-ABE8-5B85AD9774B0}"/>
+              </a:ext>
+            </a:extLst>
+          </p:cNvPr>
+          <p:cNvSpPr>
+            <a:spLocks xmlns:a="http://schemas.openxmlformats.org/drawingml/2006/main" noGrp="1"/>
+          </p:cNvSpPr>
+          <p:nvPr/>
+        </p:nvSpPr>
+        <p:spPr>
+          <a:xfrm xmlns:a="http://schemas.openxmlformats.org/drawingml/2006/main">
+            <a:off x="7181850" y="2343150"/>
+            <a:ext cx="2476500" cy="171450"/>
+          </a:xfrm>
+          <a:prstGeom xmlns:a="http://schemas.openxmlformats.org/drawingml/2006/main" prst="rect">
+            <a:avLst/>
+          </a:prstGeom>
+          <a:solidFill xmlns:a="http://schemas.openxmlformats.org/drawingml/2006/main">
+            <a:srgbClr val="000000">
+              <a:alpha val="0"/>
+            </a:srgbClr>
+          </a:solidFill>
+          <a:ln xmlns:a="http://schemas.openxmlformats.org/drawingml/2006/main" w="0">
+            <a:solidFill>
+              <a:srgbClr val="000000">
+                <a:alpha val="0"/>
+              </a:srgbClr>
+            </a:solidFill>
+            <a:prstDash val="solid"/>
+          </a:ln>
+        </p:spPr>
+        <p:txBody>
+          <a:bodyPr xmlns:a="http://schemas.openxmlformats.org/drawingml/2006/main" lIns="0" tIns="0" rIns="0" bIns="0" anchor="t"/>
+          <a:lstStyle xmlns:a="http://schemas.openxmlformats.org/drawingml/2006/main"/>
+          <a:p xmlns:a="http://schemas.openxmlformats.org/drawingml/2006/main">
+            <a:pPr algn="l">
+              <a:defRPr sz="750" b="1">
+                <a:solidFill>
+                  <a:srgbClr val="59646A"/>
+                </a:solidFill>
+                <a:latin typeface="Aptos"/>
+                <a:ea typeface="Aptos"/>
+                <a:cs typeface="Aptos"/>
+              </a:defRPr>
+            </a:pPr>
+            <a:r>
+              <a:rPr sz="750" b="1">
+                <a:solidFill>
+                  <a:srgbClr val="59646A"/>
+                </a:solidFill>
+                <a:latin typeface="Aptos"/>
+                <a:ea typeface="Aptos"/>
+                <a:cs typeface="Aptos"/>
+              </a:rPr>
+              <a:t>REQUIRED OUTPUT STANDARD</a:t>
+            </a:r>
+          </a:p>
+        </p:txBody>
+      </p:sp>
+      <p:sp>
+        <p:nvSpPr>
+          <p:cNvPr id="20" name="">
+            <a:extLst xmlns:a="http://schemas.openxmlformats.org/drawingml/2006/main">
+              <a:ext uri="{FF2B5EF4-FFF2-40B4-BE49-F238E27FC236}">
+                <a16:creationId xmlns:a16="http://schemas.microsoft.com/office/drawing/2014/main" id="{1773A1A5-3AE4-414F-809C-07007EDA77D7}"/>
+              </a:ext>
+            </a:extLst>
+          </p:cNvPr>
+          <p:cNvSpPr>
+            <a:spLocks xmlns:a="http://schemas.openxmlformats.org/drawingml/2006/main" noGrp="1"/>
+          </p:cNvSpPr>
+          <p:nvPr/>
+        </p:nvSpPr>
+        <p:spPr>
+          <a:xfrm xmlns:a="http://schemas.openxmlformats.org/drawingml/2006/main">
+            <a:off x="6819900" y="2847975"/>
+            <a:ext cx="57150" cy="57150"/>
+          </a:xfrm>
+          <a:prstGeom xmlns:a="http://schemas.openxmlformats.org/drawingml/2006/main" prst="rect">
+            <a:avLst/>
+          </a:prstGeom>
+          <a:solidFill xmlns:a="http://schemas.openxmlformats.org/drawingml/2006/main">
+            <a:srgbClr val="1D6072"/>
+          </a:solidFill>
+          <a:ln xmlns:a="http://schemas.openxmlformats.org/drawingml/2006/main" w="0">
+            <a:solidFill>
+              <a:srgbClr val="000000">
+                <a:alpha val="0"/>
+              </a:srgbClr>
+            </a:solidFill>
+            <a:prstDash val="solid"/>
+          </a:ln>
+        </p:spPr>
+      </p:sp>
+      <p:sp>
+        <p:nvSpPr>
+          <p:cNvPr id="21" name="">
+            <a:extLst xmlns:a="http://schemas.openxmlformats.org/drawingml/2006/main">
+              <a:ext uri="{FF2B5EF4-FFF2-40B4-BE49-F238E27FC236}">
+                <a16:creationId xmlns:a16="http://schemas.microsoft.com/office/drawing/2014/main" id="{BF3B532B-AC5B-4BDD-9D69-DA3A8659ACBE}"/>
+              </a:ext>
+            </a:extLst>
+          </p:cNvPr>
+          <p:cNvSpPr>
+            <a:spLocks xmlns:a="http://schemas.openxmlformats.org/drawingml/2006/main" noGrp="1"/>
+          </p:cNvSpPr>
+          <p:nvPr/>
+        </p:nvSpPr>
+        <p:spPr>
+          <a:xfrm xmlns:a="http://schemas.openxmlformats.org/drawingml/2006/main">
+            <a:off x="6991350" y="2781300"/>
+            <a:ext cx="3619500" cy="438150"/>
+          </a:xfrm>
+          <a:prstGeom xmlns:a="http://schemas.openxmlformats.org/drawingml/2006/main" prst="rect">
+            <a:avLst/>
+          </a:prstGeom>
+          <a:solidFill xmlns:a="http://schemas.openxmlformats.org/drawingml/2006/main">
+            <a:srgbClr val="000000">
+              <a:alpha val="0"/>
+            </a:srgbClr>
+          </a:solidFill>
+          <a:ln xmlns:a="http://schemas.openxmlformats.org/drawingml/2006/main" w="0">
+            <a:solidFill>
+              <a:srgbClr val="000000">
+                <a:alpha val="0"/>
+              </a:srgbClr>
+            </a:solidFill>
+            <a:prstDash val="solid"/>
+          </a:ln>
+        </p:spPr>
+        <p:txBody>
+          <a:bodyPr xmlns:a="http://schemas.openxmlformats.org/drawingml/2006/main" lIns="0" tIns="0" rIns="0" bIns="0" anchor="t"/>
+          <a:lstStyle xmlns:a="http://schemas.openxmlformats.org/drawingml/2006/main"/>
+          <a:p xmlns:a="http://schemas.openxmlformats.org/drawingml/2006/main">
+            <a:pPr algn="l">
               <a:defRPr sz="1125" b="0">
                 <a:solidFill>
-                  <a:srgbClr val="FFFFFF"/>
+                  <a:srgbClr val="172026"/>
                 </a:solidFill>
                 <a:latin typeface="Aptos"/>
                 <a:ea typeface="Aptos"/>
@@ -3960,68 +4189,35 @@
             <a:r>
               <a:rPr sz="1125" b="0">
                 <a:solidFill>
-                  <a:srgbClr val="FFFFFF"/>
+                  <a:srgbClr val="172026"/>
                 </a:solidFill>
                 <a:latin typeface="Aptos"/>
                 <a:ea typeface="Aptos"/>
                 <a:cs typeface="Aptos"/>
               </a:rPr>
-              <a:t>For the selected industrial category, generate buying committee roles, role concerns, proof needs, likely blocker hypotheses, buyer-circulatable enablement assets, and unknowns that require sales or SME validation. Do not invent a named-company case.</a:t>
+              <a:t>Includes operational, technical, commercial, quality, finance, procurement, leadership, and ecosystem roles...</a:t>
             </a:r>
           </a:p>
         </p:txBody>
       </p:sp>
       <p:sp>
         <p:nvSpPr>
-          <p:cNvPr id="17" name="">
-            <a:extLst xmlns:a="http://schemas.openxmlformats.org/drawingml/2006/main">
-              <a:ext uri="{FF2B5EF4-FFF2-40B4-BE49-F238E27FC236}">
-                <a16:creationId xmlns:a16="http://schemas.microsoft.com/office/drawing/2014/main" id="{5A6B8051-32B3-480A-B990-32F32EB30FEB}"/>
-              </a:ext>
-            </a:extLst>
-          </p:cNvPr>
-          <p:cNvSpPr>
-            <a:spLocks xmlns:a="http://schemas.openxmlformats.org/drawingml/2006/main" noGrp="1"/>
-          </p:cNvSpPr>
-          <p:nvPr/>
-        </p:nvSpPr>
-        <p:spPr>
-          <a:xfrm xmlns:a="http://schemas.openxmlformats.org/drawingml/2006/main">
-            <a:off x="6324600" y="1809750"/>
-            <a:ext cx="5867400" cy="4591050"/>
-          </a:xfrm>
-          <a:prstGeom xmlns:a="http://schemas.openxmlformats.org/drawingml/2006/main" prst="rect">
-            <a:avLst/>
-          </a:prstGeom>
-          <a:solidFill xmlns:a="http://schemas.openxmlformats.org/drawingml/2006/main">
-            <a:srgbClr val="FFFFFF"/>
-          </a:solidFill>
-          <a:ln xmlns:a="http://schemas.openxmlformats.org/drawingml/2006/main" w="9525">
-            <a:solidFill>
-              <a:srgbClr val="D9DDD6"/>
-            </a:solidFill>
-            <a:prstDash val="solid"/>
-          </a:ln>
-        </p:spPr>
-      </p:sp>
-      <p:sp>
-        <p:nvSpPr>
-          <p:cNvPr id="18" name="">
-            <a:extLst xmlns:a="http://schemas.openxmlformats.org/drawingml/2006/main">
-              <a:ext uri="{FF2B5EF4-FFF2-40B4-BE49-F238E27FC236}">
-                <a16:creationId xmlns:a16="http://schemas.microsoft.com/office/drawing/2014/main" id="{A5D0F13B-4162-47B7-9E9E-47BB64BA8C2D}"/>
-              </a:ext>
-            </a:extLst>
-          </p:cNvPr>
-          <p:cNvSpPr>
-            <a:spLocks xmlns:a="http://schemas.openxmlformats.org/drawingml/2006/main" noGrp="1"/>
-          </p:cNvSpPr>
-          <p:nvPr/>
-        </p:nvSpPr>
-        <p:spPr>
-          <a:xfrm xmlns:a="http://schemas.openxmlformats.org/drawingml/2006/main">
-            <a:off x="6705600" y="2266950"/>
-            <a:ext cx="266700" cy="19050"/>
+          <p:cNvPr id="22" name="">
+            <a:extLst xmlns:a="http://schemas.openxmlformats.org/drawingml/2006/main">
+              <a:ext uri="{FF2B5EF4-FFF2-40B4-BE49-F238E27FC236}">
+                <a16:creationId xmlns:a16="http://schemas.microsoft.com/office/drawing/2014/main" id="{FFE5FF54-E5D1-44E5-9733-39DFBC79A4BD}"/>
+              </a:ext>
+            </a:extLst>
+          </p:cNvPr>
+          <p:cNvSpPr>
+            <a:spLocks xmlns:a="http://schemas.openxmlformats.org/drawingml/2006/main" noGrp="1"/>
+          </p:cNvSpPr>
+          <p:nvPr/>
+        </p:nvSpPr>
+        <p:spPr>
+          <a:xfrm xmlns:a="http://schemas.openxmlformats.org/drawingml/2006/main">
+            <a:off x="6819900" y="3324225"/>
+            <a:ext cx="57150" cy="57150"/>
           </a:xfrm>
           <a:prstGeom xmlns:a="http://schemas.openxmlformats.org/drawingml/2006/main" prst="rect">
             <a:avLst/>
@@ -4041,22 +4237,22 @@
       </p:sp>
       <p:sp>
         <p:nvSpPr>
-          <p:cNvPr id="19" name="">
-            <a:extLst xmlns:a="http://schemas.openxmlformats.org/drawingml/2006/main">
-              <a:ext uri="{FF2B5EF4-FFF2-40B4-BE49-F238E27FC236}">
-                <a16:creationId xmlns:a16="http://schemas.microsoft.com/office/drawing/2014/main" id="{F4E351AC-00ED-4092-8240-42924ECEB4D1}"/>
-              </a:ext>
-            </a:extLst>
-          </p:cNvPr>
-          <p:cNvSpPr>
-            <a:spLocks xmlns:a="http://schemas.openxmlformats.org/drawingml/2006/main" noGrp="1"/>
-          </p:cNvSpPr>
-          <p:nvPr/>
-        </p:nvSpPr>
-        <p:spPr>
-          <a:xfrm xmlns:a="http://schemas.openxmlformats.org/drawingml/2006/main">
-            <a:off x="7067550" y="2190750"/>
-            <a:ext cx="2476500" cy="171450"/>
+          <p:cNvPr id="23" name="">
+            <a:extLst xmlns:a="http://schemas.openxmlformats.org/drawingml/2006/main">
+              <a:ext uri="{FF2B5EF4-FFF2-40B4-BE49-F238E27FC236}">
+                <a16:creationId xmlns:a16="http://schemas.microsoft.com/office/drawing/2014/main" id="{3F5D90F7-F6D6-491A-B32A-92C0F8211892}"/>
+              </a:ext>
+            </a:extLst>
+          </p:cNvPr>
+          <p:cNvSpPr>
+            <a:spLocks xmlns:a="http://schemas.openxmlformats.org/drawingml/2006/main" noGrp="1"/>
+          </p:cNvSpPr>
+          <p:nvPr/>
+        </p:nvSpPr>
+        <p:spPr>
+          <a:xfrm xmlns:a="http://schemas.openxmlformats.org/drawingml/2006/main">
+            <a:off x="6991350" y="3257550"/>
+            <a:ext cx="3619500" cy="438150"/>
           </a:xfrm>
           <a:prstGeom xmlns:a="http://schemas.openxmlformats.org/drawingml/2006/main" prst="rect">
             <a:avLst/>
@@ -4077,6 +4273,635 @@
         </p:spPr>
         <p:txBody>
           <a:bodyPr xmlns:a="http://schemas.openxmlformats.org/drawingml/2006/main" lIns="0" tIns="0" rIns="0" bIns="0" anchor="t"/>
+          <a:lstStyle xmlns:a="http://schemas.openxmlformats.org/drawingml/2006/main"/>
+          <a:p xmlns:a="http://schemas.openxmlformats.org/drawingml/2006/main">
+            <a:pPr algn="l">
+              <a:defRPr sz="1125" b="0">
+                <a:solidFill>
+                  <a:srgbClr val="172026"/>
+                </a:solidFill>
+                <a:latin typeface="Aptos"/>
+                <a:ea typeface="Aptos"/>
+                <a:cs typeface="Aptos"/>
+              </a:defRPr>
+            </a:pPr>
+            <a:r>
+              <a:rPr sz="1125" b="0">
+                <a:solidFill>
+                  <a:srgbClr val="172026"/>
+                </a:solidFill>
+                <a:latin typeface="Aptos"/>
+                <a:ea typeface="Aptos"/>
+                <a:cs typeface="Aptos"/>
+              </a:rPr>
+              <a:t>States real decision risk, not generic persona pain</a:t>
+            </a:r>
+          </a:p>
+        </p:txBody>
+      </p:sp>
+      <p:sp>
+        <p:nvSpPr>
+          <p:cNvPr id="24" name="">
+            <a:extLst xmlns:a="http://schemas.openxmlformats.org/drawingml/2006/main">
+              <a:ext uri="{FF2B5EF4-FFF2-40B4-BE49-F238E27FC236}">
+                <a16:creationId xmlns:a16="http://schemas.microsoft.com/office/drawing/2014/main" id="{16247D9F-5155-4987-BA19-3179E058759F}"/>
+              </a:ext>
+            </a:extLst>
+          </p:cNvPr>
+          <p:cNvSpPr>
+            <a:spLocks xmlns:a="http://schemas.openxmlformats.org/drawingml/2006/main" noGrp="1"/>
+          </p:cNvSpPr>
+          <p:nvPr/>
+        </p:nvSpPr>
+        <p:spPr>
+          <a:xfrm xmlns:a="http://schemas.openxmlformats.org/drawingml/2006/main">
+            <a:off x="6819900" y="3800475"/>
+            <a:ext cx="57150" cy="57150"/>
+          </a:xfrm>
+          <a:prstGeom xmlns:a="http://schemas.openxmlformats.org/drawingml/2006/main" prst="rect">
+            <a:avLst/>
+          </a:prstGeom>
+          <a:solidFill xmlns:a="http://schemas.openxmlformats.org/drawingml/2006/main">
+            <a:srgbClr val="1D6072"/>
+          </a:solidFill>
+          <a:ln xmlns:a="http://schemas.openxmlformats.org/drawingml/2006/main" w="0">
+            <a:solidFill>
+              <a:srgbClr val="000000">
+                <a:alpha val="0"/>
+              </a:srgbClr>
+            </a:solidFill>
+            <a:prstDash val="solid"/>
+          </a:ln>
+        </p:spPr>
+      </p:sp>
+      <p:sp>
+        <p:nvSpPr>
+          <p:cNvPr id="25" name="">
+            <a:extLst xmlns:a="http://schemas.openxmlformats.org/drawingml/2006/main">
+              <a:ext uri="{FF2B5EF4-FFF2-40B4-BE49-F238E27FC236}">
+                <a16:creationId xmlns:a16="http://schemas.microsoft.com/office/drawing/2014/main" id="{DDBF6768-48CB-44BF-90B6-6824FEA4FB92}"/>
+              </a:ext>
+            </a:extLst>
+          </p:cNvPr>
+          <p:cNvSpPr>
+            <a:spLocks xmlns:a="http://schemas.openxmlformats.org/drawingml/2006/main" noGrp="1"/>
+          </p:cNvSpPr>
+          <p:nvPr/>
+        </p:nvSpPr>
+        <p:spPr>
+          <a:xfrm xmlns:a="http://schemas.openxmlformats.org/drawingml/2006/main">
+            <a:off x="6991350" y="3733800"/>
+            <a:ext cx="3619500" cy="438150"/>
+          </a:xfrm>
+          <a:prstGeom xmlns:a="http://schemas.openxmlformats.org/drawingml/2006/main" prst="rect">
+            <a:avLst/>
+          </a:prstGeom>
+          <a:solidFill xmlns:a="http://schemas.openxmlformats.org/drawingml/2006/main">
+            <a:srgbClr val="000000">
+              <a:alpha val="0"/>
+            </a:srgbClr>
+          </a:solidFill>
+          <a:ln xmlns:a="http://schemas.openxmlformats.org/drawingml/2006/main" w="0">
+            <a:solidFill>
+              <a:srgbClr val="000000">
+                <a:alpha val="0"/>
+              </a:srgbClr>
+            </a:solidFill>
+            <a:prstDash val="solid"/>
+          </a:ln>
+        </p:spPr>
+        <p:txBody>
+          <a:bodyPr xmlns:a="http://schemas.openxmlformats.org/drawingml/2006/main" lIns="0" tIns="0" rIns="0" bIns="0" anchor="t"/>
+          <a:lstStyle xmlns:a="http://schemas.openxmlformats.org/drawingml/2006/main"/>
+          <a:p xmlns:a="http://schemas.openxmlformats.org/drawingml/2006/main">
+            <a:pPr algn="l">
+              <a:defRPr sz="1125" b="0">
+                <a:solidFill>
+                  <a:srgbClr val="172026"/>
+                </a:solidFill>
+                <a:latin typeface="Aptos"/>
+                <a:ea typeface="Aptos"/>
+                <a:cs typeface="Aptos"/>
+              </a:defRPr>
+            </a:pPr>
+            <a:r>
+              <a:rPr sz="1125" b="0">
+                <a:solidFill>
+                  <a:srgbClr val="172026"/>
+                </a:solidFill>
+                <a:latin typeface="Aptos"/>
+                <a:ea typeface="Aptos"/>
+                <a:cs typeface="Aptos"/>
+              </a:rPr>
+              <a:t>Names specific proof or evidence</a:t>
+            </a:r>
+          </a:p>
+        </p:txBody>
+      </p:sp>
+      <p:sp>
+        <p:nvSpPr>
+          <p:cNvPr id="26" name="">
+            <a:extLst xmlns:a="http://schemas.openxmlformats.org/drawingml/2006/main">
+              <a:ext uri="{FF2B5EF4-FFF2-40B4-BE49-F238E27FC236}">
+                <a16:creationId xmlns:a16="http://schemas.microsoft.com/office/drawing/2014/main" id="{6AD76815-EC88-4E74-8249-48FA8CB0E3EE}"/>
+              </a:ext>
+            </a:extLst>
+          </p:cNvPr>
+          <p:cNvSpPr>
+            <a:spLocks xmlns:a="http://schemas.openxmlformats.org/drawingml/2006/main" noGrp="1"/>
+          </p:cNvSpPr>
+          <p:nvPr/>
+        </p:nvSpPr>
+        <p:spPr>
+          <a:xfrm xmlns:a="http://schemas.openxmlformats.org/drawingml/2006/main">
+            <a:off x="6819900" y="4276725"/>
+            <a:ext cx="57150" cy="57150"/>
+          </a:xfrm>
+          <a:prstGeom xmlns:a="http://schemas.openxmlformats.org/drawingml/2006/main" prst="rect">
+            <a:avLst/>
+          </a:prstGeom>
+          <a:solidFill xmlns:a="http://schemas.openxmlformats.org/drawingml/2006/main">
+            <a:srgbClr val="1D6072"/>
+          </a:solidFill>
+          <a:ln xmlns:a="http://schemas.openxmlformats.org/drawingml/2006/main" w="0">
+            <a:solidFill>
+              <a:srgbClr val="000000">
+                <a:alpha val="0"/>
+              </a:srgbClr>
+            </a:solidFill>
+            <a:prstDash val="solid"/>
+          </a:ln>
+        </p:spPr>
+      </p:sp>
+      <p:sp>
+        <p:nvSpPr>
+          <p:cNvPr id="27" name="">
+            <a:extLst xmlns:a="http://schemas.openxmlformats.org/drawingml/2006/main">
+              <a:ext uri="{FF2B5EF4-FFF2-40B4-BE49-F238E27FC236}">
+                <a16:creationId xmlns:a16="http://schemas.microsoft.com/office/drawing/2014/main" id="{EBC44881-4FBA-4127-B2E6-5483D596DDF3}"/>
+              </a:ext>
+            </a:extLst>
+          </p:cNvPr>
+          <p:cNvSpPr>
+            <a:spLocks xmlns:a="http://schemas.openxmlformats.org/drawingml/2006/main" noGrp="1"/>
+          </p:cNvSpPr>
+          <p:nvPr/>
+        </p:nvSpPr>
+        <p:spPr>
+          <a:xfrm xmlns:a="http://schemas.openxmlformats.org/drawingml/2006/main">
+            <a:off x="6991350" y="4210050"/>
+            <a:ext cx="3619500" cy="438150"/>
+          </a:xfrm>
+          <a:prstGeom xmlns:a="http://schemas.openxmlformats.org/drawingml/2006/main" prst="rect">
+            <a:avLst/>
+          </a:prstGeom>
+          <a:solidFill xmlns:a="http://schemas.openxmlformats.org/drawingml/2006/main">
+            <a:srgbClr val="000000">
+              <a:alpha val="0"/>
+            </a:srgbClr>
+          </a:solidFill>
+          <a:ln xmlns:a="http://schemas.openxmlformats.org/drawingml/2006/main" w="0">
+            <a:solidFill>
+              <a:srgbClr val="000000">
+                <a:alpha val="0"/>
+              </a:srgbClr>
+            </a:solidFill>
+            <a:prstDash val="solid"/>
+          </a:ln>
+        </p:spPr>
+        <p:txBody>
+          <a:bodyPr xmlns:a="http://schemas.openxmlformats.org/drawingml/2006/main" lIns="0" tIns="0" rIns="0" bIns="0" anchor="t"/>
+          <a:lstStyle xmlns:a="http://schemas.openxmlformats.org/drawingml/2006/main"/>
+          <a:p xmlns:a="http://schemas.openxmlformats.org/drawingml/2006/main">
+            <a:pPr algn="l">
+              <a:defRPr sz="1125" b="0">
+                <a:solidFill>
+                  <a:srgbClr val="172026"/>
+                </a:solidFill>
+                <a:latin typeface="Aptos"/>
+                <a:ea typeface="Aptos"/>
+                <a:cs typeface="Aptos"/>
+              </a:defRPr>
+            </a:pPr>
+            <a:r>
+              <a:rPr sz="1125" b="0">
+                <a:solidFill>
+                  <a:srgbClr val="172026"/>
+                </a:solidFill>
+                <a:latin typeface="Aptos"/>
+                <a:ea typeface="Aptos"/>
+                <a:cs typeface="Aptos"/>
+              </a:rPr>
+              <a:t>Separates fact, assumption, and unknown</a:t>
+            </a:r>
+          </a:p>
+        </p:txBody>
+      </p:sp>
+      <p:sp>
+        <p:nvSpPr>
+          <p:cNvPr id="28" name="">
+            <a:extLst xmlns:a="http://schemas.openxmlformats.org/drawingml/2006/main">
+              <a:ext uri="{FF2B5EF4-FFF2-40B4-BE49-F238E27FC236}">
+                <a16:creationId xmlns:a16="http://schemas.microsoft.com/office/drawing/2014/main" id="{34CD2222-2466-4D00-80A0-6E645DEC58AA}"/>
+              </a:ext>
+            </a:extLst>
+          </p:cNvPr>
+          <p:cNvSpPr>
+            <a:spLocks xmlns:a="http://schemas.openxmlformats.org/drawingml/2006/main" noGrp="1"/>
+          </p:cNvSpPr>
+          <p:nvPr/>
+        </p:nvSpPr>
+        <p:spPr>
+          <a:xfrm xmlns:a="http://schemas.openxmlformats.org/drawingml/2006/main">
+            <a:off x="514350" y="6438900"/>
+            <a:ext cx="10915650" cy="9525"/>
+          </a:xfrm>
+          <a:prstGeom xmlns:a="http://schemas.openxmlformats.org/drawingml/2006/main" prst="rect">
+            <a:avLst/>
+          </a:prstGeom>
+          <a:solidFill xmlns:a="http://schemas.openxmlformats.org/drawingml/2006/main">
+            <a:srgbClr val="D9DDD6"/>
+          </a:solidFill>
+          <a:ln xmlns:a="http://schemas.openxmlformats.org/drawingml/2006/main" w="0">
+            <a:solidFill>
+              <a:srgbClr val="000000">
+                <a:alpha val="0"/>
+              </a:srgbClr>
+            </a:solidFill>
+            <a:prstDash val="solid"/>
+          </a:ln>
+        </p:spPr>
+      </p:sp>
+      <p:sp>
+        <p:nvSpPr>
+          <p:cNvPr id="29" name="">
+            <a:extLst xmlns:a="http://schemas.openxmlformats.org/drawingml/2006/main">
+              <a:ext uri="{FF2B5EF4-FFF2-40B4-BE49-F238E27FC236}">
+                <a16:creationId xmlns:a16="http://schemas.microsoft.com/office/drawing/2014/main" id="{EA85620E-C35D-4949-9EBF-3D5749ABE24F}"/>
+              </a:ext>
+            </a:extLst>
+          </p:cNvPr>
+          <p:cNvSpPr>
+            <a:spLocks xmlns:a="http://schemas.openxmlformats.org/drawingml/2006/main" noGrp="1"/>
+          </p:cNvSpPr>
+          <p:nvPr/>
+        </p:nvSpPr>
+        <p:spPr>
+          <a:xfrm xmlns:a="http://schemas.openxmlformats.org/drawingml/2006/main">
+            <a:off x="514350" y="6553200"/>
+            <a:ext cx="5905500" cy="171450"/>
+          </a:xfrm>
+          <a:prstGeom xmlns:a="http://schemas.openxmlformats.org/drawingml/2006/main" prst="rect">
+            <a:avLst/>
+          </a:prstGeom>
+          <a:solidFill xmlns:a="http://schemas.openxmlformats.org/drawingml/2006/main">
+            <a:srgbClr val="000000">
+              <a:alpha val="0"/>
+            </a:srgbClr>
+          </a:solidFill>
+          <a:ln xmlns:a="http://schemas.openxmlformats.org/drawingml/2006/main" w="0">
+            <a:solidFill>
+              <a:srgbClr val="000000">
+                <a:alpha val="0"/>
+              </a:srgbClr>
+            </a:solidFill>
+            <a:prstDash val="solid"/>
+          </a:ln>
+        </p:spPr>
+        <p:txBody>
+          <a:bodyPr xmlns:a="http://schemas.openxmlformats.org/drawingml/2006/main" lIns="0" tIns="0" rIns="0" bIns="0" anchor="t"/>
+          <a:lstStyle xmlns:a="http://schemas.openxmlformats.org/drawingml/2006/main"/>
+          <a:p xmlns:a="http://schemas.openxmlformats.org/drawingml/2006/main">
+            <a:pPr algn="l">
+              <a:defRPr sz="675" b="0">
+                <a:solidFill>
+                  <a:srgbClr val="59646A"/>
+                </a:solidFill>
+                <a:latin typeface="Aptos"/>
+                <a:ea typeface="Aptos"/>
+                <a:cs typeface="Aptos"/>
+              </a:defRPr>
+            </a:pPr>
+            <a:r>
+              <a:rPr sz="675" b="0">
+                <a:solidFill>
+                  <a:srgbClr val="59646A"/>
+                </a:solidFill>
+                <a:latin typeface="Aptos"/>
+                <a:ea typeface="Aptos"/>
+                <a:cs typeface="Aptos"/>
+              </a:rPr>
+              <a:t>Lesson 02 - Industrial Buyer Reality</a:t>
+            </a:r>
+          </a:p>
+        </p:txBody>
+      </p:sp>
+      <p:sp>
+        <p:nvSpPr>
+          <p:cNvPr id="30" name="">
+            <a:extLst xmlns:a="http://schemas.openxmlformats.org/drawingml/2006/main">
+              <a:ext uri="{FF2B5EF4-FFF2-40B4-BE49-F238E27FC236}">
+                <a16:creationId xmlns:a16="http://schemas.microsoft.com/office/drawing/2014/main" id="{ABBD5FE7-E6C3-416F-8060-8C5B3014D116}"/>
+              </a:ext>
+            </a:extLst>
+          </p:cNvPr>
+          <p:cNvSpPr>
+            <a:spLocks xmlns:a="http://schemas.openxmlformats.org/drawingml/2006/main" noGrp="1"/>
+          </p:cNvSpPr>
+          <p:nvPr/>
+        </p:nvSpPr>
+        <p:spPr>
+          <a:xfrm xmlns:a="http://schemas.openxmlformats.org/drawingml/2006/main">
+            <a:off x="5334000" y="6553200"/>
+            <a:ext cx="4095750" cy="171450"/>
+          </a:xfrm>
+          <a:prstGeom xmlns:a="http://schemas.openxmlformats.org/drawingml/2006/main" prst="rect">
+            <a:avLst/>
+          </a:prstGeom>
+          <a:solidFill xmlns:a="http://schemas.openxmlformats.org/drawingml/2006/main">
+            <a:srgbClr val="000000">
+              <a:alpha val="0"/>
+            </a:srgbClr>
+          </a:solidFill>
+          <a:ln xmlns:a="http://schemas.openxmlformats.org/drawingml/2006/main" w="0">
+            <a:solidFill>
+              <a:srgbClr val="000000">
+                <a:alpha val="0"/>
+              </a:srgbClr>
+            </a:solidFill>
+            <a:prstDash val="solid"/>
+          </a:ln>
+        </p:spPr>
+        <p:txBody>
+          <a:bodyPr xmlns:a="http://schemas.openxmlformats.org/drawingml/2006/main" lIns="0" tIns="0" rIns="0" bIns="0" anchor="t"/>
+          <a:lstStyle xmlns:a="http://schemas.openxmlformats.org/drawingml/2006/main"/>
+          <a:p xmlns:a="http://schemas.openxmlformats.org/drawingml/2006/main">
+            <a:pPr algn="r">
+              <a:defRPr sz="600" b="0">
+                <a:solidFill>
+                  <a:srgbClr val="59646A"/>
+                </a:solidFill>
+                <a:latin typeface="Aptos"/>
+                <a:ea typeface="Aptos"/>
+                <a:cs typeface="Aptos"/>
+              </a:defRPr>
+            </a:pPr>
+            <a:r>
+              <a:rPr sz="600" b="0">
+                <a:solidFill>
+                  <a:srgbClr val="59646A"/>
+                </a:solidFill>
+                <a:latin typeface="Aptos"/>
+                <a:ea typeface="Aptos"/>
+                <a:cs typeface="Aptos"/>
+              </a:rPr>
+              <a:t>Source: modules/module-01-industrial-demand-generation/lessons/02-industrial-buyer-reality.md @ 9e28222</a:t>
+            </a:r>
+          </a:p>
+        </p:txBody>
+      </p:sp>
+      <p:sp>
+        <p:nvSpPr>
+          <p:cNvPr id="31" name="">
+            <a:extLst xmlns:a="http://schemas.openxmlformats.org/drawingml/2006/main">
+              <a:ext uri="{FF2B5EF4-FFF2-40B4-BE49-F238E27FC236}">
+                <a16:creationId xmlns:a16="http://schemas.microsoft.com/office/drawing/2014/main" id="{E392264D-A370-49ED-AED6-E4B124AA1610}"/>
+              </a:ext>
+            </a:extLst>
+          </p:cNvPr>
+          <p:cNvSpPr>
+            <a:spLocks xmlns:a="http://schemas.openxmlformats.org/drawingml/2006/main" noGrp="1"/>
+          </p:cNvSpPr>
+          <p:nvPr/>
+        </p:nvSpPr>
+        <p:spPr>
+          <a:xfrm xmlns:a="http://schemas.openxmlformats.org/drawingml/2006/main">
+            <a:off x="10668000" y="6553200"/>
+            <a:ext cx="762000" cy="171450"/>
+          </a:xfrm>
+          <a:prstGeom xmlns:a="http://schemas.openxmlformats.org/drawingml/2006/main" prst="rect">
+            <a:avLst/>
+          </a:prstGeom>
+          <a:solidFill xmlns:a="http://schemas.openxmlformats.org/drawingml/2006/main">
+            <a:srgbClr val="000000">
+              <a:alpha val="0"/>
+            </a:srgbClr>
+          </a:solidFill>
+          <a:ln xmlns:a="http://schemas.openxmlformats.org/drawingml/2006/main" w="0">
+            <a:solidFill>
+              <a:srgbClr val="000000">
+                <a:alpha val="0"/>
+              </a:srgbClr>
+            </a:solidFill>
+            <a:prstDash val="solid"/>
+          </a:ln>
+        </p:spPr>
+        <p:txBody>
+          <a:bodyPr xmlns:a="http://schemas.openxmlformats.org/drawingml/2006/main" lIns="0" tIns="0" rIns="0" bIns="0" anchor="t"/>
+          <a:lstStyle xmlns:a="http://schemas.openxmlformats.org/drawingml/2006/main"/>
+          <a:p xmlns:a="http://schemas.openxmlformats.org/drawingml/2006/main">
+            <a:pPr algn="r">
+              <a:defRPr sz="675" b="0">
+                <a:solidFill>
+                  <a:srgbClr val="59646A"/>
+                </a:solidFill>
+                <a:latin typeface="Aptos"/>
+                <a:ea typeface="Aptos"/>
+                <a:cs typeface="Aptos"/>
+              </a:defRPr>
+            </a:pPr>
+            <a:r>
+              <a:rPr sz="675" b="0">
+                <a:solidFill>
+                  <a:srgbClr val="59646A"/>
+                </a:solidFill>
+                <a:latin typeface="Aptos"/>
+                <a:ea typeface="Aptos"/>
+                <a:cs typeface="Aptos"/>
+              </a:rPr>
+              <a:t>10/15</a:t>
+            </a:r>
+          </a:p>
+        </p:txBody>
+      </p:sp>
+      <p:sp>
+        <p:nvSpPr>
+          <p:cNvPr id="32" name="">
+            <a:extLst xmlns:a="http://schemas.openxmlformats.org/drawingml/2006/main">
+              <a:ext uri="{FF2B5EF4-FFF2-40B4-BE49-F238E27FC236}">
+                <a16:creationId xmlns:a16="http://schemas.microsoft.com/office/drawing/2014/main" id="{17D3A6AF-EB9E-43E4-9622-B763CB5E0B21}"/>
+              </a:ext>
+            </a:extLst>
+          </p:cNvPr>
+          <p:cNvSpPr>
+            <a:spLocks xmlns:a="http://schemas.openxmlformats.org/drawingml/2006/main" noGrp="1"/>
+          </p:cNvSpPr>
+          <p:nvPr/>
+        </p:nvSpPr>
+        <p:spPr>
+          <a:xfrm xmlns:a="http://schemas.openxmlformats.org/drawingml/2006/main">
+            <a:off x="0" y="0"/>
+            <a:ext cx="12192000" cy="1809750"/>
+          </a:xfrm>
+          <a:prstGeom xmlns:a="http://schemas.openxmlformats.org/drawingml/2006/main" prst="rect">
+            <a:avLst/>
+          </a:prstGeom>
+          <a:solidFill xmlns:a="http://schemas.openxmlformats.org/drawingml/2006/main">
+            <a:srgbClr val="F5F6F2"/>
+          </a:solidFill>
+          <a:ln xmlns:a="http://schemas.openxmlformats.org/drawingml/2006/main" w="0">
+            <a:solidFill>
+              <a:srgbClr val="000000">
+                <a:alpha val="0"/>
+              </a:srgbClr>
+            </a:solidFill>
+            <a:prstDash val="solid"/>
+          </a:ln>
+        </p:spPr>
+      </p:sp>
+      <p:sp>
+        <p:nvSpPr>
+          <p:cNvPr id="33" name="">
+            <a:extLst xmlns:a="http://schemas.openxmlformats.org/drawingml/2006/main">
+              <a:ext uri="{FF2B5EF4-FFF2-40B4-BE49-F238E27FC236}">
+                <a16:creationId xmlns:a16="http://schemas.microsoft.com/office/drawing/2014/main" id="{BCE6927E-5035-4AA9-9042-9A3422B7652D}"/>
+              </a:ext>
+            </a:extLst>
+          </p:cNvPr>
+          <p:cNvSpPr>
+            <a:spLocks xmlns:a="http://schemas.openxmlformats.org/drawingml/2006/main" noGrp="1"/>
+          </p:cNvSpPr>
+          <p:nvPr/>
+        </p:nvSpPr>
+        <p:spPr>
+          <a:xfrm xmlns:a="http://schemas.openxmlformats.org/drawingml/2006/main">
+            <a:off x="0" y="0"/>
+            <a:ext cx="171450" cy="1809750"/>
+          </a:xfrm>
+          <a:prstGeom xmlns:a="http://schemas.openxmlformats.org/drawingml/2006/main" prst="rect">
+            <a:avLst/>
+          </a:prstGeom>
+          <a:solidFill xmlns:a="http://schemas.openxmlformats.org/drawingml/2006/main">
+            <a:srgbClr val="12232B"/>
+          </a:solidFill>
+          <a:ln xmlns:a="http://schemas.openxmlformats.org/drawingml/2006/main" w="0">
+            <a:solidFill>
+              <a:srgbClr val="000000">
+                <a:alpha val="0"/>
+              </a:srgbClr>
+            </a:solidFill>
+            <a:prstDash val="solid"/>
+          </a:ln>
+        </p:spPr>
+      </p:sp>
+      <p:sp>
+        <p:nvSpPr>
+          <p:cNvPr id="34" name="">
+            <a:extLst xmlns:a="http://schemas.openxmlformats.org/drawingml/2006/main">
+              <a:ext uri="{FF2B5EF4-FFF2-40B4-BE49-F238E27FC236}">
+                <a16:creationId xmlns:a16="http://schemas.microsoft.com/office/drawing/2014/main" id="{D254E549-0C38-48EE-9DED-CBD7F0F51B50}"/>
+              </a:ext>
+            </a:extLst>
+          </p:cNvPr>
+          <p:cNvSpPr>
+            <a:spLocks xmlns:a="http://schemas.openxmlformats.org/drawingml/2006/main" noGrp="1"/>
+          </p:cNvSpPr>
+          <p:nvPr/>
+        </p:nvSpPr>
+        <p:spPr>
+          <a:xfrm xmlns:a="http://schemas.openxmlformats.org/drawingml/2006/main">
+            <a:off x="171450" y="0"/>
+            <a:ext cx="57150" cy="1809750"/>
+          </a:xfrm>
+          <a:prstGeom xmlns:a="http://schemas.openxmlformats.org/drawingml/2006/main" prst="rect">
+            <a:avLst/>
+          </a:prstGeom>
+          <a:solidFill xmlns:a="http://schemas.openxmlformats.org/drawingml/2006/main">
+            <a:srgbClr val="A85D2A"/>
+          </a:solidFill>
+          <a:ln xmlns:a="http://schemas.openxmlformats.org/drawingml/2006/main" w="0">
+            <a:solidFill>
+              <a:srgbClr val="000000">
+                <a:alpha val="0"/>
+              </a:srgbClr>
+            </a:solidFill>
+            <a:prstDash val="solid"/>
+          </a:ln>
+        </p:spPr>
+      </p:sp>
+      <p:sp>
+        <p:nvSpPr>
+          <p:cNvPr id="35" name="kicker-02-marker">
+            <a:extLst xmlns:a="http://schemas.openxmlformats.org/drawingml/2006/main">
+              <a:ext uri="{FF2B5EF4-FFF2-40B4-BE49-F238E27FC236}">
+                <a16:creationId xmlns:a16="http://schemas.microsoft.com/office/drawing/2014/main" id="{93E9C104-DB3C-4ED4-BC84-154767B9361C}"/>
+              </a:ext>
+            </a:extLst>
+          </p:cNvPr>
+          <p:cNvSpPr>
+            <a:spLocks xmlns:a="http://schemas.openxmlformats.org/drawingml/2006/main" noGrp="1"/>
+          </p:cNvSpPr>
+          <p:nvPr/>
+        </p:nvSpPr>
+        <p:spPr>
+          <a:xfrm xmlns:a="http://schemas.openxmlformats.org/drawingml/2006/main">
+            <a:off x="514350" y="390525"/>
+            <a:ext cx="76200" cy="76200"/>
+          </a:xfrm>
+          <a:prstGeom xmlns:a="http://schemas.openxmlformats.org/drawingml/2006/main" prst="rect">
+            <a:avLst/>
+          </a:prstGeom>
+          <a:solidFill xmlns:a="http://schemas.openxmlformats.org/drawingml/2006/main">
+            <a:srgbClr val="A85D2A"/>
+          </a:solidFill>
+          <a:ln xmlns:a="http://schemas.openxmlformats.org/drawingml/2006/main" w="0">
+            <a:solidFill>
+              <a:srgbClr val="000000">
+                <a:alpha val="0"/>
+              </a:srgbClr>
+            </a:solidFill>
+            <a:prstDash val="solid"/>
+          </a:ln>
+        </p:spPr>
+      </p:sp>
+      <p:sp>
+        <p:nvSpPr>
+          <p:cNvPr id="36" name="kicker-02-label">
+            <a:extLst xmlns:a="http://schemas.openxmlformats.org/drawingml/2006/main">
+              <a:ext uri="{FF2B5EF4-FFF2-40B4-BE49-F238E27FC236}">
+                <a16:creationId xmlns:a16="http://schemas.microsoft.com/office/drawing/2014/main" id="{AC4CFCAC-93B9-4892-95DE-E8B91D5FDAF0}"/>
+              </a:ext>
+            </a:extLst>
+          </p:cNvPr>
+          <p:cNvSpPr>
+            <a:spLocks xmlns:a="http://schemas.openxmlformats.org/drawingml/2006/main" noGrp="1"/>
+          </p:cNvSpPr>
+          <p:nvPr/>
+        </p:nvSpPr>
+        <p:spPr>
+          <a:xfrm xmlns:a="http://schemas.openxmlformats.org/drawingml/2006/main">
+            <a:off x="685800" y="323850"/>
+            <a:ext cx="7524750" cy="228600"/>
+          </a:xfrm>
+          <a:prstGeom xmlns:a="http://schemas.openxmlformats.org/drawingml/2006/main" prst="rect">
+            <a:avLst/>
+          </a:prstGeom>
+          <a:solidFill xmlns:a="http://schemas.openxmlformats.org/drawingml/2006/main">
+            <a:srgbClr val="000000">
+              <a:alpha val="0"/>
+            </a:srgbClr>
+          </a:solidFill>
+          <a:ln xmlns:a="http://schemas.openxmlformats.org/drawingml/2006/main" w="0">
+            <a:solidFill>
+              <a:srgbClr val="000000">
+                <a:alpha val="0"/>
+              </a:srgbClr>
+            </a:solidFill>
+            <a:prstDash val="solid"/>
+          </a:ln>
+        </p:spPr>
+        <p:txBody>
+          <a:bodyPr xmlns:a="http://schemas.openxmlformats.org/drawingml/2006/main" lIns="0" tIns="0" rIns="0" bIns="0" anchor="ctr"/>
           <a:lstStyle xmlns:a="http://schemas.openxmlformats.org/drawingml/2006/main"/>
           <a:p xmlns:a="http://schemas.openxmlformats.org/drawingml/2006/main">
             <a:pPr algn="l">
@@ -4098,844 +4923,17 @@
                 <a:ea typeface="Aptos"/>
                 <a:cs typeface="Aptos"/>
               </a:rPr>
-              <a:t>REQUIRED OUTPUT STANDARD</a:t>
+              <a:t>MODULE 1 / LESSON 02 / STRUCTURED DRAFTING DRILL</a:t>
             </a:r>
           </a:p>
         </p:txBody>
       </p:sp>
       <p:sp>
         <p:nvSpPr>
-          <p:cNvPr id="20" name="">
-            <a:extLst xmlns:a="http://schemas.openxmlformats.org/drawingml/2006/main">
-              <a:ext uri="{FF2B5EF4-FFF2-40B4-BE49-F238E27FC236}">
-                <a16:creationId xmlns:a16="http://schemas.microsoft.com/office/drawing/2014/main" id="{CD33CDC7-D1DB-496A-8F10-730A6FF98CF8}"/>
-              </a:ext>
-            </a:extLst>
-          </p:cNvPr>
-          <p:cNvSpPr>
-            <a:spLocks xmlns:a="http://schemas.openxmlformats.org/drawingml/2006/main" noGrp="1"/>
-          </p:cNvSpPr>
-          <p:nvPr/>
-        </p:nvSpPr>
-        <p:spPr>
-          <a:xfrm xmlns:a="http://schemas.openxmlformats.org/drawingml/2006/main">
-            <a:off x="6705600" y="2714625"/>
-            <a:ext cx="57150" cy="57150"/>
-          </a:xfrm>
-          <a:prstGeom xmlns:a="http://schemas.openxmlformats.org/drawingml/2006/main" prst="rect">
-            <a:avLst/>
-          </a:prstGeom>
-          <a:solidFill xmlns:a="http://schemas.openxmlformats.org/drawingml/2006/main">
-            <a:srgbClr val="1D6072"/>
-          </a:solidFill>
-          <a:ln xmlns:a="http://schemas.openxmlformats.org/drawingml/2006/main" w="0">
-            <a:solidFill>
-              <a:srgbClr val="000000">
-                <a:alpha val="0"/>
-              </a:srgbClr>
-            </a:solidFill>
-            <a:prstDash val="solid"/>
-          </a:ln>
-        </p:spPr>
-      </p:sp>
-      <p:sp>
-        <p:nvSpPr>
-          <p:cNvPr id="21" name="">
-            <a:extLst xmlns:a="http://schemas.openxmlformats.org/drawingml/2006/main">
-              <a:ext uri="{FF2B5EF4-FFF2-40B4-BE49-F238E27FC236}">
-                <a16:creationId xmlns:a16="http://schemas.microsoft.com/office/drawing/2014/main" id="{A3B460EE-62CC-43C5-B5B7-2A228C5E6E3B}"/>
-              </a:ext>
-            </a:extLst>
-          </p:cNvPr>
-          <p:cNvSpPr>
-            <a:spLocks xmlns:a="http://schemas.openxmlformats.org/drawingml/2006/main" noGrp="1"/>
-          </p:cNvSpPr>
-          <p:nvPr/>
-        </p:nvSpPr>
-        <p:spPr>
-          <a:xfrm xmlns:a="http://schemas.openxmlformats.org/drawingml/2006/main">
-            <a:off x="6877050" y="2647950"/>
-            <a:ext cx="4210050" cy="438150"/>
-          </a:xfrm>
-          <a:prstGeom xmlns:a="http://schemas.openxmlformats.org/drawingml/2006/main" prst="rect">
-            <a:avLst/>
-          </a:prstGeom>
-          <a:solidFill xmlns:a="http://schemas.openxmlformats.org/drawingml/2006/main">
-            <a:srgbClr val="000000">
-              <a:alpha val="0"/>
-            </a:srgbClr>
-          </a:solidFill>
-          <a:ln xmlns:a="http://schemas.openxmlformats.org/drawingml/2006/main" w="0">
-            <a:solidFill>
-              <a:srgbClr val="000000">
-                <a:alpha val="0"/>
-              </a:srgbClr>
-            </a:solidFill>
-            <a:prstDash val="solid"/>
-          </a:ln>
-        </p:spPr>
-        <p:txBody>
-          <a:bodyPr xmlns:a="http://schemas.openxmlformats.org/drawingml/2006/main" lIns="0" tIns="0" rIns="0" bIns="0" anchor="t"/>
-          <a:lstStyle xmlns:a="http://schemas.openxmlformats.org/drawingml/2006/main"/>
-          <a:p xmlns:a="http://schemas.openxmlformats.org/drawingml/2006/main">
-            <a:pPr algn="l">
-              <a:defRPr sz="1125" b="0">
-                <a:solidFill>
-                  <a:srgbClr val="172026"/>
-                </a:solidFill>
-                <a:latin typeface="Aptos"/>
-                <a:ea typeface="Aptos"/>
-                <a:cs typeface="Aptos"/>
-              </a:defRPr>
-            </a:pPr>
-            <a:r>
-              <a:rPr sz="1125" b="0">
-                <a:solidFill>
-                  <a:srgbClr val="172026"/>
-                </a:solidFill>
-                <a:latin typeface="Aptos"/>
-                <a:ea typeface="Aptos"/>
-                <a:cs typeface="Aptos"/>
-              </a:rPr>
-              <a:t>Includes operational, technical, commercial, quality, finance, procurement, leadership, and ecosystem roles...</a:t>
-            </a:r>
-          </a:p>
-        </p:txBody>
-      </p:sp>
-      <p:sp>
-        <p:nvSpPr>
-          <p:cNvPr id="22" name="">
-            <a:extLst xmlns:a="http://schemas.openxmlformats.org/drawingml/2006/main">
-              <a:ext uri="{FF2B5EF4-FFF2-40B4-BE49-F238E27FC236}">
-                <a16:creationId xmlns:a16="http://schemas.microsoft.com/office/drawing/2014/main" id="{1F5A0A8C-F9DD-440E-A5CB-9066722F40D0}"/>
-              </a:ext>
-            </a:extLst>
-          </p:cNvPr>
-          <p:cNvSpPr>
-            <a:spLocks xmlns:a="http://schemas.openxmlformats.org/drawingml/2006/main" noGrp="1"/>
-          </p:cNvSpPr>
-          <p:nvPr/>
-        </p:nvSpPr>
-        <p:spPr>
-          <a:xfrm xmlns:a="http://schemas.openxmlformats.org/drawingml/2006/main">
-            <a:off x="6705600" y="3190875"/>
-            <a:ext cx="57150" cy="57150"/>
-          </a:xfrm>
-          <a:prstGeom xmlns:a="http://schemas.openxmlformats.org/drawingml/2006/main" prst="rect">
-            <a:avLst/>
-          </a:prstGeom>
-          <a:solidFill xmlns:a="http://schemas.openxmlformats.org/drawingml/2006/main">
-            <a:srgbClr val="1D6072"/>
-          </a:solidFill>
-          <a:ln xmlns:a="http://schemas.openxmlformats.org/drawingml/2006/main" w="0">
-            <a:solidFill>
-              <a:srgbClr val="000000">
-                <a:alpha val="0"/>
-              </a:srgbClr>
-            </a:solidFill>
-            <a:prstDash val="solid"/>
-          </a:ln>
-        </p:spPr>
-      </p:sp>
-      <p:sp>
-        <p:nvSpPr>
-          <p:cNvPr id="23" name="">
-            <a:extLst xmlns:a="http://schemas.openxmlformats.org/drawingml/2006/main">
-              <a:ext uri="{FF2B5EF4-FFF2-40B4-BE49-F238E27FC236}">
-                <a16:creationId xmlns:a16="http://schemas.microsoft.com/office/drawing/2014/main" id="{2D344702-C9FB-4D74-B28B-C79C77AFBCBE}"/>
-              </a:ext>
-            </a:extLst>
-          </p:cNvPr>
-          <p:cNvSpPr>
-            <a:spLocks xmlns:a="http://schemas.openxmlformats.org/drawingml/2006/main" noGrp="1"/>
-          </p:cNvSpPr>
-          <p:nvPr/>
-        </p:nvSpPr>
-        <p:spPr>
-          <a:xfrm xmlns:a="http://schemas.openxmlformats.org/drawingml/2006/main">
-            <a:off x="6877050" y="3124200"/>
-            <a:ext cx="4210050" cy="438150"/>
-          </a:xfrm>
-          <a:prstGeom xmlns:a="http://schemas.openxmlformats.org/drawingml/2006/main" prst="rect">
-            <a:avLst/>
-          </a:prstGeom>
-          <a:solidFill xmlns:a="http://schemas.openxmlformats.org/drawingml/2006/main">
-            <a:srgbClr val="000000">
-              <a:alpha val="0"/>
-            </a:srgbClr>
-          </a:solidFill>
-          <a:ln xmlns:a="http://schemas.openxmlformats.org/drawingml/2006/main" w="0">
-            <a:solidFill>
-              <a:srgbClr val="000000">
-                <a:alpha val="0"/>
-              </a:srgbClr>
-            </a:solidFill>
-            <a:prstDash val="solid"/>
-          </a:ln>
-        </p:spPr>
-        <p:txBody>
-          <a:bodyPr xmlns:a="http://schemas.openxmlformats.org/drawingml/2006/main" lIns="0" tIns="0" rIns="0" bIns="0" anchor="t"/>
-          <a:lstStyle xmlns:a="http://schemas.openxmlformats.org/drawingml/2006/main"/>
-          <a:p xmlns:a="http://schemas.openxmlformats.org/drawingml/2006/main">
-            <a:pPr algn="l">
-              <a:defRPr sz="1125" b="0">
-                <a:solidFill>
-                  <a:srgbClr val="172026"/>
-                </a:solidFill>
-                <a:latin typeface="Aptos"/>
-                <a:ea typeface="Aptos"/>
-                <a:cs typeface="Aptos"/>
-              </a:defRPr>
-            </a:pPr>
-            <a:r>
-              <a:rPr sz="1125" b="0">
-                <a:solidFill>
-                  <a:srgbClr val="172026"/>
-                </a:solidFill>
-                <a:latin typeface="Aptos"/>
-                <a:ea typeface="Aptos"/>
-                <a:cs typeface="Aptos"/>
-              </a:rPr>
-              <a:t>States real decision risk, not generic persona pain</a:t>
-            </a:r>
-          </a:p>
-        </p:txBody>
-      </p:sp>
-      <p:sp>
-        <p:nvSpPr>
-          <p:cNvPr id="24" name="">
-            <a:extLst xmlns:a="http://schemas.openxmlformats.org/drawingml/2006/main">
-              <a:ext uri="{FF2B5EF4-FFF2-40B4-BE49-F238E27FC236}">
-                <a16:creationId xmlns:a16="http://schemas.microsoft.com/office/drawing/2014/main" id="{3F841B05-8844-46BF-853E-D73A0ADA2F81}"/>
-              </a:ext>
-            </a:extLst>
-          </p:cNvPr>
-          <p:cNvSpPr>
-            <a:spLocks xmlns:a="http://schemas.openxmlformats.org/drawingml/2006/main" noGrp="1"/>
-          </p:cNvSpPr>
-          <p:nvPr/>
-        </p:nvSpPr>
-        <p:spPr>
-          <a:xfrm xmlns:a="http://schemas.openxmlformats.org/drawingml/2006/main">
-            <a:off x="6705600" y="3667125"/>
-            <a:ext cx="57150" cy="57150"/>
-          </a:xfrm>
-          <a:prstGeom xmlns:a="http://schemas.openxmlformats.org/drawingml/2006/main" prst="rect">
-            <a:avLst/>
-          </a:prstGeom>
-          <a:solidFill xmlns:a="http://schemas.openxmlformats.org/drawingml/2006/main">
-            <a:srgbClr val="1D6072"/>
-          </a:solidFill>
-          <a:ln xmlns:a="http://schemas.openxmlformats.org/drawingml/2006/main" w="0">
-            <a:solidFill>
-              <a:srgbClr val="000000">
-                <a:alpha val="0"/>
-              </a:srgbClr>
-            </a:solidFill>
-            <a:prstDash val="solid"/>
-          </a:ln>
-        </p:spPr>
-      </p:sp>
-      <p:sp>
-        <p:nvSpPr>
-          <p:cNvPr id="25" name="">
-            <a:extLst xmlns:a="http://schemas.openxmlformats.org/drawingml/2006/main">
-              <a:ext uri="{FF2B5EF4-FFF2-40B4-BE49-F238E27FC236}">
-                <a16:creationId xmlns:a16="http://schemas.microsoft.com/office/drawing/2014/main" id="{D0E2B931-6C82-4576-94EE-001EEFE130CC}"/>
-              </a:ext>
-            </a:extLst>
-          </p:cNvPr>
-          <p:cNvSpPr>
-            <a:spLocks xmlns:a="http://schemas.openxmlformats.org/drawingml/2006/main" noGrp="1"/>
-          </p:cNvSpPr>
-          <p:nvPr/>
-        </p:nvSpPr>
-        <p:spPr>
-          <a:xfrm xmlns:a="http://schemas.openxmlformats.org/drawingml/2006/main">
-            <a:off x="6877050" y="3600450"/>
-            <a:ext cx="4210050" cy="438150"/>
-          </a:xfrm>
-          <a:prstGeom xmlns:a="http://schemas.openxmlformats.org/drawingml/2006/main" prst="rect">
-            <a:avLst/>
-          </a:prstGeom>
-          <a:solidFill xmlns:a="http://schemas.openxmlformats.org/drawingml/2006/main">
-            <a:srgbClr val="000000">
-              <a:alpha val="0"/>
-            </a:srgbClr>
-          </a:solidFill>
-          <a:ln xmlns:a="http://schemas.openxmlformats.org/drawingml/2006/main" w="0">
-            <a:solidFill>
-              <a:srgbClr val="000000">
-                <a:alpha val="0"/>
-              </a:srgbClr>
-            </a:solidFill>
-            <a:prstDash val="solid"/>
-          </a:ln>
-        </p:spPr>
-        <p:txBody>
-          <a:bodyPr xmlns:a="http://schemas.openxmlformats.org/drawingml/2006/main" lIns="0" tIns="0" rIns="0" bIns="0" anchor="t"/>
-          <a:lstStyle xmlns:a="http://schemas.openxmlformats.org/drawingml/2006/main"/>
-          <a:p xmlns:a="http://schemas.openxmlformats.org/drawingml/2006/main">
-            <a:pPr algn="l">
-              <a:defRPr sz="1125" b="0">
-                <a:solidFill>
-                  <a:srgbClr val="172026"/>
-                </a:solidFill>
-                <a:latin typeface="Aptos"/>
-                <a:ea typeface="Aptos"/>
-                <a:cs typeface="Aptos"/>
-              </a:defRPr>
-            </a:pPr>
-            <a:r>
-              <a:rPr sz="1125" b="0">
-                <a:solidFill>
-                  <a:srgbClr val="172026"/>
-                </a:solidFill>
-                <a:latin typeface="Aptos"/>
-                <a:ea typeface="Aptos"/>
-                <a:cs typeface="Aptos"/>
-              </a:rPr>
-              <a:t>Names specific proof or evidence</a:t>
-            </a:r>
-          </a:p>
-        </p:txBody>
-      </p:sp>
-      <p:sp>
-        <p:nvSpPr>
-          <p:cNvPr id="26" name="">
-            <a:extLst xmlns:a="http://schemas.openxmlformats.org/drawingml/2006/main">
-              <a:ext uri="{FF2B5EF4-FFF2-40B4-BE49-F238E27FC236}">
-                <a16:creationId xmlns:a16="http://schemas.microsoft.com/office/drawing/2014/main" id="{3DDA2151-97F8-4766-A9C3-F47C5DF335ED}"/>
-              </a:ext>
-            </a:extLst>
-          </p:cNvPr>
-          <p:cNvSpPr>
-            <a:spLocks xmlns:a="http://schemas.openxmlformats.org/drawingml/2006/main" noGrp="1"/>
-          </p:cNvSpPr>
-          <p:nvPr/>
-        </p:nvSpPr>
-        <p:spPr>
-          <a:xfrm xmlns:a="http://schemas.openxmlformats.org/drawingml/2006/main">
-            <a:off x="6705600" y="4143375"/>
-            <a:ext cx="57150" cy="57150"/>
-          </a:xfrm>
-          <a:prstGeom xmlns:a="http://schemas.openxmlformats.org/drawingml/2006/main" prst="rect">
-            <a:avLst/>
-          </a:prstGeom>
-          <a:solidFill xmlns:a="http://schemas.openxmlformats.org/drawingml/2006/main">
-            <a:srgbClr val="1D6072"/>
-          </a:solidFill>
-          <a:ln xmlns:a="http://schemas.openxmlformats.org/drawingml/2006/main" w="0">
-            <a:solidFill>
-              <a:srgbClr val="000000">
-                <a:alpha val="0"/>
-              </a:srgbClr>
-            </a:solidFill>
-            <a:prstDash val="solid"/>
-          </a:ln>
-        </p:spPr>
-      </p:sp>
-      <p:sp>
-        <p:nvSpPr>
-          <p:cNvPr id="27" name="">
-            <a:extLst xmlns:a="http://schemas.openxmlformats.org/drawingml/2006/main">
-              <a:ext uri="{FF2B5EF4-FFF2-40B4-BE49-F238E27FC236}">
-                <a16:creationId xmlns:a16="http://schemas.microsoft.com/office/drawing/2014/main" id="{3A1227F9-7031-40AC-AE4B-AD228412E1F9}"/>
-              </a:ext>
-            </a:extLst>
-          </p:cNvPr>
-          <p:cNvSpPr>
-            <a:spLocks xmlns:a="http://schemas.openxmlformats.org/drawingml/2006/main" noGrp="1"/>
-          </p:cNvSpPr>
-          <p:nvPr/>
-        </p:nvSpPr>
-        <p:spPr>
-          <a:xfrm xmlns:a="http://schemas.openxmlformats.org/drawingml/2006/main">
-            <a:off x="6877050" y="4076700"/>
-            <a:ext cx="4210050" cy="438150"/>
-          </a:xfrm>
-          <a:prstGeom xmlns:a="http://schemas.openxmlformats.org/drawingml/2006/main" prst="rect">
-            <a:avLst/>
-          </a:prstGeom>
-          <a:solidFill xmlns:a="http://schemas.openxmlformats.org/drawingml/2006/main">
-            <a:srgbClr val="000000">
-              <a:alpha val="0"/>
-            </a:srgbClr>
-          </a:solidFill>
-          <a:ln xmlns:a="http://schemas.openxmlformats.org/drawingml/2006/main" w="0">
-            <a:solidFill>
-              <a:srgbClr val="000000">
-                <a:alpha val="0"/>
-              </a:srgbClr>
-            </a:solidFill>
-            <a:prstDash val="solid"/>
-          </a:ln>
-        </p:spPr>
-        <p:txBody>
-          <a:bodyPr xmlns:a="http://schemas.openxmlformats.org/drawingml/2006/main" lIns="0" tIns="0" rIns="0" bIns="0" anchor="t"/>
-          <a:lstStyle xmlns:a="http://schemas.openxmlformats.org/drawingml/2006/main"/>
-          <a:p xmlns:a="http://schemas.openxmlformats.org/drawingml/2006/main">
-            <a:pPr algn="l">
-              <a:defRPr sz="1125" b="0">
-                <a:solidFill>
-                  <a:srgbClr val="172026"/>
-                </a:solidFill>
-                <a:latin typeface="Aptos"/>
-                <a:ea typeface="Aptos"/>
-                <a:cs typeface="Aptos"/>
-              </a:defRPr>
-            </a:pPr>
-            <a:r>
-              <a:rPr sz="1125" b="0">
-                <a:solidFill>
-                  <a:srgbClr val="172026"/>
-                </a:solidFill>
-                <a:latin typeface="Aptos"/>
-                <a:ea typeface="Aptos"/>
-                <a:cs typeface="Aptos"/>
-              </a:rPr>
-              <a:t>Separates fact, assumption, and unknown</a:t>
-            </a:r>
-          </a:p>
-        </p:txBody>
-      </p:sp>
-      <p:sp>
-        <p:nvSpPr>
-          <p:cNvPr id="28" name="">
-            <a:extLst xmlns:a="http://schemas.openxmlformats.org/drawingml/2006/main">
-              <a:ext uri="{FF2B5EF4-FFF2-40B4-BE49-F238E27FC236}">
-                <a16:creationId xmlns:a16="http://schemas.microsoft.com/office/drawing/2014/main" id="{3C306525-862A-4A29-A674-4C215B98204F}"/>
-              </a:ext>
-            </a:extLst>
-          </p:cNvPr>
-          <p:cNvSpPr>
-            <a:spLocks xmlns:a="http://schemas.openxmlformats.org/drawingml/2006/main" noGrp="1"/>
-          </p:cNvSpPr>
-          <p:nvPr/>
-        </p:nvSpPr>
-        <p:spPr>
-          <a:xfrm xmlns:a="http://schemas.openxmlformats.org/drawingml/2006/main">
-            <a:off x="514350" y="6438900"/>
-            <a:ext cx="10915650" cy="9525"/>
-          </a:xfrm>
-          <a:prstGeom xmlns:a="http://schemas.openxmlformats.org/drawingml/2006/main" prst="rect">
-            <a:avLst/>
-          </a:prstGeom>
-          <a:solidFill xmlns:a="http://schemas.openxmlformats.org/drawingml/2006/main">
-            <a:srgbClr val="D9DDD6"/>
-          </a:solidFill>
-          <a:ln xmlns:a="http://schemas.openxmlformats.org/drawingml/2006/main" w="0">
-            <a:solidFill>
-              <a:srgbClr val="000000">
-                <a:alpha val="0"/>
-              </a:srgbClr>
-            </a:solidFill>
-            <a:prstDash val="solid"/>
-          </a:ln>
-        </p:spPr>
-      </p:sp>
-      <p:sp>
-        <p:nvSpPr>
-          <p:cNvPr id="29" name="">
-            <a:extLst xmlns:a="http://schemas.openxmlformats.org/drawingml/2006/main">
-              <a:ext uri="{FF2B5EF4-FFF2-40B4-BE49-F238E27FC236}">
-                <a16:creationId xmlns:a16="http://schemas.microsoft.com/office/drawing/2014/main" id="{B20D30DA-47BF-4EAD-9798-4FB2619FF460}"/>
-              </a:ext>
-            </a:extLst>
-          </p:cNvPr>
-          <p:cNvSpPr>
-            <a:spLocks xmlns:a="http://schemas.openxmlformats.org/drawingml/2006/main" noGrp="1"/>
-          </p:cNvSpPr>
-          <p:nvPr/>
-        </p:nvSpPr>
-        <p:spPr>
-          <a:xfrm xmlns:a="http://schemas.openxmlformats.org/drawingml/2006/main">
-            <a:off x="514350" y="6553200"/>
-            <a:ext cx="5905500" cy="171450"/>
-          </a:xfrm>
-          <a:prstGeom xmlns:a="http://schemas.openxmlformats.org/drawingml/2006/main" prst="rect">
-            <a:avLst/>
-          </a:prstGeom>
-          <a:solidFill xmlns:a="http://schemas.openxmlformats.org/drawingml/2006/main">
-            <a:srgbClr val="000000">
-              <a:alpha val="0"/>
-            </a:srgbClr>
-          </a:solidFill>
-          <a:ln xmlns:a="http://schemas.openxmlformats.org/drawingml/2006/main" w="0">
-            <a:solidFill>
-              <a:srgbClr val="000000">
-                <a:alpha val="0"/>
-              </a:srgbClr>
-            </a:solidFill>
-            <a:prstDash val="solid"/>
-          </a:ln>
-        </p:spPr>
-        <p:txBody>
-          <a:bodyPr xmlns:a="http://schemas.openxmlformats.org/drawingml/2006/main" lIns="0" tIns="0" rIns="0" bIns="0" anchor="t"/>
-          <a:lstStyle xmlns:a="http://schemas.openxmlformats.org/drawingml/2006/main"/>
-          <a:p xmlns:a="http://schemas.openxmlformats.org/drawingml/2006/main">
-            <a:pPr algn="l">
-              <a:defRPr sz="675" b="0">
-                <a:solidFill>
-                  <a:srgbClr val="59646A"/>
-                </a:solidFill>
-                <a:latin typeface="Aptos"/>
-                <a:ea typeface="Aptos"/>
-                <a:cs typeface="Aptos"/>
-              </a:defRPr>
-            </a:pPr>
-            <a:r>
-              <a:rPr sz="675" b="0">
-                <a:solidFill>
-                  <a:srgbClr val="59646A"/>
-                </a:solidFill>
-                <a:latin typeface="Aptos"/>
-                <a:ea typeface="Aptos"/>
-                <a:cs typeface="Aptos"/>
-              </a:rPr>
-              <a:t>Lesson 02 - Industrial Buyer Reality</a:t>
-            </a:r>
-          </a:p>
-        </p:txBody>
-      </p:sp>
-      <p:sp>
-        <p:nvSpPr>
-          <p:cNvPr id="30" name="">
-            <a:extLst xmlns:a="http://schemas.openxmlformats.org/drawingml/2006/main">
-              <a:ext uri="{FF2B5EF4-FFF2-40B4-BE49-F238E27FC236}">
-                <a16:creationId xmlns:a16="http://schemas.microsoft.com/office/drawing/2014/main" id="{42C7C010-4814-47AE-A9DD-8536AFED749D}"/>
-              </a:ext>
-            </a:extLst>
-          </p:cNvPr>
-          <p:cNvSpPr>
-            <a:spLocks xmlns:a="http://schemas.openxmlformats.org/drawingml/2006/main" noGrp="1"/>
-          </p:cNvSpPr>
-          <p:nvPr/>
-        </p:nvSpPr>
-        <p:spPr>
-          <a:xfrm xmlns:a="http://schemas.openxmlformats.org/drawingml/2006/main">
-            <a:off x="5334000" y="6553200"/>
-            <a:ext cx="4095750" cy="171450"/>
-          </a:xfrm>
-          <a:prstGeom xmlns:a="http://schemas.openxmlformats.org/drawingml/2006/main" prst="rect">
-            <a:avLst/>
-          </a:prstGeom>
-          <a:solidFill xmlns:a="http://schemas.openxmlformats.org/drawingml/2006/main">
-            <a:srgbClr val="000000">
-              <a:alpha val="0"/>
-            </a:srgbClr>
-          </a:solidFill>
-          <a:ln xmlns:a="http://schemas.openxmlformats.org/drawingml/2006/main" w="0">
-            <a:solidFill>
-              <a:srgbClr val="000000">
-                <a:alpha val="0"/>
-              </a:srgbClr>
-            </a:solidFill>
-            <a:prstDash val="solid"/>
-          </a:ln>
-        </p:spPr>
-        <p:txBody>
-          <a:bodyPr xmlns:a="http://schemas.openxmlformats.org/drawingml/2006/main" lIns="0" tIns="0" rIns="0" bIns="0" anchor="t"/>
-          <a:lstStyle xmlns:a="http://schemas.openxmlformats.org/drawingml/2006/main"/>
-          <a:p xmlns:a="http://schemas.openxmlformats.org/drawingml/2006/main">
-            <a:pPr algn="r">
-              <a:defRPr sz="600" b="0">
-                <a:solidFill>
-                  <a:srgbClr val="59646A"/>
-                </a:solidFill>
-                <a:latin typeface="Aptos"/>
-                <a:ea typeface="Aptos"/>
-                <a:cs typeface="Aptos"/>
-              </a:defRPr>
-            </a:pPr>
-            <a:r>
-              <a:rPr sz="600" b="0">
-                <a:solidFill>
-                  <a:srgbClr val="59646A"/>
-                </a:solidFill>
-                <a:latin typeface="Aptos"/>
-                <a:ea typeface="Aptos"/>
-                <a:cs typeface="Aptos"/>
-              </a:rPr>
-              <a:t>Source: modules/module-01-industrial-demand-generation/lessons/02-industrial-buyer-reality.md @ 9e28222</a:t>
-            </a:r>
-          </a:p>
-        </p:txBody>
-      </p:sp>
-      <p:sp>
-        <p:nvSpPr>
-          <p:cNvPr id="31" name="">
-            <a:extLst xmlns:a="http://schemas.openxmlformats.org/drawingml/2006/main">
-              <a:ext uri="{FF2B5EF4-FFF2-40B4-BE49-F238E27FC236}">
-                <a16:creationId xmlns:a16="http://schemas.microsoft.com/office/drawing/2014/main" id="{466EFCA8-63F8-4ED6-9EC0-F8C5B6E7F7FE}"/>
-              </a:ext>
-            </a:extLst>
-          </p:cNvPr>
-          <p:cNvSpPr>
-            <a:spLocks xmlns:a="http://schemas.openxmlformats.org/drawingml/2006/main" noGrp="1"/>
-          </p:cNvSpPr>
-          <p:nvPr/>
-        </p:nvSpPr>
-        <p:spPr>
-          <a:xfrm xmlns:a="http://schemas.openxmlformats.org/drawingml/2006/main">
-            <a:off x="10668000" y="6553200"/>
-            <a:ext cx="762000" cy="171450"/>
-          </a:xfrm>
-          <a:prstGeom xmlns:a="http://schemas.openxmlformats.org/drawingml/2006/main" prst="rect">
-            <a:avLst/>
-          </a:prstGeom>
-          <a:solidFill xmlns:a="http://schemas.openxmlformats.org/drawingml/2006/main">
-            <a:srgbClr val="000000">
-              <a:alpha val="0"/>
-            </a:srgbClr>
-          </a:solidFill>
-          <a:ln xmlns:a="http://schemas.openxmlformats.org/drawingml/2006/main" w="0">
-            <a:solidFill>
-              <a:srgbClr val="000000">
-                <a:alpha val="0"/>
-              </a:srgbClr>
-            </a:solidFill>
-            <a:prstDash val="solid"/>
-          </a:ln>
-        </p:spPr>
-        <p:txBody>
-          <a:bodyPr xmlns:a="http://schemas.openxmlformats.org/drawingml/2006/main" lIns="0" tIns="0" rIns="0" bIns="0" anchor="t"/>
-          <a:lstStyle xmlns:a="http://schemas.openxmlformats.org/drawingml/2006/main"/>
-          <a:p xmlns:a="http://schemas.openxmlformats.org/drawingml/2006/main">
-            <a:pPr algn="r">
-              <a:defRPr sz="675" b="0">
-                <a:solidFill>
-                  <a:srgbClr val="59646A"/>
-                </a:solidFill>
-                <a:latin typeface="Aptos"/>
-                <a:ea typeface="Aptos"/>
-                <a:cs typeface="Aptos"/>
-              </a:defRPr>
-            </a:pPr>
-            <a:r>
-              <a:rPr sz="675" b="0">
-                <a:solidFill>
-                  <a:srgbClr val="59646A"/>
-                </a:solidFill>
-                <a:latin typeface="Aptos"/>
-                <a:ea typeface="Aptos"/>
-                <a:cs typeface="Aptos"/>
-              </a:rPr>
-              <a:t>10/15</a:t>
-            </a:r>
-          </a:p>
-        </p:txBody>
-      </p:sp>
-      <p:sp>
-        <p:nvSpPr>
-          <p:cNvPr id="32" name="">
-            <a:extLst xmlns:a="http://schemas.openxmlformats.org/drawingml/2006/main">
-              <a:ext uri="{FF2B5EF4-FFF2-40B4-BE49-F238E27FC236}">
-                <a16:creationId xmlns:a16="http://schemas.microsoft.com/office/drawing/2014/main" id="{73946269-A397-47B9-A6E5-34BDF2F7246D}"/>
-              </a:ext>
-            </a:extLst>
-          </p:cNvPr>
-          <p:cNvSpPr>
-            <a:spLocks xmlns:a="http://schemas.openxmlformats.org/drawingml/2006/main" noGrp="1"/>
-          </p:cNvSpPr>
-          <p:nvPr/>
-        </p:nvSpPr>
-        <p:spPr>
-          <a:xfrm xmlns:a="http://schemas.openxmlformats.org/drawingml/2006/main">
-            <a:off x="0" y="0"/>
-            <a:ext cx="12192000" cy="1809750"/>
-          </a:xfrm>
-          <a:prstGeom xmlns:a="http://schemas.openxmlformats.org/drawingml/2006/main" prst="rect">
-            <a:avLst/>
-          </a:prstGeom>
-          <a:solidFill xmlns:a="http://schemas.openxmlformats.org/drawingml/2006/main">
-            <a:srgbClr val="F5F6F2"/>
-          </a:solidFill>
-          <a:ln xmlns:a="http://schemas.openxmlformats.org/drawingml/2006/main" w="0">
-            <a:solidFill>
-              <a:srgbClr val="000000">
-                <a:alpha val="0"/>
-              </a:srgbClr>
-            </a:solidFill>
-            <a:prstDash val="solid"/>
-          </a:ln>
-        </p:spPr>
-      </p:sp>
-      <p:sp>
-        <p:nvSpPr>
-          <p:cNvPr id="33" name="">
-            <a:extLst xmlns:a="http://schemas.openxmlformats.org/drawingml/2006/main">
-              <a:ext uri="{FF2B5EF4-FFF2-40B4-BE49-F238E27FC236}">
-                <a16:creationId xmlns:a16="http://schemas.microsoft.com/office/drawing/2014/main" id="{62091A66-4DD4-4623-8659-74FE6C322FEC}"/>
-              </a:ext>
-            </a:extLst>
-          </p:cNvPr>
-          <p:cNvSpPr>
-            <a:spLocks xmlns:a="http://schemas.openxmlformats.org/drawingml/2006/main" noGrp="1"/>
-          </p:cNvSpPr>
-          <p:nvPr/>
-        </p:nvSpPr>
-        <p:spPr>
-          <a:xfrm xmlns:a="http://schemas.openxmlformats.org/drawingml/2006/main">
-            <a:off x="0" y="0"/>
-            <a:ext cx="171450" cy="1809750"/>
-          </a:xfrm>
-          <a:prstGeom xmlns:a="http://schemas.openxmlformats.org/drawingml/2006/main" prst="rect">
-            <a:avLst/>
-          </a:prstGeom>
-          <a:solidFill xmlns:a="http://schemas.openxmlformats.org/drawingml/2006/main">
-            <a:srgbClr val="12232B"/>
-          </a:solidFill>
-          <a:ln xmlns:a="http://schemas.openxmlformats.org/drawingml/2006/main" w="0">
-            <a:solidFill>
-              <a:srgbClr val="000000">
-                <a:alpha val="0"/>
-              </a:srgbClr>
-            </a:solidFill>
-            <a:prstDash val="solid"/>
-          </a:ln>
-        </p:spPr>
-      </p:sp>
-      <p:sp>
-        <p:nvSpPr>
-          <p:cNvPr id="34" name="">
-            <a:extLst xmlns:a="http://schemas.openxmlformats.org/drawingml/2006/main">
-              <a:ext uri="{FF2B5EF4-FFF2-40B4-BE49-F238E27FC236}">
-                <a16:creationId xmlns:a16="http://schemas.microsoft.com/office/drawing/2014/main" id="{CC5FD0FB-75C7-4D91-9982-59351964B3F5}"/>
-              </a:ext>
-            </a:extLst>
-          </p:cNvPr>
-          <p:cNvSpPr>
-            <a:spLocks xmlns:a="http://schemas.openxmlformats.org/drawingml/2006/main" noGrp="1"/>
-          </p:cNvSpPr>
-          <p:nvPr/>
-        </p:nvSpPr>
-        <p:spPr>
-          <a:xfrm xmlns:a="http://schemas.openxmlformats.org/drawingml/2006/main">
-            <a:off x="171450" y="0"/>
-            <a:ext cx="57150" cy="1809750"/>
-          </a:xfrm>
-          <a:prstGeom xmlns:a="http://schemas.openxmlformats.org/drawingml/2006/main" prst="rect">
-            <a:avLst/>
-          </a:prstGeom>
-          <a:solidFill xmlns:a="http://schemas.openxmlformats.org/drawingml/2006/main">
-            <a:srgbClr val="A85D2A"/>
-          </a:solidFill>
-          <a:ln xmlns:a="http://schemas.openxmlformats.org/drawingml/2006/main" w="0">
-            <a:solidFill>
-              <a:srgbClr val="000000">
-                <a:alpha val="0"/>
-              </a:srgbClr>
-            </a:solidFill>
-            <a:prstDash val="solid"/>
-          </a:ln>
-        </p:spPr>
-      </p:sp>
-      <p:sp>
-        <p:nvSpPr>
-          <p:cNvPr id="35" name="kicker-02-marker">
-            <a:extLst xmlns:a="http://schemas.openxmlformats.org/drawingml/2006/main">
-              <a:ext uri="{FF2B5EF4-FFF2-40B4-BE49-F238E27FC236}">
-                <a16:creationId xmlns:a16="http://schemas.microsoft.com/office/drawing/2014/main" id="{58DB5E2B-B0BC-4768-8405-8B8FD1493CBE}"/>
-              </a:ext>
-            </a:extLst>
-          </p:cNvPr>
-          <p:cNvSpPr>
-            <a:spLocks xmlns:a="http://schemas.openxmlformats.org/drawingml/2006/main" noGrp="1"/>
-          </p:cNvSpPr>
-          <p:nvPr/>
-        </p:nvSpPr>
-        <p:spPr>
-          <a:xfrm xmlns:a="http://schemas.openxmlformats.org/drawingml/2006/main">
-            <a:off x="514350" y="390525"/>
-            <a:ext cx="76200" cy="76200"/>
-          </a:xfrm>
-          <a:prstGeom xmlns:a="http://schemas.openxmlformats.org/drawingml/2006/main" prst="rect">
-            <a:avLst/>
-          </a:prstGeom>
-          <a:solidFill xmlns:a="http://schemas.openxmlformats.org/drawingml/2006/main">
-            <a:srgbClr val="A85D2A"/>
-          </a:solidFill>
-          <a:ln xmlns:a="http://schemas.openxmlformats.org/drawingml/2006/main" w="0">
-            <a:solidFill>
-              <a:srgbClr val="000000">
-                <a:alpha val="0"/>
-              </a:srgbClr>
-            </a:solidFill>
-            <a:prstDash val="solid"/>
-          </a:ln>
-        </p:spPr>
-      </p:sp>
-      <p:sp>
-        <p:nvSpPr>
-          <p:cNvPr id="36" name="kicker-02-label">
-            <a:extLst xmlns:a="http://schemas.openxmlformats.org/drawingml/2006/main">
-              <a:ext uri="{FF2B5EF4-FFF2-40B4-BE49-F238E27FC236}">
-                <a16:creationId xmlns:a16="http://schemas.microsoft.com/office/drawing/2014/main" id="{40C5C5DF-E4E9-4B6F-A157-BDE3E3E1E469}"/>
-              </a:ext>
-            </a:extLst>
-          </p:cNvPr>
-          <p:cNvSpPr>
-            <a:spLocks xmlns:a="http://schemas.openxmlformats.org/drawingml/2006/main" noGrp="1"/>
-          </p:cNvSpPr>
-          <p:nvPr/>
-        </p:nvSpPr>
-        <p:spPr>
-          <a:xfrm xmlns:a="http://schemas.openxmlformats.org/drawingml/2006/main">
-            <a:off x="685800" y="323850"/>
-            <a:ext cx="7524750" cy="228600"/>
-          </a:xfrm>
-          <a:prstGeom xmlns:a="http://schemas.openxmlformats.org/drawingml/2006/main" prst="rect">
-            <a:avLst/>
-          </a:prstGeom>
-          <a:solidFill xmlns:a="http://schemas.openxmlformats.org/drawingml/2006/main">
-            <a:srgbClr val="000000">
-              <a:alpha val="0"/>
-            </a:srgbClr>
-          </a:solidFill>
-          <a:ln xmlns:a="http://schemas.openxmlformats.org/drawingml/2006/main" w="0">
-            <a:solidFill>
-              <a:srgbClr val="000000">
-                <a:alpha val="0"/>
-              </a:srgbClr>
-            </a:solidFill>
-            <a:prstDash val="solid"/>
-          </a:ln>
-        </p:spPr>
-        <p:txBody>
-          <a:bodyPr xmlns:a="http://schemas.openxmlformats.org/drawingml/2006/main" lIns="0" tIns="0" rIns="0" bIns="0" anchor="ctr"/>
-          <a:lstStyle xmlns:a="http://schemas.openxmlformats.org/drawingml/2006/main"/>
-          <a:p xmlns:a="http://schemas.openxmlformats.org/drawingml/2006/main">
-            <a:pPr algn="l">
-              <a:defRPr sz="750" b="1">
-                <a:solidFill>
-                  <a:srgbClr val="59646A"/>
-                </a:solidFill>
-                <a:latin typeface="Aptos"/>
-                <a:ea typeface="Aptos"/>
-                <a:cs typeface="Aptos"/>
-              </a:defRPr>
-            </a:pPr>
-            <a:r>
-              <a:rPr sz="750" b="1">
-                <a:solidFill>
-                  <a:srgbClr val="59646A"/>
-                </a:solidFill>
-                <a:latin typeface="Aptos"/>
-                <a:ea typeface="Aptos"/>
-                <a:cs typeface="Aptos"/>
-              </a:rPr>
-              <a:t>MODULE 1 / LESSON 02 / AI-ASSISTED EXERCISE</a:t>
-            </a:r>
-          </a:p>
-        </p:txBody>
-      </p:sp>
-      <p:sp>
-        <p:nvSpPr>
           <p:cNvPr id="37" name="">
             <a:extLst xmlns:a="http://schemas.openxmlformats.org/drawingml/2006/main">
               <a:ext uri="{FF2B5EF4-FFF2-40B4-BE49-F238E27FC236}">
-                <a16:creationId xmlns:a16="http://schemas.microsoft.com/office/drawing/2014/main" id="{95C28F68-A782-4511-9694-1233B690850B}"/>
+                <a16:creationId xmlns:a16="http://schemas.microsoft.com/office/drawing/2014/main" id="{480053EB-CD7C-447C-91EA-FE179D006E37}"/>
               </a:ext>
             </a:extLst>
           </p:cNvPr>
@@ -4989,7 +4987,7 @@
                 <a:ea typeface="Aptos Display"/>
                 <a:cs typeface="Aptos Display"/>
               </a:rPr>
-              <a:t>Use AI to structure the attempt, then make humans responsible for judgment.</a:t>
+              <a:t>Structure the first draft before the room critiques it.</a:t>
             </a:r>
           </a:p>
         </p:txBody>
@@ -4999,7 +4997,7 @@
           <p:cNvPr id="38" name="">
             <a:extLst xmlns:a="http://schemas.openxmlformats.org/drawingml/2006/main">
               <a:ext uri="{FF2B5EF4-FFF2-40B4-BE49-F238E27FC236}">
-                <a16:creationId xmlns:a16="http://schemas.microsoft.com/office/drawing/2014/main" id="{E1856B6C-F1B1-4CD7-B4A6-5380985E784A}"/>
+                <a16:creationId xmlns:a16="http://schemas.microsoft.com/office/drawing/2014/main" id="{D59F8B80-CD98-4D8B-9709-D627F314E28F}"/>
               </a:ext>
             </a:extLst>
           </p:cNvPr>
@@ -5053,7 +5051,7 @@
                 <a:ea typeface="Aptos"/>
                 <a:cs typeface="Aptos"/>
               </a:rPr>
-              <a:t>The prompt is constrained by source, assumptions, output standard, and human validation.</a:t>
+              <a:t>The brief is constrained by source evidence, assumptions, output standard, and validation.</a:t>
             </a:r>
           </a:p>
         </p:txBody>
@@ -5063,7 +5061,7 @@
           <p:cNvPr id="39" name="">
             <a:extLst xmlns:a="http://schemas.openxmlformats.org/drawingml/2006/main">
               <a:ext uri="{FF2B5EF4-FFF2-40B4-BE49-F238E27FC236}">
-                <a16:creationId xmlns:a16="http://schemas.microsoft.com/office/drawing/2014/main" id="{56AB0116-6F18-41F2-A850-4823ED2394F0}"/>
+                <a16:creationId xmlns:a16="http://schemas.microsoft.com/office/drawing/2014/main" id="{C84C4C6E-72ED-4BAC-BC30-71D53D7C2072}"/>
               </a:ext>
             </a:extLst>
           </p:cNvPr>
@@ -5098,7 +5096,7 @@
           <p:cNvPr id="40" name="">
             <a:extLst xmlns:a="http://schemas.openxmlformats.org/drawingml/2006/main">
               <a:ext uri="{FF2B5EF4-FFF2-40B4-BE49-F238E27FC236}">
-                <a16:creationId xmlns:a16="http://schemas.microsoft.com/office/drawing/2014/main" id="{65115A4E-6F00-4B30-9C96-244BF8667E1E}"/>
+                <a16:creationId xmlns:a16="http://schemas.microsoft.com/office/drawing/2014/main" id="{C5B521C4-7168-4BDF-97F9-4FB3B887159A}"/>
               </a:ext>
             </a:extLst>
           </p:cNvPr>
@@ -5133,7 +5131,7 @@
           <p:cNvPr id="41" name="">
             <a:extLst xmlns:a="http://schemas.openxmlformats.org/drawingml/2006/main">
               <a:ext uri="{FF2B5EF4-FFF2-40B4-BE49-F238E27FC236}">
-                <a16:creationId xmlns:a16="http://schemas.microsoft.com/office/drawing/2014/main" id="{2551ED7E-5D27-44D5-B1D5-35BF0AE919E8}"/>
+                <a16:creationId xmlns:a16="http://schemas.microsoft.com/office/drawing/2014/main" id="{5DB5EADA-E0DE-4AC5-8700-86000AC2FE27}"/>
               </a:ext>
             </a:extLst>
           </p:cNvPr>
@@ -5168,7 +5166,7 @@
           <p:cNvPr id="42" name="">
             <a:extLst xmlns:a="http://schemas.openxmlformats.org/drawingml/2006/main">
               <a:ext uri="{FF2B5EF4-FFF2-40B4-BE49-F238E27FC236}">
-                <a16:creationId xmlns:a16="http://schemas.microsoft.com/office/drawing/2014/main" id="{54A48FD4-6CAD-4DA5-8BF8-85113CC4EB88}"/>
+                <a16:creationId xmlns:a16="http://schemas.microsoft.com/office/drawing/2014/main" id="{FE3C1FC6-53BB-48FA-8FE4-4556571E039C}"/>
               </a:ext>
             </a:extLst>
           </p:cNvPr>
@@ -5203,7 +5201,7 @@
           <p:cNvPr id="43" name="">
             <a:extLst xmlns:a="http://schemas.openxmlformats.org/drawingml/2006/main">
               <a:ext uri="{FF2B5EF4-FFF2-40B4-BE49-F238E27FC236}">
-                <a16:creationId xmlns:a16="http://schemas.microsoft.com/office/drawing/2014/main" id="{7151EC13-72D9-45EE-88C2-08EB71245F35}"/>
+                <a16:creationId xmlns:a16="http://schemas.microsoft.com/office/drawing/2014/main" id="{DAD41949-CC22-4055-9D7E-D1D3779B3C50}"/>
               </a:ext>
             </a:extLst>
           </p:cNvPr>
@@ -5267,7 +5265,7 @@
           <p:cNvPr id="44" name="">
             <a:extLst xmlns:a="http://schemas.openxmlformats.org/drawingml/2006/main">
               <a:ext uri="{FF2B5EF4-FFF2-40B4-BE49-F238E27FC236}">
-                <a16:creationId xmlns:a16="http://schemas.microsoft.com/office/drawing/2014/main" id="{96D7263D-43F1-422F-B05A-79599F837C6D}"/>
+                <a16:creationId xmlns:a16="http://schemas.microsoft.com/office/drawing/2014/main" id="{A744F60D-8616-4EFA-816B-C07682B7A830}"/>
               </a:ext>
             </a:extLst>
           </p:cNvPr>
@@ -5331,7 +5329,7 @@
           <p:cNvPr id="45" name="">
             <a:extLst xmlns:a="http://schemas.openxmlformats.org/drawingml/2006/main">
               <a:ext uri="{FF2B5EF4-FFF2-40B4-BE49-F238E27FC236}">
-                <a16:creationId xmlns:a16="http://schemas.microsoft.com/office/drawing/2014/main" id="{4295F729-CCD7-4CE8-AD28-BDFAD802726B}"/>
+                <a16:creationId xmlns:a16="http://schemas.microsoft.com/office/drawing/2014/main" id="{226C9199-FAA2-43F4-97CF-09B3D2C0D5D3}"/>
               </a:ext>
             </a:extLst>
           </p:cNvPr>
@@ -5393,7 +5391,7 @@
     </p:spTree>
     <p:extLst>
       <p:ext uri="{BB962C8B-B14F-4D97-AF65-F5344CB8AC3E}">
-        <p14:creationId xmlns:p14="http://schemas.microsoft.com/office/powerpoint/2010/main" val="1840293522"/>
+        <p14:creationId xmlns:p14="http://schemas.microsoft.com/office/powerpoint/2010/main" val="1709397295"/>
       </p:ext>
     </p:extLst>
   </p:cSld>
@@ -5417,7 +5415,7 @@
           <p:cNvPr id="1" name="">
             <a:extLst xmlns:a="http://schemas.openxmlformats.org/drawingml/2006/main">
               <a:ext uri="{FF2B5EF4-FFF2-40B4-BE49-F238E27FC236}">
-                <a16:creationId xmlns:a16="http://schemas.microsoft.com/office/drawing/2014/main" id="{DD964826-0200-4FE4-B948-E26130F2F524}"/>
+                <a16:creationId xmlns:a16="http://schemas.microsoft.com/office/drawing/2014/main" id="{C3C26DC1-8CC7-4D69-A148-45766850B88F}"/>
               </a:ext>
             </a:extLst>
           </p:cNvPr>
@@ -5452,7 +5450,7 @@
           <p:cNvPr id="2" name="">
             <a:extLst xmlns:a="http://schemas.openxmlformats.org/drawingml/2006/main">
               <a:ext uri="{FF2B5EF4-FFF2-40B4-BE49-F238E27FC236}">
-                <a16:creationId xmlns:a16="http://schemas.microsoft.com/office/drawing/2014/main" id="{3CD69EC4-8C21-4988-8E4A-7C2A0A1DF51A}"/>
+                <a16:creationId xmlns:a16="http://schemas.microsoft.com/office/drawing/2014/main" id="{4465C462-987B-48C8-88C9-3A044766041A}"/>
               </a:ext>
             </a:extLst>
           </p:cNvPr>
@@ -5487,7 +5485,7 @@
           <p:cNvPr id="3" name="">
             <a:extLst xmlns:a="http://schemas.openxmlformats.org/drawingml/2006/main">
               <a:ext uri="{FF2B5EF4-FFF2-40B4-BE49-F238E27FC236}">
-                <a16:creationId xmlns:a16="http://schemas.microsoft.com/office/drawing/2014/main" id="{5116CA11-4D3C-4B6A-9B67-BAF794BEF773}"/>
+                <a16:creationId xmlns:a16="http://schemas.microsoft.com/office/drawing/2014/main" id="{B4AE5507-E40A-41A1-BBBD-AF66A3D32711}"/>
               </a:ext>
             </a:extLst>
           </p:cNvPr>
@@ -5522,7 +5520,7 @@
           <p:cNvPr id="4" name="kicker-02-marker">
             <a:extLst xmlns:a="http://schemas.openxmlformats.org/drawingml/2006/main">
               <a:ext uri="{FF2B5EF4-FFF2-40B4-BE49-F238E27FC236}">
-                <a16:creationId xmlns:a16="http://schemas.microsoft.com/office/drawing/2014/main" id="{03A5BC1F-3633-4296-9692-5801C26BC30E}"/>
+                <a16:creationId xmlns:a16="http://schemas.microsoft.com/office/drawing/2014/main" id="{DE77CF7B-0688-4987-9037-A8AA6A2CC94D}"/>
               </a:ext>
             </a:extLst>
           </p:cNvPr>
@@ -5557,7 +5555,7 @@
           <p:cNvPr id="5" name="kicker-02-label">
             <a:extLst xmlns:a="http://schemas.openxmlformats.org/drawingml/2006/main">
               <a:ext uri="{FF2B5EF4-FFF2-40B4-BE49-F238E27FC236}">
-                <a16:creationId xmlns:a16="http://schemas.microsoft.com/office/drawing/2014/main" id="{37BB6CD0-7550-492D-88EF-87C5B5096D44}"/>
+                <a16:creationId xmlns:a16="http://schemas.microsoft.com/office/drawing/2014/main" id="{B7C77E01-779F-444D-95E3-F10ABA73F939}"/>
               </a:ext>
             </a:extLst>
           </p:cNvPr>
@@ -5611,7 +5609,7 @@
                 <a:ea typeface="Aptos"/>
                 <a:cs typeface="Aptos"/>
               </a:rPr>
-              <a:t>MODULE 1 / LESSON 02 / HUMAN CORRECTION</a:t>
+              <a:t>MODULE 1 / LESSON 02 / QUALITY CONTROL</a:t>
             </a:r>
           </a:p>
         </p:txBody>
@@ -5621,7 +5619,7 @@
           <p:cNvPr id="6" name="">
             <a:extLst xmlns:a="http://schemas.openxmlformats.org/drawingml/2006/main">
               <a:ext uri="{FF2B5EF4-FFF2-40B4-BE49-F238E27FC236}">
-                <a16:creationId xmlns:a16="http://schemas.microsoft.com/office/drawing/2014/main" id="{2DF353F1-CE71-4F1F-A3F2-2984C06240B7}"/>
+                <a16:creationId xmlns:a16="http://schemas.microsoft.com/office/drawing/2014/main" id="{060A6366-BDF4-4BA8-B7E2-C52AB19AE24F}"/>
               </a:ext>
             </a:extLst>
           </p:cNvPr>
@@ -5675,7 +5673,7 @@
                 <a:ea typeface="Aptos Display"/>
                 <a:cs typeface="Aptos Display"/>
               </a:rPr>
-              <a:t>AI can draft structure. Humans must repair industrial reality.</a:t>
+              <a:t>Reject weak artifacts before they become operating practice.</a:t>
             </a:r>
           </a:p>
         </p:txBody>
@@ -5685,7 +5683,7 @@
           <p:cNvPr id="7" name="">
             <a:extLst xmlns:a="http://schemas.openxmlformats.org/drawingml/2006/main">
               <a:ext uri="{FF2B5EF4-FFF2-40B4-BE49-F238E27FC236}">
-                <a16:creationId xmlns:a16="http://schemas.microsoft.com/office/drawing/2014/main" id="{F7781A87-1BCE-4400-BF2B-65584B397995}"/>
+                <a16:creationId xmlns:a16="http://schemas.microsoft.com/office/drawing/2014/main" id="{98F876DA-C332-4D11-BE65-4D94706559B4}"/>
               </a:ext>
             </a:extLst>
           </p:cNvPr>
@@ -5749,7 +5747,7 @@
           <p:cNvPr id="8" name="">
             <a:extLst xmlns:a="http://schemas.openxmlformats.org/drawingml/2006/main">
               <a:ext uri="{FF2B5EF4-FFF2-40B4-BE49-F238E27FC236}">
-                <a16:creationId xmlns:a16="http://schemas.microsoft.com/office/drawing/2014/main" id="{A79B1356-2D70-4F77-9028-5EA2DD70D04D}"/>
+                <a16:creationId xmlns:a16="http://schemas.microsoft.com/office/drawing/2014/main" id="{6D48394D-508D-426C-AD91-85F43E65FE11}"/>
               </a:ext>
             </a:extLst>
           </p:cNvPr>
@@ -5784,7 +5782,7 @@
           <p:cNvPr id="9" name="">
             <a:extLst xmlns:a="http://schemas.openxmlformats.org/drawingml/2006/main">
               <a:ext uri="{FF2B5EF4-FFF2-40B4-BE49-F238E27FC236}">
-                <a16:creationId xmlns:a16="http://schemas.microsoft.com/office/drawing/2014/main" id="{5A19993C-FD63-47C1-A63A-17A9DB4CC9D1}"/>
+                <a16:creationId xmlns:a16="http://schemas.microsoft.com/office/drawing/2014/main" id="{BA8D625C-7570-4EDE-9C56-EB56B691627B}"/>
               </a:ext>
             </a:extLst>
           </p:cNvPr>
@@ -5848,7 +5846,7 @@
           <p:cNvPr id="10" name="">
             <a:extLst xmlns:a="http://schemas.openxmlformats.org/drawingml/2006/main">
               <a:ext uri="{FF2B5EF4-FFF2-40B4-BE49-F238E27FC236}">
-                <a16:creationId xmlns:a16="http://schemas.microsoft.com/office/drawing/2014/main" id="{59B1543D-9CEE-4CE2-9D1F-1D0AC099E016}"/>
+                <a16:creationId xmlns:a16="http://schemas.microsoft.com/office/drawing/2014/main" id="{A992C4BA-57C6-478F-AF6D-D39897C64BAD}"/>
               </a:ext>
             </a:extLst>
           </p:cNvPr>
@@ -5912,7 +5910,7 @@
           <p:cNvPr id="11" name="">
             <a:extLst xmlns:a="http://schemas.openxmlformats.org/drawingml/2006/main">
               <a:ext uri="{FF2B5EF4-FFF2-40B4-BE49-F238E27FC236}">
-                <a16:creationId xmlns:a16="http://schemas.microsoft.com/office/drawing/2014/main" id="{9FA7744C-3EC1-4FE3-9D56-E9AFA046CD45}"/>
+                <a16:creationId xmlns:a16="http://schemas.microsoft.com/office/drawing/2014/main" id="{F2FAB46B-0CA6-4A7D-B8D8-F11A2B917D1F}"/>
               </a:ext>
             </a:extLst>
           </p:cNvPr>
@@ -5976,7 +5974,7 @@
           <p:cNvPr id="12" name="">
             <a:extLst xmlns:a="http://schemas.openxmlformats.org/drawingml/2006/main">
               <a:ext uri="{FF2B5EF4-FFF2-40B4-BE49-F238E27FC236}">
-                <a16:creationId xmlns:a16="http://schemas.microsoft.com/office/drawing/2014/main" id="{E7561EDD-F9EF-4994-ACD7-064FA3B05395}"/>
+                <a16:creationId xmlns:a16="http://schemas.microsoft.com/office/drawing/2014/main" id="{FDD9EDB9-E406-4C80-8CD7-51D556D7622E}"/>
               </a:ext>
             </a:extLst>
           </p:cNvPr>
@@ -6011,7 +6009,7 @@
           <p:cNvPr id="13" name="">
             <a:extLst xmlns:a="http://schemas.openxmlformats.org/drawingml/2006/main">
               <a:ext uri="{FF2B5EF4-FFF2-40B4-BE49-F238E27FC236}">
-                <a16:creationId xmlns:a16="http://schemas.microsoft.com/office/drawing/2014/main" id="{F01B3E44-1350-4CAB-976F-89220A1A920C}"/>
+                <a16:creationId xmlns:a16="http://schemas.microsoft.com/office/drawing/2014/main" id="{9526BC36-421E-4D12-A8B0-1AB4CC373AA2}"/>
               </a:ext>
             </a:extLst>
           </p:cNvPr>
@@ -6044,7 +6042,7 @@
           <p:cNvPr id="14" name="">
             <a:extLst xmlns:a="http://schemas.openxmlformats.org/drawingml/2006/main">
               <a:ext uri="{FF2B5EF4-FFF2-40B4-BE49-F238E27FC236}">
-                <a16:creationId xmlns:a16="http://schemas.microsoft.com/office/drawing/2014/main" id="{9352FE4E-6ECC-41F0-A4AE-34425C87C00A}"/>
+                <a16:creationId xmlns:a16="http://schemas.microsoft.com/office/drawing/2014/main" id="{9B48C48D-8768-4451-B70F-F1513ABFE698}"/>
               </a:ext>
             </a:extLst>
           </p:cNvPr>
@@ -6079,7 +6077,7 @@
           <p:cNvPr id="15" name="">
             <a:extLst xmlns:a="http://schemas.openxmlformats.org/drawingml/2006/main">
               <a:ext uri="{FF2B5EF4-FFF2-40B4-BE49-F238E27FC236}">
-                <a16:creationId xmlns:a16="http://schemas.microsoft.com/office/drawing/2014/main" id="{44F27AAD-84A6-4D08-8A8B-91F8B998C883}"/>
+                <a16:creationId xmlns:a16="http://schemas.microsoft.com/office/drawing/2014/main" id="{FA474023-A147-4B9E-B810-8B73C38EC8D0}"/>
               </a:ext>
             </a:extLst>
           </p:cNvPr>
@@ -6133,7 +6131,7 @@
                 <a:ea typeface="Aptos"/>
                 <a:cs typeface="Aptos"/>
               </a:rPr>
-              <a:t>REJECT OR REPAIR WHEN AI OUTPUT...</a:t>
+              <a:t>REJECT OR REPAIR WHEN THE ARTIFACT...</a:t>
             </a:r>
           </a:p>
         </p:txBody>
@@ -6143,7 +6141,7 @@
           <p:cNvPr id="16" name="">
             <a:extLst xmlns:a="http://schemas.openxmlformats.org/drawingml/2006/main">
               <a:ext uri="{FF2B5EF4-FFF2-40B4-BE49-F238E27FC236}">
-                <a16:creationId xmlns:a16="http://schemas.microsoft.com/office/drawing/2014/main" id="{C908DF35-C756-4843-B504-1C800DC33124}"/>
+                <a16:creationId xmlns:a16="http://schemas.microsoft.com/office/drawing/2014/main" id="{1D0B218D-5DC7-4D0C-87BD-8940E9CBFFD2}"/>
               </a:ext>
             </a:extLst>
           </p:cNvPr>
@@ -6178,7 +6176,7 @@
           <p:cNvPr id="17" name="">
             <a:extLst xmlns:a="http://schemas.openxmlformats.org/drawingml/2006/main">
               <a:ext uri="{FF2B5EF4-FFF2-40B4-BE49-F238E27FC236}">
-                <a16:creationId xmlns:a16="http://schemas.microsoft.com/office/drawing/2014/main" id="{B51CA098-9212-4037-979E-2102B10A54B9}"/>
+                <a16:creationId xmlns:a16="http://schemas.microsoft.com/office/drawing/2014/main" id="{C20B028D-27BF-4D5A-901F-09A9107879B1}"/>
               </a:ext>
             </a:extLst>
           </p:cNvPr>
@@ -6242,7 +6240,7 @@
           <p:cNvPr id="18" name="">
             <a:extLst xmlns:a="http://schemas.openxmlformats.org/drawingml/2006/main">
               <a:ext uri="{FF2B5EF4-FFF2-40B4-BE49-F238E27FC236}">
-                <a16:creationId xmlns:a16="http://schemas.microsoft.com/office/drawing/2014/main" id="{7EA0DA59-80FD-4A64-B0AE-E5E16DF08190}"/>
+                <a16:creationId xmlns:a16="http://schemas.microsoft.com/office/drawing/2014/main" id="{7A8F2A89-A0EB-46A2-8829-CEB2CE6456CE}"/>
               </a:ext>
             </a:extLst>
           </p:cNvPr>
@@ -6277,7 +6275,7 @@
           <p:cNvPr id="19" name="">
             <a:extLst xmlns:a="http://schemas.openxmlformats.org/drawingml/2006/main">
               <a:ext uri="{FF2B5EF4-FFF2-40B4-BE49-F238E27FC236}">
-                <a16:creationId xmlns:a16="http://schemas.microsoft.com/office/drawing/2014/main" id="{2C56E55F-C38E-48C8-874B-0BBC814ED8FA}"/>
+                <a16:creationId xmlns:a16="http://schemas.microsoft.com/office/drawing/2014/main" id="{B569DE76-FC9B-4B10-8750-9C7CF497ED83}"/>
               </a:ext>
             </a:extLst>
           </p:cNvPr>
@@ -6341,7 +6339,7 @@
           <p:cNvPr id="20" name="">
             <a:extLst xmlns:a="http://schemas.openxmlformats.org/drawingml/2006/main">
               <a:ext uri="{FF2B5EF4-FFF2-40B4-BE49-F238E27FC236}">
-                <a16:creationId xmlns:a16="http://schemas.microsoft.com/office/drawing/2014/main" id="{736140A7-840F-49D6-BAB7-646C9C27A490}"/>
+                <a16:creationId xmlns:a16="http://schemas.microsoft.com/office/drawing/2014/main" id="{574826AC-0BB5-4C32-BA22-CA4707810A59}"/>
               </a:ext>
             </a:extLst>
           </p:cNvPr>
@@ -6376,7 +6374,7 @@
           <p:cNvPr id="21" name="">
             <a:extLst xmlns:a="http://schemas.openxmlformats.org/drawingml/2006/main">
               <a:ext uri="{FF2B5EF4-FFF2-40B4-BE49-F238E27FC236}">
-                <a16:creationId xmlns:a16="http://schemas.microsoft.com/office/drawing/2014/main" id="{F20D0257-3D6B-495F-A2B4-D9BC8EBC0554}"/>
+                <a16:creationId xmlns:a16="http://schemas.microsoft.com/office/drawing/2014/main" id="{6F17AEC9-6986-48FC-A67A-DCEA910C283F}"/>
               </a:ext>
             </a:extLst>
           </p:cNvPr>
@@ -6440,7 +6438,7 @@
           <p:cNvPr id="22" name="">
             <a:extLst xmlns:a="http://schemas.openxmlformats.org/drawingml/2006/main">
               <a:ext uri="{FF2B5EF4-FFF2-40B4-BE49-F238E27FC236}">
-                <a16:creationId xmlns:a16="http://schemas.microsoft.com/office/drawing/2014/main" id="{45DDBBF2-3A56-44A0-A048-8E62E1B85681}"/>
+                <a16:creationId xmlns:a16="http://schemas.microsoft.com/office/drawing/2014/main" id="{F9EF6D69-E303-4D29-BB8E-1990A5502827}"/>
               </a:ext>
             </a:extLst>
           </p:cNvPr>
@@ -6475,7 +6473,7 @@
           <p:cNvPr id="23" name="">
             <a:extLst xmlns:a="http://schemas.openxmlformats.org/drawingml/2006/main">
               <a:ext uri="{FF2B5EF4-FFF2-40B4-BE49-F238E27FC236}">
-                <a16:creationId xmlns:a16="http://schemas.microsoft.com/office/drawing/2014/main" id="{33D83838-3A55-4B98-9F48-0DB610C81B85}"/>
+                <a16:creationId xmlns:a16="http://schemas.microsoft.com/office/drawing/2014/main" id="{6245066A-BEB6-47EA-9C41-92B8B41934A2}"/>
               </a:ext>
             </a:extLst>
           </p:cNvPr>
@@ -6539,7 +6537,7 @@
           <p:cNvPr id="24" name="">
             <a:extLst xmlns:a="http://schemas.openxmlformats.org/drawingml/2006/main">
               <a:ext uri="{FF2B5EF4-FFF2-40B4-BE49-F238E27FC236}">
-                <a16:creationId xmlns:a16="http://schemas.microsoft.com/office/drawing/2014/main" id="{27252C71-A24C-4412-B9FA-0BE2A2CA50F7}"/>
+                <a16:creationId xmlns:a16="http://schemas.microsoft.com/office/drawing/2014/main" id="{7C33A7A3-C964-458D-9A20-BAEDA5706E8E}"/>
               </a:ext>
             </a:extLst>
           </p:cNvPr>
@@ -6574,7 +6572,7 @@
           <p:cNvPr id="25" name="">
             <a:extLst xmlns:a="http://schemas.openxmlformats.org/drawingml/2006/main">
               <a:ext uri="{FF2B5EF4-FFF2-40B4-BE49-F238E27FC236}">
-                <a16:creationId xmlns:a16="http://schemas.microsoft.com/office/drawing/2014/main" id="{3BDC9C9E-9AF3-4A99-8A42-9497CB5CA270}"/>
+                <a16:creationId xmlns:a16="http://schemas.microsoft.com/office/drawing/2014/main" id="{AEF2E017-33CD-4235-B58E-A71BE6B1777C}"/>
               </a:ext>
             </a:extLst>
           </p:cNvPr>
@@ -6638,7 +6636,7 @@
           <p:cNvPr id="26" name="">
             <a:extLst xmlns:a="http://schemas.openxmlformats.org/drawingml/2006/main">
               <a:ext uri="{FF2B5EF4-FFF2-40B4-BE49-F238E27FC236}">
-                <a16:creationId xmlns:a16="http://schemas.microsoft.com/office/drawing/2014/main" id="{11F48E80-2902-4FF9-BD6A-2308274BBD1C}"/>
+                <a16:creationId xmlns:a16="http://schemas.microsoft.com/office/drawing/2014/main" id="{37F5083D-06F1-4EED-8981-D506D83B72A9}"/>
               </a:ext>
             </a:extLst>
           </p:cNvPr>
@@ -6671,7 +6669,7 @@
           <p:cNvPr id="27" name="">
             <a:extLst xmlns:a="http://schemas.openxmlformats.org/drawingml/2006/main">
               <a:ext uri="{FF2B5EF4-FFF2-40B4-BE49-F238E27FC236}">
-                <a16:creationId xmlns:a16="http://schemas.microsoft.com/office/drawing/2014/main" id="{99C3B36F-31F2-45C9-8C94-880195D8BF19}"/>
+                <a16:creationId xmlns:a16="http://schemas.microsoft.com/office/drawing/2014/main" id="{153BCD0B-3A2A-4DAD-AD72-6DC35BD753B4}"/>
               </a:ext>
             </a:extLst>
           </p:cNvPr>
@@ -6706,7 +6704,7 @@
           <p:cNvPr id="28" name="">
             <a:extLst xmlns:a="http://schemas.openxmlformats.org/drawingml/2006/main">
               <a:ext uri="{FF2B5EF4-FFF2-40B4-BE49-F238E27FC236}">
-                <a16:creationId xmlns:a16="http://schemas.microsoft.com/office/drawing/2014/main" id="{F2FEAE0E-8850-42A3-9F5E-04074965F756}"/>
+                <a16:creationId xmlns:a16="http://schemas.microsoft.com/office/drawing/2014/main" id="{0A1C7ED7-DA72-4774-AB72-2BEE3F52879A}"/>
               </a:ext>
             </a:extLst>
           </p:cNvPr>
@@ -6770,7 +6768,7 @@
           <p:cNvPr id="29" name="">
             <a:extLst xmlns:a="http://schemas.openxmlformats.org/drawingml/2006/main">
               <a:ext uri="{FF2B5EF4-FFF2-40B4-BE49-F238E27FC236}">
-                <a16:creationId xmlns:a16="http://schemas.microsoft.com/office/drawing/2014/main" id="{713AF85F-2C9F-4BF4-940D-CC41F748576D}"/>
+                <a16:creationId xmlns:a16="http://schemas.microsoft.com/office/drawing/2014/main" id="{4CA4A2CD-4132-4D47-95ED-8B97EB32400A}"/>
               </a:ext>
             </a:extLst>
           </p:cNvPr>
@@ -6834,7 +6832,7 @@
           <p:cNvPr id="30" name="">
             <a:extLst xmlns:a="http://schemas.openxmlformats.org/drawingml/2006/main">
               <a:ext uri="{FF2B5EF4-FFF2-40B4-BE49-F238E27FC236}">
-                <a16:creationId xmlns:a16="http://schemas.microsoft.com/office/drawing/2014/main" id="{DA230EEC-0A7D-49F1-B2F8-5683EB080151}"/>
+                <a16:creationId xmlns:a16="http://schemas.microsoft.com/office/drawing/2014/main" id="{ADC1DBF7-A498-47B1-AB39-DDD9328AA841}"/>
               </a:ext>
             </a:extLst>
           </p:cNvPr>
@@ -6867,7 +6865,7 @@
           <p:cNvPr id="31" name="">
             <a:extLst xmlns:a="http://schemas.openxmlformats.org/drawingml/2006/main">
               <a:ext uri="{FF2B5EF4-FFF2-40B4-BE49-F238E27FC236}">
-                <a16:creationId xmlns:a16="http://schemas.microsoft.com/office/drawing/2014/main" id="{7F7AC027-6B75-4EF1-A89C-26DFB780C41E}"/>
+                <a16:creationId xmlns:a16="http://schemas.microsoft.com/office/drawing/2014/main" id="{148229D5-7A47-4D1B-AED9-9539148EE3D0}"/>
               </a:ext>
             </a:extLst>
           </p:cNvPr>
@@ -6931,7 +6929,7 @@
           <p:cNvPr id="32" name="">
             <a:extLst xmlns:a="http://schemas.openxmlformats.org/drawingml/2006/main">
               <a:ext uri="{FF2B5EF4-FFF2-40B4-BE49-F238E27FC236}">
-                <a16:creationId xmlns:a16="http://schemas.microsoft.com/office/drawing/2014/main" id="{24ECEF22-89F8-4C65-BCC2-248724294CCE}"/>
+                <a16:creationId xmlns:a16="http://schemas.microsoft.com/office/drawing/2014/main" id="{47036E84-279A-4CCF-8B4D-0DDA59091C0A}"/>
               </a:ext>
             </a:extLst>
           </p:cNvPr>
@@ -6985,7 +6983,7 @@
                 <a:ea typeface="Aptos"/>
                 <a:cs typeface="Aptos"/>
               </a:rPr>
-              <a:t>Ask what the AI is guessing.</a:t>
+              <a:t>Ask what the artifact assumes.</a:t>
             </a:r>
           </a:p>
         </p:txBody>
@@ -6995,7 +6993,7 @@
           <p:cNvPr id="33" name="">
             <a:extLst xmlns:a="http://schemas.openxmlformats.org/drawingml/2006/main">
               <a:ext uri="{FF2B5EF4-FFF2-40B4-BE49-F238E27FC236}">
-                <a16:creationId xmlns:a16="http://schemas.microsoft.com/office/drawing/2014/main" id="{DAFD47BD-C910-42DD-9FB4-8B6EE0289A0C}"/>
+                <a16:creationId xmlns:a16="http://schemas.microsoft.com/office/drawing/2014/main" id="{2F3772C7-B494-4E92-A1D3-88C3F0AB344B}"/>
               </a:ext>
             </a:extLst>
           </p:cNvPr>
@@ -7030,7 +7028,7 @@
           <p:cNvPr id="34" name="">
             <a:extLst xmlns:a="http://schemas.openxmlformats.org/drawingml/2006/main">
               <a:ext uri="{FF2B5EF4-FFF2-40B4-BE49-F238E27FC236}">
-                <a16:creationId xmlns:a16="http://schemas.microsoft.com/office/drawing/2014/main" id="{B7A38DBD-A83F-44E4-8C88-94E616B19F81}"/>
+                <a16:creationId xmlns:a16="http://schemas.microsoft.com/office/drawing/2014/main" id="{C635A711-4C54-4D99-A3A9-BC3B87F5D6F9}"/>
               </a:ext>
             </a:extLst>
           </p:cNvPr>
@@ -7094,7 +7092,7 @@
           <p:cNvPr id="35" name="">
             <a:extLst xmlns:a="http://schemas.openxmlformats.org/drawingml/2006/main">
               <a:ext uri="{FF2B5EF4-FFF2-40B4-BE49-F238E27FC236}">
-                <a16:creationId xmlns:a16="http://schemas.microsoft.com/office/drawing/2014/main" id="{58332D78-E52C-4D48-A0E5-44754823EFED}"/>
+                <a16:creationId xmlns:a16="http://schemas.microsoft.com/office/drawing/2014/main" id="{2C1B221F-CE6E-4B90-A318-436DDB552F2F}"/>
               </a:ext>
             </a:extLst>
           </p:cNvPr>
@@ -7158,7 +7156,7 @@
           <p:cNvPr id="36" name="">
             <a:extLst xmlns:a="http://schemas.openxmlformats.org/drawingml/2006/main">
               <a:ext uri="{FF2B5EF4-FFF2-40B4-BE49-F238E27FC236}">
-                <a16:creationId xmlns:a16="http://schemas.microsoft.com/office/drawing/2014/main" id="{E9B066C4-A75E-4DFD-9AC3-B934873D474D}"/>
+                <a16:creationId xmlns:a16="http://schemas.microsoft.com/office/drawing/2014/main" id="{30449A61-8665-4470-8E04-E9533051E210}"/>
               </a:ext>
             </a:extLst>
           </p:cNvPr>
@@ -7222,7 +7220,7 @@
           <p:cNvPr id="37" name="">
             <a:extLst xmlns:a="http://schemas.openxmlformats.org/drawingml/2006/main">
               <a:ext uri="{FF2B5EF4-FFF2-40B4-BE49-F238E27FC236}">
-                <a16:creationId xmlns:a16="http://schemas.microsoft.com/office/drawing/2014/main" id="{1BC47456-6E1B-4742-83D2-6D023ECB0F8D}"/>
+                <a16:creationId xmlns:a16="http://schemas.microsoft.com/office/drawing/2014/main" id="{4D64E705-095C-4460-B3AC-07154501D8E8}"/>
               </a:ext>
             </a:extLst>
           </p:cNvPr>
@@ -7257,7 +7255,7 @@
           <p:cNvPr id="38" name="">
             <a:extLst xmlns:a="http://schemas.openxmlformats.org/drawingml/2006/main">
               <a:ext uri="{FF2B5EF4-FFF2-40B4-BE49-F238E27FC236}">
-                <a16:creationId xmlns:a16="http://schemas.microsoft.com/office/drawing/2014/main" id="{D7E79395-CD05-4AFB-8261-44797E75FA34}"/>
+                <a16:creationId xmlns:a16="http://schemas.microsoft.com/office/drawing/2014/main" id="{2BE3554A-3774-433E-B5D6-F950D0317889}"/>
               </a:ext>
             </a:extLst>
           </p:cNvPr>
@@ -7292,7 +7290,7 @@
           <p:cNvPr id="39" name="">
             <a:extLst xmlns:a="http://schemas.openxmlformats.org/drawingml/2006/main">
               <a:ext uri="{FF2B5EF4-FFF2-40B4-BE49-F238E27FC236}">
-                <a16:creationId xmlns:a16="http://schemas.microsoft.com/office/drawing/2014/main" id="{171EF2BD-68EE-48C9-A09C-F4DB37C5CADD}"/>
+                <a16:creationId xmlns:a16="http://schemas.microsoft.com/office/drawing/2014/main" id="{2C21F310-06EE-4A94-B551-877706E1352B}"/>
               </a:ext>
             </a:extLst>
           </p:cNvPr>
@@ -7327,7 +7325,7 @@
           <p:cNvPr id="40" name="kicker-02-marker">
             <a:extLst xmlns:a="http://schemas.openxmlformats.org/drawingml/2006/main">
               <a:ext uri="{FF2B5EF4-FFF2-40B4-BE49-F238E27FC236}">
-                <a16:creationId xmlns:a16="http://schemas.microsoft.com/office/drawing/2014/main" id="{F1ABF871-6789-449D-9CC0-71B68AB014B1}"/>
+                <a16:creationId xmlns:a16="http://schemas.microsoft.com/office/drawing/2014/main" id="{CF5C3348-D4A2-43F4-8C17-306B7DFAD1D7}"/>
               </a:ext>
             </a:extLst>
           </p:cNvPr>
@@ -7362,7 +7360,7 @@
           <p:cNvPr id="41" name="kicker-02-label">
             <a:extLst xmlns:a="http://schemas.openxmlformats.org/drawingml/2006/main">
               <a:ext uri="{FF2B5EF4-FFF2-40B4-BE49-F238E27FC236}">
-                <a16:creationId xmlns:a16="http://schemas.microsoft.com/office/drawing/2014/main" id="{37A6206F-FA1A-4B8E-8449-FFE4C489361F}"/>
+                <a16:creationId xmlns:a16="http://schemas.microsoft.com/office/drawing/2014/main" id="{C6FD550B-3C9F-4148-9CE4-AFB0277CE0CE}"/>
               </a:ext>
             </a:extLst>
           </p:cNvPr>
@@ -7416,7 +7414,7 @@
                 <a:ea typeface="Aptos"/>
                 <a:cs typeface="Aptos"/>
               </a:rPr>
-              <a:t>MODULE 1 / LESSON 02 / HUMAN CORRECTION</a:t>
+              <a:t>MODULE 1 / LESSON 02 / QUALITY CONTROL</a:t>
             </a:r>
           </a:p>
         </p:txBody>
@@ -7426,7 +7424,7 @@
           <p:cNvPr id="42" name="">
             <a:extLst xmlns:a="http://schemas.openxmlformats.org/drawingml/2006/main">
               <a:ext uri="{FF2B5EF4-FFF2-40B4-BE49-F238E27FC236}">
-                <a16:creationId xmlns:a16="http://schemas.microsoft.com/office/drawing/2014/main" id="{D4C53493-AD98-46D0-862B-4716EE89ABA4}"/>
+                <a16:creationId xmlns:a16="http://schemas.microsoft.com/office/drawing/2014/main" id="{0E0FE4C5-4B4D-4FD5-A2D7-2CA44F5E15D8}"/>
               </a:ext>
             </a:extLst>
           </p:cNvPr>
@@ -7480,7 +7478,7 @@
                 <a:ea typeface="Aptos Display"/>
                 <a:cs typeface="Aptos Display"/>
               </a:rPr>
-              <a:t>AI can draft structure. Humans must repair industrial reality.</a:t>
+              <a:t>Reject weak artifacts before they become operating practice.</a:t>
             </a:r>
           </a:p>
         </p:txBody>
@@ -7490,7 +7488,7 @@
           <p:cNvPr id="43" name="">
             <a:extLst xmlns:a="http://schemas.openxmlformats.org/drawingml/2006/main">
               <a:ext uri="{FF2B5EF4-FFF2-40B4-BE49-F238E27FC236}">
-                <a16:creationId xmlns:a16="http://schemas.microsoft.com/office/drawing/2014/main" id="{1D2377FD-BEA2-481E-BFC6-214BA801E861}"/>
+                <a16:creationId xmlns:a16="http://schemas.microsoft.com/office/drawing/2014/main" id="{3F27B497-AE07-4CB5-A939-8EC5F8F6DBD6}"/>
               </a:ext>
             </a:extLst>
           </p:cNvPr>
@@ -7554,7 +7552,7 @@
           <p:cNvPr id="44" name="">
             <a:extLst xmlns:a="http://schemas.openxmlformats.org/drawingml/2006/main">
               <a:ext uri="{FF2B5EF4-FFF2-40B4-BE49-F238E27FC236}">
-                <a16:creationId xmlns:a16="http://schemas.microsoft.com/office/drawing/2014/main" id="{465FFEA7-203D-4F97-8E0F-70B1F2C52182}"/>
+                <a16:creationId xmlns:a16="http://schemas.microsoft.com/office/drawing/2014/main" id="{ED8D85F2-4C5C-46A3-A503-CE835A31D6F2}"/>
               </a:ext>
             </a:extLst>
           </p:cNvPr>
@@ -7589,7 +7587,7 @@
           <p:cNvPr id="45" name="">
             <a:extLst xmlns:a="http://schemas.openxmlformats.org/drawingml/2006/main">
               <a:ext uri="{FF2B5EF4-FFF2-40B4-BE49-F238E27FC236}">
-                <a16:creationId xmlns:a16="http://schemas.microsoft.com/office/drawing/2014/main" id="{7C88EA5A-7504-427B-AFA9-0C3EDEAFDC9B}"/>
+                <a16:creationId xmlns:a16="http://schemas.microsoft.com/office/drawing/2014/main" id="{209B90BF-9FE3-4F88-B352-A536B772F1A1}"/>
               </a:ext>
             </a:extLst>
           </p:cNvPr>
@@ -7624,7 +7622,7 @@
           <p:cNvPr id="46" name="">
             <a:extLst xmlns:a="http://schemas.openxmlformats.org/drawingml/2006/main">
               <a:ext uri="{FF2B5EF4-FFF2-40B4-BE49-F238E27FC236}">
-                <a16:creationId xmlns:a16="http://schemas.microsoft.com/office/drawing/2014/main" id="{10C41368-04E8-4F8E-BBB8-3594228ED1C3}"/>
+                <a16:creationId xmlns:a16="http://schemas.microsoft.com/office/drawing/2014/main" id="{E9BD0358-34DD-46B4-8F80-ED1C0610C73A}"/>
               </a:ext>
             </a:extLst>
           </p:cNvPr>
@@ -7659,7 +7657,7 @@
           <p:cNvPr id="47" name="">
             <a:extLst xmlns:a="http://schemas.openxmlformats.org/drawingml/2006/main">
               <a:ext uri="{FF2B5EF4-FFF2-40B4-BE49-F238E27FC236}">
-                <a16:creationId xmlns:a16="http://schemas.microsoft.com/office/drawing/2014/main" id="{9FF77AB1-78F9-4BA6-A3B6-3DE24771ABC4}"/>
+                <a16:creationId xmlns:a16="http://schemas.microsoft.com/office/drawing/2014/main" id="{07497C7F-C203-457E-B54C-0C1451E8369A}"/>
               </a:ext>
             </a:extLst>
           </p:cNvPr>
@@ -7694,7 +7692,7 @@
           <p:cNvPr id="48" name="">
             <a:extLst xmlns:a="http://schemas.openxmlformats.org/drawingml/2006/main">
               <a:ext uri="{FF2B5EF4-FFF2-40B4-BE49-F238E27FC236}">
-                <a16:creationId xmlns:a16="http://schemas.microsoft.com/office/drawing/2014/main" id="{27597285-991E-4F2F-A218-48366318722E}"/>
+                <a16:creationId xmlns:a16="http://schemas.microsoft.com/office/drawing/2014/main" id="{0FD80A88-98BB-43FA-A93E-61CD5C274EFF}"/>
               </a:ext>
             </a:extLst>
           </p:cNvPr>
@@ -7758,7 +7756,7 @@
           <p:cNvPr id="49" name="">
             <a:extLst xmlns:a="http://schemas.openxmlformats.org/drawingml/2006/main">
               <a:ext uri="{FF2B5EF4-FFF2-40B4-BE49-F238E27FC236}">
-                <a16:creationId xmlns:a16="http://schemas.microsoft.com/office/drawing/2014/main" id="{D2345E46-87CA-4969-A83F-50ACF07BE2D9}"/>
+                <a16:creationId xmlns:a16="http://schemas.microsoft.com/office/drawing/2014/main" id="{A9121BAE-C08F-4E83-AAFB-AF1257DC74DD}"/>
               </a:ext>
             </a:extLst>
           </p:cNvPr>
@@ -7822,7 +7820,7 @@
           <p:cNvPr id="50" name="">
             <a:extLst xmlns:a="http://schemas.openxmlformats.org/drawingml/2006/main">
               <a:ext uri="{FF2B5EF4-FFF2-40B4-BE49-F238E27FC236}">
-                <a16:creationId xmlns:a16="http://schemas.microsoft.com/office/drawing/2014/main" id="{0E273B4A-81D5-484E-9A91-95A8910F9331}"/>
+                <a16:creationId xmlns:a16="http://schemas.microsoft.com/office/drawing/2014/main" id="{08947EEE-1310-4A1A-BC96-7D0986ACD1FA}"/>
               </a:ext>
             </a:extLst>
           </p:cNvPr>
@@ -7884,7 +7882,7 @@
     </p:spTree>
     <p:extLst>
       <p:ext uri="{BB962C8B-B14F-4D97-AF65-F5344CB8AC3E}">
-        <p14:creationId xmlns:p14="http://schemas.microsoft.com/office/powerpoint/2010/main" val="45567731"/>
+        <p14:creationId xmlns:p14="http://schemas.microsoft.com/office/powerpoint/2010/main" val="1215248168"/>
       </p:ext>
     </p:extLst>
   </p:cSld>
@@ -7908,7 +7906,7 @@
           <p:cNvPr id="1" name="">
             <a:extLst xmlns:a="http://schemas.openxmlformats.org/drawingml/2006/main">
               <a:ext uri="{FF2B5EF4-FFF2-40B4-BE49-F238E27FC236}">
-                <a16:creationId xmlns:a16="http://schemas.microsoft.com/office/drawing/2014/main" id="{BB1439F9-8C07-4F3A-86E0-7C32B378B1D9}"/>
+                <a16:creationId xmlns:a16="http://schemas.microsoft.com/office/drawing/2014/main" id="{1AFC370E-E998-48F5-9960-282DAB628F38}"/>
               </a:ext>
             </a:extLst>
           </p:cNvPr>
@@ -7943,7 +7941,7 @@
           <p:cNvPr id="2" name="">
             <a:extLst xmlns:a="http://schemas.openxmlformats.org/drawingml/2006/main">
               <a:ext uri="{FF2B5EF4-FFF2-40B4-BE49-F238E27FC236}">
-                <a16:creationId xmlns:a16="http://schemas.microsoft.com/office/drawing/2014/main" id="{9950460C-BD97-4BB3-AAFF-7600C7E772A7}"/>
+                <a16:creationId xmlns:a16="http://schemas.microsoft.com/office/drawing/2014/main" id="{91170E09-D21B-4350-AE8D-702EB7B54E93}"/>
               </a:ext>
             </a:extLst>
           </p:cNvPr>
@@ -7978,7 +7976,7 @@
           <p:cNvPr id="3" name="">
             <a:extLst xmlns:a="http://schemas.openxmlformats.org/drawingml/2006/main">
               <a:ext uri="{FF2B5EF4-FFF2-40B4-BE49-F238E27FC236}">
-                <a16:creationId xmlns:a16="http://schemas.microsoft.com/office/drawing/2014/main" id="{D894788D-2B62-49F1-9D50-09C881E74E7D}"/>
+                <a16:creationId xmlns:a16="http://schemas.microsoft.com/office/drawing/2014/main" id="{EB4C926E-0909-4FA3-B2E2-EB484D715964}"/>
               </a:ext>
             </a:extLst>
           </p:cNvPr>
@@ -8013,7 +8011,7 @@
           <p:cNvPr id="4" name="kicker-02-marker">
             <a:extLst xmlns:a="http://schemas.openxmlformats.org/drawingml/2006/main">
               <a:ext uri="{FF2B5EF4-FFF2-40B4-BE49-F238E27FC236}">
-                <a16:creationId xmlns:a16="http://schemas.microsoft.com/office/drawing/2014/main" id="{24D39F26-DAE7-465C-BC73-39A5F1587C6F}"/>
+                <a16:creationId xmlns:a16="http://schemas.microsoft.com/office/drawing/2014/main" id="{38D38475-3D6E-47DC-BCFA-D4311C967959}"/>
               </a:ext>
             </a:extLst>
           </p:cNvPr>
@@ -8048,7 +8046,7 @@
           <p:cNvPr id="5" name="kicker-02-label">
             <a:extLst xmlns:a="http://schemas.openxmlformats.org/drawingml/2006/main">
               <a:ext uri="{FF2B5EF4-FFF2-40B4-BE49-F238E27FC236}">
-                <a16:creationId xmlns:a16="http://schemas.microsoft.com/office/drawing/2014/main" id="{7AB3D748-9F1D-47AF-BAEF-7823F9792593}"/>
+                <a16:creationId xmlns:a16="http://schemas.microsoft.com/office/drawing/2014/main" id="{01E4D741-9628-4074-9250-6AE287CE5892}"/>
               </a:ext>
             </a:extLst>
           </p:cNvPr>
@@ -8112,7 +8110,7 @@
           <p:cNvPr id="6" name="">
             <a:extLst xmlns:a="http://schemas.openxmlformats.org/drawingml/2006/main">
               <a:ext uri="{FF2B5EF4-FFF2-40B4-BE49-F238E27FC236}">
-                <a16:creationId xmlns:a16="http://schemas.microsoft.com/office/drawing/2014/main" id="{D697251B-AFEE-4540-A86A-65E935EB3826}"/>
+                <a16:creationId xmlns:a16="http://schemas.microsoft.com/office/drawing/2014/main" id="{465A8504-9649-4053-965F-E2BE899679AE}"/>
               </a:ext>
             </a:extLst>
           </p:cNvPr>
@@ -8176,7 +8174,7 @@
           <p:cNvPr id="7" name="">
             <a:extLst xmlns:a="http://schemas.openxmlformats.org/drawingml/2006/main">
               <a:ext uri="{FF2B5EF4-FFF2-40B4-BE49-F238E27FC236}">
-                <a16:creationId xmlns:a16="http://schemas.microsoft.com/office/drawing/2014/main" id="{9406BE31-B537-4C31-9E95-94EFC1B730A0}"/>
+                <a16:creationId xmlns:a16="http://schemas.microsoft.com/office/drawing/2014/main" id="{D328D6C3-0E80-454E-8B3C-661E0514B8F1}"/>
               </a:ext>
             </a:extLst>
           </p:cNvPr>
@@ -8240,7 +8238,7 @@
           <p:cNvPr id="8" name="">
             <a:extLst xmlns:a="http://schemas.openxmlformats.org/drawingml/2006/main">
               <a:ext uri="{FF2B5EF4-FFF2-40B4-BE49-F238E27FC236}">
-                <a16:creationId xmlns:a16="http://schemas.microsoft.com/office/drawing/2014/main" id="{D6937BDE-6A42-4EA4-890C-C401B4417AD9}"/>
+                <a16:creationId xmlns:a16="http://schemas.microsoft.com/office/drawing/2014/main" id="{677FBA4A-21F2-404B-910C-66066942A7C3}"/>
               </a:ext>
             </a:extLst>
           </p:cNvPr>
@@ -8275,7 +8273,7 @@
           <p:cNvPr id="9" name="">
             <a:extLst xmlns:a="http://schemas.openxmlformats.org/drawingml/2006/main">
               <a:ext uri="{FF2B5EF4-FFF2-40B4-BE49-F238E27FC236}">
-                <a16:creationId xmlns:a16="http://schemas.microsoft.com/office/drawing/2014/main" id="{985C2854-5819-46BE-BD6E-5EDBA2C56311}"/>
+                <a16:creationId xmlns:a16="http://schemas.microsoft.com/office/drawing/2014/main" id="{AB3F16EA-7107-4467-9029-B32C25C4DED2}"/>
               </a:ext>
             </a:extLst>
           </p:cNvPr>
@@ -8339,7 +8337,7 @@
           <p:cNvPr id="10" name="">
             <a:extLst xmlns:a="http://schemas.openxmlformats.org/drawingml/2006/main">
               <a:ext uri="{FF2B5EF4-FFF2-40B4-BE49-F238E27FC236}">
-                <a16:creationId xmlns:a16="http://schemas.microsoft.com/office/drawing/2014/main" id="{829AD6C7-D15D-4FC1-A4B2-B2411D5BDA1A}"/>
+                <a16:creationId xmlns:a16="http://schemas.microsoft.com/office/drawing/2014/main" id="{9D5261AE-AF5A-4AAA-B159-95CD3D13EE7E}"/>
               </a:ext>
             </a:extLst>
           </p:cNvPr>
@@ -8403,7 +8401,7 @@
           <p:cNvPr id="11" name="">
             <a:extLst xmlns:a="http://schemas.openxmlformats.org/drawingml/2006/main">
               <a:ext uri="{FF2B5EF4-FFF2-40B4-BE49-F238E27FC236}">
-                <a16:creationId xmlns:a16="http://schemas.microsoft.com/office/drawing/2014/main" id="{B75E7FD4-1BF9-4238-816D-FC50EAE5A536}"/>
+                <a16:creationId xmlns:a16="http://schemas.microsoft.com/office/drawing/2014/main" id="{88A9EF61-ACA8-4638-8226-8EB6F66D95B1}"/>
               </a:ext>
             </a:extLst>
           </p:cNvPr>
@@ -8467,7 +8465,7 @@
           <p:cNvPr id="12" name="">
             <a:extLst xmlns:a="http://schemas.openxmlformats.org/drawingml/2006/main">
               <a:ext uri="{FF2B5EF4-FFF2-40B4-BE49-F238E27FC236}">
-                <a16:creationId xmlns:a16="http://schemas.microsoft.com/office/drawing/2014/main" id="{FFC09A7B-2347-4680-9838-9E5A0940A92F}"/>
+                <a16:creationId xmlns:a16="http://schemas.microsoft.com/office/drawing/2014/main" id="{95F1B699-589F-4A51-92D4-6E6202A96A6E}"/>
               </a:ext>
             </a:extLst>
           </p:cNvPr>
@@ -8500,7 +8498,7 @@
           <p:cNvPr id="13" name="">
             <a:extLst xmlns:a="http://schemas.openxmlformats.org/drawingml/2006/main">
               <a:ext uri="{FF2B5EF4-FFF2-40B4-BE49-F238E27FC236}">
-                <a16:creationId xmlns:a16="http://schemas.microsoft.com/office/drawing/2014/main" id="{9BA2E527-B87D-4CEE-A66B-F3062237859F}"/>
+                <a16:creationId xmlns:a16="http://schemas.microsoft.com/office/drawing/2014/main" id="{DD7973A5-A1B3-44D6-8676-A5E037DAC4C5}"/>
               </a:ext>
             </a:extLst>
           </p:cNvPr>
@@ -8535,7 +8533,7 @@
           <p:cNvPr id="14" name="">
             <a:extLst xmlns:a="http://schemas.openxmlformats.org/drawingml/2006/main">
               <a:ext uri="{FF2B5EF4-FFF2-40B4-BE49-F238E27FC236}">
-                <a16:creationId xmlns:a16="http://schemas.microsoft.com/office/drawing/2014/main" id="{6B806BE3-F155-4875-A68B-4161D38CB05D}"/>
+                <a16:creationId xmlns:a16="http://schemas.microsoft.com/office/drawing/2014/main" id="{59707F2A-BD0A-4612-815A-F327036CD306}"/>
               </a:ext>
             </a:extLst>
           </p:cNvPr>
@@ -8599,7 +8597,7 @@
           <p:cNvPr id="15" name="">
             <a:extLst xmlns:a="http://schemas.openxmlformats.org/drawingml/2006/main">
               <a:ext uri="{FF2B5EF4-FFF2-40B4-BE49-F238E27FC236}">
-                <a16:creationId xmlns:a16="http://schemas.microsoft.com/office/drawing/2014/main" id="{4773816C-F71D-47D9-AD88-3A4EB0A010EB}"/>
+                <a16:creationId xmlns:a16="http://schemas.microsoft.com/office/drawing/2014/main" id="{49716491-07E3-433C-8F78-4E54A995FD4D}"/>
               </a:ext>
             </a:extLst>
           </p:cNvPr>
@@ -8632,7 +8630,7 @@
           <p:cNvPr id="16" name="">
             <a:extLst xmlns:a="http://schemas.openxmlformats.org/drawingml/2006/main">
               <a:ext uri="{FF2B5EF4-FFF2-40B4-BE49-F238E27FC236}">
-                <a16:creationId xmlns:a16="http://schemas.microsoft.com/office/drawing/2014/main" id="{EA78CD32-0FF4-413A-893C-53ED24544137}"/>
+                <a16:creationId xmlns:a16="http://schemas.microsoft.com/office/drawing/2014/main" id="{D3D80A8D-DC22-4897-8C2F-593A343BE31B}"/>
               </a:ext>
             </a:extLst>
           </p:cNvPr>
@@ -8667,7 +8665,7 @@
           <p:cNvPr id="17" name="">
             <a:extLst xmlns:a="http://schemas.openxmlformats.org/drawingml/2006/main">
               <a:ext uri="{FF2B5EF4-FFF2-40B4-BE49-F238E27FC236}">
-                <a16:creationId xmlns:a16="http://schemas.microsoft.com/office/drawing/2014/main" id="{F5AE8C47-490A-4C69-9DF3-4F6E5426EC0D}"/>
+                <a16:creationId xmlns:a16="http://schemas.microsoft.com/office/drawing/2014/main" id="{5FCABA15-D48C-48CA-B439-7ADAED423F83}"/>
               </a:ext>
             </a:extLst>
           </p:cNvPr>
@@ -8731,7 +8729,7 @@
           <p:cNvPr id="18" name="">
             <a:extLst xmlns:a="http://schemas.openxmlformats.org/drawingml/2006/main">
               <a:ext uri="{FF2B5EF4-FFF2-40B4-BE49-F238E27FC236}">
-                <a16:creationId xmlns:a16="http://schemas.microsoft.com/office/drawing/2014/main" id="{EF61F720-DA5A-4A86-BE5A-552CC319DF0E}"/>
+                <a16:creationId xmlns:a16="http://schemas.microsoft.com/office/drawing/2014/main" id="{2AA025B2-A639-4B5E-9D0E-340EC86B91DF}"/>
               </a:ext>
             </a:extLst>
           </p:cNvPr>
@@ -8764,7 +8762,7 @@
           <p:cNvPr id="19" name="">
             <a:extLst xmlns:a="http://schemas.openxmlformats.org/drawingml/2006/main">
               <a:ext uri="{FF2B5EF4-FFF2-40B4-BE49-F238E27FC236}">
-                <a16:creationId xmlns:a16="http://schemas.microsoft.com/office/drawing/2014/main" id="{D6637E1B-0D16-43ED-9D04-0AD8561D3A2D}"/>
+                <a16:creationId xmlns:a16="http://schemas.microsoft.com/office/drawing/2014/main" id="{A10D4967-A10E-4694-AD22-A9BA3119F275}"/>
               </a:ext>
             </a:extLst>
           </p:cNvPr>
@@ -8799,7 +8797,7 @@
           <p:cNvPr id="20" name="">
             <a:extLst xmlns:a="http://schemas.openxmlformats.org/drawingml/2006/main">
               <a:ext uri="{FF2B5EF4-FFF2-40B4-BE49-F238E27FC236}">
-                <a16:creationId xmlns:a16="http://schemas.microsoft.com/office/drawing/2014/main" id="{52E11D91-3675-4987-9141-ECCAF5D6CDC9}"/>
+                <a16:creationId xmlns:a16="http://schemas.microsoft.com/office/drawing/2014/main" id="{733898D9-0C93-447A-8F44-9D6A2F44938F}"/>
               </a:ext>
             </a:extLst>
           </p:cNvPr>
@@ -8863,7 +8861,7 @@
           <p:cNvPr id="21" name="">
             <a:extLst xmlns:a="http://schemas.openxmlformats.org/drawingml/2006/main">
               <a:ext uri="{FF2B5EF4-FFF2-40B4-BE49-F238E27FC236}">
-                <a16:creationId xmlns:a16="http://schemas.microsoft.com/office/drawing/2014/main" id="{185C7ED1-15BD-400C-B4E7-06EE90B51FD0}"/>
+                <a16:creationId xmlns:a16="http://schemas.microsoft.com/office/drawing/2014/main" id="{99ECF23C-5161-487C-BC38-ECF4A2DA38E7}"/>
               </a:ext>
             </a:extLst>
           </p:cNvPr>
@@ -8896,7 +8894,7 @@
           <p:cNvPr id="22" name="">
             <a:extLst xmlns:a="http://schemas.openxmlformats.org/drawingml/2006/main">
               <a:ext uri="{FF2B5EF4-FFF2-40B4-BE49-F238E27FC236}">
-                <a16:creationId xmlns:a16="http://schemas.microsoft.com/office/drawing/2014/main" id="{06233105-1964-4461-A3AF-7AA6C0BA5B47}"/>
+                <a16:creationId xmlns:a16="http://schemas.microsoft.com/office/drawing/2014/main" id="{4FA02A4B-6755-476F-AB51-3421CD79D4D3}"/>
               </a:ext>
             </a:extLst>
           </p:cNvPr>
@@ -8931,7 +8929,7 @@
           <p:cNvPr id="23" name="">
             <a:extLst xmlns:a="http://schemas.openxmlformats.org/drawingml/2006/main">
               <a:ext uri="{FF2B5EF4-FFF2-40B4-BE49-F238E27FC236}">
-                <a16:creationId xmlns:a16="http://schemas.microsoft.com/office/drawing/2014/main" id="{CF15524A-C628-4213-8703-FE0DF26A7DF1}"/>
+                <a16:creationId xmlns:a16="http://schemas.microsoft.com/office/drawing/2014/main" id="{809BDB8B-A3BE-49BB-92B5-AC6FC8404400}"/>
               </a:ext>
             </a:extLst>
           </p:cNvPr>
@@ -8995,7 +8993,7 @@
           <p:cNvPr id="24" name="">
             <a:extLst xmlns:a="http://schemas.openxmlformats.org/drawingml/2006/main">
               <a:ext uri="{FF2B5EF4-FFF2-40B4-BE49-F238E27FC236}">
-                <a16:creationId xmlns:a16="http://schemas.microsoft.com/office/drawing/2014/main" id="{4CE9A3DE-4544-44AF-BDDC-63813F75B3EE}"/>
+                <a16:creationId xmlns:a16="http://schemas.microsoft.com/office/drawing/2014/main" id="{1F640F1C-55B6-4875-98BE-2EAC88E126E7}"/>
               </a:ext>
             </a:extLst>
           </p:cNvPr>
@@ -9028,7 +9026,7 @@
           <p:cNvPr id="25" name="">
             <a:extLst xmlns:a="http://schemas.openxmlformats.org/drawingml/2006/main">
               <a:ext uri="{FF2B5EF4-FFF2-40B4-BE49-F238E27FC236}">
-                <a16:creationId xmlns:a16="http://schemas.microsoft.com/office/drawing/2014/main" id="{E65441C9-06AB-4D61-861F-DA03E8856EE3}"/>
+                <a16:creationId xmlns:a16="http://schemas.microsoft.com/office/drawing/2014/main" id="{274EE88B-8E41-49DA-A109-F8BCBA28BED1}"/>
               </a:ext>
             </a:extLst>
           </p:cNvPr>
@@ -9063,7 +9061,7 @@
           <p:cNvPr id="26" name="">
             <a:extLst xmlns:a="http://schemas.openxmlformats.org/drawingml/2006/main">
               <a:ext uri="{FF2B5EF4-FFF2-40B4-BE49-F238E27FC236}">
-                <a16:creationId xmlns:a16="http://schemas.microsoft.com/office/drawing/2014/main" id="{02E39627-41A9-4F38-9073-716DFAA5AF74}"/>
+                <a16:creationId xmlns:a16="http://schemas.microsoft.com/office/drawing/2014/main" id="{51442DD2-AC34-4EAD-AFAF-F5E09C09739F}"/>
               </a:ext>
             </a:extLst>
           </p:cNvPr>
@@ -9127,7 +9125,7 @@
           <p:cNvPr id="27" name="">
             <a:extLst xmlns:a="http://schemas.openxmlformats.org/drawingml/2006/main">
               <a:ext uri="{FF2B5EF4-FFF2-40B4-BE49-F238E27FC236}">
-                <a16:creationId xmlns:a16="http://schemas.microsoft.com/office/drawing/2014/main" id="{DF89331B-A0A0-4DC9-803C-95BE12E5D797}"/>
+                <a16:creationId xmlns:a16="http://schemas.microsoft.com/office/drawing/2014/main" id="{7C8D4D45-1158-4763-8E76-EC3676508F25}"/>
               </a:ext>
             </a:extLst>
           </p:cNvPr>
@@ -9160,7 +9158,7 @@
           <p:cNvPr id="28" name="">
             <a:extLst xmlns:a="http://schemas.openxmlformats.org/drawingml/2006/main">
               <a:ext uri="{FF2B5EF4-FFF2-40B4-BE49-F238E27FC236}">
-                <a16:creationId xmlns:a16="http://schemas.microsoft.com/office/drawing/2014/main" id="{DC5DA885-3F2C-4A77-B9C7-602519AE6FB1}"/>
+                <a16:creationId xmlns:a16="http://schemas.microsoft.com/office/drawing/2014/main" id="{E5EF5B13-FAFC-42DA-A11C-C9A341B7D790}"/>
               </a:ext>
             </a:extLst>
           </p:cNvPr>
@@ -9195,7 +9193,7 @@
           <p:cNvPr id="29" name="">
             <a:extLst xmlns:a="http://schemas.openxmlformats.org/drawingml/2006/main">
               <a:ext uri="{FF2B5EF4-FFF2-40B4-BE49-F238E27FC236}">
-                <a16:creationId xmlns:a16="http://schemas.microsoft.com/office/drawing/2014/main" id="{F6A4CDBD-42B3-4A0B-8AD7-52A5F8565455}"/>
+                <a16:creationId xmlns:a16="http://schemas.microsoft.com/office/drawing/2014/main" id="{F24872C4-D28F-499E-9C1F-356A9030DB53}"/>
               </a:ext>
             </a:extLst>
           </p:cNvPr>
@@ -9259,7 +9257,7 @@
           <p:cNvPr id="30" name="">
             <a:extLst xmlns:a="http://schemas.openxmlformats.org/drawingml/2006/main">
               <a:ext uri="{FF2B5EF4-FFF2-40B4-BE49-F238E27FC236}">
-                <a16:creationId xmlns:a16="http://schemas.microsoft.com/office/drawing/2014/main" id="{0B32599A-F958-4DF1-B567-34DA50264AE2}"/>
+                <a16:creationId xmlns:a16="http://schemas.microsoft.com/office/drawing/2014/main" id="{8ACA8FBA-3805-4AC1-8E75-141FDE5CBE55}"/>
               </a:ext>
             </a:extLst>
           </p:cNvPr>
@@ -9292,7 +9290,7 @@
           <p:cNvPr id="31" name="">
             <a:extLst xmlns:a="http://schemas.openxmlformats.org/drawingml/2006/main">
               <a:ext uri="{FF2B5EF4-FFF2-40B4-BE49-F238E27FC236}">
-                <a16:creationId xmlns:a16="http://schemas.microsoft.com/office/drawing/2014/main" id="{8C13E580-F1EF-4217-96EC-41A849AB535F}"/>
+                <a16:creationId xmlns:a16="http://schemas.microsoft.com/office/drawing/2014/main" id="{D40BE918-167C-45ED-8F35-B118D1D137BF}"/>
               </a:ext>
             </a:extLst>
           </p:cNvPr>
@@ -9327,7 +9325,7 @@
           <p:cNvPr id="32" name="">
             <a:extLst xmlns:a="http://schemas.openxmlformats.org/drawingml/2006/main">
               <a:ext uri="{FF2B5EF4-FFF2-40B4-BE49-F238E27FC236}">
-                <a16:creationId xmlns:a16="http://schemas.microsoft.com/office/drawing/2014/main" id="{021C87CC-A646-4E33-80A0-99A5C553204C}"/>
+                <a16:creationId xmlns:a16="http://schemas.microsoft.com/office/drawing/2014/main" id="{7FD61A5C-5040-4D69-8733-3475073F6348}"/>
               </a:ext>
             </a:extLst>
           </p:cNvPr>
@@ -9391,7 +9389,7 @@
           <p:cNvPr id="33" name="">
             <a:extLst xmlns:a="http://schemas.openxmlformats.org/drawingml/2006/main">
               <a:ext uri="{FF2B5EF4-FFF2-40B4-BE49-F238E27FC236}">
-                <a16:creationId xmlns:a16="http://schemas.microsoft.com/office/drawing/2014/main" id="{977F20F0-3474-4CB0-8DD9-B419617FA527}"/>
+                <a16:creationId xmlns:a16="http://schemas.microsoft.com/office/drawing/2014/main" id="{0E45C8B6-78B3-462F-BA73-83C1C677C6AF}"/>
               </a:ext>
             </a:extLst>
           </p:cNvPr>
@@ -9424,7 +9422,7 @@
           <p:cNvPr id="34" name="">
             <a:extLst xmlns:a="http://schemas.openxmlformats.org/drawingml/2006/main">
               <a:ext uri="{FF2B5EF4-FFF2-40B4-BE49-F238E27FC236}">
-                <a16:creationId xmlns:a16="http://schemas.microsoft.com/office/drawing/2014/main" id="{38FFDE88-FF3B-4F24-8959-B4B1D6386A79}"/>
+                <a16:creationId xmlns:a16="http://schemas.microsoft.com/office/drawing/2014/main" id="{1EEA890A-BC7B-4C6C-A3D5-47DC24975305}"/>
               </a:ext>
             </a:extLst>
           </p:cNvPr>
@@ -9488,7 +9486,7 @@
           <p:cNvPr id="35" name="">
             <a:extLst xmlns:a="http://schemas.openxmlformats.org/drawingml/2006/main">
               <a:ext uri="{FF2B5EF4-FFF2-40B4-BE49-F238E27FC236}">
-                <a16:creationId xmlns:a16="http://schemas.microsoft.com/office/drawing/2014/main" id="{38960403-0C1B-4AF6-A482-D774309B4A1A}"/>
+                <a16:creationId xmlns:a16="http://schemas.microsoft.com/office/drawing/2014/main" id="{32C3E54D-7AB6-4BD7-A4E1-4948B0485A70}"/>
               </a:ext>
             </a:extLst>
           </p:cNvPr>
@@ -9552,7 +9550,7 @@
           <p:cNvPr id="36" name="">
             <a:extLst xmlns:a="http://schemas.openxmlformats.org/drawingml/2006/main">
               <a:ext uri="{FF2B5EF4-FFF2-40B4-BE49-F238E27FC236}">
-                <a16:creationId xmlns:a16="http://schemas.microsoft.com/office/drawing/2014/main" id="{4ABEFC01-3689-4B76-8FE3-199E2338B52F}"/>
+                <a16:creationId xmlns:a16="http://schemas.microsoft.com/office/drawing/2014/main" id="{5BBFE97D-C23A-44BB-8630-1FFDFAB9A37E}"/>
               </a:ext>
             </a:extLst>
           </p:cNvPr>
@@ -9587,7 +9585,7 @@
           <p:cNvPr id="37" name="">
             <a:extLst xmlns:a="http://schemas.openxmlformats.org/drawingml/2006/main">
               <a:ext uri="{FF2B5EF4-FFF2-40B4-BE49-F238E27FC236}">
-                <a16:creationId xmlns:a16="http://schemas.microsoft.com/office/drawing/2014/main" id="{62B8AD6B-676B-41AC-B7D3-943EE0EB642D}"/>
+                <a16:creationId xmlns:a16="http://schemas.microsoft.com/office/drawing/2014/main" id="{6FD11280-5EC7-4FFE-85D3-E72ED23BA2C3}"/>
               </a:ext>
             </a:extLst>
           </p:cNvPr>
@@ -9651,7 +9649,7 @@
           <p:cNvPr id="38" name="">
             <a:extLst xmlns:a="http://schemas.openxmlformats.org/drawingml/2006/main">
               <a:ext uri="{FF2B5EF4-FFF2-40B4-BE49-F238E27FC236}">
-                <a16:creationId xmlns:a16="http://schemas.microsoft.com/office/drawing/2014/main" id="{37DB36C5-ED2E-4E86-895B-604F6219CA97}"/>
+                <a16:creationId xmlns:a16="http://schemas.microsoft.com/office/drawing/2014/main" id="{1BD226C2-E3DF-4991-8473-51315435C1C6}"/>
               </a:ext>
             </a:extLst>
           </p:cNvPr>
@@ -9715,7 +9713,7 @@
           <p:cNvPr id="39" name="">
             <a:extLst xmlns:a="http://schemas.openxmlformats.org/drawingml/2006/main">
               <a:ext uri="{FF2B5EF4-FFF2-40B4-BE49-F238E27FC236}">
-                <a16:creationId xmlns:a16="http://schemas.microsoft.com/office/drawing/2014/main" id="{67AD818A-1EA9-435C-8F87-91892B3ACE76}"/>
+                <a16:creationId xmlns:a16="http://schemas.microsoft.com/office/drawing/2014/main" id="{48120562-9A0E-4413-9011-BF5BED2F5419}"/>
               </a:ext>
             </a:extLst>
           </p:cNvPr>
@@ -9777,7 +9775,7 @@
     </p:spTree>
     <p:extLst>
       <p:ext uri="{BB962C8B-B14F-4D97-AF65-F5344CB8AC3E}">
-        <p14:creationId xmlns:p14="http://schemas.microsoft.com/office/powerpoint/2010/main" val="357597172"/>
+        <p14:creationId xmlns:p14="http://schemas.microsoft.com/office/powerpoint/2010/main" val="696516615"/>
       </p:ext>
     </p:extLst>
   </p:cSld>
@@ -9801,7 +9799,7 @@
           <p:cNvPr id="1" name="">
             <a:extLst xmlns:a="http://schemas.openxmlformats.org/drawingml/2006/main">
               <a:ext uri="{FF2B5EF4-FFF2-40B4-BE49-F238E27FC236}">
-                <a16:creationId xmlns:a16="http://schemas.microsoft.com/office/drawing/2014/main" id="{EE58D19E-78AF-4197-86AF-FE4E0C194B2A}"/>
+                <a16:creationId xmlns:a16="http://schemas.microsoft.com/office/drawing/2014/main" id="{940CEAED-B8BA-465A-BF82-ED9CE29B03BA}"/>
               </a:ext>
             </a:extLst>
           </p:cNvPr>
@@ -9836,7 +9834,7 @@
           <p:cNvPr id="2" name="">
             <a:extLst xmlns:a="http://schemas.openxmlformats.org/drawingml/2006/main">
               <a:ext uri="{FF2B5EF4-FFF2-40B4-BE49-F238E27FC236}">
-                <a16:creationId xmlns:a16="http://schemas.microsoft.com/office/drawing/2014/main" id="{224D9829-C961-4DE2-8303-DF7B69E3F614}"/>
+                <a16:creationId xmlns:a16="http://schemas.microsoft.com/office/drawing/2014/main" id="{91CCC63C-7D25-46DD-8723-14C3D6D074CD}"/>
               </a:ext>
             </a:extLst>
           </p:cNvPr>
@@ -9871,7 +9869,7 @@
           <p:cNvPr id="3" name="">
             <a:extLst xmlns:a="http://schemas.openxmlformats.org/drawingml/2006/main">
               <a:ext uri="{FF2B5EF4-FFF2-40B4-BE49-F238E27FC236}">
-                <a16:creationId xmlns:a16="http://schemas.microsoft.com/office/drawing/2014/main" id="{778B836B-6B94-4104-A521-0645D414A75E}"/>
+                <a16:creationId xmlns:a16="http://schemas.microsoft.com/office/drawing/2014/main" id="{5592759C-F6B5-434F-82C9-A90E8C423F64}"/>
               </a:ext>
             </a:extLst>
           </p:cNvPr>
@@ -9906,7 +9904,7 @@
           <p:cNvPr id="4" name="kicker-02-marker">
             <a:extLst xmlns:a="http://schemas.openxmlformats.org/drawingml/2006/main">
               <a:ext uri="{FF2B5EF4-FFF2-40B4-BE49-F238E27FC236}">
-                <a16:creationId xmlns:a16="http://schemas.microsoft.com/office/drawing/2014/main" id="{45D59097-9E58-4685-9CFE-09B1DD97F8E1}"/>
+                <a16:creationId xmlns:a16="http://schemas.microsoft.com/office/drawing/2014/main" id="{039121FE-8821-4BA3-9F36-0BC67224DC1C}"/>
               </a:ext>
             </a:extLst>
           </p:cNvPr>
@@ -9941,7 +9939,7 @@
           <p:cNvPr id="5" name="kicker-02-label">
             <a:extLst xmlns:a="http://schemas.openxmlformats.org/drawingml/2006/main">
               <a:ext uri="{FF2B5EF4-FFF2-40B4-BE49-F238E27FC236}">
-                <a16:creationId xmlns:a16="http://schemas.microsoft.com/office/drawing/2014/main" id="{4F5D649F-F9C4-43F4-8020-24999B233F4D}"/>
+                <a16:creationId xmlns:a16="http://schemas.microsoft.com/office/drawing/2014/main" id="{7463D4A0-14EB-431C-9EDC-750B5C6C50CC}"/>
               </a:ext>
             </a:extLst>
           </p:cNvPr>
@@ -10005,7 +10003,7 @@
           <p:cNvPr id="6" name="">
             <a:extLst xmlns:a="http://schemas.openxmlformats.org/drawingml/2006/main">
               <a:ext uri="{FF2B5EF4-FFF2-40B4-BE49-F238E27FC236}">
-                <a16:creationId xmlns:a16="http://schemas.microsoft.com/office/drawing/2014/main" id="{47B6B847-9F97-4D67-BAAE-A226B1652416}"/>
+                <a16:creationId xmlns:a16="http://schemas.microsoft.com/office/drawing/2014/main" id="{64C1CD76-2119-4F14-A3E4-3F90AE7DAA51}"/>
               </a:ext>
             </a:extLst>
           </p:cNvPr>
@@ -10069,7 +10067,7 @@
           <p:cNvPr id="7" name="">
             <a:extLst xmlns:a="http://schemas.openxmlformats.org/drawingml/2006/main">
               <a:ext uri="{FF2B5EF4-FFF2-40B4-BE49-F238E27FC236}">
-                <a16:creationId xmlns:a16="http://schemas.microsoft.com/office/drawing/2014/main" id="{117175C9-5A1C-4A9A-92DC-32BC57A9FC8B}"/>
+                <a16:creationId xmlns:a16="http://schemas.microsoft.com/office/drawing/2014/main" id="{DEE004A5-E20A-49B1-9DEA-24A6DDE961F3}"/>
               </a:ext>
             </a:extLst>
           </p:cNvPr>
@@ -10133,7 +10131,7 @@
           <p:cNvPr id="8" name="">
             <a:extLst xmlns:a="http://schemas.openxmlformats.org/drawingml/2006/main">
               <a:ext uri="{FF2B5EF4-FFF2-40B4-BE49-F238E27FC236}">
-                <a16:creationId xmlns:a16="http://schemas.microsoft.com/office/drawing/2014/main" id="{A707FE6A-EC95-4866-805E-6EA668F14332}"/>
+                <a16:creationId xmlns:a16="http://schemas.microsoft.com/office/drawing/2014/main" id="{B10AD982-8F8C-470C-9D3D-C75123A9DAD8}"/>
               </a:ext>
             </a:extLst>
           </p:cNvPr>
@@ -10168,7 +10166,7 @@
           <p:cNvPr id="9" name="">
             <a:extLst xmlns:a="http://schemas.openxmlformats.org/drawingml/2006/main">
               <a:ext uri="{FF2B5EF4-FFF2-40B4-BE49-F238E27FC236}">
-                <a16:creationId xmlns:a16="http://schemas.microsoft.com/office/drawing/2014/main" id="{5A000A9B-0BF6-4A22-995F-9F5107773685}"/>
+                <a16:creationId xmlns:a16="http://schemas.microsoft.com/office/drawing/2014/main" id="{6A409219-9AA4-4919-8C8B-E6797A32C96D}"/>
               </a:ext>
             </a:extLst>
           </p:cNvPr>
@@ -10232,7 +10230,7 @@
           <p:cNvPr id="10" name="">
             <a:extLst xmlns:a="http://schemas.openxmlformats.org/drawingml/2006/main">
               <a:ext uri="{FF2B5EF4-FFF2-40B4-BE49-F238E27FC236}">
-                <a16:creationId xmlns:a16="http://schemas.microsoft.com/office/drawing/2014/main" id="{26D8BE13-EB11-4DEE-BB65-C32E486CA37B}"/>
+                <a16:creationId xmlns:a16="http://schemas.microsoft.com/office/drawing/2014/main" id="{A58FB26E-8523-4650-9F23-4EA0C1723B79}"/>
               </a:ext>
             </a:extLst>
           </p:cNvPr>
@@ -10296,7 +10294,7 @@
           <p:cNvPr id="11" name="">
             <a:extLst xmlns:a="http://schemas.openxmlformats.org/drawingml/2006/main">
               <a:ext uri="{FF2B5EF4-FFF2-40B4-BE49-F238E27FC236}">
-                <a16:creationId xmlns:a16="http://schemas.microsoft.com/office/drawing/2014/main" id="{0619B21F-1C44-4880-8D3E-97CC1C1E07B2}"/>
+                <a16:creationId xmlns:a16="http://schemas.microsoft.com/office/drawing/2014/main" id="{4E985F58-5BA8-41E6-BC11-F8ECA578E78A}"/>
               </a:ext>
             </a:extLst>
           </p:cNvPr>
@@ -10360,7 +10358,7 @@
           <p:cNvPr id="12" name="">
             <a:extLst xmlns:a="http://schemas.openxmlformats.org/drawingml/2006/main">
               <a:ext uri="{FF2B5EF4-FFF2-40B4-BE49-F238E27FC236}">
-                <a16:creationId xmlns:a16="http://schemas.microsoft.com/office/drawing/2014/main" id="{FB65D822-B6C2-4682-B1A3-5943D019530E}"/>
+                <a16:creationId xmlns:a16="http://schemas.microsoft.com/office/drawing/2014/main" id="{B266DDCE-E4ED-44F0-93EA-964600EC76A6}"/>
               </a:ext>
             </a:extLst>
           </p:cNvPr>
@@ -10395,7 +10393,7 @@
           <p:cNvPr id="13" name="">
             <a:extLst xmlns:a="http://schemas.openxmlformats.org/drawingml/2006/main">
               <a:ext uri="{FF2B5EF4-FFF2-40B4-BE49-F238E27FC236}">
-                <a16:creationId xmlns:a16="http://schemas.microsoft.com/office/drawing/2014/main" id="{115A327A-69E0-4427-90A6-E41E61D12A4A}"/>
+                <a16:creationId xmlns:a16="http://schemas.microsoft.com/office/drawing/2014/main" id="{DB4C60E9-BD9A-4281-9431-CA9CB25EB0EE}"/>
               </a:ext>
             </a:extLst>
           </p:cNvPr>
@@ -10428,7 +10426,7 @@
           <p:cNvPr id="14" name="">
             <a:extLst xmlns:a="http://schemas.openxmlformats.org/drawingml/2006/main">
               <a:ext uri="{FF2B5EF4-FFF2-40B4-BE49-F238E27FC236}">
-                <a16:creationId xmlns:a16="http://schemas.microsoft.com/office/drawing/2014/main" id="{575B359D-77C8-43F0-BC50-3B6EC7A3C20A}"/>
+                <a16:creationId xmlns:a16="http://schemas.microsoft.com/office/drawing/2014/main" id="{FE7270D8-3E8F-44AA-A26B-2FBC6EC86FDF}"/>
               </a:ext>
             </a:extLst>
           </p:cNvPr>
@@ -10461,7 +10459,7 @@
           <p:cNvPr id="15" name="">
             <a:extLst xmlns:a="http://schemas.openxmlformats.org/drawingml/2006/main">
               <a:ext uri="{FF2B5EF4-FFF2-40B4-BE49-F238E27FC236}">
-                <a16:creationId xmlns:a16="http://schemas.microsoft.com/office/drawing/2014/main" id="{3E3694EE-18E7-4D49-AB48-6D0963FF1262}"/>
+                <a16:creationId xmlns:a16="http://schemas.microsoft.com/office/drawing/2014/main" id="{7ED60CF2-3D14-4EAF-9A8C-86C34F50EA16}"/>
               </a:ext>
             </a:extLst>
           </p:cNvPr>
@@ -10525,7 +10523,7 @@
           <p:cNvPr id="16" name="">
             <a:extLst xmlns:a="http://schemas.openxmlformats.org/drawingml/2006/main">
               <a:ext uri="{FF2B5EF4-FFF2-40B4-BE49-F238E27FC236}">
-                <a16:creationId xmlns:a16="http://schemas.microsoft.com/office/drawing/2014/main" id="{E430BAF4-51A4-4F82-A68A-AB29F876F33F}"/>
+                <a16:creationId xmlns:a16="http://schemas.microsoft.com/office/drawing/2014/main" id="{60038E71-4EDB-4D64-9B87-EF96D43F6684}"/>
               </a:ext>
             </a:extLst>
           </p:cNvPr>
@@ -10589,7 +10587,7 @@
           <p:cNvPr id="17" name="">
             <a:extLst xmlns:a="http://schemas.openxmlformats.org/drawingml/2006/main">
               <a:ext uri="{FF2B5EF4-FFF2-40B4-BE49-F238E27FC236}">
-                <a16:creationId xmlns:a16="http://schemas.microsoft.com/office/drawing/2014/main" id="{EE86777C-BCEB-453B-988E-B5BD32762E13}"/>
+                <a16:creationId xmlns:a16="http://schemas.microsoft.com/office/drawing/2014/main" id="{B8131705-1AD9-43FE-8DC8-694C359A3B0D}"/>
               </a:ext>
             </a:extLst>
           </p:cNvPr>
@@ -10653,7 +10651,7 @@
           <p:cNvPr id="18" name="">
             <a:extLst xmlns:a="http://schemas.openxmlformats.org/drawingml/2006/main">
               <a:ext uri="{FF2B5EF4-FFF2-40B4-BE49-F238E27FC236}">
-                <a16:creationId xmlns:a16="http://schemas.microsoft.com/office/drawing/2014/main" id="{9F561B79-8841-4195-94A4-90516012CEC5}"/>
+                <a16:creationId xmlns:a16="http://schemas.microsoft.com/office/drawing/2014/main" id="{3E06234C-CBAD-46F4-836D-DA78CF79F7C0}"/>
               </a:ext>
             </a:extLst>
           </p:cNvPr>
@@ -10688,7 +10686,7 @@
           <p:cNvPr id="19" name="">
             <a:extLst xmlns:a="http://schemas.openxmlformats.org/drawingml/2006/main">
               <a:ext uri="{FF2B5EF4-FFF2-40B4-BE49-F238E27FC236}">
-                <a16:creationId xmlns:a16="http://schemas.microsoft.com/office/drawing/2014/main" id="{71D6FAA2-685F-4385-9099-D923ED14329B}"/>
+                <a16:creationId xmlns:a16="http://schemas.microsoft.com/office/drawing/2014/main" id="{A1B0A646-C34D-48F2-9391-D6AA9198814B}"/>
               </a:ext>
             </a:extLst>
           </p:cNvPr>
@@ -10752,7 +10750,7 @@
           <p:cNvPr id="20" name="">
             <a:extLst xmlns:a="http://schemas.openxmlformats.org/drawingml/2006/main">
               <a:ext uri="{FF2B5EF4-FFF2-40B4-BE49-F238E27FC236}">
-                <a16:creationId xmlns:a16="http://schemas.microsoft.com/office/drawing/2014/main" id="{D7E641C6-6ACD-49C7-82D5-C75C60AC7C6E}"/>
+                <a16:creationId xmlns:a16="http://schemas.microsoft.com/office/drawing/2014/main" id="{8FFBF674-7EA8-4D92-A063-5EFCD95C5E87}"/>
               </a:ext>
             </a:extLst>
           </p:cNvPr>
@@ -10816,7 +10814,7 @@
           <p:cNvPr id="21" name="">
             <a:extLst xmlns:a="http://schemas.openxmlformats.org/drawingml/2006/main">
               <a:ext uri="{FF2B5EF4-FFF2-40B4-BE49-F238E27FC236}">
-                <a16:creationId xmlns:a16="http://schemas.microsoft.com/office/drawing/2014/main" id="{90250F52-5986-4E05-967B-8D66E0316102}"/>
+                <a16:creationId xmlns:a16="http://schemas.microsoft.com/office/drawing/2014/main" id="{7B9B5DA0-48A2-45E1-98C0-528C5B158D2F}"/>
               </a:ext>
             </a:extLst>
           </p:cNvPr>
@@ -10880,7 +10878,7 @@
           <p:cNvPr id="22" name="">
             <a:extLst xmlns:a="http://schemas.openxmlformats.org/drawingml/2006/main">
               <a:ext uri="{FF2B5EF4-FFF2-40B4-BE49-F238E27FC236}">
-                <a16:creationId xmlns:a16="http://schemas.microsoft.com/office/drawing/2014/main" id="{7844CACF-9FA5-4ACE-8476-8AAE348ADE1E}"/>
+                <a16:creationId xmlns:a16="http://schemas.microsoft.com/office/drawing/2014/main" id="{0F93B459-DFA3-4D32-B9E2-F9436A31BF96}"/>
               </a:ext>
             </a:extLst>
           </p:cNvPr>
@@ -10915,7 +10913,7 @@
           <p:cNvPr id="23" name="">
             <a:extLst xmlns:a="http://schemas.openxmlformats.org/drawingml/2006/main">
               <a:ext uri="{FF2B5EF4-FFF2-40B4-BE49-F238E27FC236}">
-                <a16:creationId xmlns:a16="http://schemas.microsoft.com/office/drawing/2014/main" id="{F1ED7831-07A6-41BE-969A-E3EC76A8016C}"/>
+                <a16:creationId xmlns:a16="http://schemas.microsoft.com/office/drawing/2014/main" id="{FC71942E-296C-44BB-BAB3-C14F27D86695}"/>
               </a:ext>
             </a:extLst>
           </p:cNvPr>
@@ -10950,7 +10948,7 @@
           <p:cNvPr id="24" name="">
             <a:extLst xmlns:a="http://schemas.openxmlformats.org/drawingml/2006/main">
               <a:ext uri="{FF2B5EF4-FFF2-40B4-BE49-F238E27FC236}">
-                <a16:creationId xmlns:a16="http://schemas.microsoft.com/office/drawing/2014/main" id="{7A169DDA-A585-4D00-BF54-064006DDD1FA}"/>
+                <a16:creationId xmlns:a16="http://schemas.microsoft.com/office/drawing/2014/main" id="{3250CF04-5C92-4CB3-AA23-30D63E64238D}"/>
               </a:ext>
             </a:extLst>
           </p:cNvPr>
@@ -11014,7 +11012,7 @@
           <p:cNvPr id="25" name="">
             <a:extLst xmlns:a="http://schemas.openxmlformats.org/drawingml/2006/main">
               <a:ext uri="{FF2B5EF4-FFF2-40B4-BE49-F238E27FC236}">
-                <a16:creationId xmlns:a16="http://schemas.microsoft.com/office/drawing/2014/main" id="{4A4D5A74-8CFE-465B-B76F-0095353C7694}"/>
+                <a16:creationId xmlns:a16="http://schemas.microsoft.com/office/drawing/2014/main" id="{4E189598-A025-4EF8-8395-EC58839FC873}"/>
               </a:ext>
             </a:extLst>
           </p:cNvPr>
@@ -11078,7 +11076,7 @@
           <p:cNvPr id="26" name="">
             <a:extLst xmlns:a="http://schemas.openxmlformats.org/drawingml/2006/main">
               <a:ext uri="{FF2B5EF4-FFF2-40B4-BE49-F238E27FC236}">
-                <a16:creationId xmlns:a16="http://schemas.microsoft.com/office/drawing/2014/main" id="{02FE50E8-71AC-4CC5-B856-8C5600307344}"/>
+                <a16:creationId xmlns:a16="http://schemas.microsoft.com/office/drawing/2014/main" id="{D998F2E9-EB7B-4754-A974-8E8D83FBF37D}"/>
               </a:ext>
             </a:extLst>
           </p:cNvPr>
@@ -11142,7 +11140,7 @@
           <p:cNvPr id="27" name="">
             <a:extLst xmlns:a="http://schemas.openxmlformats.org/drawingml/2006/main">
               <a:ext uri="{FF2B5EF4-FFF2-40B4-BE49-F238E27FC236}">
-                <a16:creationId xmlns:a16="http://schemas.microsoft.com/office/drawing/2014/main" id="{E2F4804E-2F9F-44CA-83CD-0D9BAA2A53DB}"/>
+                <a16:creationId xmlns:a16="http://schemas.microsoft.com/office/drawing/2014/main" id="{72B3A67F-D729-4035-93FF-FD732C3BC2FC}"/>
               </a:ext>
             </a:extLst>
           </p:cNvPr>
@@ -11177,7 +11175,7 @@
           <p:cNvPr id="28" name="">
             <a:extLst xmlns:a="http://schemas.openxmlformats.org/drawingml/2006/main">
               <a:ext uri="{FF2B5EF4-FFF2-40B4-BE49-F238E27FC236}">
-                <a16:creationId xmlns:a16="http://schemas.microsoft.com/office/drawing/2014/main" id="{8EFF1FDA-D4EC-401D-965A-1117BF51FBB4}"/>
+                <a16:creationId xmlns:a16="http://schemas.microsoft.com/office/drawing/2014/main" id="{E5E9FF84-C069-483A-A4BD-0B99029E3CFA}"/>
               </a:ext>
             </a:extLst>
           </p:cNvPr>
@@ -11241,7 +11239,7 @@
           <p:cNvPr id="29" name="">
             <a:extLst xmlns:a="http://schemas.openxmlformats.org/drawingml/2006/main">
               <a:ext uri="{FF2B5EF4-FFF2-40B4-BE49-F238E27FC236}">
-                <a16:creationId xmlns:a16="http://schemas.microsoft.com/office/drawing/2014/main" id="{AC263964-4DBA-4496-A59B-4F63712B1F26}"/>
+                <a16:creationId xmlns:a16="http://schemas.microsoft.com/office/drawing/2014/main" id="{E1A75DD4-58B7-4552-B7C6-2CD3498A999D}"/>
               </a:ext>
             </a:extLst>
           </p:cNvPr>
@@ -11305,7 +11303,7 @@
           <p:cNvPr id="30" name="">
             <a:extLst xmlns:a="http://schemas.openxmlformats.org/drawingml/2006/main">
               <a:ext uri="{FF2B5EF4-FFF2-40B4-BE49-F238E27FC236}">
-                <a16:creationId xmlns:a16="http://schemas.microsoft.com/office/drawing/2014/main" id="{6D5CF601-F8AF-42C9-9C69-13830859E3ED}"/>
+                <a16:creationId xmlns:a16="http://schemas.microsoft.com/office/drawing/2014/main" id="{39ED75BA-7284-4975-8BAD-30590968A60C}"/>
               </a:ext>
             </a:extLst>
           </p:cNvPr>
@@ -11369,7 +11367,7 @@
           <p:cNvPr id="31" name="">
             <a:extLst xmlns:a="http://schemas.openxmlformats.org/drawingml/2006/main">
               <a:ext uri="{FF2B5EF4-FFF2-40B4-BE49-F238E27FC236}">
-                <a16:creationId xmlns:a16="http://schemas.microsoft.com/office/drawing/2014/main" id="{5D273E4A-941D-416D-A40F-A00EDD6807BB}"/>
+                <a16:creationId xmlns:a16="http://schemas.microsoft.com/office/drawing/2014/main" id="{F5AB78C6-B341-4DD4-BDB1-1F3951B12D4F}"/>
               </a:ext>
             </a:extLst>
           </p:cNvPr>
@@ -11404,7 +11402,7 @@
           <p:cNvPr id="32" name="">
             <a:extLst xmlns:a="http://schemas.openxmlformats.org/drawingml/2006/main">
               <a:ext uri="{FF2B5EF4-FFF2-40B4-BE49-F238E27FC236}">
-                <a16:creationId xmlns:a16="http://schemas.microsoft.com/office/drawing/2014/main" id="{77FB7D25-99E8-4D44-AFD7-BC0870966A75}"/>
+                <a16:creationId xmlns:a16="http://schemas.microsoft.com/office/drawing/2014/main" id="{02BCD1F1-E499-4EE6-AAB7-4609EEC91255}"/>
               </a:ext>
             </a:extLst>
           </p:cNvPr>
@@ -11439,7 +11437,7 @@
           <p:cNvPr id="33" name="">
             <a:extLst xmlns:a="http://schemas.openxmlformats.org/drawingml/2006/main">
               <a:ext uri="{FF2B5EF4-FFF2-40B4-BE49-F238E27FC236}">
-                <a16:creationId xmlns:a16="http://schemas.microsoft.com/office/drawing/2014/main" id="{73CD257C-15D3-4F9F-9DF3-863DB9EFF2BD}"/>
+                <a16:creationId xmlns:a16="http://schemas.microsoft.com/office/drawing/2014/main" id="{4338AB22-CD59-46DC-91D3-C5874A5C4AD4}"/>
               </a:ext>
             </a:extLst>
           </p:cNvPr>
@@ -11503,7 +11501,7 @@
           <p:cNvPr id="34" name="">
             <a:extLst xmlns:a="http://schemas.openxmlformats.org/drawingml/2006/main">
               <a:ext uri="{FF2B5EF4-FFF2-40B4-BE49-F238E27FC236}">
-                <a16:creationId xmlns:a16="http://schemas.microsoft.com/office/drawing/2014/main" id="{9EB600A6-B80C-415E-B57A-2F4A4D47B0D5}"/>
+                <a16:creationId xmlns:a16="http://schemas.microsoft.com/office/drawing/2014/main" id="{63AF9A72-B946-4769-A7A4-F08D4424CCF7}"/>
               </a:ext>
             </a:extLst>
           </p:cNvPr>
@@ -11567,7 +11565,7 @@
           <p:cNvPr id="35" name="">
             <a:extLst xmlns:a="http://schemas.openxmlformats.org/drawingml/2006/main">
               <a:ext uri="{FF2B5EF4-FFF2-40B4-BE49-F238E27FC236}">
-                <a16:creationId xmlns:a16="http://schemas.microsoft.com/office/drawing/2014/main" id="{5B82B062-4D8F-4FF3-B1AF-14957E3B256F}"/>
+                <a16:creationId xmlns:a16="http://schemas.microsoft.com/office/drawing/2014/main" id="{CE09FD54-C716-4F9A-AE92-B9799BACE5C6}"/>
               </a:ext>
             </a:extLst>
           </p:cNvPr>
@@ -11631,7 +11629,7 @@
           <p:cNvPr id="36" name="">
             <a:extLst xmlns:a="http://schemas.openxmlformats.org/drawingml/2006/main">
               <a:ext uri="{FF2B5EF4-FFF2-40B4-BE49-F238E27FC236}">
-                <a16:creationId xmlns:a16="http://schemas.microsoft.com/office/drawing/2014/main" id="{08F00B23-515D-4DE3-A996-8B2A48819863}"/>
+                <a16:creationId xmlns:a16="http://schemas.microsoft.com/office/drawing/2014/main" id="{1134D4EC-8E07-45E0-94E6-8C0CD1199AA5}"/>
               </a:ext>
             </a:extLst>
           </p:cNvPr>
@@ -11666,7 +11664,7 @@
           <p:cNvPr id="37" name="">
             <a:extLst xmlns:a="http://schemas.openxmlformats.org/drawingml/2006/main">
               <a:ext uri="{FF2B5EF4-FFF2-40B4-BE49-F238E27FC236}">
-                <a16:creationId xmlns:a16="http://schemas.microsoft.com/office/drawing/2014/main" id="{6ED4E734-C9E9-4CFE-A1C4-486143D6F3AE}"/>
+                <a16:creationId xmlns:a16="http://schemas.microsoft.com/office/drawing/2014/main" id="{1FAF6D70-8976-40E8-A7B0-0C1222AEF40B}"/>
               </a:ext>
             </a:extLst>
           </p:cNvPr>
@@ -11730,7 +11728,7 @@
           <p:cNvPr id="38" name="">
             <a:extLst xmlns:a="http://schemas.openxmlformats.org/drawingml/2006/main">
               <a:ext uri="{FF2B5EF4-FFF2-40B4-BE49-F238E27FC236}">
-                <a16:creationId xmlns:a16="http://schemas.microsoft.com/office/drawing/2014/main" id="{ABFA9F3E-0EC0-4C6A-8E2D-62DF1C656D9E}"/>
+                <a16:creationId xmlns:a16="http://schemas.microsoft.com/office/drawing/2014/main" id="{BC6D3022-7D3B-4ACC-BAC4-1CED9A86E8A0}"/>
               </a:ext>
             </a:extLst>
           </p:cNvPr>
@@ -11794,7 +11792,7 @@
           <p:cNvPr id="39" name="">
             <a:extLst xmlns:a="http://schemas.openxmlformats.org/drawingml/2006/main">
               <a:ext uri="{FF2B5EF4-FFF2-40B4-BE49-F238E27FC236}">
-                <a16:creationId xmlns:a16="http://schemas.microsoft.com/office/drawing/2014/main" id="{559C816D-0248-4574-8DDB-862C14D02D12}"/>
+                <a16:creationId xmlns:a16="http://schemas.microsoft.com/office/drawing/2014/main" id="{5C93B7BB-DBF2-4508-B664-458D04118CF4}"/>
               </a:ext>
             </a:extLst>
           </p:cNvPr>
@@ -11858,7 +11856,7 @@
           <p:cNvPr id="40" name="">
             <a:extLst xmlns:a="http://schemas.openxmlformats.org/drawingml/2006/main">
               <a:ext uri="{FF2B5EF4-FFF2-40B4-BE49-F238E27FC236}">
-                <a16:creationId xmlns:a16="http://schemas.microsoft.com/office/drawing/2014/main" id="{E65EF09D-07B6-4904-9454-AE928D9F320F}"/>
+                <a16:creationId xmlns:a16="http://schemas.microsoft.com/office/drawing/2014/main" id="{78DD95D8-7D2E-439F-A6A9-0F80D642A402}"/>
               </a:ext>
             </a:extLst>
           </p:cNvPr>
@@ -11893,7 +11891,7 @@
           <p:cNvPr id="41" name="">
             <a:extLst xmlns:a="http://schemas.openxmlformats.org/drawingml/2006/main">
               <a:ext uri="{FF2B5EF4-FFF2-40B4-BE49-F238E27FC236}">
-                <a16:creationId xmlns:a16="http://schemas.microsoft.com/office/drawing/2014/main" id="{CC1D9355-8946-4765-BC72-9EF39AE14494}"/>
+                <a16:creationId xmlns:a16="http://schemas.microsoft.com/office/drawing/2014/main" id="{43A34AB3-7D16-48CF-9843-1DB57165F43B}"/>
               </a:ext>
             </a:extLst>
           </p:cNvPr>
@@ -11928,7 +11926,7 @@
           <p:cNvPr id="42" name="">
             <a:extLst xmlns:a="http://schemas.openxmlformats.org/drawingml/2006/main">
               <a:ext uri="{FF2B5EF4-FFF2-40B4-BE49-F238E27FC236}">
-                <a16:creationId xmlns:a16="http://schemas.microsoft.com/office/drawing/2014/main" id="{73E75B2B-E39D-44CE-84A9-2E4D01B3D2D2}"/>
+                <a16:creationId xmlns:a16="http://schemas.microsoft.com/office/drawing/2014/main" id="{45D949C1-2E16-4F41-87D4-930D3F6A9B0E}"/>
               </a:ext>
             </a:extLst>
           </p:cNvPr>
@@ -11963,7 +11961,7 @@
           <p:cNvPr id="43" name="kicker-02-marker">
             <a:extLst xmlns:a="http://schemas.openxmlformats.org/drawingml/2006/main">
               <a:ext uri="{FF2B5EF4-FFF2-40B4-BE49-F238E27FC236}">
-                <a16:creationId xmlns:a16="http://schemas.microsoft.com/office/drawing/2014/main" id="{BC8BD787-B1FD-4695-BBCE-BB17B53A73D3}"/>
+                <a16:creationId xmlns:a16="http://schemas.microsoft.com/office/drawing/2014/main" id="{B66006AB-AF8E-4BD9-B529-0FC096456FCE}"/>
               </a:ext>
             </a:extLst>
           </p:cNvPr>
@@ -11998,7 +11996,7 @@
           <p:cNvPr id="44" name="kicker-02-label">
             <a:extLst xmlns:a="http://schemas.openxmlformats.org/drawingml/2006/main">
               <a:ext uri="{FF2B5EF4-FFF2-40B4-BE49-F238E27FC236}">
-                <a16:creationId xmlns:a16="http://schemas.microsoft.com/office/drawing/2014/main" id="{2DF0225A-745B-43CA-A2D2-B29E83851DBA}"/>
+                <a16:creationId xmlns:a16="http://schemas.microsoft.com/office/drawing/2014/main" id="{3A4AEA4C-7324-43F7-B3DD-EAA4E6B9AE9F}"/>
               </a:ext>
             </a:extLst>
           </p:cNvPr>
@@ -12062,7 +12060,7 @@
           <p:cNvPr id="45" name="">
             <a:extLst xmlns:a="http://schemas.openxmlformats.org/drawingml/2006/main">
               <a:ext uri="{FF2B5EF4-FFF2-40B4-BE49-F238E27FC236}">
-                <a16:creationId xmlns:a16="http://schemas.microsoft.com/office/drawing/2014/main" id="{21204478-EE4C-4A2B-9A03-6C2DA56FB558}"/>
+                <a16:creationId xmlns:a16="http://schemas.microsoft.com/office/drawing/2014/main" id="{A34361D8-20C4-4BD6-B0F9-890ABAAAEEA5}"/>
               </a:ext>
             </a:extLst>
           </p:cNvPr>
@@ -12126,7 +12124,7 @@
           <p:cNvPr id="46" name="">
             <a:extLst xmlns:a="http://schemas.openxmlformats.org/drawingml/2006/main">
               <a:ext uri="{FF2B5EF4-FFF2-40B4-BE49-F238E27FC236}">
-                <a16:creationId xmlns:a16="http://schemas.microsoft.com/office/drawing/2014/main" id="{C55A2184-89B0-4167-8AA9-116AF3FB065F}"/>
+                <a16:creationId xmlns:a16="http://schemas.microsoft.com/office/drawing/2014/main" id="{E19FB2B9-B881-42B8-B360-3254B2EB9245}"/>
               </a:ext>
             </a:extLst>
           </p:cNvPr>
@@ -12190,7 +12188,7 @@
           <p:cNvPr id="47" name="">
             <a:extLst xmlns:a="http://schemas.openxmlformats.org/drawingml/2006/main">
               <a:ext uri="{FF2B5EF4-FFF2-40B4-BE49-F238E27FC236}">
-                <a16:creationId xmlns:a16="http://schemas.microsoft.com/office/drawing/2014/main" id="{3FC06139-A959-4C52-B356-92E476415931}"/>
+                <a16:creationId xmlns:a16="http://schemas.microsoft.com/office/drawing/2014/main" id="{695C7C2F-048E-4062-A6D8-0589D8CC7C58}"/>
               </a:ext>
             </a:extLst>
           </p:cNvPr>
@@ -12225,7 +12223,7 @@
           <p:cNvPr id="48" name="">
             <a:extLst xmlns:a="http://schemas.openxmlformats.org/drawingml/2006/main">
               <a:ext uri="{FF2B5EF4-FFF2-40B4-BE49-F238E27FC236}">
-                <a16:creationId xmlns:a16="http://schemas.microsoft.com/office/drawing/2014/main" id="{2FDC998D-DE41-4E12-8122-30E9A1665270}"/>
+                <a16:creationId xmlns:a16="http://schemas.microsoft.com/office/drawing/2014/main" id="{64EE9188-4E75-4D74-8C74-DFFD1103FC16}"/>
               </a:ext>
             </a:extLst>
           </p:cNvPr>
@@ -12260,7 +12258,7 @@
           <p:cNvPr id="49" name="">
             <a:extLst xmlns:a="http://schemas.openxmlformats.org/drawingml/2006/main">
               <a:ext uri="{FF2B5EF4-FFF2-40B4-BE49-F238E27FC236}">
-                <a16:creationId xmlns:a16="http://schemas.microsoft.com/office/drawing/2014/main" id="{0079A14C-F24B-48AE-B2EE-68EB139FF331}"/>
+                <a16:creationId xmlns:a16="http://schemas.microsoft.com/office/drawing/2014/main" id="{7E4D5D67-9F0F-4FFA-BAC5-0FD8550CA0B1}"/>
               </a:ext>
             </a:extLst>
           </p:cNvPr>
@@ -12295,7 +12293,7 @@
           <p:cNvPr id="50" name="">
             <a:extLst xmlns:a="http://schemas.openxmlformats.org/drawingml/2006/main">
               <a:ext uri="{FF2B5EF4-FFF2-40B4-BE49-F238E27FC236}">
-                <a16:creationId xmlns:a16="http://schemas.microsoft.com/office/drawing/2014/main" id="{16EE5116-2115-415A-840F-A38CC33FE916}"/>
+                <a16:creationId xmlns:a16="http://schemas.microsoft.com/office/drawing/2014/main" id="{2D909030-9B6F-4674-AF7D-BE0DD53DE61A}"/>
               </a:ext>
             </a:extLst>
           </p:cNvPr>
@@ -12330,7 +12328,7 @@
           <p:cNvPr id="51" name="">
             <a:extLst xmlns:a="http://schemas.openxmlformats.org/drawingml/2006/main">
               <a:ext uri="{FF2B5EF4-FFF2-40B4-BE49-F238E27FC236}">
-                <a16:creationId xmlns:a16="http://schemas.microsoft.com/office/drawing/2014/main" id="{B3A28050-F01B-4AD0-9C26-194130FD3053}"/>
+                <a16:creationId xmlns:a16="http://schemas.microsoft.com/office/drawing/2014/main" id="{07314158-3E99-42FC-A736-5372C3D02D6B}"/>
               </a:ext>
             </a:extLst>
           </p:cNvPr>
@@ -12394,7 +12392,7 @@
           <p:cNvPr id="52" name="">
             <a:extLst xmlns:a="http://schemas.openxmlformats.org/drawingml/2006/main">
               <a:ext uri="{FF2B5EF4-FFF2-40B4-BE49-F238E27FC236}">
-                <a16:creationId xmlns:a16="http://schemas.microsoft.com/office/drawing/2014/main" id="{FA70128A-C213-4867-960B-3160D7609E99}"/>
+                <a16:creationId xmlns:a16="http://schemas.microsoft.com/office/drawing/2014/main" id="{1CF9D48C-D606-45BC-95DC-FC8A98D03629}"/>
               </a:ext>
             </a:extLst>
           </p:cNvPr>
@@ -12458,7 +12456,7 @@
           <p:cNvPr id="53" name="">
             <a:extLst xmlns:a="http://schemas.openxmlformats.org/drawingml/2006/main">
               <a:ext uri="{FF2B5EF4-FFF2-40B4-BE49-F238E27FC236}">
-                <a16:creationId xmlns:a16="http://schemas.microsoft.com/office/drawing/2014/main" id="{466F132A-BE7F-4CE8-9E3C-37D63E0B52C4}"/>
+                <a16:creationId xmlns:a16="http://schemas.microsoft.com/office/drawing/2014/main" id="{3A27750D-A9E7-4D7A-BA5B-A3E879E174AE}"/>
               </a:ext>
             </a:extLst>
           </p:cNvPr>
@@ -12520,7 +12518,7 @@
     </p:spTree>
     <p:extLst>
       <p:ext uri="{BB962C8B-B14F-4D97-AF65-F5344CB8AC3E}">
-        <p14:creationId xmlns:p14="http://schemas.microsoft.com/office/powerpoint/2010/main" val="1907945931"/>
+        <p14:creationId xmlns:p14="http://schemas.microsoft.com/office/powerpoint/2010/main" val="1245075031"/>
       </p:ext>
     </p:extLst>
   </p:cSld>
@@ -12544,7 +12542,7 @@
           <p:cNvPr id="1" name="">
             <a:extLst xmlns:a="http://schemas.openxmlformats.org/drawingml/2006/main">
               <a:ext uri="{FF2B5EF4-FFF2-40B4-BE49-F238E27FC236}">
-                <a16:creationId xmlns:a16="http://schemas.microsoft.com/office/drawing/2014/main" id="{ABC0DB29-10B1-4D54-BE50-68B5812EBAC7}"/>
+                <a16:creationId xmlns:a16="http://schemas.microsoft.com/office/drawing/2014/main" id="{07C2F40B-37B7-42BF-A832-E8ED4F56A365}"/>
               </a:ext>
             </a:extLst>
           </p:cNvPr>
@@ -12579,7 +12577,7 @@
           <p:cNvPr id="2" name="">
             <a:extLst xmlns:a="http://schemas.openxmlformats.org/drawingml/2006/main">
               <a:ext uri="{FF2B5EF4-FFF2-40B4-BE49-F238E27FC236}">
-                <a16:creationId xmlns:a16="http://schemas.microsoft.com/office/drawing/2014/main" id="{D80954CD-0937-4CE2-968F-1C12C28B22B2}"/>
+                <a16:creationId xmlns:a16="http://schemas.microsoft.com/office/drawing/2014/main" id="{E313926A-CD3A-44C4-B275-F54E6A206DAF}"/>
               </a:ext>
             </a:extLst>
           </p:cNvPr>
@@ -12614,7 +12612,7 @@
           <p:cNvPr id="3" name="">
             <a:extLst xmlns:a="http://schemas.openxmlformats.org/drawingml/2006/main">
               <a:ext uri="{FF2B5EF4-FFF2-40B4-BE49-F238E27FC236}">
-                <a16:creationId xmlns:a16="http://schemas.microsoft.com/office/drawing/2014/main" id="{EC5A7C11-9AEE-4739-BDDE-386BECEE14F7}"/>
+                <a16:creationId xmlns:a16="http://schemas.microsoft.com/office/drawing/2014/main" id="{0A94B542-4C8B-4342-94CA-46D174270A1A}"/>
               </a:ext>
             </a:extLst>
           </p:cNvPr>
@@ -12649,7 +12647,7 @@
           <p:cNvPr id="4" name="kicker-02-marker">
             <a:extLst xmlns:a="http://schemas.openxmlformats.org/drawingml/2006/main">
               <a:ext uri="{FF2B5EF4-FFF2-40B4-BE49-F238E27FC236}">
-                <a16:creationId xmlns:a16="http://schemas.microsoft.com/office/drawing/2014/main" id="{930489AC-EC69-40D1-A021-85F407FD9FB6}"/>
+                <a16:creationId xmlns:a16="http://schemas.microsoft.com/office/drawing/2014/main" id="{5DA60D13-C157-445A-BB46-C9E2C1F17C9E}"/>
               </a:ext>
             </a:extLst>
           </p:cNvPr>
@@ -12684,7 +12682,7 @@
           <p:cNvPr id="5" name="kicker-02-label">
             <a:extLst xmlns:a="http://schemas.openxmlformats.org/drawingml/2006/main">
               <a:ext uri="{FF2B5EF4-FFF2-40B4-BE49-F238E27FC236}">
-                <a16:creationId xmlns:a16="http://schemas.microsoft.com/office/drawing/2014/main" id="{B2CBBB08-276F-4489-A5DB-8D4146F40687}"/>
+                <a16:creationId xmlns:a16="http://schemas.microsoft.com/office/drawing/2014/main" id="{866DD951-E6D0-483D-A34A-1EAD4F83FFC4}"/>
               </a:ext>
             </a:extLst>
           </p:cNvPr>
@@ -12748,7 +12746,7 @@
           <p:cNvPr id="6" name="">
             <a:extLst xmlns:a="http://schemas.openxmlformats.org/drawingml/2006/main">
               <a:ext uri="{FF2B5EF4-FFF2-40B4-BE49-F238E27FC236}">
-                <a16:creationId xmlns:a16="http://schemas.microsoft.com/office/drawing/2014/main" id="{455E058F-8DF4-4247-A55E-378AE5A7E1CC}"/>
+                <a16:creationId xmlns:a16="http://schemas.microsoft.com/office/drawing/2014/main" id="{79EF78C8-BF7A-44D5-A64D-585F495DA78F}"/>
               </a:ext>
             </a:extLst>
           </p:cNvPr>
@@ -12812,7 +12810,7 @@
           <p:cNvPr id="7" name="">
             <a:extLst xmlns:a="http://schemas.openxmlformats.org/drawingml/2006/main">
               <a:ext uri="{FF2B5EF4-FFF2-40B4-BE49-F238E27FC236}">
-                <a16:creationId xmlns:a16="http://schemas.microsoft.com/office/drawing/2014/main" id="{938E5F36-DF1F-44A3-A47B-B39AE9CD20D3}"/>
+                <a16:creationId xmlns:a16="http://schemas.microsoft.com/office/drawing/2014/main" id="{C929690E-928A-4951-893F-BCD5983A8B65}"/>
               </a:ext>
             </a:extLst>
           </p:cNvPr>
@@ -12876,7 +12874,7 @@
           <p:cNvPr id="8" name="">
             <a:extLst xmlns:a="http://schemas.openxmlformats.org/drawingml/2006/main">
               <a:ext uri="{FF2B5EF4-FFF2-40B4-BE49-F238E27FC236}">
-                <a16:creationId xmlns:a16="http://schemas.microsoft.com/office/drawing/2014/main" id="{3E2E7F96-5146-426F-A0DB-E865B3E8B5BC}"/>
+                <a16:creationId xmlns:a16="http://schemas.microsoft.com/office/drawing/2014/main" id="{B46BD852-1049-4F7B-B5AE-6F1B082883EA}"/>
               </a:ext>
             </a:extLst>
           </p:cNvPr>
@@ -12911,7 +12909,7 @@
           <p:cNvPr id="9" name="">
             <a:extLst xmlns:a="http://schemas.openxmlformats.org/drawingml/2006/main">
               <a:ext uri="{FF2B5EF4-FFF2-40B4-BE49-F238E27FC236}">
-                <a16:creationId xmlns:a16="http://schemas.microsoft.com/office/drawing/2014/main" id="{040ACA76-CAAA-47D6-B32B-3C88993FC949}"/>
+                <a16:creationId xmlns:a16="http://schemas.microsoft.com/office/drawing/2014/main" id="{1F40F0E2-8A32-47F6-8211-467B33EDB6BF}"/>
               </a:ext>
             </a:extLst>
           </p:cNvPr>
@@ -12975,7 +12973,7 @@
           <p:cNvPr id="10" name="">
             <a:extLst xmlns:a="http://schemas.openxmlformats.org/drawingml/2006/main">
               <a:ext uri="{FF2B5EF4-FFF2-40B4-BE49-F238E27FC236}">
-                <a16:creationId xmlns:a16="http://schemas.microsoft.com/office/drawing/2014/main" id="{0AA0B671-0D60-4C8F-B899-162737C73DBD}"/>
+                <a16:creationId xmlns:a16="http://schemas.microsoft.com/office/drawing/2014/main" id="{1E0851D5-30DD-49A8-8939-9E98BA23527B}"/>
               </a:ext>
             </a:extLst>
           </p:cNvPr>
@@ -13039,7 +13037,7 @@
           <p:cNvPr id="11" name="">
             <a:extLst xmlns:a="http://schemas.openxmlformats.org/drawingml/2006/main">
               <a:ext uri="{FF2B5EF4-FFF2-40B4-BE49-F238E27FC236}">
-                <a16:creationId xmlns:a16="http://schemas.microsoft.com/office/drawing/2014/main" id="{FB431627-D5F9-4C7B-A57B-83D3562975C8}"/>
+                <a16:creationId xmlns:a16="http://schemas.microsoft.com/office/drawing/2014/main" id="{70A9110D-087D-42AF-B5B3-DB211673D127}"/>
               </a:ext>
             </a:extLst>
           </p:cNvPr>
@@ -13103,7 +13101,7 @@
           <p:cNvPr id="12" name="">
             <a:extLst xmlns:a="http://schemas.openxmlformats.org/drawingml/2006/main">
               <a:ext uri="{FF2B5EF4-FFF2-40B4-BE49-F238E27FC236}">
-                <a16:creationId xmlns:a16="http://schemas.microsoft.com/office/drawing/2014/main" id="{143CD487-8C17-4547-9532-5110913FE947}"/>
+                <a16:creationId xmlns:a16="http://schemas.microsoft.com/office/drawing/2014/main" id="{AA7EDB87-E37F-41F9-BD0D-78D5C62D87F4}"/>
               </a:ext>
             </a:extLst>
           </p:cNvPr>
@@ -13138,7 +13136,7 @@
           <p:cNvPr id="13" name="">
             <a:extLst xmlns:a="http://schemas.openxmlformats.org/drawingml/2006/main">
               <a:ext uri="{FF2B5EF4-FFF2-40B4-BE49-F238E27FC236}">
-                <a16:creationId xmlns:a16="http://schemas.microsoft.com/office/drawing/2014/main" id="{03E14853-C7AC-4A0F-98D7-28CCA4D70224}"/>
+                <a16:creationId xmlns:a16="http://schemas.microsoft.com/office/drawing/2014/main" id="{5AE60808-099B-4CFF-91EE-5D054B2CD88F}"/>
               </a:ext>
             </a:extLst>
           </p:cNvPr>
@@ -13171,7 +13169,7 @@
           <p:cNvPr id="14" name="">
             <a:extLst xmlns:a="http://schemas.openxmlformats.org/drawingml/2006/main">
               <a:ext uri="{FF2B5EF4-FFF2-40B4-BE49-F238E27FC236}">
-                <a16:creationId xmlns:a16="http://schemas.microsoft.com/office/drawing/2014/main" id="{1E230448-74EE-420B-96A9-0700B6C6BCCB}"/>
+                <a16:creationId xmlns:a16="http://schemas.microsoft.com/office/drawing/2014/main" id="{C90D3DE0-0F3C-407E-87FA-C6DD7D070B2D}"/>
               </a:ext>
             </a:extLst>
           </p:cNvPr>
@@ -13206,7 +13204,7 @@
           <p:cNvPr id="15" name="">
             <a:extLst xmlns:a="http://schemas.openxmlformats.org/drawingml/2006/main">
               <a:ext uri="{FF2B5EF4-FFF2-40B4-BE49-F238E27FC236}">
-                <a16:creationId xmlns:a16="http://schemas.microsoft.com/office/drawing/2014/main" id="{3E69AF97-87F4-4AE5-BB90-DF2023BCA6EE}"/>
+                <a16:creationId xmlns:a16="http://schemas.microsoft.com/office/drawing/2014/main" id="{152194E6-EA01-4DF6-BD47-0670D0A52339}"/>
               </a:ext>
             </a:extLst>
           </p:cNvPr>
@@ -13270,7 +13268,7 @@
           <p:cNvPr id="16" name="">
             <a:extLst xmlns:a="http://schemas.openxmlformats.org/drawingml/2006/main">
               <a:ext uri="{FF2B5EF4-FFF2-40B4-BE49-F238E27FC236}">
-                <a16:creationId xmlns:a16="http://schemas.microsoft.com/office/drawing/2014/main" id="{E2180083-3435-41AD-8C98-D4E4D7A30314}"/>
+                <a16:creationId xmlns:a16="http://schemas.microsoft.com/office/drawing/2014/main" id="{75276784-56A2-4ADD-9035-D4B2D8C3A178}"/>
               </a:ext>
             </a:extLst>
           </p:cNvPr>
@@ -13305,7 +13303,7 @@
           <p:cNvPr id="17" name="">
             <a:extLst xmlns:a="http://schemas.openxmlformats.org/drawingml/2006/main">
               <a:ext uri="{FF2B5EF4-FFF2-40B4-BE49-F238E27FC236}">
-                <a16:creationId xmlns:a16="http://schemas.microsoft.com/office/drawing/2014/main" id="{9DAF625C-4B1B-4777-BECF-4E422462B339}"/>
+                <a16:creationId xmlns:a16="http://schemas.microsoft.com/office/drawing/2014/main" id="{B8E85E58-80F2-4D22-A856-0056CF9B9EFC}"/>
               </a:ext>
             </a:extLst>
           </p:cNvPr>
@@ -13369,7 +13367,7 @@
           <p:cNvPr id="18" name="">
             <a:extLst xmlns:a="http://schemas.openxmlformats.org/drawingml/2006/main">
               <a:ext uri="{FF2B5EF4-FFF2-40B4-BE49-F238E27FC236}">
-                <a16:creationId xmlns:a16="http://schemas.microsoft.com/office/drawing/2014/main" id="{52BE7609-4F62-4579-84BF-90FE7CA4344E}"/>
+                <a16:creationId xmlns:a16="http://schemas.microsoft.com/office/drawing/2014/main" id="{4680B629-56DA-433F-BA0A-BB6AF1A75AB2}"/>
               </a:ext>
             </a:extLst>
           </p:cNvPr>
@@ -13404,7 +13402,7 @@
           <p:cNvPr id="19" name="">
             <a:extLst xmlns:a="http://schemas.openxmlformats.org/drawingml/2006/main">
               <a:ext uri="{FF2B5EF4-FFF2-40B4-BE49-F238E27FC236}">
-                <a16:creationId xmlns:a16="http://schemas.microsoft.com/office/drawing/2014/main" id="{A0CC7031-BC99-4687-AB57-9665CC232DE7}"/>
+                <a16:creationId xmlns:a16="http://schemas.microsoft.com/office/drawing/2014/main" id="{57220E6C-5E5B-4C74-8C9F-FD90A21D5E3F}"/>
               </a:ext>
             </a:extLst>
           </p:cNvPr>
@@ -13468,7 +13466,7 @@
           <p:cNvPr id="20" name="">
             <a:extLst xmlns:a="http://schemas.openxmlformats.org/drawingml/2006/main">
               <a:ext uri="{FF2B5EF4-FFF2-40B4-BE49-F238E27FC236}">
-                <a16:creationId xmlns:a16="http://schemas.microsoft.com/office/drawing/2014/main" id="{F965B278-0718-431C-91D9-3DE499093781}"/>
+                <a16:creationId xmlns:a16="http://schemas.microsoft.com/office/drawing/2014/main" id="{BF7FC2C2-C91D-4D5E-8D3A-A5A331F5D4C2}"/>
               </a:ext>
             </a:extLst>
           </p:cNvPr>
@@ -13503,7 +13501,7 @@
           <p:cNvPr id="21" name="">
             <a:extLst xmlns:a="http://schemas.openxmlformats.org/drawingml/2006/main">
               <a:ext uri="{FF2B5EF4-FFF2-40B4-BE49-F238E27FC236}">
-                <a16:creationId xmlns:a16="http://schemas.microsoft.com/office/drawing/2014/main" id="{4C28B0E2-5979-4985-8CEB-5BF2622A31DB}"/>
+                <a16:creationId xmlns:a16="http://schemas.microsoft.com/office/drawing/2014/main" id="{2D86CCFE-B779-491E-9F45-0E01F2DE43A5}"/>
               </a:ext>
             </a:extLst>
           </p:cNvPr>
@@ -13567,7 +13565,7 @@
           <p:cNvPr id="22" name="">
             <a:extLst xmlns:a="http://schemas.openxmlformats.org/drawingml/2006/main">
               <a:ext uri="{FF2B5EF4-FFF2-40B4-BE49-F238E27FC236}">
-                <a16:creationId xmlns:a16="http://schemas.microsoft.com/office/drawing/2014/main" id="{1F38F7FF-5DE2-4A74-A1A2-FC4B97B92459}"/>
+                <a16:creationId xmlns:a16="http://schemas.microsoft.com/office/drawing/2014/main" id="{78AD2BC2-E9BC-44FE-80E0-25766BD1B1DF}"/>
               </a:ext>
             </a:extLst>
           </p:cNvPr>
@@ -13602,7 +13600,7 @@
           <p:cNvPr id="23" name="">
             <a:extLst xmlns:a="http://schemas.openxmlformats.org/drawingml/2006/main">
               <a:ext uri="{FF2B5EF4-FFF2-40B4-BE49-F238E27FC236}">
-                <a16:creationId xmlns:a16="http://schemas.microsoft.com/office/drawing/2014/main" id="{826B6E31-268C-4517-9C84-EAD6543F6F18}"/>
+                <a16:creationId xmlns:a16="http://schemas.microsoft.com/office/drawing/2014/main" id="{0E6F998A-9635-448E-980F-7BB6E0D5AC52}"/>
               </a:ext>
             </a:extLst>
           </p:cNvPr>
@@ -13666,7 +13664,7 @@
           <p:cNvPr id="24" name="">
             <a:extLst xmlns:a="http://schemas.openxmlformats.org/drawingml/2006/main">
               <a:ext uri="{FF2B5EF4-FFF2-40B4-BE49-F238E27FC236}">
-                <a16:creationId xmlns:a16="http://schemas.microsoft.com/office/drawing/2014/main" id="{209F8943-E20D-4A6E-B15C-7811C4FE5CDF}"/>
+                <a16:creationId xmlns:a16="http://schemas.microsoft.com/office/drawing/2014/main" id="{FFB3FBC0-9E1B-4B33-9074-FCF5F39A3423}"/>
               </a:ext>
             </a:extLst>
           </p:cNvPr>
@@ -13701,7 +13699,7 @@
           <p:cNvPr id="25" name="">
             <a:extLst xmlns:a="http://schemas.openxmlformats.org/drawingml/2006/main">
               <a:ext uri="{FF2B5EF4-FFF2-40B4-BE49-F238E27FC236}">
-                <a16:creationId xmlns:a16="http://schemas.microsoft.com/office/drawing/2014/main" id="{EFB6BBEC-A915-4F8B-9B6A-353F97C15EBA}"/>
+                <a16:creationId xmlns:a16="http://schemas.microsoft.com/office/drawing/2014/main" id="{AB2ADC03-D720-47B7-97C5-7185750820FF}"/>
               </a:ext>
             </a:extLst>
           </p:cNvPr>
@@ -13765,7 +13763,7 @@
           <p:cNvPr id="26" name="">
             <a:extLst xmlns:a="http://schemas.openxmlformats.org/drawingml/2006/main">
               <a:ext uri="{FF2B5EF4-FFF2-40B4-BE49-F238E27FC236}">
-                <a16:creationId xmlns:a16="http://schemas.microsoft.com/office/drawing/2014/main" id="{F37F6CC2-A3E9-480C-956F-8C46DF8D412B}"/>
+                <a16:creationId xmlns:a16="http://schemas.microsoft.com/office/drawing/2014/main" id="{BF660D76-482B-48D2-B678-4D62838AFD8D}"/>
               </a:ext>
             </a:extLst>
           </p:cNvPr>
@@ -13800,7 +13798,7 @@
           <p:cNvPr id="27" name="">
             <a:extLst xmlns:a="http://schemas.openxmlformats.org/drawingml/2006/main">
               <a:ext uri="{FF2B5EF4-FFF2-40B4-BE49-F238E27FC236}">
-                <a16:creationId xmlns:a16="http://schemas.microsoft.com/office/drawing/2014/main" id="{04DF7C5B-FB8C-4BF3-A088-E6E26C79A000}"/>
+                <a16:creationId xmlns:a16="http://schemas.microsoft.com/office/drawing/2014/main" id="{C03E50C5-21A7-4AFE-B6E0-2A229180CA50}"/>
               </a:ext>
             </a:extLst>
           </p:cNvPr>
@@ -13864,7 +13862,7 @@
           <p:cNvPr id="28" name="">
             <a:extLst xmlns:a="http://schemas.openxmlformats.org/drawingml/2006/main">
               <a:ext uri="{FF2B5EF4-FFF2-40B4-BE49-F238E27FC236}">
-                <a16:creationId xmlns:a16="http://schemas.microsoft.com/office/drawing/2014/main" id="{02B54F63-1C08-4C65-8221-C62F335BDAC8}"/>
+                <a16:creationId xmlns:a16="http://schemas.microsoft.com/office/drawing/2014/main" id="{F6B9F040-4F4D-4C5F-9778-F34BD12FB949}"/>
               </a:ext>
             </a:extLst>
           </p:cNvPr>
@@ -13897,7 +13895,7 @@
           <p:cNvPr id="29" name="">
             <a:extLst xmlns:a="http://schemas.openxmlformats.org/drawingml/2006/main">
               <a:ext uri="{FF2B5EF4-FFF2-40B4-BE49-F238E27FC236}">
-                <a16:creationId xmlns:a16="http://schemas.microsoft.com/office/drawing/2014/main" id="{6622BA94-8362-4F34-95EC-2C8B6372FF09}"/>
+                <a16:creationId xmlns:a16="http://schemas.microsoft.com/office/drawing/2014/main" id="{C2C9B75F-C46E-4830-B136-36D65AEE123C}"/>
               </a:ext>
             </a:extLst>
           </p:cNvPr>
@@ -13932,7 +13930,7 @@
           <p:cNvPr id="30" name="">
             <a:extLst xmlns:a="http://schemas.openxmlformats.org/drawingml/2006/main">
               <a:ext uri="{FF2B5EF4-FFF2-40B4-BE49-F238E27FC236}">
-                <a16:creationId xmlns:a16="http://schemas.microsoft.com/office/drawing/2014/main" id="{0C511E26-811E-465C-9332-DFE2BE712848}"/>
+                <a16:creationId xmlns:a16="http://schemas.microsoft.com/office/drawing/2014/main" id="{7AAF8856-344F-441B-B3C1-11BF0EE39910}"/>
               </a:ext>
             </a:extLst>
           </p:cNvPr>
@@ -13996,7 +13994,7 @@
           <p:cNvPr id="31" name="">
             <a:extLst xmlns:a="http://schemas.openxmlformats.org/drawingml/2006/main">
               <a:ext uri="{FF2B5EF4-FFF2-40B4-BE49-F238E27FC236}">
-                <a16:creationId xmlns:a16="http://schemas.microsoft.com/office/drawing/2014/main" id="{E6526625-5402-424A-9308-6AB1CD4C3DD1}"/>
+                <a16:creationId xmlns:a16="http://schemas.microsoft.com/office/drawing/2014/main" id="{7BF6E75A-6D1A-407C-9742-609B20EFDF64}"/>
               </a:ext>
             </a:extLst>
           </p:cNvPr>
@@ -14050,7 +14048,7 @@
                 <a:ea typeface="Aptos Display"/>
                 <a:cs typeface="Aptos Display"/>
               </a:rPr>
-              <a:t>The artifact passes only if sales, marketing, RevOps, leadership, and an AI agent could inspect it and know what to do next.</a:t>
+              <a:t>The artifact passes only if sales, marketing, RevOps, and leadership can inspect it and know what to do next.</a:t>
             </a:r>
           </a:p>
         </p:txBody>
@@ -14060,7 +14058,7 @@
           <p:cNvPr id="32" name="">
             <a:extLst xmlns:a="http://schemas.openxmlformats.org/drawingml/2006/main">
               <a:ext uri="{FF2B5EF4-FFF2-40B4-BE49-F238E27FC236}">
-                <a16:creationId xmlns:a16="http://schemas.microsoft.com/office/drawing/2014/main" id="{F18B1B7C-86E7-4FBC-865C-7A9AEDB7582C}"/>
+                <a16:creationId xmlns:a16="http://schemas.microsoft.com/office/drawing/2014/main" id="{7147B67E-CAF6-43C9-ACBD-8688CC28BD3A}"/>
               </a:ext>
             </a:extLst>
           </p:cNvPr>
@@ -14124,7 +14122,7 @@
           <p:cNvPr id="33" name="">
             <a:extLst xmlns:a="http://schemas.openxmlformats.org/drawingml/2006/main">
               <a:ext uri="{FF2B5EF4-FFF2-40B4-BE49-F238E27FC236}">
-                <a16:creationId xmlns:a16="http://schemas.microsoft.com/office/drawing/2014/main" id="{06F8B30C-8881-4665-8591-D152D02F0CD6}"/>
+                <a16:creationId xmlns:a16="http://schemas.microsoft.com/office/drawing/2014/main" id="{488F3F81-A592-4459-94B6-5B68C5ED9059}"/>
               </a:ext>
             </a:extLst>
           </p:cNvPr>
@@ -14159,7 +14157,7 @@
           <p:cNvPr id="34" name="">
             <a:extLst xmlns:a="http://schemas.openxmlformats.org/drawingml/2006/main">
               <a:ext uri="{FF2B5EF4-FFF2-40B4-BE49-F238E27FC236}">
-                <a16:creationId xmlns:a16="http://schemas.microsoft.com/office/drawing/2014/main" id="{E2E388AD-C132-4DEB-85AF-01B52BAE1C96}"/>
+                <a16:creationId xmlns:a16="http://schemas.microsoft.com/office/drawing/2014/main" id="{39AE627C-A97B-4967-B4FF-EB195B21B7FA}"/>
               </a:ext>
             </a:extLst>
           </p:cNvPr>
@@ -14223,7 +14221,7 @@
           <p:cNvPr id="35" name="">
             <a:extLst xmlns:a="http://schemas.openxmlformats.org/drawingml/2006/main">
               <a:ext uri="{FF2B5EF4-FFF2-40B4-BE49-F238E27FC236}">
-                <a16:creationId xmlns:a16="http://schemas.microsoft.com/office/drawing/2014/main" id="{CE5760A0-77DC-43EA-A4B8-A158760A5057}"/>
+                <a16:creationId xmlns:a16="http://schemas.microsoft.com/office/drawing/2014/main" id="{F9D5F4F8-3D07-49F4-9E87-07FBE2EF9ED9}"/>
               </a:ext>
             </a:extLst>
           </p:cNvPr>
@@ -14287,7 +14285,7 @@
           <p:cNvPr id="36" name="">
             <a:extLst xmlns:a="http://schemas.openxmlformats.org/drawingml/2006/main">
               <a:ext uri="{FF2B5EF4-FFF2-40B4-BE49-F238E27FC236}">
-                <a16:creationId xmlns:a16="http://schemas.microsoft.com/office/drawing/2014/main" id="{B88019AF-7FEB-4D3B-9171-4AD2EC988ED3}"/>
+                <a16:creationId xmlns:a16="http://schemas.microsoft.com/office/drawing/2014/main" id="{1385AB8F-A813-427C-8BB2-0E87AF53BF45}"/>
               </a:ext>
             </a:extLst>
           </p:cNvPr>
@@ -14351,7 +14349,7 @@
           <p:cNvPr id="37" name="">
             <a:extLst xmlns:a="http://schemas.openxmlformats.org/drawingml/2006/main">
               <a:ext uri="{FF2B5EF4-FFF2-40B4-BE49-F238E27FC236}">
-                <a16:creationId xmlns:a16="http://schemas.microsoft.com/office/drawing/2014/main" id="{5305FBAE-3F81-41BA-B6FF-AC7D981850CC}"/>
+                <a16:creationId xmlns:a16="http://schemas.microsoft.com/office/drawing/2014/main" id="{79EC0989-9D17-4132-B74B-B3B9E99C79A0}"/>
               </a:ext>
             </a:extLst>
           </p:cNvPr>
@@ -14386,7 +14384,7 @@
           <p:cNvPr id="38" name="">
             <a:extLst xmlns:a="http://schemas.openxmlformats.org/drawingml/2006/main">
               <a:ext uri="{FF2B5EF4-FFF2-40B4-BE49-F238E27FC236}">
-                <a16:creationId xmlns:a16="http://schemas.microsoft.com/office/drawing/2014/main" id="{2D6F068B-D49A-481C-87AA-F088D80FF11D}"/>
+                <a16:creationId xmlns:a16="http://schemas.microsoft.com/office/drawing/2014/main" id="{993B4034-9925-4386-81BF-8C2408D6461A}"/>
               </a:ext>
             </a:extLst>
           </p:cNvPr>
@@ -14421,7 +14419,7 @@
           <p:cNvPr id="39" name="">
             <a:extLst xmlns:a="http://schemas.openxmlformats.org/drawingml/2006/main">
               <a:ext uri="{FF2B5EF4-FFF2-40B4-BE49-F238E27FC236}">
-                <a16:creationId xmlns:a16="http://schemas.microsoft.com/office/drawing/2014/main" id="{0A1570F8-2679-43F6-A598-3E88F0F087A4}"/>
+                <a16:creationId xmlns:a16="http://schemas.microsoft.com/office/drawing/2014/main" id="{DECCE219-4E13-4DC8-97F4-DDA74C58A0C7}"/>
               </a:ext>
             </a:extLst>
           </p:cNvPr>
@@ -14456,7 +14454,7 @@
           <p:cNvPr id="40" name="kicker-02-marker">
             <a:extLst xmlns:a="http://schemas.openxmlformats.org/drawingml/2006/main">
               <a:ext uri="{FF2B5EF4-FFF2-40B4-BE49-F238E27FC236}">
-                <a16:creationId xmlns:a16="http://schemas.microsoft.com/office/drawing/2014/main" id="{3E80C6C8-16FB-41A1-BB36-B91DE03EFD61}"/>
+                <a16:creationId xmlns:a16="http://schemas.microsoft.com/office/drawing/2014/main" id="{77BF9390-965E-4B20-B2F3-E18DA03EC4B3}"/>
               </a:ext>
             </a:extLst>
           </p:cNvPr>
@@ -14491,7 +14489,7 @@
           <p:cNvPr id="41" name="kicker-02-label">
             <a:extLst xmlns:a="http://schemas.openxmlformats.org/drawingml/2006/main">
               <a:ext uri="{FF2B5EF4-FFF2-40B4-BE49-F238E27FC236}">
-                <a16:creationId xmlns:a16="http://schemas.microsoft.com/office/drawing/2014/main" id="{3E0A801F-A88F-493B-A61A-BD3846C6F1B8}"/>
+                <a16:creationId xmlns:a16="http://schemas.microsoft.com/office/drawing/2014/main" id="{85CBC8B8-FFB8-40A8-B73A-3CF10F384A45}"/>
               </a:ext>
             </a:extLst>
           </p:cNvPr>
@@ -14555,7 +14553,7 @@
           <p:cNvPr id="42" name="">
             <a:extLst xmlns:a="http://schemas.openxmlformats.org/drawingml/2006/main">
               <a:ext uri="{FF2B5EF4-FFF2-40B4-BE49-F238E27FC236}">
-                <a16:creationId xmlns:a16="http://schemas.microsoft.com/office/drawing/2014/main" id="{A202FDA4-468B-442F-9564-CABF4215322A}"/>
+                <a16:creationId xmlns:a16="http://schemas.microsoft.com/office/drawing/2014/main" id="{BD7DA8E1-3EB2-4D6D-BED7-77EAFCF6640F}"/>
               </a:ext>
             </a:extLst>
           </p:cNvPr>
@@ -14619,7 +14617,7 @@
           <p:cNvPr id="43" name="">
             <a:extLst xmlns:a="http://schemas.openxmlformats.org/drawingml/2006/main">
               <a:ext uri="{FF2B5EF4-FFF2-40B4-BE49-F238E27FC236}">
-                <a16:creationId xmlns:a16="http://schemas.microsoft.com/office/drawing/2014/main" id="{E26310D3-BE68-4366-9347-C23E0CBC8D6A}"/>
+                <a16:creationId xmlns:a16="http://schemas.microsoft.com/office/drawing/2014/main" id="{260F5C9E-DB37-4543-8B63-56A5E3B6E457}"/>
               </a:ext>
             </a:extLst>
           </p:cNvPr>
@@ -14683,7 +14681,7 @@
           <p:cNvPr id="44" name="">
             <a:extLst xmlns:a="http://schemas.openxmlformats.org/drawingml/2006/main">
               <a:ext uri="{FF2B5EF4-FFF2-40B4-BE49-F238E27FC236}">
-                <a16:creationId xmlns:a16="http://schemas.microsoft.com/office/drawing/2014/main" id="{5A48503A-F502-4286-A9EA-D348E411229D}"/>
+                <a16:creationId xmlns:a16="http://schemas.microsoft.com/office/drawing/2014/main" id="{7100A529-39E6-4934-BEEE-AC5129F7C0BC}"/>
               </a:ext>
             </a:extLst>
           </p:cNvPr>
@@ -14718,7 +14716,7 @@
           <p:cNvPr id="45" name="">
             <a:extLst xmlns:a="http://schemas.openxmlformats.org/drawingml/2006/main">
               <a:ext uri="{FF2B5EF4-FFF2-40B4-BE49-F238E27FC236}">
-                <a16:creationId xmlns:a16="http://schemas.microsoft.com/office/drawing/2014/main" id="{5D290CF8-7065-4197-823A-51E1DD78C122}"/>
+                <a16:creationId xmlns:a16="http://schemas.microsoft.com/office/drawing/2014/main" id="{FA407E00-A01E-4885-A731-773E2DA8AEA5}"/>
               </a:ext>
             </a:extLst>
           </p:cNvPr>
@@ -14753,7 +14751,7 @@
           <p:cNvPr id="46" name="">
             <a:extLst xmlns:a="http://schemas.openxmlformats.org/drawingml/2006/main">
               <a:ext uri="{FF2B5EF4-FFF2-40B4-BE49-F238E27FC236}">
-                <a16:creationId xmlns:a16="http://schemas.microsoft.com/office/drawing/2014/main" id="{65F68399-328C-4453-8BAD-D185C264393C}"/>
+                <a16:creationId xmlns:a16="http://schemas.microsoft.com/office/drawing/2014/main" id="{53CA2D54-D07A-4A62-A9EA-D42BAD380628}"/>
               </a:ext>
             </a:extLst>
           </p:cNvPr>
@@ -14788,7 +14786,7 @@
           <p:cNvPr id="47" name="">
             <a:extLst xmlns:a="http://schemas.openxmlformats.org/drawingml/2006/main">
               <a:ext uri="{FF2B5EF4-FFF2-40B4-BE49-F238E27FC236}">
-                <a16:creationId xmlns:a16="http://schemas.microsoft.com/office/drawing/2014/main" id="{992A9C56-B3A1-413D-B5B1-65295CC9B108}"/>
+                <a16:creationId xmlns:a16="http://schemas.microsoft.com/office/drawing/2014/main" id="{2E8565BE-C6A4-4ADE-B348-1313C322D1CD}"/>
               </a:ext>
             </a:extLst>
           </p:cNvPr>
@@ -14823,7 +14821,7 @@
           <p:cNvPr id="48" name="">
             <a:extLst xmlns:a="http://schemas.openxmlformats.org/drawingml/2006/main">
               <a:ext uri="{FF2B5EF4-FFF2-40B4-BE49-F238E27FC236}">
-                <a16:creationId xmlns:a16="http://schemas.microsoft.com/office/drawing/2014/main" id="{424163C9-5C1D-4BE6-9875-7CDCADDE1107}"/>
+                <a16:creationId xmlns:a16="http://schemas.microsoft.com/office/drawing/2014/main" id="{3AE26EB4-B5D3-47BA-B8DA-0E132939A0DC}"/>
               </a:ext>
             </a:extLst>
           </p:cNvPr>
@@ -14887,7 +14885,7 @@
           <p:cNvPr id="49" name="">
             <a:extLst xmlns:a="http://schemas.openxmlformats.org/drawingml/2006/main">
               <a:ext uri="{FF2B5EF4-FFF2-40B4-BE49-F238E27FC236}">
-                <a16:creationId xmlns:a16="http://schemas.microsoft.com/office/drawing/2014/main" id="{7FDCFD86-41BF-48E7-A21A-25EA39E2C41B}"/>
+                <a16:creationId xmlns:a16="http://schemas.microsoft.com/office/drawing/2014/main" id="{EB49DBD3-8F2C-43B5-AA27-7E495D5A3E42}"/>
               </a:ext>
             </a:extLst>
           </p:cNvPr>
@@ -14951,7 +14949,7 @@
           <p:cNvPr id="50" name="">
             <a:extLst xmlns:a="http://schemas.openxmlformats.org/drawingml/2006/main">
               <a:ext uri="{FF2B5EF4-FFF2-40B4-BE49-F238E27FC236}">
-                <a16:creationId xmlns:a16="http://schemas.microsoft.com/office/drawing/2014/main" id="{3825403F-500A-4ADF-B6CA-63749266BBA2}"/>
+                <a16:creationId xmlns:a16="http://schemas.microsoft.com/office/drawing/2014/main" id="{BC8C8461-F905-4D45-A3C1-5CB4FF60CA42}"/>
               </a:ext>
             </a:extLst>
           </p:cNvPr>
@@ -15013,7 +15011,7 @@
     </p:spTree>
     <p:extLst>
       <p:ext uri="{BB962C8B-B14F-4D97-AF65-F5344CB8AC3E}">
-        <p14:creationId xmlns:p14="http://schemas.microsoft.com/office/powerpoint/2010/main" val="1098538314"/>
+        <p14:creationId xmlns:p14="http://schemas.microsoft.com/office/powerpoint/2010/main" val="1752845590"/>
       </p:ext>
     </p:extLst>
   </p:cSld>
@@ -15037,7 +15035,7 @@
           <p:cNvPr id="1" name="">
             <a:extLst xmlns:a="http://schemas.openxmlformats.org/drawingml/2006/main">
               <a:ext uri="{FF2B5EF4-FFF2-40B4-BE49-F238E27FC236}">
-                <a16:creationId xmlns:a16="http://schemas.microsoft.com/office/drawing/2014/main" id="{36E775C1-9623-4AE2-BA1B-723F68945810}"/>
+                <a16:creationId xmlns:a16="http://schemas.microsoft.com/office/drawing/2014/main" id="{3B22D114-B95C-40D1-8DAA-04CA212CFEB7}"/>
               </a:ext>
             </a:extLst>
           </p:cNvPr>
@@ -15072,7 +15070,7 @@
           <p:cNvPr id="2" name="">
             <a:extLst xmlns:a="http://schemas.openxmlformats.org/drawingml/2006/main">
               <a:ext uri="{FF2B5EF4-FFF2-40B4-BE49-F238E27FC236}">
-                <a16:creationId xmlns:a16="http://schemas.microsoft.com/office/drawing/2014/main" id="{0A00BA08-B651-4236-A17A-2D37DCEF9FB8}"/>
+                <a16:creationId xmlns:a16="http://schemas.microsoft.com/office/drawing/2014/main" id="{2E93338B-8178-418F-AF9C-96510FFBA3CC}"/>
               </a:ext>
             </a:extLst>
           </p:cNvPr>
@@ -15107,7 +15105,7 @@
           <p:cNvPr id="3" name="">
             <a:extLst xmlns:a="http://schemas.openxmlformats.org/drawingml/2006/main">
               <a:ext uri="{FF2B5EF4-FFF2-40B4-BE49-F238E27FC236}">
-                <a16:creationId xmlns:a16="http://schemas.microsoft.com/office/drawing/2014/main" id="{18106F44-F27A-4895-A435-2694A51523CC}"/>
+                <a16:creationId xmlns:a16="http://schemas.microsoft.com/office/drawing/2014/main" id="{3E5193EA-FD5A-4BE9-A1D0-2B2E885FA8DC}"/>
               </a:ext>
             </a:extLst>
           </p:cNvPr>
@@ -15142,7 +15140,7 @@
           <p:cNvPr id="4" name="kicker-02-marker">
             <a:extLst xmlns:a="http://schemas.openxmlformats.org/drawingml/2006/main">
               <a:ext uri="{FF2B5EF4-FFF2-40B4-BE49-F238E27FC236}">
-                <a16:creationId xmlns:a16="http://schemas.microsoft.com/office/drawing/2014/main" id="{557C5FA5-3DC2-489B-8C6A-55451D567C3E}"/>
+                <a16:creationId xmlns:a16="http://schemas.microsoft.com/office/drawing/2014/main" id="{8566D62A-9FC2-48FC-87CA-C6EF69356ECC}"/>
               </a:ext>
             </a:extLst>
           </p:cNvPr>
@@ -15177,7 +15175,7 @@
           <p:cNvPr id="5" name="kicker-02-label">
             <a:extLst xmlns:a="http://schemas.openxmlformats.org/drawingml/2006/main">
               <a:ext uri="{FF2B5EF4-FFF2-40B4-BE49-F238E27FC236}">
-                <a16:creationId xmlns:a16="http://schemas.microsoft.com/office/drawing/2014/main" id="{340943F9-D551-4F38-A441-57FBAC782D4F}"/>
+                <a16:creationId xmlns:a16="http://schemas.microsoft.com/office/drawing/2014/main" id="{EC4C72B8-1C7C-47D4-B6DF-25EAC8DFE176}"/>
               </a:ext>
             </a:extLst>
           </p:cNvPr>
@@ -15241,7 +15239,7 @@
           <p:cNvPr id="6" name="">
             <a:extLst xmlns:a="http://schemas.openxmlformats.org/drawingml/2006/main">
               <a:ext uri="{FF2B5EF4-FFF2-40B4-BE49-F238E27FC236}">
-                <a16:creationId xmlns:a16="http://schemas.microsoft.com/office/drawing/2014/main" id="{C6013677-A320-4467-A045-495DAFFB41F2}"/>
+                <a16:creationId xmlns:a16="http://schemas.microsoft.com/office/drawing/2014/main" id="{AAD2B234-C707-442E-8C0B-DBF15C69BB27}"/>
               </a:ext>
             </a:extLst>
           </p:cNvPr>
@@ -15305,7 +15303,7 @@
           <p:cNvPr id="7" name="">
             <a:extLst xmlns:a="http://schemas.openxmlformats.org/drawingml/2006/main">
               <a:ext uri="{FF2B5EF4-FFF2-40B4-BE49-F238E27FC236}">
-                <a16:creationId xmlns:a16="http://schemas.microsoft.com/office/drawing/2014/main" id="{D7C8228D-B68B-466D-BBE8-EE881147C1B7}"/>
+                <a16:creationId xmlns:a16="http://schemas.microsoft.com/office/drawing/2014/main" id="{5069EA17-0E0F-4BBB-B083-AF8488BEBE17}"/>
               </a:ext>
             </a:extLst>
           </p:cNvPr>
@@ -15338,7 +15336,7 @@
           <p:cNvPr id="8" name="">
             <a:extLst xmlns:a="http://schemas.openxmlformats.org/drawingml/2006/main">
               <a:ext uri="{FF2B5EF4-FFF2-40B4-BE49-F238E27FC236}">
-                <a16:creationId xmlns:a16="http://schemas.microsoft.com/office/drawing/2014/main" id="{C4DFD9C7-1A22-4D15-B460-4700382C481C}"/>
+                <a16:creationId xmlns:a16="http://schemas.microsoft.com/office/drawing/2014/main" id="{ADBDDC95-2235-46A4-A9B1-5C277C21DEC1}"/>
               </a:ext>
             </a:extLst>
           </p:cNvPr>
@@ -15373,7 +15371,7 @@
           <p:cNvPr id="9" name="">
             <a:extLst xmlns:a="http://schemas.openxmlformats.org/drawingml/2006/main">
               <a:ext uri="{FF2B5EF4-FFF2-40B4-BE49-F238E27FC236}">
-                <a16:creationId xmlns:a16="http://schemas.microsoft.com/office/drawing/2014/main" id="{2A2EBE9D-965E-4F78-853D-B02CEC9A94DD}"/>
+                <a16:creationId xmlns:a16="http://schemas.microsoft.com/office/drawing/2014/main" id="{50A942AD-C6C0-413B-ABCD-2158EE414860}"/>
               </a:ext>
             </a:extLst>
           </p:cNvPr>
@@ -15437,7 +15435,7 @@
           <p:cNvPr id="10" name="">
             <a:extLst xmlns:a="http://schemas.openxmlformats.org/drawingml/2006/main">
               <a:ext uri="{FF2B5EF4-FFF2-40B4-BE49-F238E27FC236}">
-                <a16:creationId xmlns:a16="http://schemas.microsoft.com/office/drawing/2014/main" id="{42394395-5489-4103-8337-B67DA827675A}"/>
+                <a16:creationId xmlns:a16="http://schemas.microsoft.com/office/drawing/2014/main" id="{E754A2A8-2133-419B-8751-FB98F4D5684E}"/>
               </a:ext>
             </a:extLst>
           </p:cNvPr>
@@ -15501,7 +15499,7 @@
           <p:cNvPr id="11" name="">
             <a:extLst xmlns:a="http://schemas.openxmlformats.org/drawingml/2006/main">
               <a:ext uri="{FF2B5EF4-FFF2-40B4-BE49-F238E27FC236}">
-                <a16:creationId xmlns:a16="http://schemas.microsoft.com/office/drawing/2014/main" id="{83F49193-91D9-468A-B0F6-574D81197277}"/>
+                <a16:creationId xmlns:a16="http://schemas.microsoft.com/office/drawing/2014/main" id="{045B62AC-79A2-4A10-A263-1D68A82B0D19}"/>
               </a:ext>
             </a:extLst>
           </p:cNvPr>
@@ -15534,7 +15532,7 @@
           <p:cNvPr id="12" name="">
             <a:extLst xmlns:a="http://schemas.openxmlformats.org/drawingml/2006/main">
               <a:ext uri="{FF2B5EF4-FFF2-40B4-BE49-F238E27FC236}">
-                <a16:creationId xmlns:a16="http://schemas.microsoft.com/office/drawing/2014/main" id="{574771D0-9E9B-456A-A377-79F8CBE5F2D4}"/>
+                <a16:creationId xmlns:a16="http://schemas.microsoft.com/office/drawing/2014/main" id="{C5062131-8FE6-4A68-9CCA-4F9565C7BA41}"/>
               </a:ext>
             </a:extLst>
           </p:cNvPr>
@@ -15569,7 +15567,7 @@
           <p:cNvPr id="13" name="">
             <a:extLst xmlns:a="http://schemas.openxmlformats.org/drawingml/2006/main">
               <a:ext uri="{FF2B5EF4-FFF2-40B4-BE49-F238E27FC236}">
-                <a16:creationId xmlns:a16="http://schemas.microsoft.com/office/drawing/2014/main" id="{56EEF4F1-9233-4823-B73C-8639A62CCDBD}"/>
+                <a16:creationId xmlns:a16="http://schemas.microsoft.com/office/drawing/2014/main" id="{098491F0-9B03-4327-9079-226D7ED77D36}"/>
               </a:ext>
             </a:extLst>
           </p:cNvPr>
@@ -15633,7 +15631,7 @@
           <p:cNvPr id="14" name="">
             <a:extLst xmlns:a="http://schemas.openxmlformats.org/drawingml/2006/main">
               <a:ext uri="{FF2B5EF4-FFF2-40B4-BE49-F238E27FC236}">
-                <a16:creationId xmlns:a16="http://schemas.microsoft.com/office/drawing/2014/main" id="{415D9ED3-9A1D-4203-A2C5-893E48B053D3}"/>
+                <a16:creationId xmlns:a16="http://schemas.microsoft.com/office/drawing/2014/main" id="{F5100E0F-DFDD-49B4-A27A-8A8785BFD9A6}"/>
               </a:ext>
             </a:extLst>
           </p:cNvPr>
@@ -15697,7 +15695,7 @@
           <p:cNvPr id="15" name="">
             <a:extLst xmlns:a="http://schemas.openxmlformats.org/drawingml/2006/main">
               <a:ext uri="{FF2B5EF4-FFF2-40B4-BE49-F238E27FC236}">
-                <a16:creationId xmlns:a16="http://schemas.microsoft.com/office/drawing/2014/main" id="{E19AD469-C8FB-4BAA-9D32-3548EA1E0C4D}"/>
+                <a16:creationId xmlns:a16="http://schemas.microsoft.com/office/drawing/2014/main" id="{2E7193B2-41ED-4621-B87F-309F6DE1F291}"/>
               </a:ext>
             </a:extLst>
           </p:cNvPr>
@@ -15730,7 +15728,7 @@
           <p:cNvPr id="16" name="">
             <a:extLst xmlns:a="http://schemas.openxmlformats.org/drawingml/2006/main">
               <a:ext uri="{FF2B5EF4-FFF2-40B4-BE49-F238E27FC236}">
-                <a16:creationId xmlns:a16="http://schemas.microsoft.com/office/drawing/2014/main" id="{7C73BBD9-54F3-46F7-B4B9-F300C00D9805}"/>
+                <a16:creationId xmlns:a16="http://schemas.microsoft.com/office/drawing/2014/main" id="{9E7C0F94-7435-4E4D-9047-9B7414DC8097}"/>
               </a:ext>
             </a:extLst>
           </p:cNvPr>
@@ -15784,7 +15782,7 @@
                 <a:ea typeface="Aptos"/>
                 <a:cs typeface="Aptos"/>
               </a:rPr>
-              <a:t>Recurring instructor check: sales impact / signal / RevOps field / buyer content / AI risk / industrial failure mode</a:t>
+              <a:t>Recurring instructor check: sales impact / signal / RevOps field / buyer content / review risk / industrial failure mode</a:t>
             </a:r>
           </a:p>
         </p:txBody>
@@ -15794,7 +15792,7 @@
           <p:cNvPr id="17" name="">
             <a:extLst xmlns:a="http://schemas.openxmlformats.org/drawingml/2006/main">
               <a:ext uri="{FF2B5EF4-FFF2-40B4-BE49-F238E27FC236}">
-                <a16:creationId xmlns:a16="http://schemas.microsoft.com/office/drawing/2014/main" id="{4AB37199-1A61-450F-AC67-B7E7FE253B06}"/>
+                <a16:creationId xmlns:a16="http://schemas.microsoft.com/office/drawing/2014/main" id="{114527A4-5C0E-4DCB-831E-B2C24EF8061C}"/>
               </a:ext>
             </a:extLst>
           </p:cNvPr>
@@ -15829,7 +15827,7 @@
           <p:cNvPr id="18" name="">
             <a:extLst xmlns:a="http://schemas.openxmlformats.org/drawingml/2006/main">
               <a:ext uri="{FF2B5EF4-FFF2-40B4-BE49-F238E27FC236}">
-                <a16:creationId xmlns:a16="http://schemas.microsoft.com/office/drawing/2014/main" id="{757DF3A6-1F07-4E6D-BA54-21918DC4419E}"/>
+                <a16:creationId xmlns:a16="http://schemas.microsoft.com/office/drawing/2014/main" id="{B8898D74-7B0A-4F49-9903-63A97771C92D}"/>
               </a:ext>
             </a:extLst>
           </p:cNvPr>
@@ -15893,7 +15891,7 @@
           <p:cNvPr id="19" name="">
             <a:extLst xmlns:a="http://schemas.openxmlformats.org/drawingml/2006/main">
               <a:ext uri="{FF2B5EF4-FFF2-40B4-BE49-F238E27FC236}">
-                <a16:creationId xmlns:a16="http://schemas.microsoft.com/office/drawing/2014/main" id="{0F68F1EF-D615-439F-9420-FF9D2E441D93}"/>
+                <a16:creationId xmlns:a16="http://schemas.microsoft.com/office/drawing/2014/main" id="{B987D06F-9994-44FF-9180-B89DE2B32847}"/>
               </a:ext>
             </a:extLst>
           </p:cNvPr>
@@ -15957,7 +15955,7 @@
           <p:cNvPr id="20" name="">
             <a:extLst xmlns:a="http://schemas.openxmlformats.org/drawingml/2006/main">
               <a:ext uri="{FF2B5EF4-FFF2-40B4-BE49-F238E27FC236}">
-                <a16:creationId xmlns:a16="http://schemas.microsoft.com/office/drawing/2014/main" id="{48D41C3C-DE78-435A-B135-1F1E8FB2ADB3}"/>
+                <a16:creationId xmlns:a16="http://schemas.microsoft.com/office/drawing/2014/main" id="{04A34DAD-4B97-4ADE-A494-AB7406D95BBA}"/>
               </a:ext>
             </a:extLst>
           </p:cNvPr>
@@ -16019,7 +16017,7 @@
     </p:spTree>
     <p:extLst>
       <p:ext uri="{BB962C8B-B14F-4D97-AF65-F5344CB8AC3E}">
-        <p14:creationId xmlns:p14="http://schemas.microsoft.com/office/powerpoint/2010/main" val="1605462238"/>
+        <p14:creationId xmlns:p14="http://schemas.microsoft.com/office/powerpoint/2010/main" val="1313728471"/>
       </p:ext>
     </p:extLst>
   </p:cSld>
@@ -16043,7 +16041,7 @@
           <p:cNvPr id="1" name="">
             <a:extLst xmlns:a="http://schemas.openxmlformats.org/drawingml/2006/main">
               <a:ext uri="{FF2B5EF4-FFF2-40B4-BE49-F238E27FC236}">
-                <a16:creationId xmlns:a16="http://schemas.microsoft.com/office/drawing/2014/main" id="{627BB541-10AD-4EF9-8D86-627B9180322F}"/>
+                <a16:creationId xmlns:a16="http://schemas.microsoft.com/office/drawing/2014/main" id="{A4B855AF-CB6F-4661-A58C-CA8EC5B34464}"/>
               </a:ext>
             </a:extLst>
           </p:cNvPr>
@@ -16078,7 +16076,7 @@
           <p:cNvPr id="2" name="">
             <a:extLst xmlns:a="http://schemas.openxmlformats.org/drawingml/2006/main">
               <a:ext uri="{FF2B5EF4-FFF2-40B4-BE49-F238E27FC236}">
-                <a16:creationId xmlns:a16="http://schemas.microsoft.com/office/drawing/2014/main" id="{C79D11CA-7775-4036-ADAB-480569EFEAC1}"/>
+                <a16:creationId xmlns:a16="http://schemas.microsoft.com/office/drawing/2014/main" id="{7A6D9489-5B3A-49A9-B9EA-99B9D6215054}"/>
               </a:ext>
             </a:extLst>
           </p:cNvPr>
@@ -16113,7 +16111,7 @@
           <p:cNvPr id="3" name="">
             <a:extLst xmlns:a="http://schemas.openxmlformats.org/drawingml/2006/main">
               <a:ext uri="{FF2B5EF4-FFF2-40B4-BE49-F238E27FC236}">
-                <a16:creationId xmlns:a16="http://schemas.microsoft.com/office/drawing/2014/main" id="{FCA4A5A1-5893-40D0-9302-DC9C222B5244}"/>
+                <a16:creationId xmlns:a16="http://schemas.microsoft.com/office/drawing/2014/main" id="{11DC51B6-E127-4CEB-97E8-73727CA37D6D}"/>
               </a:ext>
             </a:extLst>
           </p:cNvPr>
@@ -16148,7 +16146,7 @@
           <p:cNvPr id="4" name="kicker-02-marker">
             <a:extLst xmlns:a="http://schemas.openxmlformats.org/drawingml/2006/main">
               <a:ext uri="{FF2B5EF4-FFF2-40B4-BE49-F238E27FC236}">
-                <a16:creationId xmlns:a16="http://schemas.microsoft.com/office/drawing/2014/main" id="{6774FC5D-0849-44D7-8C38-9EE8296077E8}"/>
+                <a16:creationId xmlns:a16="http://schemas.microsoft.com/office/drawing/2014/main" id="{A596C023-319A-4ADF-A5DD-F7263BD1AA15}"/>
               </a:ext>
             </a:extLst>
           </p:cNvPr>
@@ -16183,7 +16181,7 @@
           <p:cNvPr id="5" name="kicker-02-label">
             <a:extLst xmlns:a="http://schemas.openxmlformats.org/drawingml/2006/main">
               <a:ext uri="{FF2B5EF4-FFF2-40B4-BE49-F238E27FC236}">
-                <a16:creationId xmlns:a16="http://schemas.microsoft.com/office/drawing/2014/main" id="{47EC3518-1572-4C1E-8B23-7A52D6AAF147}"/>
+                <a16:creationId xmlns:a16="http://schemas.microsoft.com/office/drawing/2014/main" id="{AD9A94B2-8C10-4E05-8C48-3148AA45816B}"/>
               </a:ext>
             </a:extLst>
           </p:cNvPr>
@@ -16247,7 +16245,7 @@
           <p:cNvPr id="6" name="">
             <a:extLst xmlns:a="http://schemas.openxmlformats.org/drawingml/2006/main">
               <a:ext uri="{FF2B5EF4-FFF2-40B4-BE49-F238E27FC236}">
-                <a16:creationId xmlns:a16="http://schemas.microsoft.com/office/drawing/2014/main" id="{2D6A6456-81FC-4A65-A40C-4B5FE1C03AE8}"/>
+                <a16:creationId xmlns:a16="http://schemas.microsoft.com/office/drawing/2014/main" id="{FAE7ACE4-D34D-43C7-BEBA-D7A0A17DE94F}"/>
               </a:ext>
             </a:extLst>
           </p:cNvPr>
@@ -16311,7 +16309,7 @@
           <p:cNvPr id="7" name="">
             <a:extLst xmlns:a="http://schemas.openxmlformats.org/drawingml/2006/main">
               <a:ext uri="{FF2B5EF4-FFF2-40B4-BE49-F238E27FC236}">
-                <a16:creationId xmlns:a16="http://schemas.microsoft.com/office/drawing/2014/main" id="{A9787CF7-C13F-4430-8F9A-CF6BE0E1F666}"/>
+                <a16:creationId xmlns:a16="http://schemas.microsoft.com/office/drawing/2014/main" id="{1C82F3BE-B65B-4000-95D6-B81D0337557B}"/>
               </a:ext>
             </a:extLst>
           </p:cNvPr>
@@ -16375,7 +16373,7 @@
           <p:cNvPr id="8" name="">
             <a:extLst xmlns:a="http://schemas.openxmlformats.org/drawingml/2006/main">
               <a:ext uri="{FF2B5EF4-FFF2-40B4-BE49-F238E27FC236}">
-                <a16:creationId xmlns:a16="http://schemas.microsoft.com/office/drawing/2014/main" id="{30AB754B-2C56-4E32-811B-0145BC9EF7D1}"/>
+                <a16:creationId xmlns:a16="http://schemas.microsoft.com/office/drawing/2014/main" id="{88F89C3D-495C-48BA-BEC0-23CB3289A09C}"/>
               </a:ext>
             </a:extLst>
           </p:cNvPr>
@@ -16410,7 +16408,7 @@
           <p:cNvPr id="9" name="">
             <a:extLst xmlns:a="http://schemas.openxmlformats.org/drawingml/2006/main">
               <a:ext uri="{FF2B5EF4-FFF2-40B4-BE49-F238E27FC236}">
-                <a16:creationId xmlns:a16="http://schemas.microsoft.com/office/drawing/2014/main" id="{47CF47C5-E0A6-496D-BF77-0028E4C97C53}"/>
+                <a16:creationId xmlns:a16="http://schemas.microsoft.com/office/drawing/2014/main" id="{C9A840F4-6B14-46BA-B070-37216623EA2A}"/>
               </a:ext>
             </a:extLst>
           </p:cNvPr>
@@ -16474,7 +16472,7 @@
           <p:cNvPr id="10" name="">
             <a:extLst xmlns:a="http://schemas.openxmlformats.org/drawingml/2006/main">
               <a:ext uri="{FF2B5EF4-FFF2-40B4-BE49-F238E27FC236}">
-                <a16:creationId xmlns:a16="http://schemas.microsoft.com/office/drawing/2014/main" id="{E02DF173-9072-461D-8BBA-4FB4379D656B}"/>
+                <a16:creationId xmlns:a16="http://schemas.microsoft.com/office/drawing/2014/main" id="{E7346F6F-1AE9-441F-B7D3-2F5DA79822AA}"/>
               </a:ext>
             </a:extLst>
           </p:cNvPr>
@@ -16538,7 +16536,7 @@
           <p:cNvPr id="11" name="">
             <a:extLst xmlns:a="http://schemas.openxmlformats.org/drawingml/2006/main">
               <a:ext uri="{FF2B5EF4-FFF2-40B4-BE49-F238E27FC236}">
-                <a16:creationId xmlns:a16="http://schemas.microsoft.com/office/drawing/2014/main" id="{F4A20261-357E-476D-86BD-9DF6CD611BBC}"/>
+                <a16:creationId xmlns:a16="http://schemas.microsoft.com/office/drawing/2014/main" id="{D9CD35D3-BE67-45BE-98E0-47DD2DD18A51}"/>
               </a:ext>
             </a:extLst>
           </p:cNvPr>
@@ -16602,7 +16600,7 @@
           <p:cNvPr id="12" name="">
             <a:extLst xmlns:a="http://schemas.openxmlformats.org/drawingml/2006/main">
               <a:ext uri="{FF2B5EF4-FFF2-40B4-BE49-F238E27FC236}">
-                <a16:creationId xmlns:a16="http://schemas.microsoft.com/office/drawing/2014/main" id="{0E591404-2CF1-4EB4-B8A1-A1A8E553060B}"/>
+                <a16:creationId xmlns:a16="http://schemas.microsoft.com/office/drawing/2014/main" id="{510740C3-5ED4-418D-8D8F-4DFCE1FF2E36}"/>
               </a:ext>
             </a:extLst>
           </p:cNvPr>
@@ -16635,7 +16633,7 @@
           <p:cNvPr id="13" name="">
             <a:extLst xmlns:a="http://schemas.openxmlformats.org/drawingml/2006/main">
               <a:ext uri="{FF2B5EF4-FFF2-40B4-BE49-F238E27FC236}">
-                <a16:creationId xmlns:a16="http://schemas.microsoft.com/office/drawing/2014/main" id="{C687F91E-984F-4FDB-9B8B-336F17D40F16}"/>
+                <a16:creationId xmlns:a16="http://schemas.microsoft.com/office/drawing/2014/main" id="{4351375E-3E07-4480-8C03-E1322A4F4CFA}"/>
               </a:ext>
             </a:extLst>
           </p:cNvPr>
@@ -16699,7 +16697,7 @@
           <p:cNvPr id="14" name="">
             <a:extLst xmlns:a="http://schemas.openxmlformats.org/drawingml/2006/main">
               <a:ext uri="{FF2B5EF4-FFF2-40B4-BE49-F238E27FC236}">
-                <a16:creationId xmlns:a16="http://schemas.microsoft.com/office/drawing/2014/main" id="{6FC031E5-4EA5-40E0-B596-C53BD2DD7A7C}"/>
+                <a16:creationId xmlns:a16="http://schemas.microsoft.com/office/drawing/2014/main" id="{11400709-8395-492E-83E1-A89B2C22F993}"/>
               </a:ext>
             </a:extLst>
           </p:cNvPr>
@@ -16734,7 +16732,7 @@
           <p:cNvPr id="15" name="">
             <a:extLst xmlns:a="http://schemas.openxmlformats.org/drawingml/2006/main">
               <a:ext uri="{FF2B5EF4-FFF2-40B4-BE49-F238E27FC236}">
-                <a16:creationId xmlns:a16="http://schemas.microsoft.com/office/drawing/2014/main" id="{3FB8A5B4-C249-4326-905B-D359BFA27E2A}"/>
+                <a16:creationId xmlns:a16="http://schemas.microsoft.com/office/drawing/2014/main" id="{9CE0FBA7-738E-4090-9745-F3C52D39B9A7}"/>
               </a:ext>
             </a:extLst>
           </p:cNvPr>
@@ -16798,7 +16796,7 @@
           <p:cNvPr id="16" name="">
             <a:extLst xmlns:a="http://schemas.openxmlformats.org/drawingml/2006/main">
               <a:ext uri="{FF2B5EF4-FFF2-40B4-BE49-F238E27FC236}">
-                <a16:creationId xmlns:a16="http://schemas.microsoft.com/office/drawing/2014/main" id="{DA174F6A-9A56-4856-90B7-E49A5799ACDF}"/>
+                <a16:creationId xmlns:a16="http://schemas.microsoft.com/office/drawing/2014/main" id="{63B15FDE-ECBB-41C5-B104-09FC35141C04}"/>
               </a:ext>
             </a:extLst>
           </p:cNvPr>
@@ -16831,7 +16829,7 @@
           <p:cNvPr id="17" name="">
             <a:extLst xmlns:a="http://schemas.openxmlformats.org/drawingml/2006/main">
               <a:ext uri="{FF2B5EF4-FFF2-40B4-BE49-F238E27FC236}">
-                <a16:creationId xmlns:a16="http://schemas.microsoft.com/office/drawing/2014/main" id="{1B0AEA75-85F0-42BF-B126-A1F703B4AB57}"/>
+                <a16:creationId xmlns:a16="http://schemas.microsoft.com/office/drawing/2014/main" id="{74A67E23-85A1-4FAD-B01A-49ED2B23E6BE}"/>
               </a:ext>
             </a:extLst>
           </p:cNvPr>
@@ -16866,7 +16864,7 @@
           <p:cNvPr id="18" name="">
             <a:extLst xmlns:a="http://schemas.openxmlformats.org/drawingml/2006/main">
               <a:ext uri="{FF2B5EF4-FFF2-40B4-BE49-F238E27FC236}">
-                <a16:creationId xmlns:a16="http://schemas.microsoft.com/office/drawing/2014/main" id="{30525C1B-ABDA-411F-9891-FC194963C822}"/>
+                <a16:creationId xmlns:a16="http://schemas.microsoft.com/office/drawing/2014/main" id="{C6C5A6A7-5DCE-4CC0-8A69-8944C501109E}"/>
               </a:ext>
             </a:extLst>
           </p:cNvPr>
@@ -16930,7 +16928,7 @@
           <p:cNvPr id="19" name="">
             <a:extLst xmlns:a="http://schemas.openxmlformats.org/drawingml/2006/main">
               <a:ext uri="{FF2B5EF4-FFF2-40B4-BE49-F238E27FC236}">
-                <a16:creationId xmlns:a16="http://schemas.microsoft.com/office/drawing/2014/main" id="{05AE8C66-0032-43E5-B94C-B408EF12EE8A}"/>
+                <a16:creationId xmlns:a16="http://schemas.microsoft.com/office/drawing/2014/main" id="{96E4F951-A09A-4C88-9A14-487304756E54}"/>
               </a:ext>
             </a:extLst>
           </p:cNvPr>
@@ -16965,7 +16963,7 @@
           <p:cNvPr id="20" name="">
             <a:extLst xmlns:a="http://schemas.openxmlformats.org/drawingml/2006/main">
               <a:ext uri="{FF2B5EF4-FFF2-40B4-BE49-F238E27FC236}">
-                <a16:creationId xmlns:a16="http://schemas.microsoft.com/office/drawing/2014/main" id="{7B7C2222-2E11-4B56-A30B-D0C31C1C4F69}"/>
+                <a16:creationId xmlns:a16="http://schemas.microsoft.com/office/drawing/2014/main" id="{90CB3E2A-7496-471A-A943-C09758250D4A}"/>
               </a:ext>
             </a:extLst>
           </p:cNvPr>
@@ -17029,7 +17027,7 @@
           <p:cNvPr id="21" name="">
             <a:extLst xmlns:a="http://schemas.openxmlformats.org/drawingml/2006/main">
               <a:ext uri="{FF2B5EF4-FFF2-40B4-BE49-F238E27FC236}">
-                <a16:creationId xmlns:a16="http://schemas.microsoft.com/office/drawing/2014/main" id="{05947E6C-C171-4937-8DC7-F45E8A6C7D66}"/>
+                <a16:creationId xmlns:a16="http://schemas.microsoft.com/office/drawing/2014/main" id="{173F6641-C88F-47CD-BF15-7B93EC100B2F}"/>
               </a:ext>
             </a:extLst>
           </p:cNvPr>
@@ -17064,7 +17062,7 @@
           <p:cNvPr id="22" name="">
             <a:extLst xmlns:a="http://schemas.openxmlformats.org/drawingml/2006/main">
               <a:ext uri="{FF2B5EF4-FFF2-40B4-BE49-F238E27FC236}">
-                <a16:creationId xmlns:a16="http://schemas.microsoft.com/office/drawing/2014/main" id="{6686AB0A-F0A2-4896-B572-27CFC657039B}"/>
+                <a16:creationId xmlns:a16="http://schemas.microsoft.com/office/drawing/2014/main" id="{819B6497-4D9E-47BD-8EA0-041FA3C4B2CF}"/>
               </a:ext>
             </a:extLst>
           </p:cNvPr>
@@ -17128,7 +17126,7 @@
           <p:cNvPr id="23" name="">
             <a:extLst xmlns:a="http://schemas.openxmlformats.org/drawingml/2006/main">
               <a:ext uri="{FF2B5EF4-FFF2-40B4-BE49-F238E27FC236}">
-                <a16:creationId xmlns:a16="http://schemas.microsoft.com/office/drawing/2014/main" id="{1FB43DC2-1B65-4978-9294-A9E3B417717F}"/>
+                <a16:creationId xmlns:a16="http://schemas.microsoft.com/office/drawing/2014/main" id="{376DE4BD-F00C-4E46-B6ED-6C870C77577D}"/>
               </a:ext>
             </a:extLst>
           </p:cNvPr>
@@ -17163,7 +17161,7 @@
           <p:cNvPr id="24" name="">
             <a:extLst xmlns:a="http://schemas.openxmlformats.org/drawingml/2006/main">
               <a:ext uri="{FF2B5EF4-FFF2-40B4-BE49-F238E27FC236}">
-                <a16:creationId xmlns:a16="http://schemas.microsoft.com/office/drawing/2014/main" id="{8AF80DAB-94C0-4195-AFB2-39F5FE56FE8F}"/>
+                <a16:creationId xmlns:a16="http://schemas.microsoft.com/office/drawing/2014/main" id="{5EB794BA-BAD0-4125-A477-C57E362CB70A}"/>
               </a:ext>
             </a:extLst>
           </p:cNvPr>
@@ -17217,7 +17215,7 @@
                 <a:ea typeface="Aptos"/>
                 <a:cs typeface="Aptos"/>
               </a:rPr>
-              <a:t>Keep AI useful but subordinate to human correction.</a:t>
+              <a:t>Keep first drafts subordinate to human correction.</a:t>
             </a:r>
           </a:p>
         </p:txBody>
@@ -17227,7 +17225,7 @@
           <p:cNvPr id="25" name="">
             <a:extLst xmlns:a="http://schemas.openxmlformats.org/drawingml/2006/main">
               <a:ext uri="{FF2B5EF4-FFF2-40B4-BE49-F238E27FC236}">
-                <a16:creationId xmlns:a16="http://schemas.microsoft.com/office/drawing/2014/main" id="{CFC57D5E-4AFB-494F-B213-9D053B9CEDEB}"/>
+                <a16:creationId xmlns:a16="http://schemas.microsoft.com/office/drawing/2014/main" id="{3561AD86-8F09-4E55-9785-A3936B8CF64B}"/>
               </a:ext>
             </a:extLst>
           </p:cNvPr>
@@ -17262,7 +17260,7 @@
           <p:cNvPr id="26" name="">
             <a:extLst xmlns:a="http://schemas.openxmlformats.org/drawingml/2006/main">
               <a:ext uri="{FF2B5EF4-FFF2-40B4-BE49-F238E27FC236}">
-                <a16:creationId xmlns:a16="http://schemas.microsoft.com/office/drawing/2014/main" id="{2518E3EF-B68E-418F-BBC7-F623401B2187}"/>
+                <a16:creationId xmlns:a16="http://schemas.microsoft.com/office/drawing/2014/main" id="{84692BDF-A8DC-441A-81BA-93F2C9139ED0}"/>
               </a:ext>
             </a:extLst>
           </p:cNvPr>
@@ -17326,7 +17324,7 @@
           <p:cNvPr id="27" name="">
             <a:extLst xmlns:a="http://schemas.openxmlformats.org/drawingml/2006/main">
               <a:ext uri="{FF2B5EF4-FFF2-40B4-BE49-F238E27FC236}">
-                <a16:creationId xmlns:a16="http://schemas.microsoft.com/office/drawing/2014/main" id="{424A6E52-2CC9-4965-AD1A-37CAA6186F82}"/>
+                <a16:creationId xmlns:a16="http://schemas.microsoft.com/office/drawing/2014/main" id="{5811FEC0-25E7-4D0D-B6E9-5FD53422EB0C}"/>
               </a:ext>
             </a:extLst>
           </p:cNvPr>
@@ -17361,7 +17359,7 @@
           <p:cNvPr id="28" name="">
             <a:extLst xmlns:a="http://schemas.openxmlformats.org/drawingml/2006/main">
               <a:ext uri="{FF2B5EF4-FFF2-40B4-BE49-F238E27FC236}">
-                <a16:creationId xmlns:a16="http://schemas.microsoft.com/office/drawing/2014/main" id="{A4960975-237C-4310-AD5A-00D4CEBEB51C}"/>
+                <a16:creationId xmlns:a16="http://schemas.microsoft.com/office/drawing/2014/main" id="{635DDE0D-75E2-4B94-BECE-B39C7A897539}"/>
               </a:ext>
             </a:extLst>
           </p:cNvPr>
@@ -17425,7 +17423,7 @@
           <p:cNvPr id="29" name="">
             <a:extLst xmlns:a="http://schemas.openxmlformats.org/drawingml/2006/main">
               <a:ext uri="{FF2B5EF4-FFF2-40B4-BE49-F238E27FC236}">
-                <a16:creationId xmlns:a16="http://schemas.microsoft.com/office/drawing/2014/main" id="{F31CD6A7-9A82-4206-8BF1-0B4E83B56174}"/>
+                <a16:creationId xmlns:a16="http://schemas.microsoft.com/office/drawing/2014/main" id="{B5A7DD0B-3B82-438A-82CC-D76EC7AD6180}"/>
               </a:ext>
             </a:extLst>
           </p:cNvPr>
@@ -17489,7 +17487,7 @@
           <p:cNvPr id="30" name="">
             <a:extLst xmlns:a="http://schemas.openxmlformats.org/drawingml/2006/main">
               <a:ext uri="{FF2B5EF4-FFF2-40B4-BE49-F238E27FC236}">
-                <a16:creationId xmlns:a16="http://schemas.microsoft.com/office/drawing/2014/main" id="{472C0DE2-3621-448D-A2F7-0BFD2DD4750D}"/>
+                <a16:creationId xmlns:a16="http://schemas.microsoft.com/office/drawing/2014/main" id="{713C0E3A-F7B6-4EFD-8B0A-379F1BECDF28}"/>
               </a:ext>
             </a:extLst>
           </p:cNvPr>
@@ -17551,7 +17549,7 @@
     </p:spTree>
     <p:extLst>
       <p:ext uri="{BB962C8B-B14F-4D97-AF65-F5344CB8AC3E}">
-        <p14:creationId xmlns:p14="http://schemas.microsoft.com/office/powerpoint/2010/main" val="831232281"/>
+        <p14:creationId xmlns:p14="http://schemas.microsoft.com/office/powerpoint/2010/main" val="1452608733"/>
       </p:ext>
     </p:extLst>
   </p:cSld>
@@ -17575,7 +17573,7 @@
           <p:cNvPr id="1" name="">
             <a:extLst xmlns:a="http://schemas.openxmlformats.org/drawingml/2006/main">
               <a:ext uri="{FF2B5EF4-FFF2-40B4-BE49-F238E27FC236}">
-                <a16:creationId xmlns:a16="http://schemas.microsoft.com/office/drawing/2014/main" id="{FD755484-1E0E-4112-B890-8A044309246D}"/>
+                <a16:creationId xmlns:a16="http://schemas.microsoft.com/office/drawing/2014/main" id="{4BF2B143-AF0A-4B80-9EEC-E25AB3B0E1AC}"/>
               </a:ext>
             </a:extLst>
           </p:cNvPr>
@@ -17610,7 +17608,7 @@
           <p:cNvPr id="2" name="">
             <a:extLst xmlns:a="http://schemas.openxmlformats.org/drawingml/2006/main">
               <a:ext uri="{FF2B5EF4-FFF2-40B4-BE49-F238E27FC236}">
-                <a16:creationId xmlns:a16="http://schemas.microsoft.com/office/drawing/2014/main" id="{B7686371-B5FE-439C-BC9E-50E538D05B24}"/>
+                <a16:creationId xmlns:a16="http://schemas.microsoft.com/office/drawing/2014/main" id="{C486651C-7DA7-47C9-A284-BBAEB022504A}"/>
               </a:ext>
             </a:extLst>
           </p:cNvPr>
@@ -17645,7 +17643,7 @@
           <p:cNvPr id="3" name="">
             <a:extLst xmlns:a="http://schemas.openxmlformats.org/drawingml/2006/main">
               <a:ext uri="{FF2B5EF4-FFF2-40B4-BE49-F238E27FC236}">
-                <a16:creationId xmlns:a16="http://schemas.microsoft.com/office/drawing/2014/main" id="{C356C5CD-4171-44DB-BE96-283CC54A8C7E}"/>
+                <a16:creationId xmlns:a16="http://schemas.microsoft.com/office/drawing/2014/main" id="{279E34C4-EBAD-44D6-8560-9A05E1DC421F}"/>
               </a:ext>
             </a:extLst>
           </p:cNvPr>
@@ -17680,7 +17678,7 @@
           <p:cNvPr id="4" name="kicker-02-marker">
             <a:extLst xmlns:a="http://schemas.openxmlformats.org/drawingml/2006/main">
               <a:ext uri="{FF2B5EF4-FFF2-40B4-BE49-F238E27FC236}">
-                <a16:creationId xmlns:a16="http://schemas.microsoft.com/office/drawing/2014/main" id="{0C8963CE-64A4-44D4-9FE6-4012EAB7F8FB}"/>
+                <a16:creationId xmlns:a16="http://schemas.microsoft.com/office/drawing/2014/main" id="{F506AD49-4B86-458A-824C-27DABE5F3B3D}"/>
               </a:ext>
             </a:extLst>
           </p:cNvPr>
@@ -17715,7 +17713,7 @@
           <p:cNvPr id="5" name="kicker-02-label">
             <a:extLst xmlns:a="http://schemas.openxmlformats.org/drawingml/2006/main">
               <a:ext uri="{FF2B5EF4-FFF2-40B4-BE49-F238E27FC236}">
-                <a16:creationId xmlns:a16="http://schemas.microsoft.com/office/drawing/2014/main" id="{05439AD7-7153-4820-8DD7-9747F11D0F14}"/>
+                <a16:creationId xmlns:a16="http://schemas.microsoft.com/office/drawing/2014/main" id="{B068E0BE-A427-4786-8DFD-5991F6F43C11}"/>
               </a:ext>
             </a:extLst>
           </p:cNvPr>
@@ -17779,7 +17777,7 @@
           <p:cNvPr id="6" name="">
             <a:extLst xmlns:a="http://schemas.openxmlformats.org/drawingml/2006/main">
               <a:ext uri="{FF2B5EF4-FFF2-40B4-BE49-F238E27FC236}">
-                <a16:creationId xmlns:a16="http://schemas.microsoft.com/office/drawing/2014/main" id="{88B5DF92-8F49-490B-8479-69199693C844}"/>
+                <a16:creationId xmlns:a16="http://schemas.microsoft.com/office/drawing/2014/main" id="{7598E613-35CA-40EF-BCFF-19BD598D8167}"/>
               </a:ext>
             </a:extLst>
           </p:cNvPr>
@@ -17843,7 +17841,7 @@
           <p:cNvPr id="7" name="">
             <a:extLst xmlns:a="http://schemas.openxmlformats.org/drawingml/2006/main">
               <a:ext uri="{FF2B5EF4-FFF2-40B4-BE49-F238E27FC236}">
-                <a16:creationId xmlns:a16="http://schemas.microsoft.com/office/drawing/2014/main" id="{089B7BEF-BF55-4816-93E0-E5982EB5EDC7}"/>
+                <a16:creationId xmlns:a16="http://schemas.microsoft.com/office/drawing/2014/main" id="{5F4DDA70-35C3-485E-80ED-405DED3F2F43}"/>
               </a:ext>
             </a:extLst>
           </p:cNvPr>
@@ -17907,7 +17905,7 @@
           <p:cNvPr id="8" name="">
             <a:extLst xmlns:a="http://schemas.openxmlformats.org/drawingml/2006/main">
               <a:ext uri="{FF2B5EF4-FFF2-40B4-BE49-F238E27FC236}">
-                <a16:creationId xmlns:a16="http://schemas.microsoft.com/office/drawing/2014/main" id="{5913D2FA-C1D4-4E7E-A521-7271DEDA8A81}"/>
+                <a16:creationId xmlns:a16="http://schemas.microsoft.com/office/drawing/2014/main" id="{8589CA62-401F-457F-B900-2226D65C65F1}"/>
               </a:ext>
             </a:extLst>
           </p:cNvPr>
@@ -17942,7 +17940,7 @@
           <p:cNvPr id="9" name="">
             <a:extLst xmlns:a="http://schemas.openxmlformats.org/drawingml/2006/main">
               <a:ext uri="{FF2B5EF4-FFF2-40B4-BE49-F238E27FC236}">
-                <a16:creationId xmlns:a16="http://schemas.microsoft.com/office/drawing/2014/main" id="{4C75064B-6452-4326-BC65-3699104038CE}"/>
+                <a16:creationId xmlns:a16="http://schemas.microsoft.com/office/drawing/2014/main" id="{D21A474E-78BA-4B5E-8C34-AF1F0CB9F8DB}"/>
               </a:ext>
             </a:extLst>
           </p:cNvPr>
@@ -18006,7 +18004,7 @@
           <p:cNvPr id="10" name="">
             <a:extLst xmlns:a="http://schemas.openxmlformats.org/drawingml/2006/main">
               <a:ext uri="{FF2B5EF4-FFF2-40B4-BE49-F238E27FC236}">
-                <a16:creationId xmlns:a16="http://schemas.microsoft.com/office/drawing/2014/main" id="{6FD281E1-2920-45EB-90FE-6EDE44873329}"/>
+                <a16:creationId xmlns:a16="http://schemas.microsoft.com/office/drawing/2014/main" id="{A628B8ED-3B19-4DE7-8B7E-B0D3A32B0058}"/>
               </a:ext>
             </a:extLst>
           </p:cNvPr>
@@ -18070,7 +18068,7 @@
           <p:cNvPr id="11" name="">
             <a:extLst xmlns:a="http://schemas.openxmlformats.org/drawingml/2006/main">
               <a:ext uri="{FF2B5EF4-FFF2-40B4-BE49-F238E27FC236}">
-                <a16:creationId xmlns:a16="http://schemas.microsoft.com/office/drawing/2014/main" id="{09805E1B-ABFF-49E4-8E77-373D74147305}"/>
+                <a16:creationId xmlns:a16="http://schemas.microsoft.com/office/drawing/2014/main" id="{D316DE85-42FC-4348-943E-34E024E781EA}"/>
               </a:ext>
             </a:extLst>
           </p:cNvPr>
@@ -18134,7 +18132,7 @@
           <p:cNvPr id="12" name="">
             <a:extLst xmlns:a="http://schemas.openxmlformats.org/drawingml/2006/main">
               <a:ext uri="{FF2B5EF4-FFF2-40B4-BE49-F238E27FC236}">
-                <a16:creationId xmlns:a16="http://schemas.microsoft.com/office/drawing/2014/main" id="{747CC971-84BD-4FDD-B6F3-B7CD1BB9C9D2}"/>
+                <a16:creationId xmlns:a16="http://schemas.microsoft.com/office/drawing/2014/main" id="{F4B82792-7F8F-4C41-B06E-D7C538D0BE7A}"/>
               </a:ext>
             </a:extLst>
           </p:cNvPr>
@@ -18167,7 +18165,7 @@
           <p:cNvPr id="13" name="">
             <a:extLst xmlns:a="http://schemas.openxmlformats.org/drawingml/2006/main">
               <a:ext uri="{FF2B5EF4-FFF2-40B4-BE49-F238E27FC236}">
-                <a16:creationId xmlns:a16="http://schemas.microsoft.com/office/drawing/2014/main" id="{DAA050D3-DEE2-4087-9372-56A4C9D342C4}"/>
+                <a16:creationId xmlns:a16="http://schemas.microsoft.com/office/drawing/2014/main" id="{E2697825-64F8-44D8-9C43-C2E5C0E1D043}"/>
               </a:ext>
             </a:extLst>
           </p:cNvPr>
@@ -18202,7 +18200,7 @@
           <p:cNvPr id="14" name="">
             <a:extLst xmlns:a="http://schemas.openxmlformats.org/drawingml/2006/main">
               <a:ext uri="{FF2B5EF4-FFF2-40B4-BE49-F238E27FC236}">
-                <a16:creationId xmlns:a16="http://schemas.microsoft.com/office/drawing/2014/main" id="{E5FB2B36-66A9-4728-AA71-87174F1F9BA3}"/>
+                <a16:creationId xmlns:a16="http://schemas.microsoft.com/office/drawing/2014/main" id="{6D5C3D03-4853-4142-87D0-5373D3B140D0}"/>
               </a:ext>
             </a:extLst>
           </p:cNvPr>
@@ -18266,7 +18264,7 @@
           <p:cNvPr id="15" name="">
             <a:extLst xmlns:a="http://schemas.openxmlformats.org/drawingml/2006/main">
               <a:ext uri="{FF2B5EF4-FFF2-40B4-BE49-F238E27FC236}">
-                <a16:creationId xmlns:a16="http://schemas.microsoft.com/office/drawing/2014/main" id="{7CF966EE-9F12-4C1E-95F5-6763D492447C}"/>
+                <a16:creationId xmlns:a16="http://schemas.microsoft.com/office/drawing/2014/main" id="{4FFADC2A-81CA-4C9D-9673-8E0F1A90C0C2}"/>
               </a:ext>
             </a:extLst>
           </p:cNvPr>
@@ -18301,7 +18299,7 @@
           <p:cNvPr id="16" name="">
             <a:extLst xmlns:a="http://schemas.openxmlformats.org/drawingml/2006/main">
               <a:ext uri="{FF2B5EF4-FFF2-40B4-BE49-F238E27FC236}">
-                <a16:creationId xmlns:a16="http://schemas.microsoft.com/office/drawing/2014/main" id="{A90D2C4F-26A2-4AFF-A46C-A80936DE239C}"/>
+                <a16:creationId xmlns:a16="http://schemas.microsoft.com/office/drawing/2014/main" id="{F5647282-47C5-4DD5-B3C9-92AD56F10942}"/>
               </a:ext>
             </a:extLst>
           </p:cNvPr>
@@ -18365,7 +18363,7 @@
           <p:cNvPr id="17" name="">
             <a:extLst xmlns:a="http://schemas.openxmlformats.org/drawingml/2006/main">
               <a:ext uri="{FF2B5EF4-FFF2-40B4-BE49-F238E27FC236}">
-                <a16:creationId xmlns:a16="http://schemas.microsoft.com/office/drawing/2014/main" id="{A739E250-8C65-4831-9487-75B4BF634120}"/>
+                <a16:creationId xmlns:a16="http://schemas.microsoft.com/office/drawing/2014/main" id="{7C20262D-55F7-4DDB-9059-7E55D2506FF4}"/>
               </a:ext>
             </a:extLst>
           </p:cNvPr>
@@ -18400,7 +18398,7 @@
           <p:cNvPr id="18" name="">
             <a:extLst xmlns:a="http://schemas.openxmlformats.org/drawingml/2006/main">
               <a:ext uri="{FF2B5EF4-FFF2-40B4-BE49-F238E27FC236}">
-                <a16:creationId xmlns:a16="http://schemas.microsoft.com/office/drawing/2014/main" id="{E26CF1BF-CA84-4552-BAEB-2A3D65490B50}"/>
+                <a16:creationId xmlns:a16="http://schemas.microsoft.com/office/drawing/2014/main" id="{FEFE5BED-140C-4A61-9D1A-4DF643AF6F5D}"/>
               </a:ext>
             </a:extLst>
           </p:cNvPr>
@@ -18464,7 +18462,7 @@
           <p:cNvPr id="19" name="">
             <a:extLst xmlns:a="http://schemas.openxmlformats.org/drawingml/2006/main">
               <a:ext uri="{FF2B5EF4-FFF2-40B4-BE49-F238E27FC236}">
-                <a16:creationId xmlns:a16="http://schemas.microsoft.com/office/drawing/2014/main" id="{3EDF9E8A-994E-4A4A-A1B2-767EF4F9B704}"/>
+                <a16:creationId xmlns:a16="http://schemas.microsoft.com/office/drawing/2014/main" id="{3ADC3479-473E-4C4E-9B47-549502ECC794}"/>
               </a:ext>
             </a:extLst>
           </p:cNvPr>
@@ -18499,7 +18497,7 @@
           <p:cNvPr id="20" name="">
             <a:extLst xmlns:a="http://schemas.openxmlformats.org/drawingml/2006/main">
               <a:ext uri="{FF2B5EF4-FFF2-40B4-BE49-F238E27FC236}">
-                <a16:creationId xmlns:a16="http://schemas.microsoft.com/office/drawing/2014/main" id="{735B1C01-7A4D-456A-B18B-925A7D32D232}"/>
+                <a16:creationId xmlns:a16="http://schemas.microsoft.com/office/drawing/2014/main" id="{6EBB6204-60A4-4868-81EC-D0B0F6E7797B}"/>
               </a:ext>
             </a:extLst>
           </p:cNvPr>
@@ -18563,7 +18561,7 @@
           <p:cNvPr id="21" name="">
             <a:extLst xmlns:a="http://schemas.openxmlformats.org/drawingml/2006/main">
               <a:ext uri="{FF2B5EF4-FFF2-40B4-BE49-F238E27FC236}">
-                <a16:creationId xmlns:a16="http://schemas.microsoft.com/office/drawing/2014/main" id="{F3DC7DC7-DED2-4AAF-8342-B668E9180A00}"/>
+                <a16:creationId xmlns:a16="http://schemas.microsoft.com/office/drawing/2014/main" id="{96559D5C-4227-468C-A297-F6C7DD78AC19}"/>
               </a:ext>
             </a:extLst>
           </p:cNvPr>
@@ -18598,7 +18596,7 @@
           <p:cNvPr id="22" name="">
             <a:extLst xmlns:a="http://schemas.openxmlformats.org/drawingml/2006/main">
               <a:ext uri="{FF2B5EF4-FFF2-40B4-BE49-F238E27FC236}">
-                <a16:creationId xmlns:a16="http://schemas.microsoft.com/office/drawing/2014/main" id="{42FE5B9F-D5AF-4F31-9DD5-B60C36404218}"/>
+                <a16:creationId xmlns:a16="http://schemas.microsoft.com/office/drawing/2014/main" id="{F204FB92-3365-4322-BFA7-65BA6884978C}"/>
               </a:ext>
             </a:extLst>
           </p:cNvPr>
@@ -18662,7 +18660,7 @@
           <p:cNvPr id="23" name="">
             <a:extLst xmlns:a="http://schemas.openxmlformats.org/drawingml/2006/main">
               <a:ext uri="{FF2B5EF4-FFF2-40B4-BE49-F238E27FC236}">
-                <a16:creationId xmlns:a16="http://schemas.microsoft.com/office/drawing/2014/main" id="{E1A659C7-9A79-4EC3-B74A-604C00FB084A}"/>
+                <a16:creationId xmlns:a16="http://schemas.microsoft.com/office/drawing/2014/main" id="{9FBAD428-CFC0-423B-9EDB-FD31E65EE254}"/>
               </a:ext>
             </a:extLst>
           </p:cNvPr>
@@ -18695,7 +18693,7 @@
           <p:cNvPr id="24" name="">
             <a:extLst xmlns:a="http://schemas.openxmlformats.org/drawingml/2006/main">
               <a:ext uri="{FF2B5EF4-FFF2-40B4-BE49-F238E27FC236}">
-                <a16:creationId xmlns:a16="http://schemas.microsoft.com/office/drawing/2014/main" id="{5FD7CF0A-5C67-4FC1-B3CE-45B3473D24DF}"/>
+                <a16:creationId xmlns:a16="http://schemas.microsoft.com/office/drawing/2014/main" id="{7B32B8F8-B1AB-41F4-8323-DD87CB50B3B3}"/>
               </a:ext>
             </a:extLst>
           </p:cNvPr>
@@ -18730,7 +18728,7 @@
           <p:cNvPr id="25" name="">
             <a:extLst xmlns:a="http://schemas.openxmlformats.org/drawingml/2006/main">
               <a:ext uri="{FF2B5EF4-FFF2-40B4-BE49-F238E27FC236}">
-                <a16:creationId xmlns:a16="http://schemas.microsoft.com/office/drawing/2014/main" id="{5E02A223-2B17-4968-99F9-6EC15DA92636}"/>
+                <a16:creationId xmlns:a16="http://schemas.microsoft.com/office/drawing/2014/main" id="{5FB80E4B-0097-4004-A630-1B189AF0F8FD}"/>
               </a:ext>
             </a:extLst>
           </p:cNvPr>
@@ -18794,7 +18792,7 @@
           <p:cNvPr id="26" name="">
             <a:extLst xmlns:a="http://schemas.openxmlformats.org/drawingml/2006/main">
               <a:ext uri="{FF2B5EF4-FFF2-40B4-BE49-F238E27FC236}">
-                <a16:creationId xmlns:a16="http://schemas.microsoft.com/office/drawing/2014/main" id="{71A79423-E379-4E51-B4BB-293DE5FB5505}"/>
+                <a16:creationId xmlns:a16="http://schemas.microsoft.com/office/drawing/2014/main" id="{8400515D-F770-4F28-812E-EFD7BABF3D3C}"/>
               </a:ext>
             </a:extLst>
           </p:cNvPr>
@@ -18827,7 +18825,7 @@
           <p:cNvPr id="27" name="">
             <a:extLst xmlns:a="http://schemas.openxmlformats.org/drawingml/2006/main">
               <a:ext uri="{FF2B5EF4-FFF2-40B4-BE49-F238E27FC236}">
-                <a16:creationId xmlns:a16="http://schemas.microsoft.com/office/drawing/2014/main" id="{2ED340E5-8B3A-42F6-9558-AC39A14890D5}"/>
+                <a16:creationId xmlns:a16="http://schemas.microsoft.com/office/drawing/2014/main" id="{AD26463F-B0D8-4F3A-8BE1-4D5778C32BE2}"/>
               </a:ext>
             </a:extLst>
           </p:cNvPr>
@@ -18891,7 +18889,7 @@
           <p:cNvPr id="28" name="">
             <a:extLst xmlns:a="http://schemas.openxmlformats.org/drawingml/2006/main">
               <a:ext uri="{FF2B5EF4-FFF2-40B4-BE49-F238E27FC236}">
-                <a16:creationId xmlns:a16="http://schemas.microsoft.com/office/drawing/2014/main" id="{0D35CEE4-B861-4310-BD83-8B0CF1F5AB37}"/>
+                <a16:creationId xmlns:a16="http://schemas.microsoft.com/office/drawing/2014/main" id="{5F36928C-5AD7-4C4C-B7AA-5D6A0315EFF1}"/>
               </a:ext>
             </a:extLst>
           </p:cNvPr>
@@ -18955,7 +18953,7 @@
           <p:cNvPr id="29" name="">
             <a:extLst xmlns:a="http://schemas.openxmlformats.org/drawingml/2006/main">
               <a:ext uri="{FF2B5EF4-FFF2-40B4-BE49-F238E27FC236}">
-                <a16:creationId xmlns:a16="http://schemas.microsoft.com/office/drawing/2014/main" id="{B5162A65-59E2-4B34-B54C-19BA1AC004B0}"/>
+                <a16:creationId xmlns:a16="http://schemas.microsoft.com/office/drawing/2014/main" id="{1C7B45F6-BEE8-44CB-B46D-3DF364B2A1AA}"/>
               </a:ext>
             </a:extLst>
           </p:cNvPr>
@@ -18988,7 +18986,7 @@
           <p:cNvPr id="30" name="">
             <a:extLst xmlns:a="http://schemas.openxmlformats.org/drawingml/2006/main">
               <a:ext uri="{FF2B5EF4-FFF2-40B4-BE49-F238E27FC236}">
-                <a16:creationId xmlns:a16="http://schemas.microsoft.com/office/drawing/2014/main" id="{B8FA83A0-40DC-4B68-8CF9-EB18C16769C8}"/>
+                <a16:creationId xmlns:a16="http://schemas.microsoft.com/office/drawing/2014/main" id="{6B34C2BB-28EF-4EBC-B0E4-AC6EF60027D5}"/>
               </a:ext>
             </a:extLst>
           </p:cNvPr>
@@ -19052,7 +19050,7 @@
           <p:cNvPr id="31" name="">
             <a:extLst xmlns:a="http://schemas.openxmlformats.org/drawingml/2006/main">
               <a:ext uri="{FF2B5EF4-FFF2-40B4-BE49-F238E27FC236}">
-                <a16:creationId xmlns:a16="http://schemas.microsoft.com/office/drawing/2014/main" id="{3C0A25B6-E25B-43AB-B00E-7BAB7D8FEDA1}"/>
+                <a16:creationId xmlns:a16="http://schemas.microsoft.com/office/drawing/2014/main" id="{9BF462B8-7EEC-4274-93BA-8B0A8BB95807}"/>
               </a:ext>
             </a:extLst>
           </p:cNvPr>
@@ -19116,7 +19114,7 @@
           <p:cNvPr id="32" name="">
             <a:extLst xmlns:a="http://schemas.openxmlformats.org/drawingml/2006/main">
               <a:ext uri="{FF2B5EF4-FFF2-40B4-BE49-F238E27FC236}">
-                <a16:creationId xmlns:a16="http://schemas.microsoft.com/office/drawing/2014/main" id="{C5E2D099-F3D1-41C2-9603-4178B5555CA2}"/>
+                <a16:creationId xmlns:a16="http://schemas.microsoft.com/office/drawing/2014/main" id="{1E2D627F-46A8-4696-921A-A625F3589770}"/>
               </a:ext>
             </a:extLst>
           </p:cNvPr>
@@ -19149,7 +19147,7 @@
           <p:cNvPr id="33" name="">
             <a:extLst xmlns:a="http://schemas.openxmlformats.org/drawingml/2006/main">
               <a:ext uri="{FF2B5EF4-FFF2-40B4-BE49-F238E27FC236}">
-                <a16:creationId xmlns:a16="http://schemas.microsoft.com/office/drawing/2014/main" id="{550C173A-54C8-43E0-8547-3FACAAED18EF}"/>
+                <a16:creationId xmlns:a16="http://schemas.microsoft.com/office/drawing/2014/main" id="{86FF1792-BE97-4004-8420-7A0545DF9732}"/>
               </a:ext>
             </a:extLst>
           </p:cNvPr>
@@ -19213,7 +19211,7 @@
           <p:cNvPr id="34" name="">
             <a:extLst xmlns:a="http://schemas.openxmlformats.org/drawingml/2006/main">
               <a:ext uri="{FF2B5EF4-FFF2-40B4-BE49-F238E27FC236}">
-                <a16:creationId xmlns:a16="http://schemas.microsoft.com/office/drawing/2014/main" id="{F8E1F535-FFD8-4477-AED1-87001153FA44}"/>
+                <a16:creationId xmlns:a16="http://schemas.microsoft.com/office/drawing/2014/main" id="{4CD1F06F-FAFB-4E32-B66B-986D565AB136}"/>
               </a:ext>
             </a:extLst>
           </p:cNvPr>
@@ -19277,7 +19275,7 @@
           <p:cNvPr id="35" name="">
             <a:extLst xmlns:a="http://schemas.openxmlformats.org/drawingml/2006/main">
               <a:ext uri="{FF2B5EF4-FFF2-40B4-BE49-F238E27FC236}">
-                <a16:creationId xmlns:a16="http://schemas.microsoft.com/office/drawing/2014/main" id="{384F121A-4BCD-4937-B6D1-A49EBCEAAB78}"/>
+                <a16:creationId xmlns:a16="http://schemas.microsoft.com/office/drawing/2014/main" id="{16BC7757-0AD4-456B-96C2-510989733413}"/>
               </a:ext>
             </a:extLst>
           </p:cNvPr>
@@ -19310,7 +19308,7 @@
           <p:cNvPr id="36" name="">
             <a:extLst xmlns:a="http://schemas.openxmlformats.org/drawingml/2006/main">
               <a:ext uri="{FF2B5EF4-FFF2-40B4-BE49-F238E27FC236}">
-                <a16:creationId xmlns:a16="http://schemas.microsoft.com/office/drawing/2014/main" id="{84023E19-ACDD-4CCC-B867-055CC1B88E80}"/>
+                <a16:creationId xmlns:a16="http://schemas.microsoft.com/office/drawing/2014/main" id="{5B2F6DF5-7720-49F5-A1FF-97004807442B}"/>
               </a:ext>
             </a:extLst>
           </p:cNvPr>
@@ -19374,7 +19372,7 @@
           <p:cNvPr id="37" name="">
             <a:extLst xmlns:a="http://schemas.openxmlformats.org/drawingml/2006/main">
               <a:ext uri="{FF2B5EF4-FFF2-40B4-BE49-F238E27FC236}">
-                <a16:creationId xmlns:a16="http://schemas.microsoft.com/office/drawing/2014/main" id="{95CF069B-09EE-40A9-97FC-0F96377334B0}"/>
+                <a16:creationId xmlns:a16="http://schemas.microsoft.com/office/drawing/2014/main" id="{16FFC367-D485-48E8-A55C-657D4B1186EE}"/>
               </a:ext>
             </a:extLst>
           </p:cNvPr>
@@ -19438,7 +19436,7 @@
           <p:cNvPr id="38" name="">
             <a:extLst xmlns:a="http://schemas.openxmlformats.org/drawingml/2006/main">
               <a:ext uri="{FF2B5EF4-FFF2-40B4-BE49-F238E27FC236}">
-                <a16:creationId xmlns:a16="http://schemas.microsoft.com/office/drawing/2014/main" id="{D29E5860-2EF8-48C5-A0B7-FFF0C4FEDA85}"/>
+                <a16:creationId xmlns:a16="http://schemas.microsoft.com/office/drawing/2014/main" id="{F793DCEA-3D82-4FA5-9B1A-14B51BBAE44B}"/>
               </a:ext>
             </a:extLst>
           </p:cNvPr>
@@ -19471,7 +19469,7 @@
           <p:cNvPr id="39" name="">
             <a:extLst xmlns:a="http://schemas.openxmlformats.org/drawingml/2006/main">
               <a:ext uri="{FF2B5EF4-FFF2-40B4-BE49-F238E27FC236}">
-                <a16:creationId xmlns:a16="http://schemas.microsoft.com/office/drawing/2014/main" id="{B3EA2F4E-21CA-4116-9326-E817727B95F9}"/>
+                <a16:creationId xmlns:a16="http://schemas.microsoft.com/office/drawing/2014/main" id="{9FEDD859-9329-4374-A9F8-FC250F8800AB}"/>
               </a:ext>
             </a:extLst>
           </p:cNvPr>
@@ -19535,7 +19533,7 @@
           <p:cNvPr id="40" name="">
             <a:extLst xmlns:a="http://schemas.openxmlformats.org/drawingml/2006/main">
               <a:ext uri="{FF2B5EF4-FFF2-40B4-BE49-F238E27FC236}">
-                <a16:creationId xmlns:a16="http://schemas.microsoft.com/office/drawing/2014/main" id="{B01D379F-73F0-48B9-B13F-2A0DA4EB977F}"/>
+                <a16:creationId xmlns:a16="http://schemas.microsoft.com/office/drawing/2014/main" id="{BC0802AA-6BBD-4D45-AC73-783F2E22A649}"/>
               </a:ext>
             </a:extLst>
           </p:cNvPr>
@@ -19599,7 +19597,7 @@
           <p:cNvPr id="41" name="">
             <a:extLst xmlns:a="http://schemas.openxmlformats.org/drawingml/2006/main">
               <a:ext uri="{FF2B5EF4-FFF2-40B4-BE49-F238E27FC236}">
-                <a16:creationId xmlns:a16="http://schemas.microsoft.com/office/drawing/2014/main" id="{6C9A2FA5-0196-4D66-9B9F-908D3646818D}"/>
+                <a16:creationId xmlns:a16="http://schemas.microsoft.com/office/drawing/2014/main" id="{A637003F-4A67-43B8-B3DB-86B1970CC5D2}"/>
               </a:ext>
             </a:extLst>
           </p:cNvPr>
@@ -19634,7 +19632,7 @@
           <p:cNvPr id="42" name="">
             <a:extLst xmlns:a="http://schemas.openxmlformats.org/drawingml/2006/main">
               <a:ext uri="{FF2B5EF4-FFF2-40B4-BE49-F238E27FC236}">
-                <a16:creationId xmlns:a16="http://schemas.microsoft.com/office/drawing/2014/main" id="{483BEEC6-3789-4FEC-A7D6-8A927B75B8AB}"/>
+                <a16:creationId xmlns:a16="http://schemas.microsoft.com/office/drawing/2014/main" id="{E3B1F0B9-8259-4013-9143-0694C9BDEC59}"/>
               </a:ext>
             </a:extLst>
           </p:cNvPr>
@@ -19698,7 +19696,7 @@
           <p:cNvPr id="43" name="">
             <a:extLst xmlns:a="http://schemas.openxmlformats.org/drawingml/2006/main">
               <a:ext uri="{FF2B5EF4-FFF2-40B4-BE49-F238E27FC236}">
-                <a16:creationId xmlns:a16="http://schemas.microsoft.com/office/drawing/2014/main" id="{3AD8B769-B4B6-45BD-B291-130F5682C19E}"/>
+                <a16:creationId xmlns:a16="http://schemas.microsoft.com/office/drawing/2014/main" id="{8F9F1533-3DAA-42F4-8411-52A7EA198083}"/>
               </a:ext>
             </a:extLst>
           </p:cNvPr>
@@ -19762,7 +19760,7 @@
           <p:cNvPr id="44" name="">
             <a:extLst xmlns:a="http://schemas.openxmlformats.org/drawingml/2006/main">
               <a:ext uri="{FF2B5EF4-FFF2-40B4-BE49-F238E27FC236}">
-                <a16:creationId xmlns:a16="http://schemas.microsoft.com/office/drawing/2014/main" id="{86C0E4B2-30DE-494E-B0EB-F07FDCF36337}"/>
+                <a16:creationId xmlns:a16="http://schemas.microsoft.com/office/drawing/2014/main" id="{3BE241DD-75C3-4B46-8831-BDD1569871CD}"/>
               </a:ext>
             </a:extLst>
           </p:cNvPr>
@@ -19824,7 +19822,7 @@
     </p:spTree>
     <p:extLst>
       <p:ext uri="{BB962C8B-B14F-4D97-AF65-F5344CB8AC3E}">
-        <p14:creationId xmlns:p14="http://schemas.microsoft.com/office/powerpoint/2010/main" val="1020680469"/>
+        <p14:creationId xmlns:p14="http://schemas.microsoft.com/office/powerpoint/2010/main" val="80084561"/>
       </p:ext>
     </p:extLst>
   </p:cSld>
@@ -19848,7 +19846,7 @@
           <p:cNvPr id="1" name="">
             <a:extLst xmlns:a="http://schemas.openxmlformats.org/drawingml/2006/main">
               <a:ext uri="{FF2B5EF4-FFF2-40B4-BE49-F238E27FC236}">
-                <a16:creationId xmlns:a16="http://schemas.microsoft.com/office/drawing/2014/main" id="{B371A1BD-4418-455B-9028-23EE54769CBC}"/>
+                <a16:creationId xmlns:a16="http://schemas.microsoft.com/office/drawing/2014/main" id="{AC45AC54-7D47-4BE4-BEF5-58C7884EE7A5}"/>
               </a:ext>
             </a:extLst>
           </p:cNvPr>
@@ -19883,7 +19881,7 @@
           <p:cNvPr id="2" name="">
             <a:extLst xmlns:a="http://schemas.openxmlformats.org/drawingml/2006/main">
               <a:ext uri="{FF2B5EF4-FFF2-40B4-BE49-F238E27FC236}">
-                <a16:creationId xmlns:a16="http://schemas.microsoft.com/office/drawing/2014/main" id="{98C335DC-985F-4C07-AAED-352C050CD1E0}"/>
+                <a16:creationId xmlns:a16="http://schemas.microsoft.com/office/drawing/2014/main" id="{A779D4C6-DD16-4875-AA88-8D8348914ED9}"/>
               </a:ext>
             </a:extLst>
           </p:cNvPr>
@@ -19918,7 +19916,7 @@
           <p:cNvPr id="3" name="">
             <a:extLst xmlns:a="http://schemas.openxmlformats.org/drawingml/2006/main">
               <a:ext uri="{FF2B5EF4-FFF2-40B4-BE49-F238E27FC236}">
-                <a16:creationId xmlns:a16="http://schemas.microsoft.com/office/drawing/2014/main" id="{77268B41-F9DD-4753-883C-D4DA3E73EA09}"/>
+                <a16:creationId xmlns:a16="http://schemas.microsoft.com/office/drawing/2014/main" id="{2E366930-F233-4C56-883A-FBEAF082052B}"/>
               </a:ext>
             </a:extLst>
           </p:cNvPr>
@@ -19953,7 +19951,7 @@
           <p:cNvPr id="4" name="kicker-02-marker">
             <a:extLst xmlns:a="http://schemas.openxmlformats.org/drawingml/2006/main">
               <a:ext uri="{FF2B5EF4-FFF2-40B4-BE49-F238E27FC236}">
-                <a16:creationId xmlns:a16="http://schemas.microsoft.com/office/drawing/2014/main" id="{1A225C06-F28B-4CC6-945E-A690E86F5254}"/>
+                <a16:creationId xmlns:a16="http://schemas.microsoft.com/office/drawing/2014/main" id="{0F75DA48-1471-4122-9BAC-AED741735879}"/>
               </a:ext>
             </a:extLst>
           </p:cNvPr>
@@ -19988,7 +19986,7 @@
           <p:cNvPr id="5" name="kicker-02-label">
             <a:extLst xmlns:a="http://schemas.openxmlformats.org/drawingml/2006/main">
               <a:ext uri="{FF2B5EF4-FFF2-40B4-BE49-F238E27FC236}">
-                <a16:creationId xmlns:a16="http://schemas.microsoft.com/office/drawing/2014/main" id="{930E3002-B284-4CC1-982F-A1F4CCB2DE45}"/>
+                <a16:creationId xmlns:a16="http://schemas.microsoft.com/office/drawing/2014/main" id="{206AB955-0898-4EC2-A8B3-240402DD4CF7}"/>
               </a:ext>
             </a:extLst>
           </p:cNvPr>
@@ -20052,7 +20050,7 @@
           <p:cNvPr id="6" name="">
             <a:extLst xmlns:a="http://schemas.openxmlformats.org/drawingml/2006/main">
               <a:ext uri="{FF2B5EF4-FFF2-40B4-BE49-F238E27FC236}">
-                <a16:creationId xmlns:a16="http://schemas.microsoft.com/office/drawing/2014/main" id="{748148CC-4F98-41D7-92A0-68941104F0BF}"/>
+                <a16:creationId xmlns:a16="http://schemas.microsoft.com/office/drawing/2014/main" id="{86AEDFFE-C2C1-4F7E-8660-27A883957829}"/>
               </a:ext>
             </a:extLst>
           </p:cNvPr>
@@ -20116,7 +20114,7 @@
           <p:cNvPr id="7" name="">
             <a:extLst xmlns:a="http://schemas.openxmlformats.org/drawingml/2006/main">
               <a:ext uri="{FF2B5EF4-FFF2-40B4-BE49-F238E27FC236}">
-                <a16:creationId xmlns:a16="http://schemas.microsoft.com/office/drawing/2014/main" id="{97CCFD26-F5B4-4BC4-A072-B47B34B40F67}"/>
+                <a16:creationId xmlns:a16="http://schemas.microsoft.com/office/drawing/2014/main" id="{BE969048-905B-420E-88C4-9ADB8C944438}"/>
               </a:ext>
             </a:extLst>
           </p:cNvPr>
@@ -20180,7 +20178,7 @@
           <p:cNvPr id="8" name="">
             <a:extLst xmlns:a="http://schemas.openxmlformats.org/drawingml/2006/main">
               <a:ext uri="{FF2B5EF4-FFF2-40B4-BE49-F238E27FC236}">
-                <a16:creationId xmlns:a16="http://schemas.microsoft.com/office/drawing/2014/main" id="{91E4F011-FDCE-43DB-9E47-83EB36B1B1D5}"/>
+                <a16:creationId xmlns:a16="http://schemas.microsoft.com/office/drawing/2014/main" id="{4AC6A5A6-0A8F-4A0B-B025-118CC4D7699A}"/>
               </a:ext>
             </a:extLst>
           </p:cNvPr>
@@ -20215,7 +20213,7 @@
           <p:cNvPr id="9" name="">
             <a:extLst xmlns:a="http://schemas.openxmlformats.org/drawingml/2006/main">
               <a:ext uri="{FF2B5EF4-FFF2-40B4-BE49-F238E27FC236}">
-                <a16:creationId xmlns:a16="http://schemas.microsoft.com/office/drawing/2014/main" id="{F9A99791-4A22-40B7-8356-E12A059321F1}"/>
+                <a16:creationId xmlns:a16="http://schemas.microsoft.com/office/drawing/2014/main" id="{DDB69DCA-34CA-4040-9E34-5CC7FB74FBBA}"/>
               </a:ext>
             </a:extLst>
           </p:cNvPr>
@@ -20279,7 +20277,7 @@
           <p:cNvPr id="10" name="">
             <a:extLst xmlns:a="http://schemas.openxmlformats.org/drawingml/2006/main">
               <a:ext uri="{FF2B5EF4-FFF2-40B4-BE49-F238E27FC236}">
-                <a16:creationId xmlns:a16="http://schemas.microsoft.com/office/drawing/2014/main" id="{25567E5E-ED3E-4F48-B131-86357D06966F}"/>
+                <a16:creationId xmlns:a16="http://schemas.microsoft.com/office/drawing/2014/main" id="{B86B1B7C-34A1-4630-A9E8-271E35847314}"/>
               </a:ext>
             </a:extLst>
           </p:cNvPr>
@@ -20343,7 +20341,7 @@
           <p:cNvPr id="11" name="">
             <a:extLst xmlns:a="http://schemas.openxmlformats.org/drawingml/2006/main">
               <a:ext uri="{FF2B5EF4-FFF2-40B4-BE49-F238E27FC236}">
-                <a16:creationId xmlns:a16="http://schemas.microsoft.com/office/drawing/2014/main" id="{26DEC608-6C91-4742-83FD-61DDF9E6EFCE}"/>
+                <a16:creationId xmlns:a16="http://schemas.microsoft.com/office/drawing/2014/main" id="{E65E2CDE-D00F-46A7-916D-962A7AFE41C5}"/>
               </a:ext>
             </a:extLst>
           </p:cNvPr>
@@ -20407,7 +20405,7 @@
           <p:cNvPr id="12" name="">
             <a:extLst xmlns:a="http://schemas.openxmlformats.org/drawingml/2006/main">
               <a:ext uri="{FF2B5EF4-FFF2-40B4-BE49-F238E27FC236}">
-                <a16:creationId xmlns:a16="http://schemas.microsoft.com/office/drawing/2014/main" id="{C28D5F65-BD9E-4F89-A0E0-46F16BE029AA}"/>
+                <a16:creationId xmlns:a16="http://schemas.microsoft.com/office/drawing/2014/main" id="{B9378376-D6E3-4FE6-B8B4-DDFDF0DA9B73}"/>
               </a:ext>
             </a:extLst>
           </p:cNvPr>
@@ -20442,7 +20440,7 @@
           <p:cNvPr id="13" name="">
             <a:extLst xmlns:a="http://schemas.openxmlformats.org/drawingml/2006/main">
               <a:ext uri="{FF2B5EF4-FFF2-40B4-BE49-F238E27FC236}">
-                <a16:creationId xmlns:a16="http://schemas.microsoft.com/office/drawing/2014/main" id="{10CD7962-81E9-4103-93D0-BFEDDB8ACAB0}"/>
+                <a16:creationId xmlns:a16="http://schemas.microsoft.com/office/drawing/2014/main" id="{72327B55-3902-4950-A770-9DFA6A7CDF61}"/>
               </a:ext>
             </a:extLst>
           </p:cNvPr>
@@ -20475,7 +20473,7 @@
           <p:cNvPr id="14" name="">
             <a:extLst xmlns:a="http://schemas.openxmlformats.org/drawingml/2006/main">
               <a:ext uri="{FF2B5EF4-FFF2-40B4-BE49-F238E27FC236}">
-                <a16:creationId xmlns:a16="http://schemas.microsoft.com/office/drawing/2014/main" id="{B5B4D78C-EF98-4EC1-8FAE-539980477E5C}"/>
+                <a16:creationId xmlns:a16="http://schemas.microsoft.com/office/drawing/2014/main" id="{D89934F0-6DCC-4509-946C-B6C15EE1492F}"/>
               </a:ext>
             </a:extLst>
           </p:cNvPr>
@@ -20510,7 +20508,7 @@
           <p:cNvPr id="15" name="">
             <a:extLst xmlns:a="http://schemas.openxmlformats.org/drawingml/2006/main">
               <a:ext uri="{FF2B5EF4-FFF2-40B4-BE49-F238E27FC236}">
-                <a16:creationId xmlns:a16="http://schemas.microsoft.com/office/drawing/2014/main" id="{4F07F421-39E7-4DE2-9EDC-26A7E3EC962A}"/>
+                <a16:creationId xmlns:a16="http://schemas.microsoft.com/office/drawing/2014/main" id="{5019FF4F-F11E-45DB-B74A-CAA9AC28667E}"/>
               </a:ext>
             </a:extLst>
           </p:cNvPr>
@@ -20574,7 +20572,7 @@
           <p:cNvPr id="16" name="">
             <a:extLst xmlns:a="http://schemas.openxmlformats.org/drawingml/2006/main">
               <a:ext uri="{FF2B5EF4-FFF2-40B4-BE49-F238E27FC236}">
-                <a16:creationId xmlns:a16="http://schemas.microsoft.com/office/drawing/2014/main" id="{C05D865B-A591-4F39-BC48-CF19A206ABF0}"/>
+                <a16:creationId xmlns:a16="http://schemas.microsoft.com/office/drawing/2014/main" id="{A5B4B9D7-6A9F-4DFF-A6C0-9CB1AE11DD1E}"/>
               </a:ext>
             </a:extLst>
           </p:cNvPr>
@@ -20607,7 +20605,7 @@
           <p:cNvPr id="17" name="">
             <a:extLst xmlns:a="http://schemas.openxmlformats.org/drawingml/2006/main">
               <a:ext uri="{FF2B5EF4-FFF2-40B4-BE49-F238E27FC236}">
-                <a16:creationId xmlns:a16="http://schemas.microsoft.com/office/drawing/2014/main" id="{EA6FE64E-CEF5-4C98-B146-EE280D440F5B}"/>
+                <a16:creationId xmlns:a16="http://schemas.microsoft.com/office/drawing/2014/main" id="{DDF28C84-27D9-4221-9576-0E855AD93230}"/>
               </a:ext>
             </a:extLst>
           </p:cNvPr>
@@ -20642,7 +20640,7 @@
           <p:cNvPr id="18" name="">
             <a:extLst xmlns:a="http://schemas.openxmlformats.org/drawingml/2006/main">
               <a:ext uri="{FF2B5EF4-FFF2-40B4-BE49-F238E27FC236}">
-                <a16:creationId xmlns:a16="http://schemas.microsoft.com/office/drawing/2014/main" id="{30DF8615-24C4-4CEF-A8E1-B15A681E1E53}"/>
+                <a16:creationId xmlns:a16="http://schemas.microsoft.com/office/drawing/2014/main" id="{0D7F5D18-C744-4E94-944D-0E8151D534BC}"/>
               </a:ext>
             </a:extLst>
           </p:cNvPr>
@@ -20706,7 +20704,7 @@
           <p:cNvPr id="19" name="">
             <a:extLst xmlns:a="http://schemas.openxmlformats.org/drawingml/2006/main">
               <a:ext uri="{FF2B5EF4-FFF2-40B4-BE49-F238E27FC236}">
-                <a16:creationId xmlns:a16="http://schemas.microsoft.com/office/drawing/2014/main" id="{2E61C7DB-F472-4DB6-A988-0A54FB6C5867}"/>
+                <a16:creationId xmlns:a16="http://schemas.microsoft.com/office/drawing/2014/main" id="{7C70F263-7207-4286-B0CA-1FE2C3406B53}"/>
               </a:ext>
             </a:extLst>
           </p:cNvPr>
@@ -20770,7 +20768,7 @@
           <p:cNvPr id="20" name="">
             <a:extLst xmlns:a="http://schemas.openxmlformats.org/drawingml/2006/main">
               <a:ext uri="{FF2B5EF4-FFF2-40B4-BE49-F238E27FC236}">
-                <a16:creationId xmlns:a16="http://schemas.microsoft.com/office/drawing/2014/main" id="{F3C9535C-A758-426A-9CF7-9D6F25638500}"/>
+                <a16:creationId xmlns:a16="http://schemas.microsoft.com/office/drawing/2014/main" id="{02EC09A1-39AF-48F3-9286-C5A08AC20B42}"/>
               </a:ext>
             </a:extLst>
           </p:cNvPr>
@@ -20805,7 +20803,7 @@
           <p:cNvPr id="21" name="">
             <a:extLst xmlns:a="http://schemas.openxmlformats.org/drawingml/2006/main">
               <a:ext uri="{FF2B5EF4-FFF2-40B4-BE49-F238E27FC236}">
-                <a16:creationId xmlns:a16="http://schemas.microsoft.com/office/drawing/2014/main" id="{84BB6F89-521B-44A8-93D4-0054A899993B}"/>
+                <a16:creationId xmlns:a16="http://schemas.microsoft.com/office/drawing/2014/main" id="{AC154D7E-16DB-4307-9E5E-D3D8AEB28568}"/>
               </a:ext>
             </a:extLst>
           </p:cNvPr>
@@ -20838,7 +20836,7 @@
           <p:cNvPr id="22" name="">
             <a:extLst xmlns:a="http://schemas.openxmlformats.org/drawingml/2006/main">
               <a:ext uri="{FF2B5EF4-FFF2-40B4-BE49-F238E27FC236}">
-                <a16:creationId xmlns:a16="http://schemas.microsoft.com/office/drawing/2014/main" id="{4C69E43F-16E4-49A8-B0C9-912190DE4CE7}"/>
+                <a16:creationId xmlns:a16="http://schemas.microsoft.com/office/drawing/2014/main" id="{966CD534-7AE8-4E49-9526-43A0A458A7EA}"/>
               </a:ext>
             </a:extLst>
           </p:cNvPr>
@@ -20873,7 +20871,7 @@
           <p:cNvPr id="23" name="">
             <a:extLst xmlns:a="http://schemas.openxmlformats.org/drawingml/2006/main">
               <a:ext uri="{FF2B5EF4-FFF2-40B4-BE49-F238E27FC236}">
-                <a16:creationId xmlns:a16="http://schemas.microsoft.com/office/drawing/2014/main" id="{4B074159-6EA1-44E0-A8AD-60F8AC1C2B43}"/>
+                <a16:creationId xmlns:a16="http://schemas.microsoft.com/office/drawing/2014/main" id="{A1E8B156-27D7-4624-904A-9C53570975AE}"/>
               </a:ext>
             </a:extLst>
           </p:cNvPr>
@@ -20937,7 +20935,7 @@
           <p:cNvPr id="24" name="">
             <a:extLst xmlns:a="http://schemas.openxmlformats.org/drawingml/2006/main">
               <a:ext uri="{FF2B5EF4-FFF2-40B4-BE49-F238E27FC236}">
-                <a16:creationId xmlns:a16="http://schemas.microsoft.com/office/drawing/2014/main" id="{DCF31FB6-C690-4BB7-A6EB-B51830E222A8}"/>
+                <a16:creationId xmlns:a16="http://schemas.microsoft.com/office/drawing/2014/main" id="{253F1B5A-8A59-41FF-91E1-BDA0E2B60667}"/>
               </a:ext>
             </a:extLst>
           </p:cNvPr>
@@ -21001,7 +20999,7 @@
           <p:cNvPr id="25" name="">
             <a:extLst xmlns:a="http://schemas.openxmlformats.org/drawingml/2006/main">
               <a:ext uri="{FF2B5EF4-FFF2-40B4-BE49-F238E27FC236}">
-                <a16:creationId xmlns:a16="http://schemas.microsoft.com/office/drawing/2014/main" id="{220BBB40-17D3-405F-830B-A0523E0873C2}"/>
+                <a16:creationId xmlns:a16="http://schemas.microsoft.com/office/drawing/2014/main" id="{B1286830-6DFA-4819-A46C-86F0E2DEAE06}"/>
               </a:ext>
             </a:extLst>
           </p:cNvPr>
@@ -21036,7 +21034,7 @@
           <p:cNvPr id="26" name="">
             <a:extLst xmlns:a="http://schemas.openxmlformats.org/drawingml/2006/main">
               <a:ext uri="{FF2B5EF4-FFF2-40B4-BE49-F238E27FC236}">
-                <a16:creationId xmlns:a16="http://schemas.microsoft.com/office/drawing/2014/main" id="{33C57181-E475-42C9-8FB6-4CD732983C14}"/>
+                <a16:creationId xmlns:a16="http://schemas.microsoft.com/office/drawing/2014/main" id="{70C353DE-7F55-4FBA-831A-5B65418B005A}"/>
               </a:ext>
             </a:extLst>
           </p:cNvPr>
@@ -21069,7 +21067,7 @@
           <p:cNvPr id="27" name="">
             <a:extLst xmlns:a="http://schemas.openxmlformats.org/drawingml/2006/main">
               <a:ext uri="{FF2B5EF4-FFF2-40B4-BE49-F238E27FC236}">
-                <a16:creationId xmlns:a16="http://schemas.microsoft.com/office/drawing/2014/main" id="{ABC02EAE-B8C9-4ABC-83D4-495853B61BFE}"/>
+                <a16:creationId xmlns:a16="http://schemas.microsoft.com/office/drawing/2014/main" id="{30306C1E-8BCA-486E-AB2F-6E93A53BA4C9}"/>
               </a:ext>
             </a:extLst>
           </p:cNvPr>
@@ -21104,7 +21102,7 @@
           <p:cNvPr id="28" name="">
             <a:extLst xmlns:a="http://schemas.openxmlformats.org/drawingml/2006/main">
               <a:ext uri="{FF2B5EF4-FFF2-40B4-BE49-F238E27FC236}">
-                <a16:creationId xmlns:a16="http://schemas.microsoft.com/office/drawing/2014/main" id="{A3E74F66-A13C-4339-8748-AF805074B169}"/>
+                <a16:creationId xmlns:a16="http://schemas.microsoft.com/office/drawing/2014/main" id="{0C76918F-776D-4485-9320-35F28B500686}"/>
               </a:ext>
             </a:extLst>
           </p:cNvPr>
@@ -21168,7 +21166,7 @@
           <p:cNvPr id="29" name="">
             <a:extLst xmlns:a="http://schemas.openxmlformats.org/drawingml/2006/main">
               <a:ext uri="{FF2B5EF4-FFF2-40B4-BE49-F238E27FC236}">
-                <a16:creationId xmlns:a16="http://schemas.microsoft.com/office/drawing/2014/main" id="{7842BB54-AE43-47E8-A66E-25415D2D704F}"/>
+                <a16:creationId xmlns:a16="http://schemas.microsoft.com/office/drawing/2014/main" id="{6B94AC7C-AC20-46FC-8B0B-D8AF572CD218}"/>
               </a:ext>
             </a:extLst>
           </p:cNvPr>
@@ -21232,7 +21230,7 @@
           <p:cNvPr id="30" name="">
             <a:extLst xmlns:a="http://schemas.openxmlformats.org/drawingml/2006/main">
               <a:ext uri="{FF2B5EF4-FFF2-40B4-BE49-F238E27FC236}">
-                <a16:creationId xmlns:a16="http://schemas.microsoft.com/office/drawing/2014/main" id="{5CAA5D2A-2C15-4ADD-BA53-332BACB3262D}"/>
+                <a16:creationId xmlns:a16="http://schemas.microsoft.com/office/drawing/2014/main" id="{0E460385-7047-42AF-BFF6-B0912C191FF0}"/>
               </a:ext>
             </a:extLst>
           </p:cNvPr>
@@ -21267,7 +21265,7 @@
           <p:cNvPr id="31" name="">
             <a:extLst xmlns:a="http://schemas.openxmlformats.org/drawingml/2006/main">
               <a:ext uri="{FF2B5EF4-FFF2-40B4-BE49-F238E27FC236}">
-                <a16:creationId xmlns:a16="http://schemas.microsoft.com/office/drawing/2014/main" id="{8AEBCE56-D384-4207-BB19-E73B920F81B3}"/>
+                <a16:creationId xmlns:a16="http://schemas.microsoft.com/office/drawing/2014/main" id="{60039C56-CA32-4AD2-8ABC-715D40C1AD76}"/>
               </a:ext>
             </a:extLst>
           </p:cNvPr>
@@ -21300,7 +21298,7 @@
           <p:cNvPr id="32" name="">
             <a:extLst xmlns:a="http://schemas.openxmlformats.org/drawingml/2006/main">
               <a:ext uri="{FF2B5EF4-FFF2-40B4-BE49-F238E27FC236}">
-                <a16:creationId xmlns:a16="http://schemas.microsoft.com/office/drawing/2014/main" id="{5BA6923D-7E71-4CC2-8D31-C126B142C650}"/>
+                <a16:creationId xmlns:a16="http://schemas.microsoft.com/office/drawing/2014/main" id="{F26822E5-2887-453C-9D2F-E7676CA7B141}"/>
               </a:ext>
             </a:extLst>
           </p:cNvPr>
@@ -21335,7 +21333,7 @@
           <p:cNvPr id="33" name="">
             <a:extLst xmlns:a="http://schemas.openxmlformats.org/drawingml/2006/main">
               <a:ext uri="{FF2B5EF4-FFF2-40B4-BE49-F238E27FC236}">
-                <a16:creationId xmlns:a16="http://schemas.microsoft.com/office/drawing/2014/main" id="{051A524F-5B78-4075-8E1D-879041DBC611}"/>
+                <a16:creationId xmlns:a16="http://schemas.microsoft.com/office/drawing/2014/main" id="{4DD95EF4-3422-4C83-969E-691BC0F52174}"/>
               </a:ext>
             </a:extLst>
           </p:cNvPr>
@@ -21399,7 +21397,7 @@
           <p:cNvPr id="34" name="">
             <a:extLst xmlns:a="http://schemas.openxmlformats.org/drawingml/2006/main">
               <a:ext uri="{FF2B5EF4-FFF2-40B4-BE49-F238E27FC236}">
-                <a16:creationId xmlns:a16="http://schemas.microsoft.com/office/drawing/2014/main" id="{782C9A6A-FF49-4948-A708-F0499100B4A6}"/>
+                <a16:creationId xmlns:a16="http://schemas.microsoft.com/office/drawing/2014/main" id="{0B23B646-2E2E-4949-B35D-B68A218F4669}"/>
               </a:ext>
             </a:extLst>
           </p:cNvPr>
@@ -21463,7 +21461,7 @@
           <p:cNvPr id="35" name="">
             <a:extLst xmlns:a="http://schemas.openxmlformats.org/drawingml/2006/main">
               <a:ext uri="{FF2B5EF4-FFF2-40B4-BE49-F238E27FC236}">
-                <a16:creationId xmlns:a16="http://schemas.microsoft.com/office/drawing/2014/main" id="{D89D2D66-6D32-4E51-B8A6-7D05F83EA768}"/>
+                <a16:creationId xmlns:a16="http://schemas.microsoft.com/office/drawing/2014/main" id="{672EDDED-376D-46EE-BB47-0343E1854EBC}"/>
               </a:ext>
             </a:extLst>
           </p:cNvPr>
@@ -21496,7 +21494,7 @@
           <p:cNvPr id="36" name="">
             <a:extLst xmlns:a="http://schemas.openxmlformats.org/drawingml/2006/main">
               <a:ext uri="{FF2B5EF4-FFF2-40B4-BE49-F238E27FC236}">
-                <a16:creationId xmlns:a16="http://schemas.microsoft.com/office/drawing/2014/main" id="{0BA3AC5D-D76F-492F-A38E-ADC819325A74}"/>
+                <a16:creationId xmlns:a16="http://schemas.microsoft.com/office/drawing/2014/main" id="{668024DE-497A-42D4-B052-68E36E99C062}"/>
               </a:ext>
             </a:extLst>
           </p:cNvPr>
@@ -21531,7 +21529,7 @@
           <p:cNvPr id="37" name="">
             <a:extLst xmlns:a="http://schemas.openxmlformats.org/drawingml/2006/main">
               <a:ext uri="{FF2B5EF4-FFF2-40B4-BE49-F238E27FC236}">
-                <a16:creationId xmlns:a16="http://schemas.microsoft.com/office/drawing/2014/main" id="{BC1962F7-A506-4A52-84EC-6355F7F2D3E0}"/>
+                <a16:creationId xmlns:a16="http://schemas.microsoft.com/office/drawing/2014/main" id="{0EFFB10D-9F0D-40E5-A7FE-1758504D7FED}"/>
               </a:ext>
             </a:extLst>
           </p:cNvPr>
@@ -21595,7 +21593,7 @@
           <p:cNvPr id="38" name="">
             <a:extLst xmlns:a="http://schemas.openxmlformats.org/drawingml/2006/main">
               <a:ext uri="{FF2B5EF4-FFF2-40B4-BE49-F238E27FC236}">
-                <a16:creationId xmlns:a16="http://schemas.microsoft.com/office/drawing/2014/main" id="{B7605559-A640-4B07-B68B-77D21845EF1C}"/>
+                <a16:creationId xmlns:a16="http://schemas.microsoft.com/office/drawing/2014/main" id="{FE431091-A566-480E-8D2C-16FCDFB8F5DB}"/>
               </a:ext>
             </a:extLst>
           </p:cNvPr>
@@ -21659,7 +21657,7 @@
           <p:cNvPr id="39" name="">
             <a:extLst xmlns:a="http://schemas.openxmlformats.org/drawingml/2006/main">
               <a:ext uri="{FF2B5EF4-FFF2-40B4-BE49-F238E27FC236}">
-                <a16:creationId xmlns:a16="http://schemas.microsoft.com/office/drawing/2014/main" id="{07B98FDC-22C7-41E0-9A81-EE3BBBF1B066}"/>
+                <a16:creationId xmlns:a16="http://schemas.microsoft.com/office/drawing/2014/main" id="{8F78F79B-E439-428C-AEF8-114083654D57}"/>
               </a:ext>
             </a:extLst>
           </p:cNvPr>
@@ -21694,7 +21692,7 @@
           <p:cNvPr id="40" name="">
             <a:extLst xmlns:a="http://schemas.openxmlformats.org/drawingml/2006/main">
               <a:ext uri="{FF2B5EF4-FFF2-40B4-BE49-F238E27FC236}">
-                <a16:creationId xmlns:a16="http://schemas.microsoft.com/office/drawing/2014/main" id="{2A9B83BC-83D6-487A-A80D-82A47971C0C7}"/>
+                <a16:creationId xmlns:a16="http://schemas.microsoft.com/office/drawing/2014/main" id="{111229CF-BD9A-4D5F-BF7F-45DB7CA4AA64}"/>
               </a:ext>
             </a:extLst>
           </p:cNvPr>
@@ -21727,7 +21725,7 @@
           <p:cNvPr id="41" name="">
             <a:extLst xmlns:a="http://schemas.openxmlformats.org/drawingml/2006/main">
               <a:ext uri="{FF2B5EF4-FFF2-40B4-BE49-F238E27FC236}">
-                <a16:creationId xmlns:a16="http://schemas.microsoft.com/office/drawing/2014/main" id="{12D49343-7DC8-4179-8976-CA209E91B92E}"/>
+                <a16:creationId xmlns:a16="http://schemas.microsoft.com/office/drawing/2014/main" id="{043F022D-6728-4CEE-952F-4DA24516E090}"/>
               </a:ext>
             </a:extLst>
           </p:cNvPr>
@@ -21762,7 +21760,7 @@
           <p:cNvPr id="42" name="">
             <a:extLst xmlns:a="http://schemas.openxmlformats.org/drawingml/2006/main">
               <a:ext uri="{FF2B5EF4-FFF2-40B4-BE49-F238E27FC236}">
-                <a16:creationId xmlns:a16="http://schemas.microsoft.com/office/drawing/2014/main" id="{9F8DE23E-9CE3-4A50-8C3D-DAE79388783A}"/>
+                <a16:creationId xmlns:a16="http://schemas.microsoft.com/office/drawing/2014/main" id="{90FCD0A1-91E7-4AA8-92A1-FF5B19CCE6F1}"/>
               </a:ext>
             </a:extLst>
           </p:cNvPr>
@@ -21826,7 +21824,7 @@
           <p:cNvPr id="43" name="">
             <a:extLst xmlns:a="http://schemas.openxmlformats.org/drawingml/2006/main">
               <a:ext uri="{FF2B5EF4-FFF2-40B4-BE49-F238E27FC236}">
-                <a16:creationId xmlns:a16="http://schemas.microsoft.com/office/drawing/2014/main" id="{20AB7E48-4F10-4FA4-96B0-279B6F20B1F4}"/>
+                <a16:creationId xmlns:a16="http://schemas.microsoft.com/office/drawing/2014/main" id="{93D94F4E-F039-4ED6-9028-28665FAA8B2D}"/>
               </a:ext>
             </a:extLst>
           </p:cNvPr>
@@ -21890,7 +21888,7 @@
           <p:cNvPr id="44" name="">
             <a:extLst xmlns:a="http://schemas.openxmlformats.org/drawingml/2006/main">
               <a:ext uri="{FF2B5EF4-FFF2-40B4-BE49-F238E27FC236}">
-                <a16:creationId xmlns:a16="http://schemas.microsoft.com/office/drawing/2014/main" id="{F59218E4-A2CE-423D-8C3A-B83876E8130D}"/>
+                <a16:creationId xmlns:a16="http://schemas.microsoft.com/office/drawing/2014/main" id="{7535EC9C-DF47-4C23-B737-2C7A49CD3805}"/>
               </a:ext>
             </a:extLst>
           </p:cNvPr>
@@ -21925,7 +21923,7 @@
           <p:cNvPr id="45" name="">
             <a:extLst xmlns:a="http://schemas.openxmlformats.org/drawingml/2006/main">
               <a:ext uri="{FF2B5EF4-FFF2-40B4-BE49-F238E27FC236}">
-                <a16:creationId xmlns:a16="http://schemas.microsoft.com/office/drawing/2014/main" id="{79875884-A608-4C9E-A1EE-1CF971053BFE}"/>
+                <a16:creationId xmlns:a16="http://schemas.microsoft.com/office/drawing/2014/main" id="{C7FDBC07-A9C9-4E83-B6CC-5AFFAE604285}"/>
               </a:ext>
             </a:extLst>
           </p:cNvPr>
@@ -21958,7 +21956,7 @@
           <p:cNvPr id="46" name="">
             <a:extLst xmlns:a="http://schemas.openxmlformats.org/drawingml/2006/main">
               <a:ext uri="{FF2B5EF4-FFF2-40B4-BE49-F238E27FC236}">
-                <a16:creationId xmlns:a16="http://schemas.microsoft.com/office/drawing/2014/main" id="{EFC1D94E-324D-4AF2-9DBC-C222CA3120EE}"/>
+                <a16:creationId xmlns:a16="http://schemas.microsoft.com/office/drawing/2014/main" id="{1ACFE8E8-E4B8-40F7-8D7B-9B379214F91F}"/>
               </a:ext>
             </a:extLst>
           </p:cNvPr>
@@ -21993,7 +21991,7 @@
           <p:cNvPr id="47" name="">
             <a:extLst xmlns:a="http://schemas.openxmlformats.org/drawingml/2006/main">
               <a:ext uri="{FF2B5EF4-FFF2-40B4-BE49-F238E27FC236}">
-                <a16:creationId xmlns:a16="http://schemas.microsoft.com/office/drawing/2014/main" id="{8E3E84A9-2F21-4728-BC73-90226385D47B}"/>
+                <a16:creationId xmlns:a16="http://schemas.microsoft.com/office/drawing/2014/main" id="{D99D8501-23EF-4BF5-B366-1C89BF3A1887}"/>
               </a:ext>
             </a:extLst>
           </p:cNvPr>
@@ -22057,7 +22055,7 @@
           <p:cNvPr id="48" name="">
             <a:extLst xmlns:a="http://schemas.openxmlformats.org/drawingml/2006/main">
               <a:ext uri="{FF2B5EF4-FFF2-40B4-BE49-F238E27FC236}">
-                <a16:creationId xmlns:a16="http://schemas.microsoft.com/office/drawing/2014/main" id="{CB4FAABE-145D-4694-AA30-DC210363F891}"/>
+                <a16:creationId xmlns:a16="http://schemas.microsoft.com/office/drawing/2014/main" id="{1D471E17-451D-49D3-A0EB-193E289F7E15}"/>
               </a:ext>
             </a:extLst>
           </p:cNvPr>
@@ -22121,7 +22119,7 @@
           <p:cNvPr id="49" name="">
             <a:extLst xmlns:a="http://schemas.openxmlformats.org/drawingml/2006/main">
               <a:ext uri="{FF2B5EF4-FFF2-40B4-BE49-F238E27FC236}">
-                <a16:creationId xmlns:a16="http://schemas.microsoft.com/office/drawing/2014/main" id="{03DA9265-6E9E-4D57-842E-13A92A1EC037}"/>
+                <a16:creationId xmlns:a16="http://schemas.microsoft.com/office/drawing/2014/main" id="{B8E1998C-22FA-492B-80A1-9B557CAC058F}"/>
               </a:ext>
             </a:extLst>
           </p:cNvPr>
@@ -22154,7 +22152,7 @@
           <p:cNvPr id="50" name="">
             <a:extLst xmlns:a="http://schemas.openxmlformats.org/drawingml/2006/main">
               <a:ext uri="{FF2B5EF4-FFF2-40B4-BE49-F238E27FC236}">
-                <a16:creationId xmlns:a16="http://schemas.microsoft.com/office/drawing/2014/main" id="{BB70F1C5-E3ED-4261-8BEC-217BA614AB0A}"/>
+                <a16:creationId xmlns:a16="http://schemas.microsoft.com/office/drawing/2014/main" id="{0FBD4921-25AE-40A7-B36E-4E67DFC29975}"/>
               </a:ext>
             </a:extLst>
           </p:cNvPr>
@@ -22218,7 +22216,7 @@
           <p:cNvPr id="51" name="">
             <a:extLst xmlns:a="http://schemas.openxmlformats.org/drawingml/2006/main">
               <a:ext uri="{FF2B5EF4-FFF2-40B4-BE49-F238E27FC236}">
-                <a16:creationId xmlns:a16="http://schemas.microsoft.com/office/drawing/2014/main" id="{A094D844-33B2-4620-892C-9A29F6678681}"/>
+                <a16:creationId xmlns:a16="http://schemas.microsoft.com/office/drawing/2014/main" id="{DF3CEC4C-471C-4587-AE1F-1DB1DA90E895}"/>
               </a:ext>
             </a:extLst>
           </p:cNvPr>
@@ -22253,7 +22251,7 @@
           <p:cNvPr id="52" name="">
             <a:extLst xmlns:a="http://schemas.openxmlformats.org/drawingml/2006/main">
               <a:ext uri="{FF2B5EF4-FFF2-40B4-BE49-F238E27FC236}">
-                <a16:creationId xmlns:a16="http://schemas.microsoft.com/office/drawing/2014/main" id="{274390F4-B16A-417B-9785-A47FE44ED13D}"/>
+                <a16:creationId xmlns:a16="http://schemas.microsoft.com/office/drawing/2014/main" id="{3835EF9D-70BB-4796-8F36-29629F9EF50D}"/>
               </a:ext>
             </a:extLst>
           </p:cNvPr>
@@ -22317,7 +22315,7 @@
           <p:cNvPr id="53" name="">
             <a:extLst xmlns:a="http://schemas.openxmlformats.org/drawingml/2006/main">
               <a:ext uri="{FF2B5EF4-FFF2-40B4-BE49-F238E27FC236}">
-                <a16:creationId xmlns:a16="http://schemas.microsoft.com/office/drawing/2014/main" id="{E902A7C1-ED89-4EB4-A686-A4176E24D277}"/>
+                <a16:creationId xmlns:a16="http://schemas.microsoft.com/office/drawing/2014/main" id="{3E75D245-F05A-4BAF-9A0E-7760BB140B0F}"/>
               </a:ext>
             </a:extLst>
           </p:cNvPr>
@@ -22381,7 +22379,7 @@
           <p:cNvPr id="54" name="">
             <a:extLst xmlns:a="http://schemas.openxmlformats.org/drawingml/2006/main">
               <a:ext uri="{FF2B5EF4-FFF2-40B4-BE49-F238E27FC236}">
-                <a16:creationId xmlns:a16="http://schemas.microsoft.com/office/drawing/2014/main" id="{8F93E373-C5E1-4A98-B5BD-6D9A949A39BD}"/>
+                <a16:creationId xmlns:a16="http://schemas.microsoft.com/office/drawing/2014/main" id="{91E0EFDB-668B-416A-9078-3751F5F10D39}"/>
               </a:ext>
             </a:extLst>
           </p:cNvPr>
@@ -22445,7 +22443,7 @@
           <p:cNvPr id="55" name="">
             <a:extLst xmlns:a="http://schemas.openxmlformats.org/drawingml/2006/main">
               <a:ext uri="{FF2B5EF4-FFF2-40B4-BE49-F238E27FC236}">
-                <a16:creationId xmlns:a16="http://schemas.microsoft.com/office/drawing/2014/main" id="{47D60611-A2C6-4412-B931-8219BC78581C}"/>
+                <a16:creationId xmlns:a16="http://schemas.microsoft.com/office/drawing/2014/main" id="{966FDE23-F4FE-4EC7-920E-F0C07081190D}"/>
               </a:ext>
             </a:extLst>
           </p:cNvPr>
@@ -22480,7 +22478,7 @@
           <p:cNvPr id="56" name="">
             <a:extLst xmlns:a="http://schemas.openxmlformats.org/drawingml/2006/main">
               <a:ext uri="{FF2B5EF4-FFF2-40B4-BE49-F238E27FC236}">
-                <a16:creationId xmlns:a16="http://schemas.microsoft.com/office/drawing/2014/main" id="{2B5380D4-FF09-4529-BDC5-CD6047A068BE}"/>
+                <a16:creationId xmlns:a16="http://schemas.microsoft.com/office/drawing/2014/main" id="{7489DAFE-402A-43DB-AA74-8FAEBA5E10CE}"/>
               </a:ext>
             </a:extLst>
           </p:cNvPr>
@@ -22515,7 +22513,7 @@
           <p:cNvPr id="57" name="">
             <a:extLst xmlns:a="http://schemas.openxmlformats.org/drawingml/2006/main">
               <a:ext uri="{FF2B5EF4-FFF2-40B4-BE49-F238E27FC236}">
-                <a16:creationId xmlns:a16="http://schemas.microsoft.com/office/drawing/2014/main" id="{52372635-02ED-4884-9694-6A2F7C9C7DB9}"/>
+                <a16:creationId xmlns:a16="http://schemas.microsoft.com/office/drawing/2014/main" id="{02519B63-BD70-43B2-9197-692128ACB4A2}"/>
               </a:ext>
             </a:extLst>
           </p:cNvPr>
@@ -22550,7 +22548,7 @@
           <p:cNvPr id="58" name="kicker-02-marker">
             <a:extLst xmlns:a="http://schemas.openxmlformats.org/drawingml/2006/main">
               <a:ext uri="{FF2B5EF4-FFF2-40B4-BE49-F238E27FC236}">
-                <a16:creationId xmlns:a16="http://schemas.microsoft.com/office/drawing/2014/main" id="{D110CD8C-4CAD-492D-8FE6-FA31923F7480}"/>
+                <a16:creationId xmlns:a16="http://schemas.microsoft.com/office/drawing/2014/main" id="{B65ABE3A-300F-4B6C-AE63-8E703D2461AB}"/>
               </a:ext>
             </a:extLst>
           </p:cNvPr>
@@ -22585,7 +22583,7 @@
           <p:cNvPr id="59" name="kicker-02-label">
             <a:extLst xmlns:a="http://schemas.openxmlformats.org/drawingml/2006/main">
               <a:ext uri="{FF2B5EF4-FFF2-40B4-BE49-F238E27FC236}">
-                <a16:creationId xmlns:a16="http://schemas.microsoft.com/office/drawing/2014/main" id="{988FF8D3-3594-4D31-8D12-053F58572587}"/>
+                <a16:creationId xmlns:a16="http://schemas.microsoft.com/office/drawing/2014/main" id="{FB1E474D-E1CA-4053-876F-F6D3BFAD61C0}"/>
               </a:ext>
             </a:extLst>
           </p:cNvPr>
@@ -22649,7 +22647,7 @@
           <p:cNvPr id="60" name="">
             <a:extLst xmlns:a="http://schemas.openxmlformats.org/drawingml/2006/main">
               <a:ext uri="{FF2B5EF4-FFF2-40B4-BE49-F238E27FC236}">
-                <a16:creationId xmlns:a16="http://schemas.microsoft.com/office/drawing/2014/main" id="{6EAD93E6-BE7C-42A7-A2B7-C620179C3FBF}"/>
+                <a16:creationId xmlns:a16="http://schemas.microsoft.com/office/drawing/2014/main" id="{725D3875-529F-4A89-94A3-1805E7330976}"/>
               </a:ext>
             </a:extLst>
           </p:cNvPr>
@@ -22713,7 +22711,7 @@
           <p:cNvPr id="61" name="">
             <a:extLst xmlns:a="http://schemas.openxmlformats.org/drawingml/2006/main">
               <a:ext uri="{FF2B5EF4-FFF2-40B4-BE49-F238E27FC236}">
-                <a16:creationId xmlns:a16="http://schemas.microsoft.com/office/drawing/2014/main" id="{C88B7E2E-46CD-4B0C-8AEC-AE2085ED6A12}"/>
+                <a16:creationId xmlns:a16="http://schemas.microsoft.com/office/drawing/2014/main" id="{03E876FD-706D-4694-8556-9D96DC7DD9E5}"/>
               </a:ext>
             </a:extLst>
           </p:cNvPr>
@@ -22777,7 +22775,7 @@
           <p:cNvPr id="62" name="">
             <a:extLst xmlns:a="http://schemas.openxmlformats.org/drawingml/2006/main">
               <a:ext uri="{FF2B5EF4-FFF2-40B4-BE49-F238E27FC236}">
-                <a16:creationId xmlns:a16="http://schemas.microsoft.com/office/drawing/2014/main" id="{0115750E-B2F8-4411-8544-0C26F51379E2}"/>
+                <a16:creationId xmlns:a16="http://schemas.microsoft.com/office/drawing/2014/main" id="{9FEA25F2-EE87-4595-B66B-7E7AA998B1F7}"/>
               </a:ext>
             </a:extLst>
           </p:cNvPr>
@@ -22812,7 +22810,7 @@
           <p:cNvPr id="63" name="">
             <a:extLst xmlns:a="http://schemas.openxmlformats.org/drawingml/2006/main">
               <a:ext uri="{FF2B5EF4-FFF2-40B4-BE49-F238E27FC236}">
-                <a16:creationId xmlns:a16="http://schemas.microsoft.com/office/drawing/2014/main" id="{BC47B332-7562-448E-9550-0ABFDAB64064}"/>
+                <a16:creationId xmlns:a16="http://schemas.microsoft.com/office/drawing/2014/main" id="{58B0E44F-C432-4618-9DDF-475C0F745691}"/>
               </a:ext>
             </a:extLst>
           </p:cNvPr>
@@ -22847,7 +22845,7 @@
           <p:cNvPr id="64" name="">
             <a:extLst xmlns:a="http://schemas.openxmlformats.org/drawingml/2006/main">
               <a:ext uri="{FF2B5EF4-FFF2-40B4-BE49-F238E27FC236}">
-                <a16:creationId xmlns:a16="http://schemas.microsoft.com/office/drawing/2014/main" id="{BDBDFDD1-832C-472E-9E78-2DC2B5A82496}"/>
+                <a16:creationId xmlns:a16="http://schemas.microsoft.com/office/drawing/2014/main" id="{5A5D4C0E-493C-4A72-8734-E0D35BED8902}"/>
               </a:ext>
             </a:extLst>
           </p:cNvPr>
@@ -22882,7 +22880,7 @@
           <p:cNvPr id="65" name="">
             <a:extLst xmlns:a="http://schemas.openxmlformats.org/drawingml/2006/main">
               <a:ext uri="{FF2B5EF4-FFF2-40B4-BE49-F238E27FC236}">
-                <a16:creationId xmlns:a16="http://schemas.microsoft.com/office/drawing/2014/main" id="{419B9F9C-62C3-45A5-8FBF-EBF102C09F6B}"/>
+                <a16:creationId xmlns:a16="http://schemas.microsoft.com/office/drawing/2014/main" id="{8D93D0F3-48BE-4E45-A390-D768FB0AB0BF}"/>
               </a:ext>
             </a:extLst>
           </p:cNvPr>
@@ -22917,7 +22915,7 @@
           <p:cNvPr id="66" name="">
             <a:extLst xmlns:a="http://schemas.openxmlformats.org/drawingml/2006/main">
               <a:ext uri="{FF2B5EF4-FFF2-40B4-BE49-F238E27FC236}">
-                <a16:creationId xmlns:a16="http://schemas.microsoft.com/office/drawing/2014/main" id="{83C9648D-4616-4125-9FED-D999D394B098}"/>
+                <a16:creationId xmlns:a16="http://schemas.microsoft.com/office/drawing/2014/main" id="{F39F8268-C4DF-4384-ABFC-B771C46EAD3C}"/>
               </a:ext>
             </a:extLst>
           </p:cNvPr>
@@ -22981,7 +22979,7 @@
           <p:cNvPr id="67" name="">
             <a:extLst xmlns:a="http://schemas.openxmlformats.org/drawingml/2006/main">
               <a:ext uri="{FF2B5EF4-FFF2-40B4-BE49-F238E27FC236}">
-                <a16:creationId xmlns:a16="http://schemas.microsoft.com/office/drawing/2014/main" id="{9983ED43-D510-4DD2-8FB0-9BDFFFCF6C41}"/>
+                <a16:creationId xmlns:a16="http://schemas.microsoft.com/office/drawing/2014/main" id="{127A3231-EBCE-4802-98FD-60705D19C44E}"/>
               </a:ext>
             </a:extLst>
           </p:cNvPr>
@@ -23045,7 +23043,7 @@
           <p:cNvPr id="68" name="">
             <a:extLst xmlns:a="http://schemas.openxmlformats.org/drawingml/2006/main">
               <a:ext uri="{FF2B5EF4-FFF2-40B4-BE49-F238E27FC236}">
-                <a16:creationId xmlns:a16="http://schemas.microsoft.com/office/drawing/2014/main" id="{392EEA3F-B97E-41DD-B325-44A9DA2BAA2D}"/>
+                <a16:creationId xmlns:a16="http://schemas.microsoft.com/office/drawing/2014/main" id="{DE1E5CAF-8566-4F43-AAFA-157ABCF3D653}"/>
               </a:ext>
             </a:extLst>
           </p:cNvPr>
@@ -23107,7 +23105,7 @@
     </p:spTree>
     <p:extLst>
       <p:ext uri="{BB962C8B-B14F-4D97-AF65-F5344CB8AC3E}">
-        <p14:creationId xmlns:p14="http://schemas.microsoft.com/office/powerpoint/2010/main" val="1951045105"/>
+        <p14:creationId xmlns:p14="http://schemas.microsoft.com/office/powerpoint/2010/main" val="558980837"/>
       </p:ext>
     </p:extLst>
   </p:cSld>
@@ -23131,7 +23129,7 @@
           <p:cNvPr id="1" name="">
             <a:extLst xmlns:a="http://schemas.openxmlformats.org/drawingml/2006/main">
               <a:ext uri="{FF2B5EF4-FFF2-40B4-BE49-F238E27FC236}">
-                <a16:creationId xmlns:a16="http://schemas.microsoft.com/office/drawing/2014/main" id="{C3D7C09B-9E44-4146-B7DD-3455C26EB8E4}"/>
+                <a16:creationId xmlns:a16="http://schemas.microsoft.com/office/drawing/2014/main" id="{0BBCC44B-522C-41A0-83DF-746AB46D9CFB}"/>
               </a:ext>
             </a:extLst>
           </p:cNvPr>
@@ -23166,7 +23164,7 @@
           <p:cNvPr id="2" name="">
             <a:extLst xmlns:a="http://schemas.openxmlformats.org/drawingml/2006/main">
               <a:ext uri="{FF2B5EF4-FFF2-40B4-BE49-F238E27FC236}">
-                <a16:creationId xmlns:a16="http://schemas.microsoft.com/office/drawing/2014/main" id="{8303655C-29B5-4EF1-91D6-AB390398DEFC}"/>
+                <a16:creationId xmlns:a16="http://schemas.microsoft.com/office/drawing/2014/main" id="{83EB307E-64FE-41AB-A3F6-37F40B1E2E81}"/>
               </a:ext>
             </a:extLst>
           </p:cNvPr>
@@ -23201,7 +23199,7 @@
           <p:cNvPr id="3" name="">
             <a:extLst xmlns:a="http://schemas.openxmlformats.org/drawingml/2006/main">
               <a:ext uri="{FF2B5EF4-FFF2-40B4-BE49-F238E27FC236}">
-                <a16:creationId xmlns:a16="http://schemas.microsoft.com/office/drawing/2014/main" id="{DC72575B-CDD9-4455-B05E-EE736A61E7B0}"/>
+                <a16:creationId xmlns:a16="http://schemas.microsoft.com/office/drawing/2014/main" id="{65A19846-10E8-47C4-9210-21140229D577}"/>
               </a:ext>
             </a:extLst>
           </p:cNvPr>
@@ -23236,7 +23234,7 @@
           <p:cNvPr id="4" name="kicker-02-marker">
             <a:extLst xmlns:a="http://schemas.openxmlformats.org/drawingml/2006/main">
               <a:ext uri="{FF2B5EF4-FFF2-40B4-BE49-F238E27FC236}">
-                <a16:creationId xmlns:a16="http://schemas.microsoft.com/office/drawing/2014/main" id="{918A1424-B202-4DD9-9941-B8E40B734E82}"/>
+                <a16:creationId xmlns:a16="http://schemas.microsoft.com/office/drawing/2014/main" id="{945A6616-0746-4FB9-A413-FF02381A88BF}"/>
               </a:ext>
             </a:extLst>
           </p:cNvPr>
@@ -23271,7 +23269,7 @@
           <p:cNvPr id="5" name="kicker-02-label">
             <a:extLst xmlns:a="http://schemas.openxmlformats.org/drawingml/2006/main">
               <a:ext uri="{FF2B5EF4-FFF2-40B4-BE49-F238E27FC236}">
-                <a16:creationId xmlns:a16="http://schemas.microsoft.com/office/drawing/2014/main" id="{A13E3F44-9D98-45A2-AAC8-BAAD08CFB68E}"/>
+                <a16:creationId xmlns:a16="http://schemas.microsoft.com/office/drawing/2014/main" id="{4D6C491B-CF26-4CDB-89F7-5C61C4C7E044}"/>
               </a:ext>
             </a:extLst>
           </p:cNvPr>
@@ -23335,7 +23333,7 @@
           <p:cNvPr id="6" name="">
             <a:extLst xmlns:a="http://schemas.openxmlformats.org/drawingml/2006/main">
               <a:ext uri="{FF2B5EF4-FFF2-40B4-BE49-F238E27FC236}">
-                <a16:creationId xmlns:a16="http://schemas.microsoft.com/office/drawing/2014/main" id="{FF8140E6-F50C-4C8F-89E1-DB6611312052}"/>
+                <a16:creationId xmlns:a16="http://schemas.microsoft.com/office/drawing/2014/main" id="{1AD7BC85-D9E4-4639-8810-52C1567BDB2B}"/>
               </a:ext>
             </a:extLst>
           </p:cNvPr>
@@ -23399,7 +23397,7 @@
           <p:cNvPr id="7" name="">
             <a:extLst xmlns:a="http://schemas.openxmlformats.org/drawingml/2006/main">
               <a:ext uri="{FF2B5EF4-FFF2-40B4-BE49-F238E27FC236}">
-                <a16:creationId xmlns:a16="http://schemas.microsoft.com/office/drawing/2014/main" id="{C399E602-98AB-4369-8734-3892D1021241}"/>
+                <a16:creationId xmlns:a16="http://schemas.microsoft.com/office/drawing/2014/main" id="{576EDEF5-1D81-4414-9783-261BDAA7A825}"/>
               </a:ext>
             </a:extLst>
           </p:cNvPr>
@@ -23463,7 +23461,7 @@
           <p:cNvPr id="8" name="">
             <a:extLst xmlns:a="http://schemas.openxmlformats.org/drawingml/2006/main">
               <a:ext uri="{FF2B5EF4-FFF2-40B4-BE49-F238E27FC236}">
-                <a16:creationId xmlns:a16="http://schemas.microsoft.com/office/drawing/2014/main" id="{2BEC47AC-E526-4F36-94AE-F82EB36BB9C4}"/>
+                <a16:creationId xmlns:a16="http://schemas.microsoft.com/office/drawing/2014/main" id="{F8F0DC6D-FCEC-43E6-B46D-EBC835653E3A}"/>
               </a:ext>
             </a:extLst>
           </p:cNvPr>
@@ -23498,7 +23496,7 @@
           <p:cNvPr id="9" name="">
             <a:extLst xmlns:a="http://schemas.openxmlformats.org/drawingml/2006/main">
               <a:ext uri="{FF2B5EF4-FFF2-40B4-BE49-F238E27FC236}">
-                <a16:creationId xmlns:a16="http://schemas.microsoft.com/office/drawing/2014/main" id="{203300E3-8558-4391-89A1-740123A7FD65}"/>
+                <a16:creationId xmlns:a16="http://schemas.microsoft.com/office/drawing/2014/main" id="{C28FD0D9-6677-4CDA-958E-D7A4A6A775CA}"/>
               </a:ext>
             </a:extLst>
           </p:cNvPr>
@@ -23562,7 +23560,7 @@
           <p:cNvPr id="10" name="">
             <a:extLst xmlns:a="http://schemas.openxmlformats.org/drawingml/2006/main">
               <a:ext uri="{FF2B5EF4-FFF2-40B4-BE49-F238E27FC236}">
-                <a16:creationId xmlns:a16="http://schemas.microsoft.com/office/drawing/2014/main" id="{BD6CD5C6-60B7-4A46-B6DC-628182EF81AF}"/>
+                <a16:creationId xmlns:a16="http://schemas.microsoft.com/office/drawing/2014/main" id="{F4195086-A2B6-4600-8276-01C88291D43E}"/>
               </a:ext>
             </a:extLst>
           </p:cNvPr>
@@ -23626,7 +23624,7 @@
           <p:cNvPr id="11" name="">
             <a:extLst xmlns:a="http://schemas.openxmlformats.org/drawingml/2006/main">
               <a:ext uri="{FF2B5EF4-FFF2-40B4-BE49-F238E27FC236}">
-                <a16:creationId xmlns:a16="http://schemas.microsoft.com/office/drawing/2014/main" id="{4097B313-BC23-4638-B934-F9334F53D22B}"/>
+                <a16:creationId xmlns:a16="http://schemas.microsoft.com/office/drawing/2014/main" id="{34ACCA2F-36FB-41E9-92BA-1EF272E9021A}"/>
               </a:ext>
             </a:extLst>
           </p:cNvPr>
@@ -23690,7 +23688,7 @@
           <p:cNvPr id="12" name="">
             <a:extLst xmlns:a="http://schemas.openxmlformats.org/drawingml/2006/main">
               <a:ext uri="{FF2B5EF4-FFF2-40B4-BE49-F238E27FC236}">
-                <a16:creationId xmlns:a16="http://schemas.microsoft.com/office/drawing/2014/main" id="{9D1EC6E3-4835-4281-AF34-E5FD7B43AD6B}"/>
+                <a16:creationId xmlns:a16="http://schemas.microsoft.com/office/drawing/2014/main" id="{ECA44803-7791-41F9-9055-27BD2F74ED98}"/>
               </a:ext>
             </a:extLst>
           </p:cNvPr>
@@ -23723,7 +23721,7 @@
           <p:cNvPr id="13" name="">
             <a:extLst xmlns:a="http://schemas.openxmlformats.org/drawingml/2006/main">
               <a:ext uri="{FF2B5EF4-FFF2-40B4-BE49-F238E27FC236}">
-                <a16:creationId xmlns:a16="http://schemas.microsoft.com/office/drawing/2014/main" id="{DE6F5F73-D821-491D-B177-63F10E7AAC93}"/>
+                <a16:creationId xmlns:a16="http://schemas.microsoft.com/office/drawing/2014/main" id="{CC184CC6-012E-4DBA-937F-0FF3BC667100}"/>
               </a:ext>
             </a:extLst>
           </p:cNvPr>
@@ -23758,7 +23756,7 @@
           <p:cNvPr id="14" name="">
             <a:extLst xmlns:a="http://schemas.openxmlformats.org/drawingml/2006/main">
               <a:ext uri="{FF2B5EF4-FFF2-40B4-BE49-F238E27FC236}">
-                <a16:creationId xmlns:a16="http://schemas.microsoft.com/office/drawing/2014/main" id="{D06E8DDF-FF4A-48BB-9553-3056763602AE}"/>
+                <a16:creationId xmlns:a16="http://schemas.microsoft.com/office/drawing/2014/main" id="{98350384-7031-46DF-9EB3-308EDABEC7B8}"/>
               </a:ext>
             </a:extLst>
           </p:cNvPr>
@@ -23822,7 +23820,7 @@
           <p:cNvPr id="15" name="">
             <a:extLst xmlns:a="http://schemas.openxmlformats.org/drawingml/2006/main">
               <a:ext uri="{FF2B5EF4-FFF2-40B4-BE49-F238E27FC236}">
-                <a16:creationId xmlns:a16="http://schemas.microsoft.com/office/drawing/2014/main" id="{A7E4B085-32E8-48A8-A508-BA3CCEF1CF4A}"/>
+                <a16:creationId xmlns:a16="http://schemas.microsoft.com/office/drawing/2014/main" id="{8D67D14B-A528-4E1F-AE35-E6D703884813}"/>
               </a:ext>
             </a:extLst>
           </p:cNvPr>
@@ -23886,7 +23884,7 @@
           <p:cNvPr id="16" name="">
             <a:extLst xmlns:a="http://schemas.openxmlformats.org/drawingml/2006/main">
               <a:ext uri="{FF2B5EF4-FFF2-40B4-BE49-F238E27FC236}">
-                <a16:creationId xmlns:a16="http://schemas.microsoft.com/office/drawing/2014/main" id="{0F929AE0-4FA4-46E2-8639-ABE905DA5FF9}"/>
+                <a16:creationId xmlns:a16="http://schemas.microsoft.com/office/drawing/2014/main" id="{00085B07-375E-4395-929B-2424779F51F9}"/>
               </a:ext>
             </a:extLst>
           </p:cNvPr>
@@ -23919,7 +23917,7 @@
           <p:cNvPr id="17" name="">
             <a:extLst xmlns:a="http://schemas.openxmlformats.org/drawingml/2006/main">
               <a:ext uri="{FF2B5EF4-FFF2-40B4-BE49-F238E27FC236}">
-                <a16:creationId xmlns:a16="http://schemas.microsoft.com/office/drawing/2014/main" id="{ED57ECA8-43FD-43F5-87C9-50896617D224}"/>
+                <a16:creationId xmlns:a16="http://schemas.microsoft.com/office/drawing/2014/main" id="{232C3673-FB0C-442E-9D98-05438A9489A2}"/>
               </a:ext>
             </a:extLst>
           </p:cNvPr>
@@ -23954,7 +23952,7 @@
           <p:cNvPr id="18" name="">
             <a:extLst xmlns:a="http://schemas.openxmlformats.org/drawingml/2006/main">
               <a:ext uri="{FF2B5EF4-FFF2-40B4-BE49-F238E27FC236}">
-                <a16:creationId xmlns:a16="http://schemas.microsoft.com/office/drawing/2014/main" id="{9DF25A24-426F-4DFB-A7D7-75BF6E0A8155}"/>
+                <a16:creationId xmlns:a16="http://schemas.microsoft.com/office/drawing/2014/main" id="{73B0A12A-EB17-4E19-AD82-4C1A03197D5F}"/>
               </a:ext>
             </a:extLst>
           </p:cNvPr>
@@ -24018,7 +24016,7 @@
           <p:cNvPr id="19" name="">
             <a:extLst xmlns:a="http://schemas.openxmlformats.org/drawingml/2006/main">
               <a:ext uri="{FF2B5EF4-FFF2-40B4-BE49-F238E27FC236}">
-                <a16:creationId xmlns:a16="http://schemas.microsoft.com/office/drawing/2014/main" id="{D99E85E9-16B5-42DE-96F2-6A271946E30E}"/>
+                <a16:creationId xmlns:a16="http://schemas.microsoft.com/office/drawing/2014/main" id="{4F98040E-20B3-421A-91BA-F4E5C86FB2CC}"/>
               </a:ext>
             </a:extLst>
           </p:cNvPr>
@@ -24082,7 +24080,7 @@
           <p:cNvPr id="20" name="">
             <a:extLst xmlns:a="http://schemas.openxmlformats.org/drawingml/2006/main">
               <a:ext uri="{FF2B5EF4-FFF2-40B4-BE49-F238E27FC236}">
-                <a16:creationId xmlns:a16="http://schemas.microsoft.com/office/drawing/2014/main" id="{2E8B828A-81F4-434B-A645-269EF38C5601}"/>
+                <a16:creationId xmlns:a16="http://schemas.microsoft.com/office/drawing/2014/main" id="{5A0D1EBA-4256-4984-9B9F-26FABDDCDCAC}"/>
               </a:ext>
             </a:extLst>
           </p:cNvPr>
@@ -24115,7 +24113,7 @@
           <p:cNvPr id="21" name="">
             <a:extLst xmlns:a="http://schemas.openxmlformats.org/drawingml/2006/main">
               <a:ext uri="{FF2B5EF4-FFF2-40B4-BE49-F238E27FC236}">
-                <a16:creationId xmlns:a16="http://schemas.microsoft.com/office/drawing/2014/main" id="{32EC94B4-B1BA-4E57-B1D5-4608429D3E29}"/>
+                <a16:creationId xmlns:a16="http://schemas.microsoft.com/office/drawing/2014/main" id="{BCAB2EFB-3887-438A-ACEC-3B42225B0A80}"/>
               </a:ext>
             </a:extLst>
           </p:cNvPr>
@@ -24150,7 +24148,7 @@
           <p:cNvPr id="22" name="">
             <a:extLst xmlns:a="http://schemas.openxmlformats.org/drawingml/2006/main">
               <a:ext uri="{FF2B5EF4-FFF2-40B4-BE49-F238E27FC236}">
-                <a16:creationId xmlns:a16="http://schemas.microsoft.com/office/drawing/2014/main" id="{8FA86467-30E8-4988-AE78-43E79ECF5122}"/>
+                <a16:creationId xmlns:a16="http://schemas.microsoft.com/office/drawing/2014/main" id="{FE6199A1-05E2-4AA3-BA81-F9A181949E1D}"/>
               </a:ext>
             </a:extLst>
           </p:cNvPr>
@@ -24214,7 +24212,7 @@
           <p:cNvPr id="23" name="">
             <a:extLst xmlns:a="http://schemas.openxmlformats.org/drawingml/2006/main">
               <a:ext uri="{FF2B5EF4-FFF2-40B4-BE49-F238E27FC236}">
-                <a16:creationId xmlns:a16="http://schemas.microsoft.com/office/drawing/2014/main" id="{137C8EFE-7DA0-4120-9488-1630B999A357}"/>
+                <a16:creationId xmlns:a16="http://schemas.microsoft.com/office/drawing/2014/main" id="{0C59F892-34EC-489E-93F7-46EEB5DBFB9C}"/>
               </a:ext>
             </a:extLst>
           </p:cNvPr>
@@ -24278,7 +24276,7 @@
           <p:cNvPr id="24" name="">
             <a:extLst xmlns:a="http://schemas.openxmlformats.org/drawingml/2006/main">
               <a:ext uri="{FF2B5EF4-FFF2-40B4-BE49-F238E27FC236}">
-                <a16:creationId xmlns:a16="http://schemas.microsoft.com/office/drawing/2014/main" id="{B7ABF5F8-0085-404E-AFE6-125CB352F1B8}"/>
+                <a16:creationId xmlns:a16="http://schemas.microsoft.com/office/drawing/2014/main" id="{9B5E8EBD-AD40-4194-8860-89CB4E5A4F63}"/>
               </a:ext>
             </a:extLst>
           </p:cNvPr>
@@ -24311,7 +24309,7 @@
           <p:cNvPr id="25" name="">
             <a:extLst xmlns:a="http://schemas.openxmlformats.org/drawingml/2006/main">
               <a:ext uri="{FF2B5EF4-FFF2-40B4-BE49-F238E27FC236}">
-                <a16:creationId xmlns:a16="http://schemas.microsoft.com/office/drawing/2014/main" id="{1E69A4E0-9D79-4AD8-941C-F4ECA2C0A9BE}"/>
+                <a16:creationId xmlns:a16="http://schemas.microsoft.com/office/drawing/2014/main" id="{DC03F0BB-6B5A-4EA4-9F22-11B04C292A89}"/>
               </a:ext>
             </a:extLst>
           </p:cNvPr>
@@ -24346,7 +24344,7 @@
           <p:cNvPr id="26" name="">
             <a:extLst xmlns:a="http://schemas.openxmlformats.org/drawingml/2006/main">
               <a:ext uri="{FF2B5EF4-FFF2-40B4-BE49-F238E27FC236}">
-                <a16:creationId xmlns:a16="http://schemas.microsoft.com/office/drawing/2014/main" id="{4E33A922-EBA2-40B7-AC0A-359D63D270F6}"/>
+                <a16:creationId xmlns:a16="http://schemas.microsoft.com/office/drawing/2014/main" id="{41185CC8-1F6E-4C5C-BB19-1C77FF8B5A48}"/>
               </a:ext>
             </a:extLst>
           </p:cNvPr>
@@ -24410,7 +24408,7 @@
           <p:cNvPr id="27" name="">
             <a:extLst xmlns:a="http://schemas.openxmlformats.org/drawingml/2006/main">
               <a:ext uri="{FF2B5EF4-FFF2-40B4-BE49-F238E27FC236}">
-                <a16:creationId xmlns:a16="http://schemas.microsoft.com/office/drawing/2014/main" id="{F8B1D68C-EAF0-4358-A5FA-2342CC4DEB71}"/>
+                <a16:creationId xmlns:a16="http://schemas.microsoft.com/office/drawing/2014/main" id="{423CC821-B247-4FE4-B47E-7FECB206EB50}"/>
               </a:ext>
             </a:extLst>
           </p:cNvPr>
@@ -24474,7 +24472,7 @@
           <p:cNvPr id="28" name="">
             <a:extLst xmlns:a="http://schemas.openxmlformats.org/drawingml/2006/main">
               <a:ext uri="{FF2B5EF4-FFF2-40B4-BE49-F238E27FC236}">
-                <a16:creationId xmlns:a16="http://schemas.microsoft.com/office/drawing/2014/main" id="{DD0DCBCF-F1CD-41C1-BE09-D4A6B7A1946C}"/>
+                <a16:creationId xmlns:a16="http://schemas.microsoft.com/office/drawing/2014/main" id="{F84C2D75-1D3D-41C4-94EF-7227B0B50FB1}"/>
               </a:ext>
             </a:extLst>
           </p:cNvPr>
@@ -24507,7 +24505,7 @@
           <p:cNvPr id="29" name="">
             <a:extLst xmlns:a="http://schemas.openxmlformats.org/drawingml/2006/main">
               <a:ext uri="{FF2B5EF4-FFF2-40B4-BE49-F238E27FC236}">
-                <a16:creationId xmlns:a16="http://schemas.microsoft.com/office/drawing/2014/main" id="{C4A1CC56-CC3C-4C72-911D-400FC968CC0F}"/>
+                <a16:creationId xmlns:a16="http://schemas.microsoft.com/office/drawing/2014/main" id="{68C9395D-B495-4171-91FE-A0F218CB0400}"/>
               </a:ext>
             </a:extLst>
           </p:cNvPr>
@@ -24571,7 +24569,7 @@
           <p:cNvPr id="30" name="">
             <a:extLst xmlns:a="http://schemas.openxmlformats.org/drawingml/2006/main">
               <a:ext uri="{FF2B5EF4-FFF2-40B4-BE49-F238E27FC236}">
-                <a16:creationId xmlns:a16="http://schemas.microsoft.com/office/drawing/2014/main" id="{926FF8DE-F400-49A1-A683-D9BD3D065E90}"/>
+                <a16:creationId xmlns:a16="http://schemas.microsoft.com/office/drawing/2014/main" id="{192315A9-2676-4D84-9175-B1B27F755593}"/>
               </a:ext>
             </a:extLst>
           </p:cNvPr>
@@ -24635,7 +24633,7 @@
           <p:cNvPr id="31" name="">
             <a:extLst xmlns:a="http://schemas.openxmlformats.org/drawingml/2006/main">
               <a:ext uri="{FF2B5EF4-FFF2-40B4-BE49-F238E27FC236}">
-                <a16:creationId xmlns:a16="http://schemas.microsoft.com/office/drawing/2014/main" id="{06658065-55E3-4AC7-9D37-63CA01426B38}"/>
+                <a16:creationId xmlns:a16="http://schemas.microsoft.com/office/drawing/2014/main" id="{B92603E4-73D3-4E35-B4C6-E243F1E13698}"/>
               </a:ext>
             </a:extLst>
           </p:cNvPr>
@@ -24670,7 +24668,7 @@
           <p:cNvPr id="32" name="">
             <a:extLst xmlns:a="http://schemas.openxmlformats.org/drawingml/2006/main">
               <a:ext uri="{FF2B5EF4-FFF2-40B4-BE49-F238E27FC236}">
-                <a16:creationId xmlns:a16="http://schemas.microsoft.com/office/drawing/2014/main" id="{489BDF78-5A73-4F35-8461-06590F387B79}"/>
+                <a16:creationId xmlns:a16="http://schemas.microsoft.com/office/drawing/2014/main" id="{54C287B6-49A7-4ADC-98DD-8C28DBF5DC3A}"/>
               </a:ext>
             </a:extLst>
           </p:cNvPr>
@@ -24734,7 +24732,7 @@
           <p:cNvPr id="33" name="">
             <a:extLst xmlns:a="http://schemas.openxmlformats.org/drawingml/2006/main">
               <a:ext uri="{FF2B5EF4-FFF2-40B4-BE49-F238E27FC236}">
-                <a16:creationId xmlns:a16="http://schemas.microsoft.com/office/drawing/2014/main" id="{CE722D98-C7D6-4CB7-B915-40311388182B}"/>
+                <a16:creationId xmlns:a16="http://schemas.microsoft.com/office/drawing/2014/main" id="{5BA7F561-A154-46BD-A3B5-B1628DD6ED0E}"/>
               </a:ext>
             </a:extLst>
           </p:cNvPr>
@@ -24798,7 +24796,7 @@
           <p:cNvPr id="34" name="">
             <a:extLst xmlns:a="http://schemas.openxmlformats.org/drawingml/2006/main">
               <a:ext uri="{FF2B5EF4-FFF2-40B4-BE49-F238E27FC236}">
-                <a16:creationId xmlns:a16="http://schemas.microsoft.com/office/drawing/2014/main" id="{A0787CCD-5C31-4E4A-B0BF-91B81E895198}"/>
+                <a16:creationId xmlns:a16="http://schemas.microsoft.com/office/drawing/2014/main" id="{CCED4DA4-8119-4A07-8E01-6F0ECCD35313}"/>
               </a:ext>
             </a:extLst>
           </p:cNvPr>
@@ -24860,7 +24858,7 @@
     </p:spTree>
     <p:extLst>
       <p:ext uri="{BB962C8B-B14F-4D97-AF65-F5344CB8AC3E}">
-        <p14:creationId xmlns:p14="http://schemas.microsoft.com/office/powerpoint/2010/main" val="1182992155"/>
+        <p14:creationId xmlns:p14="http://schemas.microsoft.com/office/powerpoint/2010/main" val="574329615"/>
       </p:ext>
     </p:extLst>
   </p:cSld>
@@ -24884,7 +24882,7 @@
           <p:cNvPr id="1" name="">
             <a:extLst xmlns:a="http://schemas.openxmlformats.org/drawingml/2006/main">
               <a:ext uri="{FF2B5EF4-FFF2-40B4-BE49-F238E27FC236}">
-                <a16:creationId xmlns:a16="http://schemas.microsoft.com/office/drawing/2014/main" id="{5A5918CD-57BD-4CAA-BDA9-38064B7F5B5D}"/>
+                <a16:creationId xmlns:a16="http://schemas.microsoft.com/office/drawing/2014/main" id="{13150CC2-C14A-4200-8E2E-31CCD266A983}"/>
               </a:ext>
             </a:extLst>
           </p:cNvPr>
@@ -24919,7 +24917,7 @@
           <p:cNvPr id="2" name="">
             <a:extLst xmlns:a="http://schemas.openxmlformats.org/drawingml/2006/main">
               <a:ext uri="{FF2B5EF4-FFF2-40B4-BE49-F238E27FC236}">
-                <a16:creationId xmlns:a16="http://schemas.microsoft.com/office/drawing/2014/main" id="{2F7F9A04-56B2-46D1-8614-0709C5FCD264}"/>
+                <a16:creationId xmlns:a16="http://schemas.microsoft.com/office/drawing/2014/main" id="{BCB267BE-2494-4786-A645-EBC574BD8AF1}"/>
               </a:ext>
             </a:extLst>
           </p:cNvPr>
@@ -24954,7 +24952,7 @@
           <p:cNvPr id="3" name="">
             <a:extLst xmlns:a="http://schemas.openxmlformats.org/drawingml/2006/main">
               <a:ext uri="{FF2B5EF4-FFF2-40B4-BE49-F238E27FC236}">
-                <a16:creationId xmlns:a16="http://schemas.microsoft.com/office/drawing/2014/main" id="{F65594AB-2527-439B-B8EA-907CE7BAEEFB}"/>
+                <a16:creationId xmlns:a16="http://schemas.microsoft.com/office/drawing/2014/main" id="{EDF8ABB1-6769-4A00-ABDE-6112C1E6B6E5}"/>
               </a:ext>
             </a:extLst>
           </p:cNvPr>
@@ -24989,7 +24987,7 @@
           <p:cNvPr id="4" name="kicker-02-marker">
             <a:extLst xmlns:a="http://schemas.openxmlformats.org/drawingml/2006/main">
               <a:ext uri="{FF2B5EF4-FFF2-40B4-BE49-F238E27FC236}">
-                <a16:creationId xmlns:a16="http://schemas.microsoft.com/office/drawing/2014/main" id="{3E52FB52-01AD-43C8-8399-71AE6A194447}"/>
+                <a16:creationId xmlns:a16="http://schemas.microsoft.com/office/drawing/2014/main" id="{9DFA9834-9F68-4AB7-B565-84FA43814F08}"/>
               </a:ext>
             </a:extLst>
           </p:cNvPr>
@@ -25024,7 +25022,7 @@
           <p:cNvPr id="5" name="kicker-02-label">
             <a:extLst xmlns:a="http://schemas.openxmlformats.org/drawingml/2006/main">
               <a:ext uri="{FF2B5EF4-FFF2-40B4-BE49-F238E27FC236}">
-                <a16:creationId xmlns:a16="http://schemas.microsoft.com/office/drawing/2014/main" id="{B27ADE39-E44B-4691-82CB-25EB40FD92FC}"/>
+                <a16:creationId xmlns:a16="http://schemas.microsoft.com/office/drawing/2014/main" id="{205D38A4-ABAA-42D5-B18F-2EC89326FEE7}"/>
               </a:ext>
             </a:extLst>
           </p:cNvPr>
@@ -25088,7 +25086,7 @@
           <p:cNvPr id="6" name="">
             <a:extLst xmlns:a="http://schemas.openxmlformats.org/drawingml/2006/main">
               <a:ext uri="{FF2B5EF4-FFF2-40B4-BE49-F238E27FC236}">
-                <a16:creationId xmlns:a16="http://schemas.microsoft.com/office/drawing/2014/main" id="{7AE43F53-AAD6-411E-8E14-370B230F1A4A}"/>
+                <a16:creationId xmlns:a16="http://schemas.microsoft.com/office/drawing/2014/main" id="{941EF0D4-DA72-4B22-922C-941E049DD37B}"/>
               </a:ext>
             </a:extLst>
           </p:cNvPr>
@@ -25152,7 +25150,7 @@
           <p:cNvPr id="7" name="">
             <a:extLst xmlns:a="http://schemas.openxmlformats.org/drawingml/2006/main">
               <a:ext uri="{FF2B5EF4-FFF2-40B4-BE49-F238E27FC236}">
-                <a16:creationId xmlns:a16="http://schemas.microsoft.com/office/drawing/2014/main" id="{CD0C3437-4329-4F85-B8BD-B9996D3927C5}"/>
+                <a16:creationId xmlns:a16="http://schemas.microsoft.com/office/drawing/2014/main" id="{84FFEE9A-073F-4877-9D97-ACB06C19D639}"/>
               </a:ext>
             </a:extLst>
           </p:cNvPr>
@@ -25216,7 +25214,7 @@
           <p:cNvPr id="8" name="">
             <a:extLst xmlns:a="http://schemas.openxmlformats.org/drawingml/2006/main">
               <a:ext uri="{FF2B5EF4-FFF2-40B4-BE49-F238E27FC236}">
-                <a16:creationId xmlns:a16="http://schemas.microsoft.com/office/drawing/2014/main" id="{4CD31D39-DAF7-4ABD-968D-EBBF7F7C0696}"/>
+                <a16:creationId xmlns:a16="http://schemas.microsoft.com/office/drawing/2014/main" id="{92DC3BEA-5B05-459B-9ACF-25411DB1F8A6}"/>
               </a:ext>
             </a:extLst>
           </p:cNvPr>
@@ -25251,7 +25249,7 @@
           <p:cNvPr id="9" name="">
             <a:extLst xmlns:a="http://schemas.openxmlformats.org/drawingml/2006/main">
               <a:ext uri="{FF2B5EF4-FFF2-40B4-BE49-F238E27FC236}">
-                <a16:creationId xmlns:a16="http://schemas.microsoft.com/office/drawing/2014/main" id="{076DBE32-5BE1-433D-B0C4-8A98802C762C}"/>
+                <a16:creationId xmlns:a16="http://schemas.microsoft.com/office/drawing/2014/main" id="{7A2F091E-23C1-45DC-A9D5-CD44400B4A24}"/>
               </a:ext>
             </a:extLst>
           </p:cNvPr>
@@ -25315,7 +25313,7 @@
           <p:cNvPr id="10" name="">
             <a:extLst xmlns:a="http://schemas.openxmlformats.org/drawingml/2006/main">
               <a:ext uri="{FF2B5EF4-FFF2-40B4-BE49-F238E27FC236}">
-                <a16:creationId xmlns:a16="http://schemas.microsoft.com/office/drawing/2014/main" id="{3B98A296-56BB-41BD-993D-FF3906C1F3B5}"/>
+                <a16:creationId xmlns:a16="http://schemas.microsoft.com/office/drawing/2014/main" id="{9B4B2F9F-E756-48D7-A535-074EF86D02B3}"/>
               </a:ext>
             </a:extLst>
           </p:cNvPr>
@@ -25379,7 +25377,7 @@
           <p:cNvPr id="11" name="">
             <a:extLst xmlns:a="http://schemas.openxmlformats.org/drawingml/2006/main">
               <a:ext uri="{FF2B5EF4-FFF2-40B4-BE49-F238E27FC236}">
-                <a16:creationId xmlns:a16="http://schemas.microsoft.com/office/drawing/2014/main" id="{B8EFE5E1-CAD5-4F0D-A445-9711C84C0D9D}"/>
+                <a16:creationId xmlns:a16="http://schemas.microsoft.com/office/drawing/2014/main" id="{4423A4AD-9FFF-4CCC-805D-5D3CB9764E0C}"/>
               </a:ext>
             </a:extLst>
           </p:cNvPr>
@@ -25443,7 +25441,7 @@
           <p:cNvPr id="12" name="">
             <a:extLst xmlns:a="http://schemas.openxmlformats.org/drawingml/2006/main">
               <a:ext uri="{FF2B5EF4-FFF2-40B4-BE49-F238E27FC236}">
-                <a16:creationId xmlns:a16="http://schemas.microsoft.com/office/drawing/2014/main" id="{890CC092-274A-4BFD-B0FC-30FB90FEEA7F}"/>
+                <a16:creationId xmlns:a16="http://schemas.microsoft.com/office/drawing/2014/main" id="{9D253430-C039-42BA-BF88-AF72BE65A76A}"/>
               </a:ext>
             </a:extLst>
           </p:cNvPr>
@@ -25478,7 +25476,7 @@
           <p:cNvPr id="13" name="">
             <a:extLst xmlns:a="http://schemas.openxmlformats.org/drawingml/2006/main">
               <a:ext uri="{FF2B5EF4-FFF2-40B4-BE49-F238E27FC236}">
-                <a16:creationId xmlns:a16="http://schemas.microsoft.com/office/drawing/2014/main" id="{0FB0FCB5-C70D-4D78-B6FC-4EE36044D296}"/>
+                <a16:creationId xmlns:a16="http://schemas.microsoft.com/office/drawing/2014/main" id="{15DC7BFF-782E-4168-8E33-9C37109993F5}"/>
               </a:ext>
             </a:extLst>
           </p:cNvPr>
@@ -25511,7 +25509,7 @@
           <p:cNvPr id="14" name="">
             <a:extLst xmlns:a="http://schemas.openxmlformats.org/drawingml/2006/main">
               <a:ext uri="{FF2B5EF4-FFF2-40B4-BE49-F238E27FC236}">
-                <a16:creationId xmlns:a16="http://schemas.microsoft.com/office/drawing/2014/main" id="{27B740BD-2FE8-4DE4-B377-FE1DA3A944A0}"/>
+                <a16:creationId xmlns:a16="http://schemas.microsoft.com/office/drawing/2014/main" id="{F8019B55-7F07-4622-85F4-F7A5C34FF88B}"/>
               </a:ext>
             </a:extLst>
           </p:cNvPr>
@@ -25546,7 +25544,7 @@
           <p:cNvPr id="15" name="">
             <a:extLst xmlns:a="http://schemas.openxmlformats.org/drawingml/2006/main">
               <a:ext uri="{FF2B5EF4-FFF2-40B4-BE49-F238E27FC236}">
-                <a16:creationId xmlns:a16="http://schemas.microsoft.com/office/drawing/2014/main" id="{338E27B4-DC29-4E95-95B6-8355FF33A553}"/>
+                <a16:creationId xmlns:a16="http://schemas.microsoft.com/office/drawing/2014/main" id="{85EE09A6-C5C1-4C41-8099-18B6DB426E40}"/>
               </a:ext>
             </a:extLst>
           </p:cNvPr>
@@ -25610,7 +25608,7 @@
           <p:cNvPr id="16" name="">
             <a:extLst xmlns:a="http://schemas.openxmlformats.org/drawingml/2006/main">
               <a:ext uri="{FF2B5EF4-FFF2-40B4-BE49-F238E27FC236}">
-                <a16:creationId xmlns:a16="http://schemas.microsoft.com/office/drawing/2014/main" id="{482F924A-78B3-479B-898A-C909A745AB89}"/>
+                <a16:creationId xmlns:a16="http://schemas.microsoft.com/office/drawing/2014/main" id="{C38073E5-8AA4-4FC7-97BC-513B25470682}"/>
               </a:ext>
             </a:extLst>
           </p:cNvPr>
@@ -25645,7 +25643,7 @@
           <p:cNvPr id="17" name="">
             <a:extLst xmlns:a="http://schemas.openxmlformats.org/drawingml/2006/main">
               <a:ext uri="{FF2B5EF4-FFF2-40B4-BE49-F238E27FC236}">
-                <a16:creationId xmlns:a16="http://schemas.microsoft.com/office/drawing/2014/main" id="{1FE682E6-BA69-463A-93F5-1E6606678CB1}"/>
+                <a16:creationId xmlns:a16="http://schemas.microsoft.com/office/drawing/2014/main" id="{774D70EC-695B-401E-B47D-6E0536BF8B9A}"/>
               </a:ext>
             </a:extLst>
           </p:cNvPr>
@@ -25709,7 +25707,7 @@
           <p:cNvPr id="18" name="">
             <a:extLst xmlns:a="http://schemas.openxmlformats.org/drawingml/2006/main">
               <a:ext uri="{FF2B5EF4-FFF2-40B4-BE49-F238E27FC236}">
-                <a16:creationId xmlns:a16="http://schemas.microsoft.com/office/drawing/2014/main" id="{72782C4F-66EE-410F-A691-5D9CBAC2CB56}"/>
+                <a16:creationId xmlns:a16="http://schemas.microsoft.com/office/drawing/2014/main" id="{D8AA2A1A-75E2-4E8D-8ACF-FE69716AB097}"/>
               </a:ext>
             </a:extLst>
           </p:cNvPr>
@@ -25744,7 +25742,7 @@
           <p:cNvPr id="19" name="">
             <a:extLst xmlns:a="http://schemas.openxmlformats.org/drawingml/2006/main">
               <a:ext uri="{FF2B5EF4-FFF2-40B4-BE49-F238E27FC236}">
-                <a16:creationId xmlns:a16="http://schemas.microsoft.com/office/drawing/2014/main" id="{ACC54928-1427-4FEC-ADEA-D7A357ADE2BE}"/>
+                <a16:creationId xmlns:a16="http://schemas.microsoft.com/office/drawing/2014/main" id="{6DF72709-2878-4176-A832-4970A3C6F5B9}"/>
               </a:ext>
             </a:extLst>
           </p:cNvPr>
@@ -25808,7 +25806,7 @@
           <p:cNvPr id="20" name="">
             <a:extLst xmlns:a="http://schemas.openxmlformats.org/drawingml/2006/main">
               <a:ext uri="{FF2B5EF4-FFF2-40B4-BE49-F238E27FC236}">
-                <a16:creationId xmlns:a16="http://schemas.microsoft.com/office/drawing/2014/main" id="{074266A7-DE12-4364-A92B-897F21073F99}"/>
+                <a16:creationId xmlns:a16="http://schemas.microsoft.com/office/drawing/2014/main" id="{93CA6678-B778-4AEF-A2DA-049321D172EE}"/>
               </a:ext>
             </a:extLst>
           </p:cNvPr>
@@ -25843,7 +25841,7 @@
           <p:cNvPr id="21" name="">
             <a:extLst xmlns:a="http://schemas.openxmlformats.org/drawingml/2006/main">
               <a:ext uri="{FF2B5EF4-FFF2-40B4-BE49-F238E27FC236}">
-                <a16:creationId xmlns:a16="http://schemas.microsoft.com/office/drawing/2014/main" id="{1DD795AD-DB94-4D20-BEF3-E8B9BCE4CE15}"/>
+                <a16:creationId xmlns:a16="http://schemas.microsoft.com/office/drawing/2014/main" id="{46CEEC4F-81AE-4250-8C5B-8A7121A98B7A}"/>
               </a:ext>
             </a:extLst>
           </p:cNvPr>
@@ -25907,7 +25905,7 @@
           <p:cNvPr id="22" name="">
             <a:extLst xmlns:a="http://schemas.openxmlformats.org/drawingml/2006/main">
               <a:ext uri="{FF2B5EF4-FFF2-40B4-BE49-F238E27FC236}">
-                <a16:creationId xmlns:a16="http://schemas.microsoft.com/office/drawing/2014/main" id="{D1EBF26E-FF3B-4EC8-8575-DD295FD7D746}"/>
+                <a16:creationId xmlns:a16="http://schemas.microsoft.com/office/drawing/2014/main" id="{85F4DB91-8C48-4D0B-B01A-CEF9CC40A01C}"/>
               </a:ext>
             </a:extLst>
           </p:cNvPr>
@@ -25942,7 +25940,7 @@
           <p:cNvPr id="23" name="">
             <a:extLst xmlns:a="http://schemas.openxmlformats.org/drawingml/2006/main">
               <a:ext uri="{FF2B5EF4-FFF2-40B4-BE49-F238E27FC236}">
-                <a16:creationId xmlns:a16="http://schemas.microsoft.com/office/drawing/2014/main" id="{7994AF7A-B23A-4031-9BAB-9A4266966D3F}"/>
+                <a16:creationId xmlns:a16="http://schemas.microsoft.com/office/drawing/2014/main" id="{36745AE2-E75D-4948-B5F3-8859DC6619D1}"/>
               </a:ext>
             </a:extLst>
           </p:cNvPr>
@@ -26006,7 +26004,7 @@
           <p:cNvPr id="24" name="">
             <a:extLst xmlns:a="http://schemas.openxmlformats.org/drawingml/2006/main">
               <a:ext uri="{FF2B5EF4-FFF2-40B4-BE49-F238E27FC236}">
-                <a16:creationId xmlns:a16="http://schemas.microsoft.com/office/drawing/2014/main" id="{92C83C42-A8DC-4F5C-B412-99C659CCF7B7}"/>
+                <a16:creationId xmlns:a16="http://schemas.microsoft.com/office/drawing/2014/main" id="{8D1B78A5-5522-470B-BEDF-826352CF94D6}"/>
               </a:ext>
             </a:extLst>
           </p:cNvPr>
@@ -26041,7 +26039,7 @@
           <p:cNvPr id="25" name="">
             <a:extLst xmlns:a="http://schemas.openxmlformats.org/drawingml/2006/main">
               <a:ext uri="{FF2B5EF4-FFF2-40B4-BE49-F238E27FC236}">
-                <a16:creationId xmlns:a16="http://schemas.microsoft.com/office/drawing/2014/main" id="{0CC2E8A1-1A7F-46F6-8756-16553155EF93}"/>
+                <a16:creationId xmlns:a16="http://schemas.microsoft.com/office/drawing/2014/main" id="{82C84762-560D-40C5-BC73-FB99DE06A25B}"/>
               </a:ext>
             </a:extLst>
           </p:cNvPr>
@@ -26105,7 +26103,7 @@
           <p:cNvPr id="26" name="">
             <a:extLst xmlns:a="http://schemas.openxmlformats.org/drawingml/2006/main">
               <a:ext uri="{FF2B5EF4-FFF2-40B4-BE49-F238E27FC236}">
-                <a16:creationId xmlns:a16="http://schemas.microsoft.com/office/drawing/2014/main" id="{90BC8CDA-4A6C-459D-B74F-089877AECCAE}"/>
+                <a16:creationId xmlns:a16="http://schemas.microsoft.com/office/drawing/2014/main" id="{D2C91016-C666-4B11-975A-31D6D5885554}"/>
               </a:ext>
             </a:extLst>
           </p:cNvPr>
@@ -26169,7 +26167,7 @@
           <p:cNvPr id="27" name="">
             <a:extLst xmlns:a="http://schemas.openxmlformats.org/drawingml/2006/main">
               <a:ext uri="{FF2B5EF4-FFF2-40B4-BE49-F238E27FC236}">
-                <a16:creationId xmlns:a16="http://schemas.microsoft.com/office/drawing/2014/main" id="{32BD8F13-6439-45A1-A831-B3E14903D701}"/>
+                <a16:creationId xmlns:a16="http://schemas.microsoft.com/office/drawing/2014/main" id="{E05451EA-3E7A-431F-AAB6-879BE3FAE72A}"/>
               </a:ext>
             </a:extLst>
           </p:cNvPr>
@@ -26233,7 +26231,7 @@
           <p:cNvPr id="28" name="">
             <a:extLst xmlns:a="http://schemas.openxmlformats.org/drawingml/2006/main">
               <a:ext uri="{FF2B5EF4-FFF2-40B4-BE49-F238E27FC236}">
-                <a16:creationId xmlns:a16="http://schemas.microsoft.com/office/drawing/2014/main" id="{4D17362D-26DA-4BA9-9CEC-2F3AB4FF56A9}"/>
+                <a16:creationId xmlns:a16="http://schemas.microsoft.com/office/drawing/2014/main" id="{D052C3CA-2233-4605-B541-AB3B5664DE64}"/>
               </a:ext>
             </a:extLst>
           </p:cNvPr>
@@ -26268,7 +26266,7 @@
           <p:cNvPr id="29" name="">
             <a:extLst xmlns:a="http://schemas.openxmlformats.org/drawingml/2006/main">
               <a:ext uri="{FF2B5EF4-FFF2-40B4-BE49-F238E27FC236}">
-                <a16:creationId xmlns:a16="http://schemas.microsoft.com/office/drawing/2014/main" id="{D64A5D60-1083-49D6-8322-475FFC06FF03}"/>
+                <a16:creationId xmlns:a16="http://schemas.microsoft.com/office/drawing/2014/main" id="{F23C4464-B650-4750-BEF0-55A7E7856892}"/>
               </a:ext>
             </a:extLst>
           </p:cNvPr>
@@ -26303,7 +26301,7 @@
           <p:cNvPr id="30" name="">
             <a:extLst xmlns:a="http://schemas.openxmlformats.org/drawingml/2006/main">
               <a:ext uri="{FF2B5EF4-FFF2-40B4-BE49-F238E27FC236}">
-                <a16:creationId xmlns:a16="http://schemas.microsoft.com/office/drawing/2014/main" id="{348277DB-FCC4-44F1-BB4B-9EF206956DCB}"/>
+                <a16:creationId xmlns:a16="http://schemas.microsoft.com/office/drawing/2014/main" id="{549E80C1-FBF7-4951-8D23-6624D1873F4E}"/>
               </a:ext>
             </a:extLst>
           </p:cNvPr>
@@ -26338,7 +26336,7 @@
           <p:cNvPr id="31" name="kicker-02-marker">
             <a:extLst xmlns:a="http://schemas.openxmlformats.org/drawingml/2006/main">
               <a:ext uri="{FF2B5EF4-FFF2-40B4-BE49-F238E27FC236}">
-                <a16:creationId xmlns:a16="http://schemas.microsoft.com/office/drawing/2014/main" id="{BDAE5436-6E2A-4823-98A1-B147F511882C}"/>
+                <a16:creationId xmlns:a16="http://schemas.microsoft.com/office/drawing/2014/main" id="{08AF2112-32DB-4CD0-90E2-5AB0F681D351}"/>
               </a:ext>
             </a:extLst>
           </p:cNvPr>
@@ -26373,7 +26371,7 @@
           <p:cNvPr id="32" name="kicker-02-label">
             <a:extLst xmlns:a="http://schemas.openxmlformats.org/drawingml/2006/main">
               <a:ext uri="{FF2B5EF4-FFF2-40B4-BE49-F238E27FC236}">
-                <a16:creationId xmlns:a16="http://schemas.microsoft.com/office/drawing/2014/main" id="{3643889B-5FC6-4ECA-AF1B-014EAEA116BE}"/>
+                <a16:creationId xmlns:a16="http://schemas.microsoft.com/office/drawing/2014/main" id="{0228CB06-A9C5-428D-B3E9-ECDA6E39944F}"/>
               </a:ext>
             </a:extLst>
           </p:cNvPr>
@@ -26437,7 +26435,7 @@
           <p:cNvPr id="33" name="">
             <a:extLst xmlns:a="http://schemas.openxmlformats.org/drawingml/2006/main">
               <a:ext uri="{FF2B5EF4-FFF2-40B4-BE49-F238E27FC236}">
-                <a16:creationId xmlns:a16="http://schemas.microsoft.com/office/drawing/2014/main" id="{7D5D8690-75E6-441A-9119-EB2CBFABC032}"/>
+                <a16:creationId xmlns:a16="http://schemas.microsoft.com/office/drawing/2014/main" id="{050648E0-B579-44AA-9FD8-8C601C02551A}"/>
               </a:ext>
             </a:extLst>
           </p:cNvPr>
@@ -26501,7 +26499,7 @@
           <p:cNvPr id="34" name="">
             <a:extLst xmlns:a="http://schemas.openxmlformats.org/drawingml/2006/main">
               <a:ext uri="{FF2B5EF4-FFF2-40B4-BE49-F238E27FC236}">
-                <a16:creationId xmlns:a16="http://schemas.microsoft.com/office/drawing/2014/main" id="{40D71DC2-18D1-4FAA-8CC3-FC84F7A77448}"/>
+                <a16:creationId xmlns:a16="http://schemas.microsoft.com/office/drawing/2014/main" id="{05EEAF87-73F2-4DBA-A0F3-75BE1B72B243}"/>
               </a:ext>
             </a:extLst>
           </p:cNvPr>
@@ -26565,7 +26563,7 @@
           <p:cNvPr id="35" name="">
             <a:extLst xmlns:a="http://schemas.openxmlformats.org/drawingml/2006/main">
               <a:ext uri="{FF2B5EF4-FFF2-40B4-BE49-F238E27FC236}">
-                <a16:creationId xmlns:a16="http://schemas.microsoft.com/office/drawing/2014/main" id="{3385B976-3949-439C-82DB-5C8BEFBB68A3}"/>
+                <a16:creationId xmlns:a16="http://schemas.microsoft.com/office/drawing/2014/main" id="{BB6BF90B-8D77-4414-9757-4C6D209FBFA4}"/>
               </a:ext>
             </a:extLst>
           </p:cNvPr>
@@ -26600,7 +26598,7 @@
           <p:cNvPr id="36" name="">
             <a:extLst xmlns:a="http://schemas.openxmlformats.org/drawingml/2006/main">
               <a:ext uri="{FF2B5EF4-FFF2-40B4-BE49-F238E27FC236}">
-                <a16:creationId xmlns:a16="http://schemas.microsoft.com/office/drawing/2014/main" id="{D13F7888-6AFD-41BA-9D48-F5BDEF765783}"/>
+                <a16:creationId xmlns:a16="http://schemas.microsoft.com/office/drawing/2014/main" id="{F7B0DEB8-C8AD-4148-9E95-8986F1EAC7D8}"/>
               </a:ext>
             </a:extLst>
           </p:cNvPr>
@@ -26635,7 +26633,7 @@
           <p:cNvPr id="37" name="">
             <a:extLst xmlns:a="http://schemas.openxmlformats.org/drawingml/2006/main">
               <a:ext uri="{FF2B5EF4-FFF2-40B4-BE49-F238E27FC236}">
-                <a16:creationId xmlns:a16="http://schemas.microsoft.com/office/drawing/2014/main" id="{B735AE2D-0612-4379-AAC4-825B7D4872B0}"/>
+                <a16:creationId xmlns:a16="http://schemas.microsoft.com/office/drawing/2014/main" id="{34A2F39D-D086-4C84-87D3-C6916C7503FF}"/>
               </a:ext>
             </a:extLst>
           </p:cNvPr>
@@ -26670,7 +26668,7 @@
           <p:cNvPr id="38" name="">
             <a:extLst xmlns:a="http://schemas.openxmlformats.org/drawingml/2006/main">
               <a:ext uri="{FF2B5EF4-FFF2-40B4-BE49-F238E27FC236}">
-                <a16:creationId xmlns:a16="http://schemas.microsoft.com/office/drawing/2014/main" id="{15C1E3E3-B0AD-4DC7-9652-BCD1D10DFF96}"/>
+                <a16:creationId xmlns:a16="http://schemas.microsoft.com/office/drawing/2014/main" id="{F400B4A8-48C4-4AD7-B60F-AFA84AEAB3DA}"/>
               </a:ext>
             </a:extLst>
           </p:cNvPr>
@@ -26705,7 +26703,7 @@
           <p:cNvPr id="39" name="">
             <a:extLst xmlns:a="http://schemas.openxmlformats.org/drawingml/2006/main">
               <a:ext uri="{FF2B5EF4-FFF2-40B4-BE49-F238E27FC236}">
-                <a16:creationId xmlns:a16="http://schemas.microsoft.com/office/drawing/2014/main" id="{B51AE64C-F8C9-4506-ACAE-B46659A33E6E}"/>
+                <a16:creationId xmlns:a16="http://schemas.microsoft.com/office/drawing/2014/main" id="{C3B45C5C-24E3-4931-85D2-531DD2A63CC8}"/>
               </a:ext>
             </a:extLst>
           </p:cNvPr>
@@ -26769,7 +26767,7 @@
           <p:cNvPr id="40" name="">
             <a:extLst xmlns:a="http://schemas.openxmlformats.org/drawingml/2006/main">
               <a:ext uri="{FF2B5EF4-FFF2-40B4-BE49-F238E27FC236}">
-                <a16:creationId xmlns:a16="http://schemas.microsoft.com/office/drawing/2014/main" id="{DE84653B-2089-4A4F-B62A-C65BAA4D7C80}"/>
+                <a16:creationId xmlns:a16="http://schemas.microsoft.com/office/drawing/2014/main" id="{EFB7F687-2F3F-4197-9850-8DA26AE324E8}"/>
               </a:ext>
             </a:extLst>
           </p:cNvPr>
@@ -26833,7 +26831,7 @@
           <p:cNvPr id="41" name="">
             <a:extLst xmlns:a="http://schemas.openxmlformats.org/drawingml/2006/main">
               <a:ext uri="{FF2B5EF4-FFF2-40B4-BE49-F238E27FC236}">
-                <a16:creationId xmlns:a16="http://schemas.microsoft.com/office/drawing/2014/main" id="{4E14C7F2-3304-4C18-8BF6-9D534F743A78}"/>
+                <a16:creationId xmlns:a16="http://schemas.microsoft.com/office/drawing/2014/main" id="{8146CDB6-661B-437F-92FF-300FE1ED5D43}"/>
               </a:ext>
             </a:extLst>
           </p:cNvPr>
@@ -26895,7 +26893,7 @@
     </p:spTree>
     <p:extLst>
       <p:ext uri="{BB962C8B-B14F-4D97-AF65-F5344CB8AC3E}">
-        <p14:creationId xmlns:p14="http://schemas.microsoft.com/office/powerpoint/2010/main" val="463688018"/>
+        <p14:creationId xmlns:p14="http://schemas.microsoft.com/office/powerpoint/2010/main" val="306155298"/>
       </p:ext>
     </p:extLst>
   </p:cSld>
@@ -26919,7 +26917,7 @@
           <p:cNvPr id="1" name="">
             <a:extLst xmlns:a="http://schemas.openxmlformats.org/drawingml/2006/main">
               <a:ext uri="{FF2B5EF4-FFF2-40B4-BE49-F238E27FC236}">
-                <a16:creationId xmlns:a16="http://schemas.microsoft.com/office/drawing/2014/main" id="{C5D93913-0860-4367-B3ED-AD50C5E3C832}"/>
+                <a16:creationId xmlns:a16="http://schemas.microsoft.com/office/drawing/2014/main" id="{C57084F8-0C04-4E4D-B3A6-0E49434EFE62}"/>
               </a:ext>
             </a:extLst>
           </p:cNvPr>
@@ -26954,7 +26952,7 @@
           <p:cNvPr id="2" name="">
             <a:extLst xmlns:a="http://schemas.openxmlformats.org/drawingml/2006/main">
               <a:ext uri="{FF2B5EF4-FFF2-40B4-BE49-F238E27FC236}">
-                <a16:creationId xmlns:a16="http://schemas.microsoft.com/office/drawing/2014/main" id="{67789EC1-1465-4617-B4FD-3DCBF30027A4}"/>
+                <a16:creationId xmlns:a16="http://schemas.microsoft.com/office/drawing/2014/main" id="{1760E674-314E-4B89-99DA-9E4B9F3F5D19}"/>
               </a:ext>
             </a:extLst>
           </p:cNvPr>
@@ -26989,7 +26987,7 @@
           <p:cNvPr id="3" name="">
             <a:extLst xmlns:a="http://schemas.openxmlformats.org/drawingml/2006/main">
               <a:ext uri="{FF2B5EF4-FFF2-40B4-BE49-F238E27FC236}">
-                <a16:creationId xmlns:a16="http://schemas.microsoft.com/office/drawing/2014/main" id="{908D0789-EE09-44AE-A78B-67BC5295FF43}"/>
+                <a16:creationId xmlns:a16="http://schemas.microsoft.com/office/drawing/2014/main" id="{CD14DFA5-9898-46A2-B02B-4DEADD178905}"/>
               </a:ext>
             </a:extLst>
           </p:cNvPr>
@@ -27024,7 +27022,7 @@
           <p:cNvPr id="4" name="kicker-02-marker">
             <a:extLst xmlns:a="http://schemas.openxmlformats.org/drawingml/2006/main">
               <a:ext uri="{FF2B5EF4-FFF2-40B4-BE49-F238E27FC236}">
-                <a16:creationId xmlns:a16="http://schemas.microsoft.com/office/drawing/2014/main" id="{16167FD2-C9B1-409E-BAE8-E5DA044979EF}"/>
+                <a16:creationId xmlns:a16="http://schemas.microsoft.com/office/drawing/2014/main" id="{6751CC6E-508D-4270-9638-503DF1167182}"/>
               </a:ext>
             </a:extLst>
           </p:cNvPr>
@@ -27059,7 +27057,7 @@
           <p:cNvPr id="5" name="kicker-02-label">
             <a:extLst xmlns:a="http://schemas.openxmlformats.org/drawingml/2006/main">
               <a:ext uri="{FF2B5EF4-FFF2-40B4-BE49-F238E27FC236}">
-                <a16:creationId xmlns:a16="http://schemas.microsoft.com/office/drawing/2014/main" id="{53878D58-DEBD-40C9-81BD-962430FE9C71}"/>
+                <a16:creationId xmlns:a16="http://schemas.microsoft.com/office/drawing/2014/main" id="{7CB8E6E6-F357-4907-A930-2925456B8781}"/>
               </a:ext>
             </a:extLst>
           </p:cNvPr>
@@ -27123,7 +27121,7 @@
           <p:cNvPr id="6" name="">
             <a:extLst xmlns:a="http://schemas.openxmlformats.org/drawingml/2006/main">
               <a:ext uri="{FF2B5EF4-FFF2-40B4-BE49-F238E27FC236}">
-                <a16:creationId xmlns:a16="http://schemas.microsoft.com/office/drawing/2014/main" id="{C81D4667-D73C-44E9-852C-5B2768C2184D}"/>
+                <a16:creationId xmlns:a16="http://schemas.microsoft.com/office/drawing/2014/main" id="{1870C22A-9BE3-4D99-955D-00164C6E8A85}"/>
               </a:ext>
             </a:extLst>
           </p:cNvPr>
@@ -27187,7 +27185,7 @@
           <p:cNvPr id="7" name="">
             <a:extLst xmlns:a="http://schemas.openxmlformats.org/drawingml/2006/main">
               <a:ext uri="{FF2B5EF4-FFF2-40B4-BE49-F238E27FC236}">
-                <a16:creationId xmlns:a16="http://schemas.microsoft.com/office/drawing/2014/main" id="{AE2E7ACE-785D-4050-9535-784E6305C283}"/>
+                <a16:creationId xmlns:a16="http://schemas.microsoft.com/office/drawing/2014/main" id="{2C403696-DB38-48AA-B18E-568BD671A4D4}"/>
               </a:ext>
             </a:extLst>
           </p:cNvPr>
@@ -27251,7 +27249,7 @@
           <p:cNvPr id="8" name="">
             <a:extLst xmlns:a="http://schemas.openxmlformats.org/drawingml/2006/main">
               <a:ext uri="{FF2B5EF4-FFF2-40B4-BE49-F238E27FC236}">
-                <a16:creationId xmlns:a16="http://schemas.microsoft.com/office/drawing/2014/main" id="{45011C56-270D-4706-9605-732F02232C79}"/>
+                <a16:creationId xmlns:a16="http://schemas.microsoft.com/office/drawing/2014/main" id="{A9DF09D7-DEB9-4EBF-B87B-36B64E3FEF5D}"/>
               </a:ext>
             </a:extLst>
           </p:cNvPr>
@@ -27286,7 +27284,7 @@
           <p:cNvPr id="9" name="">
             <a:extLst xmlns:a="http://schemas.openxmlformats.org/drawingml/2006/main">
               <a:ext uri="{FF2B5EF4-FFF2-40B4-BE49-F238E27FC236}">
-                <a16:creationId xmlns:a16="http://schemas.microsoft.com/office/drawing/2014/main" id="{2FE22C57-79ED-4E98-9A18-0C0E4DDB786E}"/>
+                <a16:creationId xmlns:a16="http://schemas.microsoft.com/office/drawing/2014/main" id="{3E7CD08A-537C-4141-99D7-E7BAC61EC2C5}"/>
               </a:ext>
             </a:extLst>
           </p:cNvPr>
@@ -27350,7 +27348,7 @@
           <p:cNvPr id="10" name="">
             <a:extLst xmlns:a="http://schemas.openxmlformats.org/drawingml/2006/main">
               <a:ext uri="{FF2B5EF4-FFF2-40B4-BE49-F238E27FC236}">
-                <a16:creationId xmlns:a16="http://schemas.microsoft.com/office/drawing/2014/main" id="{8414BD31-55EF-4489-9862-E645E498192A}"/>
+                <a16:creationId xmlns:a16="http://schemas.microsoft.com/office/drawing/2014/main" id="{5C330F57-2205-4EFD-817E-09D3DD9CE63C}"/>
               </a:ext>
             </a:extLst>
           </p:cNvPr>
@@ -27414,7 +27412,7 @@
           <p:cNvPr id="11" name="">
             <a:extLst xmlns:a="http://schemas.openxmlformats.org/drawingml/2006/main">
               <a:ext uri="{FF2B5EF4-FFF2-40B4-BE49-F238E27FC236}">
-                <a16:creationId xmlns:a16="http://schemas.microsoft.com/office/drawing/2014/main" id="{732908AB-E19F-43C3-9C88-8D050A0AD076}"/>
+                <a16:creationId xmlns:a16="http://schemas.microsoft.com/office/drawing/2014/main" id="{67F21BCB-A56C-4324-860B-2A94C2F52C6F}"/>
               </a:ext>
             </a:extLst>
           </p:cNvPr>
@@ -27478,7 +27476,7 @@
           <p:cNvPr id="12" name="">
             <a:extLst xmlns:a="http://schemas.openxmlformats.org/drawingml/2006/main">
               <a:ext uri="{FF2B5EF4-FFF2-40B4-BE49-F238E27FC236}">
-                <a16:creationId xmlns:a16="http://schemas.microsoft.com/office/drawing/2014/main" id="{462DB2FC-9956-4126-A530-DC73CB11D9B2}"/>
+                <a16:creationId xmlns:a16="http://schemas.microsoft.com/office/drawing/2014/main" id="{97AACD69-F9F5-463D-901C-256E0DBA64E1}"/>
               </a:ext>
             </a:extLst>
           </p:cNvPr>
@@ -27511,7 +27509,7 @@
           <p:cNvPr id="13" name="">
             <a:extLst xmlns:a="http://schemas.openxmlformats.org/drawingml/2006/main">
               <a:ext uri="{FF2B5EF4-FFF2-40B4-BE49-F238E27FC236}">
-                <a16:creationId xmlns:a16="http://schemas.microsoft.com/office/drawing/2014/main" id="{2304BE89-22BF-44B2-BEE3-99CBFF3CACD0}"/>
+                <a16:creationId xmlns:a16="http://schemas.microsoft.com/office/drawing/2014/main" id="{1B4B284B-E140-4F5B-A4E5-6392CB81A842}"/>
               </a:ext>
             </a:extLst>
           </p:cNvPr>
@@ -27575,7 +27573,7 @@
           <p:cNvPr id="14" name="">
             <a:extLst xmlns:a="http://schemas.openxmlformats.org/drawingml/2006/main">
               <a:ext uri="{FF2B5EF4-FFF2-40B4-BE49-F238E27FC236}">
-                <a16:creationId xmlns:a16="http://schemas.microsoft.com/office/drawing/2014/main" id="{E427E8DB-1291-4B55-9045-372DCB3F6FBB}"/>
+                <a16:creationId xmlns:a16="http://schemas.microsoft.com/office/drawing/2014/main" id="{0154CE46-21AC-47AB-86E0-40E232BA6A2B}"/>
               </a:ext>
             </a:extLst>
           </p:cNvPr>
@@ -27610,7 +27608,7 @@
           <p:cNvPr id="15" name="">
             <a:extLst xmlns:a="http://schemas.openxmlformats.org/drawingml/2006/main">
               <a:ext uri="{FF2B5EF4-FFF2-40B4-BE49-F238E27FC236}">
-                <a16:creationId xmlns:a16="http://schemas.microsoft.com/office/drawing/2014/main" id="{AB3AF6AF-0E04-4F7B-A8C2-DB7129EACA02}"/>
+                <a16:creationId xmlns:a16="http://schemas.microsoft.com/office/drawing/2014/main" id="{B4A5CB37-EDB0-46F2-B779-3448EEA312ED}"/>
               </a:ext>
             </a:extLst>
           </p:cNvPr>
@@ -27664,7 +27662,7 @@
                 <a:ea typeface="Aptos"/>
                 <a:cs typeface="Aptos"/>
               </a:rPr>
-              <a:t>PROMPT STACK</a:t>
+              <a:t>QUESTION STACK</a:t>
             </a:r>
           </a:p>
         </p:txBody>
@@ -27674,7 +27672,7 @@
           <p:cNvPr id="16" name="">
             <a:extLst xmlns:a="http://schemas.openxmlformats.org/drawingml/2006/main">
               <a:ext uri="{FF2B5EF4-FFF2-40B4-BE49-F238E27FC236}">
-                <a16:creationId xmlns:a16="http://schemas.microsoft.com/office/drawing/2014/main" id="{856DBBF0-02C0-4CF0-9429-F80671E862A9}"/>
+                <a16:creationId xmlns:a16="http://schemas.microsoft.com/office/drawing/2014/main" id="{77A56E56-B8B1-4EA7-AA56-DD6742265925}"/>
               </a:ext>
             </a:extLst>
           </p:cNvPr>
@@ -27709,7 +27707,7 @@
           <p:cNvPr id="17" name="">
             <a:extLst xmlns:a="http://schemas.openxmlformats.org/drawingml/2006/main">
               <a:ext uri="{FF2B5EF4-FFF2-40B4-BE49-F238E27FC236}">
-                <a16:creationId xmlns:a16="http://schemas.microsoft.com/office/drawing/2014/main" id="{B73DC2DA-1E05-407F-8E9B-39BB89BD5FD2}"/>
+                <a16:creationId xmlns:a16="http://schemas.microsoft.com/office/drawing/2014/main" id="{7CBE3B4C-04AC-49F6-BFC1-41FFF19CDBCE}"/>
               </a:ext>
             </a:extLst>
           </p:cNvPr>
@@ -27773,7 +27771,7 @@
           <p:cNvPr id="18" name="">
             <a:extLst xmlns:a="http://schemas.openxmlformats.org/drawingml/2006/main">
               <a:ext uri="{FF2B5EF4-FFF2-40B4-BE49-F238E27FC236}">
-                <a16:creationId xmlns:a16="http://schemas.microsoft.com/office/drawing/2014/main" id="{41EEA82A-2BAA-40AD-BC9F-713F0FD80A32}"/>
+                <a16:creationId xmlns:a16="http://schemas.microsoft.com/office/drawing/2014/main" id="{F4B3632E-6251-4D4B-BBB8-F7BD0BDDF173}"/>
               </a:ext>
             </a:extLst>
           </p:cNvPr>
@@ -27808,7 +27806,7 @@
           <p:cNvPr id="19" name="">
             <a:extLst xmlns:a="http://schemas.openxmlformats.org/drawingml/2006/main">
               <a:ext uri="{FF2B5EF4-FFF2-40B4-BE49-F238E27FC236}">
-                <a16:creationId xmlns:a16="http://schemas.microsoft.com/office/drawing/2014/main" id="{6BC1950A-FF8F-4BD6-8D82-232F434DD990}"/>
+                <a16:creationId xmlns:a16="http://schemas.microsoft.com/office/drawing/2014/main" id="{5D3CA7F6-7FC8-4BD5-93B2-6A01066E194C}"/>
               </a:ext>
             </a:extLst>
           </p:cNvPr>
@@ -27872,7 +27870,7 @@
           <p:cNvPr id="20" name="">
             <a:extLst xmlns:a="http://schemas.openxmlformats.org/drawingml/2006/main">
               <a:ext uri="{FF2B5EF4-FFF2-40B4-BE49-F238E27FC236}">
-                <a16:creationId xmlns:a16="http://schemas.microsoft.com/office/drawing/2014/main" id="{44DC1175-E8B7-45A6-8479-46F8AE492A19}"/>
+                <a16:creationId xmlns:a16="http://schemas.microsoft.com/office/drawing/2014/main" id="{1EBD2D75-5AC4-4EBC-96AE-AEC4F99C2559}"/>
               </a:ext>
             </a:extLst>
           </p:cNvPr>
@@ -27907,7 +27905,7 @@
           <p:cNvPr id="21" name="">
             <a:extLst xmlns:a="http://schemas.openxmlformats.org/drawingml/2006/main">
               <a:ext uri="{FF2B5EF4-FFF2-40B4-BE49-F238E27FC236}">
-                <a16:creationId xmlns:a16="http://schemas.microsoft.com/office/drawing/2014/main" id="{7D64B221-24DD-43DF-B229-643B1FB50F77}"/>
+                <a16:creationId xmlns:a16="http://schemas.microsoft.com/office/drawing/2014/main" id="{D60726CC-3CCA-4B6F-BA1A-1C932278A2CD}"/>
               </a:ext>
             </a:extLst>
           </p:cNvPr>
@@ -27971,7 +27969,7 @@
           <p:cNvPr id="22" name="">
             <a:extLst xmlns:a="http://schemas.openxmlformats.org/drawingml/2006/main">
               <a:ext uri="{FF2B5EF4-FFF2-40B4-BE49-F238E27FC236}">
-                <a16:creationId xmlns:a16="http://schemas.microsoft.com/office/drawing/2014/main" id="{BC3E0CD2-F06B-4388-B547-E182170A8F66}"/>
+                <a16:creationId xmlns:a16="http://schemas.microsoft.com/office/drawing/2014/main" id="{4749F5C1-B139-418A-A3FB-C0F0D904F0B8}"/>
               </a:ext>
             </a:extLst>
           </p:cNvPr>
@@ -28006,7 +28004,7 @@
           <p:cNvPr id="23" name="">
             <a:extLst xmlns:a="http://schemas.openxmlformats.org/drawingml/2006/main">
               <a:ext uri="{FF2B5EF4-FFF2-40B4-BE49-F238E27FC236}">
-                <a16:creationId xmlns:a16="http://schemas.microsoft.com/office/drawing/2014/main" id="{6FCC051E-B0E9-4765-B25B-4B7041E2C74E}"/>
+                <a16:creationId xmlns:a16="http://schemas.microsoft.com/office/drawing/2014/main" id="{8A51C84E-5840-4680-A8F8-D55BA19C2E07}"/>
               </a:ext>
             </a:extLst>
           </p:cNvPr>
@@ -28070,7 +28068,7 @@
           <p:cNvPr id="24" name="">
             <a:extLst xmlns:a="http://schemas.openxmlformats.org/drawingml/2006/main">
               <a:ext uri="{FF2B5EF4-FFF2-40B4-BE49-F238E27FC236}">
-                <a16:creationId xmlns:a16="http://schemas.microsoft.com/office/drawing/2014/main" id="{CEBBC6A8-CC8A-433D-B346-C45A8832FA10}"/>
+                <a16:creationId xmlns:a16="http://schemas.microsoft.com/office/drawing/2014/main" id="{56F4A2F3-1071-41B9-BBC2-9ECDA5B328D3}"/>
               </a:ext>
             </a:extLst>
           </p:cNvPr>
@@ -28105,7 +28103,7 @@
           <p:cNvPr id="25" name="">
             <a:extLst xmlns:a="http://schemas.openxmlformats.org/drawingml/2006/main">
               <a:ext uri="{FF2B5EF4-FFF2-40B4-BE49-F238E27FC236}">
-                <a16:creationId xmlns:a16="http://schemas.microsoft.com/office/drawing/2014/main" id="{0DF37F63-E2FC-4522-84A9-986C90184162}"/>
+                <a16:creationId xmlns:a16="http://schemas.microsoft.com/office/drawing/2014/main" id="{1D61BAB0-CF00-4C9B-B179-9C2BA7663AA7}"/>
               </a:ext>
             </a:extLst>
           </p:cNvPr>
@@ -28169,7 +28167,7 @@
           <p:cNvPr id="26" name="">
             <a:extLst xmlns:a="http://schemas.openxmlformats.org/drawingml/2006/main">
               <a:ext uri="{FF2B5EF4-FFF2-40B4-BE49-F238E27FC236}">
-                <a16:creationId xmlns:a16="http://schemas.microsoft.com/office/drawing/2014/main" id="{E02E7D3F-A76D-4480-A83F-0A1BC14921AD}"/>
+                <a16:creationId xmlns:a16="http://schemas.microsoft.com/office/drawing/2014/main" id="{043A12D5-0AC6-4064-9210-DFF317C82B79}"/>
               </a:ext>
             </a:extLst>
           </p:cNvPr>
@@ -28204,7 +28202,7 @@
           <p:cNvPr id="27" name="">
             <a:extLst xmlns:a="http://schemas.openxmlformats.org/drawingml/2006/main">
               <a:ext uri="{FF2B5EF4-FFF2-40B4-BE49-F238E27FC236}">
-                <a16:creationId xmlns:a16="http://schemas.microsoft.com/office/drawing/2014/main" id="{36C9A564-EDB0-4810-AC82-D44A1EA723BB}"/>
+                <a16:creationId xmlns:a16="http://schemas.microsoft.com/office/drawing/2014/main" id="{B89DFA94-56E5-4A08-85A7-C163E69974C5}"/>
               </a:ext>
             </a:extLst>
           </p:cNvPr>
@@ -28268,7 +28266,7 @@
           <p:cNvPr id="28" name="">
             <a:extLst xmlns:a="http://schemas.openxmlformats.org/drawingml/2006/main">
               <a:ext uri="{FF2B5EF4-FFF2-40B4-BE49-F238E27FC236}">
-                <a16:creationId xmlns:a16="http://schemas.microsoft.com/office/drawing/2014/main" id="{893C46AD-B1AB-4565-8361-160D26D34F9A}"/>
+                <a16:creationId xmlns:a16="http://schemas.microsoft.com/office/drawing/2014/main" id="{8E70150D-E014-45F4-8DF7-C822F728E296}"/>
               </a:ext>
             </a:extLst>
           </p:cNvPr>
@@ -28303,7 +28301,7 @@
           <p:cNvPr id="29" name="">
             <a:extLst xmlns:a="http://schemas.openxmlformats.org/drawingml/2006/main">
               <a:ext uri="{FF2B5EF4-FFF2-40B4-BE49-F238E27FC236}">
-                <a16:creationId xmlns:a16="http://schemas.microsoft.com/office/drawing/2014/main" id="{F5DA5A64-F331-4838-AC53-9C9049FBDCDB}"/>
+                <a16:creationId xmlns:a16="http://schemas.microsoft.com/office/drawing/2014/main" id="{48AFBBE8-2126-4912-A062-B02DF0FC442D}"/>
               </a:ext>
             </a:extLst>
           </p:cNvPr>
@@ -28367,7 +28365,7 @@
           <p:cNvPr id="30" name="">
             <a:extLst xmlns:a="http://schemas.openxmlformats.org/drawingml/2006/main">
               <a:ext uri="{FF2B5EF4-FFF2-40B4-BE49-F238E27FC236}">
-                <a16:creationId xmlns:a16="http://schemas.microsoft.com/office/drawing/2014/main" id="{25E49D94-910B-40B1-85B4-23FCFBC8F672}"/>
+                <a16:creationId xmlns:a16="http://schemas.microsoft.com/office/drawing/2014/main" id="{00D7F996-6326-4EF6-93A3-39700AE0271E}"/>
               </a:ext>
             </a:extLst>
           </p:cNvPr>
@@ -28431,7 +28429,7 @@
           <p:cNvPr id="31" name="">
             <a:extLst xmlns:a="http://schemas.openxmlformats.org/drawingml/2006/main">
               <a:ext uri="{FF2B5EF4-FFF2-40B4-BE49-F238E27FC236}">
-                <a16:creationId xmlns:a16="http://schemas.microsoft.com/office/drawing/2014/main" id="{CC149583-648F-490D-976B-D92E47077D47}"/>
+                <a16:creationId xmlns:a16="http://schemas.microsoft.com/office/drawing/2014/main" id="{3067BC3B-4CB0-4DE9-B924-A05192A20AD0}"/>
               </a:ext>
             </a:extLst>
           </p:cNvPr>
@@ -28493,7 +28491,7 @@
     </p:spTree>
     <p:extLst>
       <p:ext uri="{BB962C8B-B14F-4D97-AF65-F5344CB8AC3E}">
-        <p14:creationId xmlns:p14="http://schemas.microsoft.com/office/powerpoint/2010/main" val="314421663"/>
+        <p14:creationId xmlns:p14="http://schemas.microsoft.com/office/powerpoint/2010/main" val="1053121821"/>
       </p:ext>
     </p:extLst>
   </p:cSld>
@@ -28517,7 +28515,7 @@
           <p:cNvPr id="1" name="">
             <a:extLst xmlns:a="http://schemas.openxmlformats.org/drawingml/2006/main">
               <a:ext uri="{FF2B5EF4-FFF2-40B4-BE49-F238E27FC236}">
-                <a16:creationId xmlns:a16="http://schemas.microsoft.com/office/drawing/2014/main" id="{CDA9ED96-DF91-4CB2-9E76-2F9A6FC546F1}"/>
+                <a16:creationId xmlns:a16="http://schemas.microsoft.com/office/drawing/2014/main" id="{191F1BE9-F826-476B-BCA5-9409E0D7F688}"/>
               </a:ext>
             </a:extLst>
           </p:cNvPr>
@@ -28552,7 +28550,7 @@
           <p:cNvPr id="2" name="">
             <a:extLst xmlns:a="http://schemas.openxmlformats.org/drawingml/2006/main">
               <a:ext uri="{FF2B5EF4-FFF2-40B4-BE49-F238E27FC236}">
-                <a16:creationId xmlns:a16="http://schemas.microsoft.com/office/drawing/2014/main" id="{E185284F-7B95-4364-A6DE-1013D4AD7600}"/>
+                <a16:creationId xmlns:a16="http://schemas.microsoft.com/office/drawing/2014/main" id="{D7661D65-E09B-4846-AAD7-2A8CAED68246}"/>
               </a:ext>
             </a:extLst>
           </p:cNvPr>
@@ -28587,7 +28585,7 @@
           <p:cNvPr id="3" name="">
             <a:extLst xmlns:a="http://schemas.openxmlformats.org/drawingml/2006/main">
               <a:ext uri="{FF2B5EF4-FFF2-40B4-BE49-F238E27FC236}">
-                <a16:creationId xmlns:a16="http://schemas.microsoft.com/office/drawing/2014/main" id="{F6A036DF-FD7C-48DE-89AC-E2546FB3C9F7}"/>
+                <a16:creationId xmlns:a16="http://schemas.microsoft.com/office/drawing/2014/main" id="{95744F66-051F-4159-904F-93B4FBE566FF}"/>
               </a:ext>
             </a:extLst>
           </p:cNvPr>
@@ -28622,7 +28620,7 @@
           <p:cNvPr id="4" name="kicker-02-marker">
             <a:extLst xmlns:a="http://schemas.openxmlformats.org/drawingml/2006/main">
               <a:ext uri="{FF2B5EF4-FFF2-40B4-BE49-F238E27FC236}">
-                <a16:creationId xmlns:a16="http://schemas.microsoft.com/office/drawing/2014/main" id="{E2351BC2-F0CC-4C99-9F00-63427B765325}"/>
+                <a16:creationId xmlns:a16="http://schemas.microsoft.com/office/drawing/2014/main" id="{C7B5129B-9069-4CB5-AF1D-07906124565E}"/>
               </a:ext>
             </a:extLst>
           </p:cNvPr>
@@ -28657,7 +28655,7 @@
           <p:cNvPr id="5" name="kicker-02-label">
             <a:extLst xmlns:a="http://schemas.openxmlformats.org/drawingml/2006/main">
               <a:ext uri="{FF2B5EF4-FFF2-40B4-BE49-F238E27FC236}">
-                <a16:creationId xmlns:a16="http://schemas.microsoft.com/office/drawing/2014/main" id="{04E9EEC0-69D2-4BF7-B881-5D944FD40B6F}"/>
+                <a16:creationId xmlns:a16="http://schemas.microsoft.com/office/drawing/2014/main" id="{73D0BE65-B525-4022-A710-F247D9BF4979}"/>
               </a:ext>
             </a:extLst>
           </p:cNvPr>
@@ -28721,7 +28719,7 @@
           <p:cNvPr id="6" name="">
             <a:extLst xmlns:a="http://schemas.openxmlformats.org/drawingml/2006/main">
               <a:ext uri="{FF2B5EF4-FFF2-40B4-BE49-F238E27FC236}">
-                <a16:creationId xmlns:a16="http://schemas.microsoft.com/office/drawing/2014/main" id="{6154AE26-6069-4830-BD27-E9489DF78285}"/>
+                <a16:creationId xmlns:a16="http://schemas.microsoft.com/office/drawing/2014/main" id="{FDC28AC8-7BA6-436F-8464-60F9CA1AA6E0}"/>
               </a:ext>
             </a:extLst>
           </p:cNvPr>
@@ -28785,7 +28783,7 @@
           <p:cNvPr id="7" name="">
             <a:extLst xmlns:a="http://schemas.openxmlformats.org/drawingml/2006/main">
               <a:ext uri="{FF2B5EF4-FFF2-40B4-BE49-F238E27FC236}">
-                <a16:creationId xmlns:a16="http://schemas.microsoft.com/office/drawing/2014/main" id="{68E72872-7535-45D7-BFD1-F406F13E3F84}"/>
+                <a16:creationId xmlns:a16="http://schemas.microsoft.com/office/drawing/2014/main" id="{6022F96C-61D4-4D2B-8438-306D16775CF3}"/>
               </a:ext>
             </a:extLst>
           </p:cNvPr>
@@ -28849,7 +28847,7 @@
           <p:cNvPr id="8" name="">
             <a:extLst xmlns:a="http://schemas.openxmlformats.org/drawingml/2006/main">
               <a:ext uri="{FF2B5EF4-FFF2-40B4-BE49-F238E27FC236}">
-                <a16:creationId xmlns:a16="http://schemas.microsoft.com/office/drawing/2014/main" id="{99F8F654-BBC8-423A-A758-86DAA35DC948}"/>
+                <a16:creationId xmlns:a16="http://schemas.microsoft.com/office/drawing/2014/main" id="{0771593B-EE40-4E63-9956-EE0C79978BE9}"/>
               </a:ext>
             </a:extLst>
           </p:cNvPr>
@@ -28884,7 +28882,7 @@
           <p:cNvPr id="9" name="">
             <a:extLst xmlns:a="http://schemas.openxmlformats.org/drawingml/2006/main">
               <a:ext uri="{FF2B5EF4-FFF2-40B4-BE49-F238E27FC236}">
-                <a16:creationId xmlns:a16="http://schemas.microsoft.com/office/drawing/2014/main" id="{01BA82F5-1A6A-4CC0-8BEC-61BCAD4E1A93}"/>
+                <a16:creationId xmlns:a16="http://schemas.microsoft.com/office/drawing/2014/main" id="{54A6127F-E7C3-45B3-B84E-4276256927CF}"/>
               </a:ext>
             </a:extLst>
           </p:cNvPr>
@@ -28948,7 +28946,7 @@
           <p:cNvPr id="10" name="">
             <a:extLst xmlns:a="http://schemas.openxmlformats.org/drawingml/2006/main">
               <a:ext uri="{FF2B5EF4-FFF2-40B4-BE49-F238E27FC236}">
-                <a16:creationId xmlns:a16="http://schemas.microsoft.com/office/drawing/2014/main" id="{16F891B7-4269-44B1-8C21-6AFBD33F4F05}"/>
+                <a16:creationId xmlns:a16="http://schemas.microsoft.com/office/drawing/2014/main" id="{D1ADBD63-3DC4-4E3C-9D0C-EB4FF67BDC89}"/>
               </a:ext>
             </a:extLst>
           </p:cNvPr>
@@ -29012,7 +29010,7 @@
           <p:cNvPr id="11" name="">
             <a:extLst xmlns:a="http://schemas.openxmlformats.org/drawingml/2006/main">
               <a:ext uri="{FF2B5EF4-FFF2-40B4-BE49-F238E27FC236}">
-                <a16:creationId xmlns:a16="http://schemas.microsoft.com/office/drawing/2014/main" id="{F6154057-17DE-4461-9C5C-CEF77A687D93}"/>
+                <a16:creationId xmlns:a16="http://schemas.microsoft.com/office/drawing/2014/main" id="{2FB53F3C-0FBD-4024-ADEF-6DFF5F33FB81}"/>
               </a:ext>
             </a:extLst>
           </p:cNvPr>
@@ -29076,7 +29074,7 @@
           <p:cNvPr id="12" name="">
             <a:extLst xmlns:a="http://schemas.openxmlformats.org/drawingml/2006/main">
               <a:ext uri="{FF2B5EF4-FFF2-40B4-BE49-F238E27FC236}">
-                <a16:creationId xmlns:a16="http://schemas.microsoft.com/office/drawing/2014/main" id="{3350C034-CAC2-4B4C-9EEC-7E718069CE18}"/>
+                <a16:creationId xmlns:a16="http://schemas.microsoft.com/office/drawing/2014/main" id="{B3C6C44E-CBA1-46AA-824E-7F73655576D4}"/>
               </a:ext>
             </a:extLst>
           </p:cNvPr>
@@ -29109,7 +29107,7 @@
           <p:cNvPr id="13" name="">
             <a:extLst xmlns:a="http://schemas.openxmlformats.org/drawingml/2006/main">
               <a:ext uri="{FF2B5EF4-FFF2-40B4-BE49-F238E27FC236}">
-                <a16:creationId xmlns:a16="http://schemas.microsoft.com/office/drawing/2014/main" id="{09FF7ECF-2509-454A-AD08-3DE4F121F9D4}"/>
+                <a16:creationId xmlns:a16="http://schemas.microsoft.com/office/drawing/2014/main" id="{77D16165-041D-4211-82DF-459265994BF0}"/>
               </a:ext>
             </a:extLst>
           </p:cNvPr>
@@ -29144,7 +29142,7 @@
           <p:cNvPr id="14" name="">
             <a:extLst xmlns:a="http://schemas.openxmlformats.org/drawingml/2006/main">
               <a:ext uri="{FF2B5EF4-FFF2-40B4-BE49-F238E27FC236}">
-                <a16:creationId xmlns:a16="http://schemas.microsoft.com/office/drawing/2014/main" id="{4184C377-F2AA-46C9-AC4C-DF1E8115F688}"/>
+                <a16:creationId xmlns:a16="http://schemas.microsoft.com/office/drawing/2014/main" id="{917158FD-F032-41D1-A1EE-E37F3AD47D4A}"/>
               </a:ext>
             </a:extLst>
           </p:cNvPr>
@@ -29208,7 +29206,7 @@
           <p:cNvPr id="15" name="">
             <a:extLst xmlns:a="http://schemas.openxmlformats.org/drawingml/2006/main">
               <a:ext uri="{FF2B5EF4-FFF2-40B4-BE49-F238E27FC236}">
-                <a16:creationId xmlns:a16="http://schemas.microsoft.com/office/drawing/2014/main" id="{431D46C4-0291-4523-A42B-93C66356D584}"/>
+                <a16:creationId xmlns:a16="http://schemas.microsoft.com/office/drawing/2014/main" id="{CD60C29F-0DE0-41CA-A5B5-3E394416EADB}"/>
               </a:ext>
             </a:extLst>
           </p:cNvPr>
@@ -29272,7 +29270,7 @@
           <p:cNvPr id="16" name="">
             <a:extLst xmlns:a="http://schemas.openxmlformats.org/drawingml/2006/main">
               <a:ext uri="{FF2B5EF4-FFF2-40B4-BE49-F238E27FC236}">
-                <a16:creationId xmlns:a16="http://schemas.microsoft.com/office/drawing/2014/main" id="{01D89CC5-15CF-4FD6-9ADB-6F73853C94AD}"/>
+                <a16:creationId xmlns:a16="http://schemas.microsoft.com/office/drawing/2014/main" id="{858279E2-52A7-40CD-B13D-1C8EA98D5837}"/>
               </a:ext>
             </a:extLst>
           </p:cNvPr>
@@ -29307,7 +29305,7 @@
           <p:cNvPr id="17" name="">
             <a:extLst xmlns:a="http://schemas.openxmlformats.org/drawingml/2006/main">
               <a:ext uri="{FF2B5EF4-FFF2-40B4-BE49-F238E27FC236}">
-                <a16:creationId xmlns:a16="http://schemas.microsoft.com/office/drawing/2014/main" id="{9A3AC03A-65BB-4DB6-B802-D4F1CDB77BA6}"/>
+                <a16:creationId xmlns:a16="http://schemas.microsoft.com/office/drawing/2014/main" id="{01EDCC24-BD16-4F1D-8CFC-8FA55B1F8272}"/>
               </a:ext>
             </a:extLst>
           </p:cNvPr>
@@ -29371,7 +29369,7 @@
           <p:cNvPr id="18" name="">
             <a:extLst xmlns:a="http://schemas.openxmlformats.org/drawingml/2006/main">
               <a:ext uri="{FF2B5EF4-FFF2-40B4-BE49-F238E27FC236}">
-                <a16:creationId xmlns:a16="http://schemas.microsoft.com/office/drawing/2014/main" id="{3BE536B6-AAF1-49EE-B56E-19B215BF7BEC}"/>
+                <a16:creationId xmlns:a16="http://schemas.microsoft.com/office/drawing/2014/main" id="{9A5A6257-2D68-465F-B062-31849DAE7DB9}"/>
               </a:ext>
             </a:extLst>
           </p:cNvPr>
@@ -29435,7 +29433,7 @@
           <p:cNvPr id="19" name="">
             <a:extLst xmlns:a="http://schemas.openxmlformats.org/drawingml/2006/main">
               <a:ext uri="{FF2B5EF4-FFF2-40B4-BE49-F238E27FC236}">
-                <a16:creationId xmlns:a16="http://schemas.microsoft.com/office/drawing/2014/main" id="{B4854A8D-5A55-4E9C-BC21-F73F617B5333}"/>
+                <a16:creationId xmlns:a16="http://schemas.microsoft.com/office/drawing/2014/main" id="{F556054F-870A-4426-8348-9C25F2F5FB44}"/>
               </a:ext>
             </a:extLst>
           </p:cNvPr>
@@ -29468,7 +29466,7 @@
           <p:cNvPr id="20" name="">
             <a:extLst xmlns:a="http://schemas.openxmlformats.org/drawingml/2006/main">
               <a:ext uri="{FF2B5EF4-FFF2-40B4-BE49-F238E27FC236}">
-                <a16:creationId xmlns:a16="http://schemas.microsoft.com/office/drawing/2014/main" id="{063503B8-783C-4137-96A7-D480148D50E4}"/>
+                <a16:creationId xmlns:a16="http://schemas.microsoft.com/office/drawing/2014/main" id="{9A80DA7C-4E54-4DDF-A914-0486EDECA076}"/>
               </a:ext>
             </a:extLst>
           </p:cNvPr>
@@ -29503,7 +29501,7 @@
           <p:cNvPr id="21" name="">
             <a:extLst xmlns:a="http://schemas.openxmlformats.org/drawingml/2006/main">
               <a:ext uri="{FF2B5EF4-FFF2-40B4-BE49-F238E27FC236}">
-                <a16:creationId xmlns:a16="http://schemas.microsoft.com/office/drawing/2014/main" id="{9FA4E6EB-6ECB-4369-8AB6-FEA9D7240358}"/>
+                <a16:creationId xmlns:a16="http://schemas.microsoft.com/office/drawing/2014/main" id="{388FBFD3-9D16-40C7-8234-5BB80866E8BC}"/>
               </a:ext>
             </a:extLst>
           </p:cNvPr>
@@ -29567,7 +29565,7 @@
           <p:cNvPr id="22" name="">
             <a:extLst xmlns:a="http://schemas.openxmlformats.org/drawingml/2006/main">
               <a:ext uri="{FF2B5EF4-FFF2-40B4-BE49-F238E27FC236}">
-                <a16:creationId xmlns:a16="http://schemas.microsoft.com/office/drawing/2014/main" id="{5429CE9C-EE90-4B4A-8BB4-58A4B6366736}"/>
+                <a16:creationId xmlns:a16="http://schemas.microsoft.com/office/drawing/2014/main" id="{8FFD21EF-9600-4703-8EAE-FEDB784F81A4}"/>
               </a:ext>
             </a:extLst>
           </p:cNvPr>
@@ -29600,7 +29598,7 @@
           <p:cNvPr id="23" name="">
             <a:extLst xmlns:a="http://schemas.openxmlformats.org/drawingml/2006/main">
               <a:ext uri="{FF2B5EF4-FFF2-40B4-BE49-F238E27FC236}">
-                <a16:creationId xmlns:a16="http://schemas.microsoft.com/office/drawing/2014/main" id="{F8B53FC6-BFE4-4B7E-A7D8-B8B3EA5F9B53}"/>
+                <a16:creationId xmlns:a16="http://schemas.microsoft.com/office/drawing/2014/main" id="{2AF20F31-32CA-4CE6-A96C-34681E167444}"/>
               </a:ext>
             </a:extLst>
           </p:cNvPr>
@@ -29664,7 +29662,7 @@
           <p:cNvPr id="24" name="">
             <a:extLst xmlns:a="http://schemas.openxmlformats.org/drawingml/2006/main">
               <a:ext uri="{FF2B5EF4-FFF2-40B4-BE49-F238E27FC236}">
-                <a16:creationId xmlns:a16="http://schemas.microsoft.com/office/drawing/2014/main" id="{2DA41226-89C0-455A-87B8-E54785F62C9B}"/>
+                <a16:creationId xmlns:a16="http://schemas.microsoft.com/office/drawing/2014/main" id="{93D8D6ED-1BD8-4674-A75B-855FF55A975B}"/>
               </a:ext>
             </a:extLst>
           </p:cNvPr>
@@ -29728,7 +29726,7 @@
           <p:cNvPr id="25" name="">
             <a:extLst xmlns:a="http://schemas.openxmlformats.org/drawingml/2006/main">
               <a:ext uri="{FF2B5EF4-FFF2-40B4-BE49-F238E27FC236}">
-                <a16:creationId xmlns:a16="http://schemas.microsoft.com/office/drawing/2014/main" id="{6D27136F-EAED-46B2-8BED-4D2EC89DA6CE}"/>
+                <a16:creationId xmlns:a16="http://schemas.microsoft.com/office/drawing/2014/main" id="{25C24153-166A-4948-AA29-9D7011AC03DD}"/>
               </a:ext>
             </a:extLst>
           </p:cNvPr>
@@ -29761,7 +29759,7 @@
           <p:cNvPr id="26" name="">
             <a:extLst xmlns:a="http://schemas.openxmlformats.org/drawingml/2006/main">
               <a:ext uri="{FF2B5EF4-FFF2-40B4-BE49-F238E27FC236}">
-                <a16:creationId xmlns:a16="http://schemas.microsoft.com/office/drawing/2014/main" id="{4031E908-F34E-4EF3-B191-F9F54D682D00}"/>
+                <a16:creationId xmlns:a16="http://schemas.microsoft.com/office/drawing/2014/main" id="{20EC4D0A-49DC-4CA7-B1FE-F026F912D583}"/>
               </a:ext>
             </a:extLst>
           </p:cNvPr>
@@ -29825,7 +29823,7 @@
           <p:cNvPr id="27" name="">
             <a:extLst xmlns:a="http://schemas.openxmlformats.org/drawingml/2006/main">
               <a:ext uri="{FF2B5EF4-FFF2-40B4-BE49-F238E27FC236}">
-                <a16:creationId xmlns:a16="http://schemas.microsoft.com/office/drawing/2014/main" id="{56364494-D478-4EA1-B63A-358AB747DE78}"/>
+                <a16:creationId xmlns:a16="http://schemas.microsoft.com/office/drawing/2014/main" id="{751C464E-8576-44A4-B478-D87896FE3B97}"/>
               </a:ext>
             </a:extLst>
           </p:cNvPr>
@@ -29889,7 +29887,7 @@
           <p:cNvPr id="28" name="">
             <a:extLst xmlns:a="http://schemas.openxmlformats.org/drawingml/2006/main">
               <a:ext uri="{FF2B5EF4-FFF2-40B4-BE49-F238E27FC236}">
-                <a16:creationId xmlns:a16="http://schemas.microsoft.com/office/drawing/2014/main" id="{2F58F296-7A4F-486F-82AC-DF027C3C4009}"/>
+                <a16:creationId xmlns:a16="http://schemas.microsoft.com/office/drawing/2014/main" id="{FE498E1B-0ED3-49F6-99FA-098DA6EE4617}"/>
               </a:ext>
             </a:extLst>
           </p:cNvPr>
@@ -29922,7 +29920,7 @@
           <p:cNvPr id="29" name="">
             <a:extLst xmlns:a="http://schemas.openxmlformats.org/drawingml/2006/main">
               <a:ext uri="{FF2B5EF4-FFF2-40B4-BE49-F238E27FC236}">
-                <a16:creationId xmlns:a16="http://schemas.microsoft.com/office/drawing/2014/main" id="{932FE1E0-277D-4408-A9DC-FC1986299F61}"/>
+                <a16:creationId xmlns:a16="http://schemas.microsoft.com/office/drawing/2014/main" id="{FABC80C2-EE61-4586-B115-75C83383B710}"/>
               </a:ext>
             </a:extLst>
           </p:cNvPr>
@@ -29986,7 +29984,7 @@
           <p:cNvPr id="30" name="">
             <a:extLst xmlns:a="http://schemas.openxmlformats.org/drawingml/2006/main">
               <a:ext uri="{FF2B5EF4-FFF2-40B4-BE49-F238E27FC236}">
-                <a16:creationId xmlns:a16="http://schemas.microsoft.com/office/drawing/2014/main" id="{A7A2FE91-0FAD-4868-B3BD-274245C68E2D}"/>
+                <a16:creationId xmlns:a16="http://schemas.microsoft.com/office/drawing/2014/main" id="{0A4C2069-C8A9-4BE5-82EC-F6584E2C6193}"/>
               </a:ext>
             </a:extLst>
           </p:cNvPr>
@@ -30050,7 +30048,7 @@
           <p:cNvPr id="31" name="">
             <a:extLst xmlns:a="http://schemas.openxmlformats.org/drawingml/2006/main">
               <a:ext uri="{FF2B5EF4-FFF2-40B4-BE49-F238E27FC236}">
-                <a16:creationId xmlns:a16="http://schemas.microsoft.com/office/drawing/2014/main" id="{B41ECD00-6283-4F6E-9CAF-23F0ABC4AD23}"/>
+                <a16:creationId xmlns:a16="http://schemas.microsoft.com/office/drawing/2014/main" id="{6C6673FA-999F-47FF-BD0A-D4B525FC8685}"/>
               </a:ext>
             </a:extLst>
           </p:cNvPr>
@@ -30085,7 +30083,7 @@
           <p:cNvPr id="32" name="">
             <a:extLst xmlns:a="http://schemas.openxmlformats.org/drawingml/2006/main">
               <a:ext uri="{FF2B5EF4-FFF2-40B4-BE49-F238E27FC236}">
-                <a16:creationId xmlns:a16="http://schemas.microsoft.com/office/drawing/2014/main" id="{700E54E8-EEAB-40F0-8A53-C019F34D7EB0}"/>
+                <a16:creationId xmlns:a16="http://schemas.microsoft.com/office/drawing/2014/main" id="{AF174846-F498-496F-B111-B7044D4FCD9B}"/>
               </a:ext>
             </a:extLst>
           </p:cNvPr>
@@ -30149,7 +30147,7 @@
           <p:cNvPr id="33" name="">
             <a:extLst xmlns:a="http://schemas.openxmlformats.org/drawingml/2006/main">
               <a:ext uri="{FF2B5EF4-FFF2-40B4-BE49-F238E27FC236}">
-                <a16:creationId xmlns:a16="http://schemas.microsoft.com/office/drawing/2014/main" id="{C745273C-34C8-4543-818A-81260A4FEFA6}"/>
+                <a16:creationId xmlns:a16="http://schemas.microsoft.com/office/drawing/2014/main" id="{1CA1F6DA-B444-4DDE-AF19-3BDA6307DB07}"/>
               </a:ext>
             </a:extLst>
           </p:cNvPr>
@@ -30213,7 +30211,7 @@
           <p:cNvPr id="34" name="">
             <a:extLst xmlns:a="http://schemas.openxmlformats.org/drawingml/2006/main">
               <a:ext uri="{FF2B5EF4-FFF2-40B4-BE49-F238E27FC236}">
-                <a16:creationId xmlns:a16="http://schemas.microsoft.com/office/drawing/2014/main" id="{D9836CBB-87C1-455D-A5E7-4EF2D487263B}"/>
+                <a16:creationId xmlns:a16="http://schemas.microsoft.com/office/drawing/2014/main" id="{4E1347E5-8EC3-4981-B0FB-B732BB286E42}"/>
               </a:ext>
             </a:extLst>
           </p:cNvPr>
@@ -30275,7 +30273,7 @@
     </p:spTree>
     <p:extLst>
       <p:ext uri="{BB962C8B-B14F-4D97-AF65-F5344CB8AC3E}">
-        <p14:creationId xmlns:p14="http://schemas.microsoft.com/office/powerpoint/2010/main" val="852209783"/>
+        <p14:creationId xmlns:p14="http://schemas.microsoft.com/office/powerpoint/2010/main" val="1153803983"/>
       </p:ext>
     </p:extLst>
   </p:cSld>
@@ -30299,7 +30297,7 @@
           <p:cNvPr id="1" name="">
             <a:extLst xmlns:a="http://schemas.openxmlformats.org/drawingml/2006/main">
               <a:ext uri="{FF2B5EF4-FFF2-40B4-BE49-F238E27FC236}">
-                <a16:creationId xmlns:a16="http://schemas.microsoft.com/office/drawing/2014/main" id="{B241D847-6325-482D-944F-0B2C578F57C1}"/>
+                <a16:creationId xmlns:a16="http://schemas.microsoft.com/office/drawing/2014/main" id="{EF9ACDDE-3060-453D-AA12-5989E57A43B8}"/>
               </a:ext>
             </a:extLst>
           </p:cNvPr>
@@ -30334,7 +30332,7 @@
           <p:cNvPr id="2" name="">
             <a:extLst xmlns:a="http://schemas.openxmlformats.org/drawingml/2006/main">
               <a:ext uri="{FF2B5EF4-FFF2-40B4-BE49-F238E27FC236}">
-                <a16:creationId xmlns:a16="http://schemas.microsoft.com/office/drawing/2014/main" id="{189A785D-E956-4E59-B9D1-B676B6DF8980}"/>
+                <a16:creationId xmlns:a16="http://schemas.microsoft.com/office/drawing/2014/main" id="{B705DE39-9E89-4C3B-8653-4F6DEB6CA088}"/>
               </a:ext>
             </a:extLst>
           </p:cNvPr>
@@ -30369,7 +30367,7 @@
           <p:cNvPr id="3" name="">
             <a:extLst xmlns:a="http://schemas.openxmlformats.org/drawingml/2006/main">
               <a:ext uri="{FF2B5EF4-FFF2-40B4-BE49-F238E27FC236}">
-                <a16:creationId xmlns:a16="http://schemas.microsoft.com/office/drawing/2014/main" id="{E89F8D15-8B88-41BC-A3C3-E3C56CE13833}"/>
+                <a16:creationId xmlns:a16="http://schemas.microsoft.com/office/drawing/2014/main" id="{7668B396-E1DF-4602-829D-35634D540F66}"/>
               </a:ext>
             </a:extLst>
           </p:cNvPr>
@@ -30404,7 +30402,7 @@
           <p:cNvPr id="4" name="kicker-02-marker">
             <a:extLst xmlns:a="http://schemas.openxmlformats.org/drawingml/2006/main">
               <a:ext uri="{FF2B5EF4-FFF2-40B4-BE49-F238E27FC236}">
-                <a16:creationId xmlns:a16="http://schemas.microsoft.com/office/drawing/2014/main" id="{EA2707ED-76B3-4D45-A932-A3AE87B383DD}"/>
+                <a16:creationId xmlns:a16="http://schemas.microsoft.com/office/drawing/2014/main" id="{A689CE36-16B3-47B7-AB42-AADA4E823955}"/>
               </a:ext>
             </a:extLst>
           </p:cNvPr>
@@ -30439,7 +30437,7 @@
           <p:cNvPr id="5" name="kicker-02-label">
             <a:extLst xmlns:a="http://schemas.openxmlformats.org/drawingml/2006/main">
               <a:ext uri="{FF2B5EF4-FFF2-40B4-BE49-F238E27FC236}">
-                <a16:creationId xmlns:a16="http://schemas.microsoft.com/office/drawing/2014/main" id="{F9C85165-80C0-427E-9681-3F54ED4FDC8E}"/>
+                <a16:creationId xmlns:a16="http://schemas.microsoft.com/office/drawing/2014/main" id="{21940D99-57AA-4B56-887C-A3BA2C29F016}"/>
               </a:ext>
             </a:extLst>
           </p:cNvPr>
@@ -30503,7 +30501,7 @@
           <p:cNvPr id="6" name="">
             <a:extLst xmlns:a="http://schemas.openxmlformats.org/drawingml/2006/main">
               <a:ext uri="{FF2B5EF4-FFF2-40B4-BE49-F238E27FC236}">
-                <a16:creationId xmlns:a16="http://schemas.microsoft.com/office/drawing/2014/main" id="{EC247C13-51DD-40CE-ACE8-068C26E0B6DA}"/>
+                <a16:creationId xmlns:a16="http://schemas.microsoft.com/office/drawing/2014/main" id="{E0D27F6F-4C89-4D00-8FC0-4A3D88DCBA4C}"/>
               </a:ext>
             </a:extLst>
           </p:cNvPr>
@@ -30567,7 +30565,7 @@
           <p:cNvPr id="7" name="">
             <a:extLst xmlns:a="http://schemas.openxmlformats.org/drawingml/2006/main">
               <a:ext uri="{FF2B5EF4-FFF2-40B4-BE49-F238E27FC236}">
-                <a16:creationId xmlns:a16="http://schemas.microsoft.com/office/drawing/2014/main" id="{14AA6726-498A-4C5C-AEB2-EF69976D5995}"/>
+                <a16:creationId xmlns:a16="http://schemas.microsoft.com/office/drawing/2014/main" id="{CD6FA41C-6AE4-4638-A247-2AC9A3F87ADD}"/>
               </a:ext>
             </a:extLst>
           </p:cNvPr>
@@ -30631,7 +30629,7 @@
           <p:cNvPr id="8" name="">
             <a:extLst xmlns:a="http://schemas.openxmlformats.org/drawingml/2006/main">
               <a:ext uri="{FF2B5EF4-FFF2-40B4-BE49-F238E27FC236}">
-                <a16:creationId xmlns:a16="http://schemas.microsoft.com/office/drawing/2014/main" id="{F7072BAD-C09E-4B92-8182-DAE7E41C01D2}"/>
+                <a16:creationId xmlns:a16="http://schemas.microsoft.com/office/drawing/2014/main" id="{734B6D6F-9476-408F-9AE4-9FFC6BBA1D24}"/>
               </a:ext>
             </a:extLst>
           </p:cNvPr>
@@ -30666,7 +30664,7 @@
           <p:cNvPr id="9" name="">
             <a:extLst xmlns:a="http://schemas.openxmlformats.org/drawingml/2006/main">
               <a:ext uri="{FF2B5EF4-FFF2-40B4-BE49-F238E27FC236}">
-                <a16:creationId xmlns:a16="http://schemas.microsoft.com/office/drawing/2014/main" id="{3AEB7C8B-8E12-4541-962C-B97FA1408919}"/>
+                <a16:creationId xmlns:a16="http://schemas.microsoft.com/office/drawing/2014/main" id="{C73672A9-9D1B-4768-9391-A026BE6CD282}"/>
               </a:ext>
             </a:extLst>
           </p:cNvPr>
@@ -30730,7 +30728,7 @@
           <p:cNvPr id="10" name="">
             <a:extLst xmlns:a="http://schemas.openxmlformats.org/drawingml/2006/main">
               <a:ext uri="{FF2B5EF4-FFF2-40B4-BE49-F238E27FC236}">
-                <a16:creationId xmlns:a16="http://schemas.microsoft.com/office/drawing/2014/main" id="{B19266EC-F52F-413A-BE7A-FBB7F5AC1479}"/>
+                <a16:creationId xmlns:a16="http://schemas.microsoft.com/office/drawing/2014/main" id="{4560384F-6B64-41DF-BA2A-C44332FE302A}"/>
               </a:ext>
             </a:extLst>
           </p:cNvPr>
@@ -30794,7 +30792,7 @@
           <p:cNvPr id="11" name="">
             <a:extLst xmlns:a="http://schemas.openxmlformats.org/drawingml/2006/main">
               <a:ext uri="{FF2B5EF4-FFF2-40B4-BE49-F238E27FC236}">
-                <a16:creationId xmlns:a16="http://schemas.microsoft.com/office/drawing/2014/main" id="{EC560255-EFCD-4D2C-8502-5F4FE7F9F229}"/>
+                <a16:creationId xmlns:a16="http://schemas.microsoft.com/office/drawing/2014/main" id="{0DDF6236-5541-47B9-9A1B-FB1389B464BF}"/>
               </a:ext>
             </a:extLst>
           </p:cNvPr>
@@ -30858,7 +30856,7 @@
           <p:cNvPr id="12" name="">
             <a:extLst xmlns:a="http://schemas.openxmlformats.org/drawingml/2006/main">
               <a:ext uri="{FF2B5EF4-FFF2-40B4-BE49-F238E27FC236}">
-                <a16:creationId xmlns:a16="http://schemas.microsoft.com/office/drawing/2014/main" id="{CDAE2C09-6439-42EF-93DD-E4FDE6903481}"/>
+                <a16:creationId xmlns:a16="http://schemas.microsoft.com/office/drawing/2014/main" id="{414F322C-89E7-4512-9DF4-94E680FD2C73}"/>
               </a:ext>
             </a:extLst>
           </p:cNvPr>
@@ -30893,7 +30891,7 @@
           <p:cNvPr id="13" name="">
             <a:extLst xmlns:a="http://schemas.openxmlformats.org/drawingml/2006/main">
               <a:ext uri="{FF2B5EF4-FFF2-40B4-BE49-F238E27FC236}">
-                <a16:creationId xmlns:a16="http://schemas.microsoft.com/office/drawing/2014/main" id="{7A13A48F-77E7-4625-8FF1-AFD57E954AC1}"/>
+                <a16:creationId xmlns:a16="http://schemas.microsoft.com/office/drawing/2014/main" id="{DAFF233E-4965-43E3-89FA-54ACC6679D5F}"/>
               </a:ext>
             </a:extLst>
           </p:cNvPr>
@@ -30926,7 +30924,7 @@
           <p:cNvPr id="14" name="">
             <a:extLst xmlns:a="http://schemas.openxmlformats.org/drawingml/2006/main">
               <a:ext uri="{FF2B5EF4-FFF2-40B4-BE49-F238E27FC236}">
-                <a16:creationId xmlns:a16="http://schemas.microsoft.com/office/drawing/2014/main" id="{491EE60A-3338-40AA-ACF4-C390E3D5FE7B}"/>
+                <a16:creationId xmlns:a16="http://schemas.microsoft.com/office/drawing/2014/main" id="{38CF1902-496B-4771-9710-527FBBF6A6DD}"/>
               </a:ext>
             </a:extLst>
           </p:cNvPr>
@@ -30961,7 +30959,7 @@
           <p:cNvPr id="15" name="">
             <a:extLst xmlns:a="http://schemas.openxmlformats.org/drawingml/2006/main">
               <a:ext uri="{FF2B5EF4-FFF2-40B4-BE49-F238E27FC236}">
-                <a16:creationId xmlns:a16="http://schemas.microsoft.com/office/drawing/2014/main" id="{81DD7807-2CE9-4718-84C3-1ED8D6D253ED}"/>
+                <a16:creationId xmlns:a16="http://schemas.microsoft.com/office/drawing/2014/main" id="{5DAA9BD5-F1F9-40BF-9B82-30094EFA2633}"/>
               </a:ext>
             </a:extLst>
           </p:cNvPr>
@@ -31025,7 +31023,7 @@
           <p:cNvPr id="16" name="">
             <a:extLst xmlns:a="http://schemas.openxmlformats.org/drawingml/2006/main">
               <a:ext uri="{FF2B5EF4-FFF2-40B4-BE49-F238E27FC236}">
-                <a16:creationId xmlns:a16="http://schemas.microsoft.com/office/drawing/2014/main" id="{400FA68E-67FE-4A39-8F9D-A6349B1A414D}"/>
+                <a16:creationId xmlns:a16="http://schemas.microsoft.com/office/drawing/2014/main" id="{47EFE4AE-2ECE-4618-984C-C165E6B04E09}"/>
               </a:ext>
             </a:extLst>
           </p:cNvPr>
@@ -31058,7 +31056,7 @@
           <p:cNvPr id="17" name="">
             <a:extLst xmlns:a="http://schemas.openxmlformats.org/drawingml/2006/main">
               <a:ext uri="{FF2B5EF4-FFF2-40B4-BE49-F238E27FC236}">
-                <a16:creationId xmlns:a16="http://schemas.microsoft.com/office/drawing/2014/main" id="{7AEC4ECF-869A-48F1-8913-A786508F4307}"/>
+                <a16:creationId xmlns:a16="http://schemas.microsoft.com/office/drawing/2014/main" id="{F6C7E276-AE10-4FD3-8A1E-607C2337053C}"/>
               </a:ext>
             </a:extLst>
           </p:cNvPr>
@@ -31122,7 +31120,7 @@
           <p:cNvPr id="18" name="">
             <a:extLst xmlns:a="http://schemas.openxmlformats.org/drawingml/2006/main">
               <a:ext uri="{FF2B5EF4-FFF2-40B4-BE49-F238E27FC236}">
-                <a16:creationId xmlns:a16="http://schemas.microsoft.com/office/drawing/2014/main" id="{9017FF00-EA17-4AC2-81C8-E8718092DD67}"/>
+                <a16:creationId xmlns:a16="http://schemas.microsoft.com/office/drawing/2014/main" id="{D5F4FD12-5657-4081-A978-BA323B6D4090}"/>
               </a:ext>
             </a:extLst>
           </p:cNvPr>
@@ -31186,7 +31184,7 @@
           <p:cNvPr id="19" name="">
             <a:extLst xmlns:a="http://schemas.openxmlformats.org/drawingml/2006/main">
               <a:ext uri="{FF2B5EF4-FFF2-40B4-BE49-F238E27FC236}">
-                <a16:creationId xmlns:a16="http://schemas.microsoft.com/office/drawing/2014/main" id="{494B8E1E-0518-44C2-A6CF-27A365B4DEC2}"/>
+                <a16:creationId xmlns:a16="http://schemas.microsoft.com/office/drawing/2014/main" id="{5EC2BBB8-533F-4F5E-8F30-22AD3B957A11}"/>
               </a:ext>
             </a:extLst>
           </p:cNvPr>
@@ -31219,7 +31217,7 @@
           <p:cNvPr id="20" name="">
             <a:extLst xmlns:a="http://schemas.openxmlformats.org/drawingml/2006/main">
               <a:ext uri="{FF2B5EF4-FFF2-40B4-BE49-F238E27FC236}">
-                <a16:creationId xmlns:a16="http://schemas.microsoft.com/office/drawing/2014/main" id="{B7E07FD1-5D63-4614-9208-19B79C50C04A}"/>
+                <a16:creationId xmlns:a16="http://schemas.microsoft.com/office/drawing/2014/main" id="{7B67F9EA-4770-49E9-B76F-9C2142814AD3}"/>
               </a:ext>
             </a:extLst>
           </p:cNvPr>
@@ -31283,7 +31281,7 @@
           <p:cNvPr id="21" name="">
             <a:extLst xmlns:a="http://schemas.openxmlformats.org/drawingml/2006/main">
               <a:ext uri="{FF2B5EF4-FFF2-40B4-BE49-F238E27FC236}">
-                <a16:creationId xmlns:a16="http://schemas.microsoft.com/office/drawing/2014/main" id="{74DD7435-7819-4B1C-8FBB-CFDE5E1962C1}"/>
+                <a16:creationId xmlns:a16="http://schemas.microsoft.com/office/drawing/2014/main" id="{E0B3F044-92CC-465A-BFD9-CC07C4DF0300}"/>
               </a:ext>
             </a:extLst>
           </p:cNvPr>
@@ -31347,7 +31345,7 @@
           <p:cNvPr id="22" name="">
             <a:extLst xmlns:a="http://schemas.openxmlformats.org/drawingml/2006/main">
               <a:ext uri="{FF2B5EF4-FFF2-40B4-BE49-F238E27FC236}">
-                <a16:creationId xmlns:a16="http://schemas.microsoft.com/office/drawing/2014/main" id="{74CA514D-0C34-4F77-B9A5-1A03403135F9}"/>
+                <a16:creationId xmlns:a16="http://schemas.microsoft.com/office/drawing/2014/main" id="{C685BA31-6254-423D-9261-A6B39F73E62B}"/>
               </a:ext>
             </a:extLst>
           </p:cNvPr>
@@ -31380,7 +31378,7 @@
           <p:cNvPr id="23" name="">
             <a:extLst xmlns:a="http://schemas.openxmlformats.org/drawingml/2006/main">
               <a:ext uri="{FF2B5EF4-FFF2-40B4-BE49-F238E27FC236}">
-                <a16:creationId xmlns:a16="http://schemas.microsoft.com/office/drawing/2014/main" id="{850D9EF6-CE7E-4E89-9E56-93A90FEC148A}"/>
+                <a16:creationId xmlns:a16="http://schemas.microsoft.com/office/drawing/2014/main" id="{2C8B5618-90E2-4262-BAD4-BEFE99EA7E5E}"/>
               </a:ext>
             </a:extLst>
           </p:cNvPr>
@@ -31444,7 +31442,7 @@
           <p:cNvPr id="24" name="">
             <a:extLst xmlns:a="http://schemas.openxmlformats.org/drawingml/2006/main">
               <a:ext uri="{FF2B5EF4-FFF2-40B4-BE49-F238E27FC236}">
-                <a16:creationId xmlns:a16="http://schemas.microsoft.com/office/drawing/2014/main" id="{89E638C9-BAAA-4B19-B8DA-696B99AEB3F5}"/>
+                <a16:creationId xmlns:a16="http://schemas.microsoft.com/office/drawing/2014/main" id="{0DCCCCDE-DFE0-45E8-ABD7-47E5E256E8E9}"/>
               </a:ext>
             </a:extLst>
           </p:cNvPr>
@@ -31508,7 +31506,7 @@
           <p:cNvPr id="25" name="">
             <a:extLst xmlns:a="http://schemas.openxmlformats.org/drawingml/2006/main">
               <a:ext uri="{FF2B5EF4-FFF2-40B4-BE49-F238E27FC236}">
-                <a16:creationId xmlns:a16="http://schemas.microsoft.com/office/drawing/2014/main" id="{DF775D01-B7C2-4E42-B9D3-4594C2ED538B}"/>
+                <a16:creationId xmlns:a16="http://schemas.microsoft.com/office/drawing/2014/main" id="{A45EB3D4-954B-4C75-AADA-28BACC8399D7}"/>
               </a:ext>
             </a:extLst>
           </p:cNvPr>
@@ -31543,7 +31541,7 @@
           <p:cNvPr id="26" name="">
             <a:extLst xmlns:a="http://schemas.openxmlformats.org/drawingml/2006/main">
               <a:ext uri="{FF2B5EF4-FFF2-40B4-BE49-F238E27FC236}">
-                <a16:creationId xmlns:a16="http://schemas.microsoft.com/office/drawing/2014/main" id="{31412982-7679-41EE-995F-A8FB02EDF1B3}"/>
+                <a16:creationId xmlns:a16="http://schemas.microsoft.com/office/drawing/2014/main" id="{3854ABBC-5714-457A-BA9B-944E7064D088}"/>
               </a:ext>
             </a:extLst>
           </p:cNvPr>
@@ -31607,7 +31605,7 @@
           <p:cNvPr id="27" name="">
             <a:extLst xmlns:a="http://schemas.openxmlformats.org/drawingml/2006/main">
               <a:ext uri="{FF2B5EF4-FFF2-40B4-BE49-F238E27FC236}">
-                <a16:creationId xmlns:a16="http://schemas.microsoft.com/office/drawing/2014/main" id="{94964465-F67A-4087-A95F-AA2BBB617876}"/>
+                <a16:creationId xmlns:a16="http://schemas.microsoft.com/office/drawing/2014/main" id="{04C3D6AC-85DC-4258-99F7-8A9689373627}"/>
               </a:ext>
             </a:extLst>
           </p:cNvPr>
@@ -31640,7 +31638,7 @@
           <p:cNvPr id="28" name="">
             <a:extLst xmlns:a="http://schemas.openxmlformats.org/drawingml/2006/main">
               <a:ext uri="{FF2B5EF4-FFF2-40B4-BE49-F238E27FC236}">
-                <a16:creationId xmlns:a16="http://schemas.microsoft.com/office/drawing/2014/main" id="{8D3C3B54-D743-4EC8-B998-5C7010926F1E}"/>
+                <a16:creationId xmlns:a16="http://schemas.microsoft.com/office/drawing/2014/main" id="{F1CB587F-9B48-4A8F-B681-36CA854A413D}"/>
               </a:ext>
             </a:extLst>
           </p:cNvPr>
@@ -31704,7 +31702,7 @@
           <p:cNvPr id="29" name="">
             <a:extLst xmlns:a="http://schemas.openxmlformats.org/drawingml/2006/main">
               <a:ext uri="{FF2B5EF4-FFF2-40B4-BE49-F238E27FC236}">
-                <a16:creationId xmlns:a16="http://schemas.microsoft.com/office/drawing/2014/main" id="{F482483C-338D-4C97-A0FB-25855C95466B}"/>
+                <a16:creationId xmlns:a16="http://schemas.microsoft.com/office/drawing/2014/main" id="{80A3C909-DEE8-4F78-A4BC-744660142CEB}"/>
               </a:ext>
             </a:extLst>
           </p:cNvPr>
@@ -31768,7 +31766,7 @@
           <p:cNvPr id="30" name="">
             <a:extLst xmlns:a="http://schemas.openxmlformats.org/drawingml/2006/main">
               <a:ext uri="{FF2B5EF4-FFF2-40B4-BE49-F238E27FC236}">
-                <a16:creationId xmlns:a16="http://schemas.microsoft.com/office/drawing/2014/main" id="{0BD20AD6-32D2-4D1A-A934-BF54E348F55A}"/>
+                <a16:creationId xmlns:a16="http://schemas.microsoft.com/office/drawing/2014/main" id="{F7659EE6-2921-4E64-A264-B53D21CD4054}"/>
               </a:ext>
             </a:extLst>
           </p:cNvPr>
@@ -31801,7 +31799,7 @@
           <p:cNvPr id="31" name="">
             <a:extLst xmlns:a="http://schemas.openxmlformats.org/drawingml/2006/main">
               <a:ext uri="{FF2B5EF4-FFF2-40B4-BE49-F238E27FC236}">
-                <a16:creationId xmlns:a16="http://schemas.microsoft.com/office/drawing/2014/main" id="{F850523A-7B97-4296-BC31-4B303E171DE8}"/>
+                <a16:creationId xmlns:a16="http://schemas.microsoft.com/office/drawing/2014/main" id="{FDAF0BF3-D83B-44C5-ABF7-DCC7145FCEBA}"/>
               </a:ext>
             </a:extLst>
           </p:cNvPr>
@@ -31865,7 +31863,7 @@
           <p:cNvPr id="32" name="">
             <a:extLst xmlns:a="http://schemas.openxmlformats.org/drawingml/2006/main">
               <a:ext uri="{FF2B5EF4-FFF2-40B4-BE49-F238E27FC236}">
-                <a16:creationId xmlns:a16="http://schemas.microsoft.com/office/drawing/2014/main" id="{AE1652C0-D573-48EC-A51E-F0B546B94A5A}"/>
+                <a16:creationId xmlns:a16="http://schemas.microsoft.com/office/drawing/2014/main" id="{A4ADCC38-B1DF-49BF-9EC8-98A2C0FBB96F}"/>
               </a:ext>
             </a:extLst>
           </p:cNvPr>
@@ -31929,7 +31927,7 @@
           <p:cNvPr id="33" name="">
             <a:extLst xmlns:a="http://schemas.openxmlformats.org/drawingml/2006/main">
               <a:ext uri="{FF2B5EF4-FFF2-40B4-BE49-F238E27FC236}">
-                <a16:creationId xmlns:a16="http://schemas.microsoft.com/office/drawing/2014/main" id="{B6AAD03B-52B2-41CC-8AA3-C7DB0AE71CD4}"/>
+                <a16:creationId xmlns:a16="http://schemas.microsoft.com/office/drawing/2014/main" id="{21A127CD-EF2D-4FF9-832D-5A899BA01081}"/>
               </a:ext>
             </a:extLst>
           </p:cNvPr>
@@ -31964,7 +31962,7 @@
           <p:cNvPr id="34" name="">
             <a:extLst xmlns:a="http://schemas.openxmlformats.org/drawingml/2006/main">
               <a:ext uri="{FF2B5EF4-FFF2-40B4-BE49-F238E27FC236}">
-                <a16:creationId xmlns:a16="http://schemas.microsoft.com/office/drawing/2014/main" id="{61B1AC1C-102C-46CD-B8F3-02DDAD7B1173}"/>
+                <a16:creationId xmlns:a16="http://schemas.microsoft.com/office/drawing/2014/main" id="{A27A6F1A-1EEE-404E-AECE-CBD8DA20322B}"/>
               </a:ext>
             </a:extLst>
           </p:cNvPr>
@@ -32028,7 +32026,7 @@
           <p:cNvPr id="35" name="">
             <a:extLst xmlns:a="http://schemas.openxmlformats.org/drawingml/2006/main">
               <a:ext uri="{FF2B5EF4-FFF2-40B4-BE49-F238E27FC236}">
-                <a16:creationId xmlns:a16="http://schemas.microsoft.com/office/drawing/2014/main" id="{31A2AF2D-B68D-4562-AB94-DAA52D54F103}"/>
+                <a16:creationId xmlns:a16="http://schemas.microsoft.com/office/drawing/2014/main" id="{3AC3D15F-BC70-44AE-9F92-C2AB2C703663}"/>
               </a:ext>
             </a:extLst>
           </p:cNvPr>
@@ -32092,7 +32090,7 @@
           <p:cNvPr id="36" name="">
             <a:extLst xmlns:a="http://schemas.openxmlformats.org/drawingml/2006/main">
               <a:ext uri="{FF2B5EF4-FFF2-40B4-BE49-F238E27FC236}">
-                <a16:creationId xmlns:a16="http://schemas.microsoft.com/office/drawing/2014/main" id="{2EC40AFC-394A-432F-9E53-C05CB74E0EBF}"/>
+                <a16:creationId xmlns:a16="http://schemas.microsoft.com/office/drawing/2014/main" id="{7A724199-5FF5-4896-B616-BB79BFE258B7}"/>
               </a:ext>
             </a:extLst>
           </p:cNvPr>
@@ -32156,7 +32154,7 @@
           <p:cNvPr id="37" name="">
             <a:extLst xmlns:a="http://schemas.openxmlformats.org/drawingml/2006/main">
               <a:ext uri="{FF2B5EF4-FFF2-40B4-BE49-F238E27FC236}">
-                <a16:creationId xmlns:a16="http://schemas.microsoft.com/office/drawing/2014/main" id="{0C1BD9D5-D3A2-4D85-8DEE-63D909CB2E56}"/>
+                <a16:creationId xmlns:a16="http://schemas.microsoft.com/office/drawing/2014/main" id="{0BD1F025-0E42-48A6-A211-82DC7665B165}"/>
               </a:ext>
             </a:extLst>
           </p:cNvPr>
@@ -32191,7 +32189,7 @@
           <p:cNvPr id="38" name="">
             <a:extLst xmlns:a="http://schemas.openxmlformats.org/drawingml/2006/main">
               <a:ext uri="{FF2B5EF4-FFF2-40B4-BE49-F238E27FC236}">
-                <a16:creationId xmlns:a16="http://schemas.microsoft.com/office/drawing/2014/main" id="{DD86DD23-8B19-4F12-978B-972F234BE46B}"/>
+                <a16:creationId xmlns:a16="http://schemas.microsoft.com/office/drawing/2014/main" id="{2D1888BA-F506-4133-9B3C-6994F6997A97}"/>
               </a:ext>
             </a:extLst>
           </p:cNvPr>
@@ -32226,7 +32224,7 @@
           <p:cNvPr id="39" name="">
             <a:extLst xmlns:a="http://schemas.openxmlformats.org/drawingml/2006/main">
               <a:ext uri="{FF2B5EF4-FFF2-40B4-BE49-F238E27FC236}">
-                <a16:creationId xmlns:a16="http://schemas.microsoft.com/office/drawing/2014/main" id="{CC0A5502-8909-4CF7-90C1-B1A39FE414A0}"/>
+                <a16:creationId xmlns:a16="http://schemas.microsoft.com/office/drawing/2014/main" id="{C6BA76C2-548A-415F-BA83-C6B41150B756}"/>
               </a:ext>
             </a:extLst>
           </p:cNvPr>
@@ -32261,7 +32259,7 @@
           <p:cNvPr id="40" name="kicker-02-marker">
             <a:extLst xmlns:a="http://schemas.openxmlformats.org/drawingml/2006/main">
               <a:ext uri="{FF2B5EF4-FFF2-40B4-BE49-F238E27FC236}">
-                <a16:creationId xmlns:a16="http://schemas.microsoft.com/office/drawing/2014/main" id="{105CE1E0-DCCF-4C42-9525-C03640BC8C31}"/>
+                <a16:creationId xmlns:a16="http://schemas.microsoft.com/office/drawing/2014/main" id="{326F298E-64C0-4B0E-9F51-B04CD5689EC6}"/>
               </a:ext>
             </a:extLst>
           </p:cNvPr>
@@ -32296,7 +32294,7 @@
           <p:cNvPr id="41" name="kicker-02-label">
             <a:extLst xmlns:a="http://schemas.openxmlformats.org/drawingml/2006/main">
               <a:ext uri="{FF2B5EF4-FFF2-40B4-BE49-F238E27FC236}">
-                <a16:creationId xmlns:a16="http://schemas.microsoft.com/office/drawing/2014/main" id="{55FBAB1D-0E3D-4979-9528-94881031F666}"/>
+                <a16:creationId xmlns:a16="http://schemas.microsoft.com/office/drawing/2014/main" id="{255EDB04-FCF5-46DB-AA47-A91AB6208E79}"/>
               </a:ext>
             </a:extLst>
           </p:cNvPr>
@@ -32360,7 +32358,7 @@
           <p:cNvPr id="42" name="">
             <a:extLst xmlns:a="http://schemas.openxmlformats.org/drawingml/2006/main">
               <a:ext uri="{FF2B5EF4-FFF2-40B4-BE49-F238E27FC236}">
-                <a16:creationId xmlns:a16="http://schemas.microsoft.com/office/drawing/2014/main" id="{F1D303CD-5A83-40B5-B453-085FFB7615FF}"/>
+                <a16:creationId xmlns:a16="http://schemas.microsoft.com/office/drawing/2014/main" id="{05D6C9DA-F2F9-46CC-9F8A-DD6CB4EB57B0}"/>
               </a:ext>
             </a:extLst>
           </p:cNvPr>
@@ -32424,7 +32422,7 @@
           <p:cNvPr id="43" name="">
             <a:extLst xmlns:a="http://schemas.openxmlformats.org/drawingml/2006/main">
               <a:ext uri="{FF2B5EF4-FFF2-40B4-BE49-F238E27FC236}">
-                <a16:creationId xmlns:a16="http://schemas.microsoft.com/office/drawing/2014/main" id="{F5A427EB-F40E-408E-928F-596BD6865565}"/>
+                <a16:creationId xmlns:a16="http://schemas.microsoft.com/office/drawing/2014/main" id="{A30B5F43-F3DA-438E-AA88-5BFAB3EAB8D1}"/>
               </a:ext>
             </a:extLst>
           </p:cNvPr>
@@ -32488,7 +32486,7 @@
           <p:cNvPr id="44" name="">
             <a:extLst xmlns:a="http://schemas.openxmlformats.org/drawingml/2006/main">
               <a:ext uri="{FF2B5EF4-FFF2-40B4-BE49-F238E27FC236}">
-                <a16:creationId xmlns:a16="http://schemas.microsoft.com/office/drawing/2014/main" id="{8414CCF6-7077-4E55-BED6-74461CAFD83E}"/>
+                <a16:creationId xmlns:a16="http://schemas.microsoft.com/office/drawing/2014/main" id="{1E33AB5E-2EA5-4B02-83F7-0EF51BABBD31}"/>
               </a:ext>
             </a:extLst>
           </p:cNvPr>
@@ -32523,7 +32521,7 @@
           <p:cNvPr id="45" name="">
             <a:extLst xmlns:a="http://schemas.openxmlformats.org/drawingml/2006/main">
               <a:ext uri="{FF2B5EF4-FFF2-40B4-BE49-F238E27FC236}">
-                <a16:creationId xmlns:a16="http://schemas.microsoft.com/office/drawing/2014/main" id="{4E371545-773F-46D3-A09B-7F2E6AD31150}"/>
+                <a16:creationId xmlns:a16="http://schemas.microsoft.com/office/drawing/2014/main" id="{A94BD8C1-7479-4C25-AA47-09F9E80595DB}"/>
               </a:ext>
             </a:extLst>
           </p:cNvPr>
@@ -32558,7 +32556,7 @@
           <p:cNvPr id="46" name="">
             <a:extLst xmlns:a="http://schemas.openxmlformats.org/drawingml/2006/main">
               <a:ext uri="{FF2B5EF4-FFF2-40B4-BE49-F238E27FC236}">
-                <a16:creationId xmlns:a16="http://schemas.microsoft.com/office/drawing/2014/main" id="{618B1D8F-0484-4455-AAA4-7ABE250CC864}"/>
+                <a16:creationId xmlns:a16="http://schemas.microsoft.com/office/drawing/2014/main" id="{E35DDA91-FCAF-4227-8FD9-47F0341630DB}"/>
               </a:ext>
             </a:extLst>
           </p:cNvPr>
@@ -32593,7 +32591,7 @@
           <p:cNvPr id="47" name="">
             <a:extLst xmlns:a="http://schemas.openxmlformats.org/drawingml/2006/main">
               <a:ext uri="{FF2B5EF4-FFF2-40B4-BE49-F238E27FC236}">
-                <a16:creationId xmlns:a16="http://schemas.microsoft.com/office/drawing/2014/main" id="{B70D3ACB-31C9-4D56-A8AA-954856FE2760}"/>
+                <a16:creationId xmlns:a16="http://schemas.microsoft.com/office/drawing/2014/main" id="{37FA3BD4-EA81-4616-B085-0386BC7AA30D}"/>
               </a:ext>
             </a:extLst>
           </p:cNvPr>
@@ -32628,7 +32626,7 @@
           <p:cNvPr id="48" name="">
             <a:extLst xmlns:a="http://schemas.openxmlformats.org/drawingml/2006/main">
               <a:ext uri="{FF2B5EF4-FFF2-40B4-BE49-F238E27FC236}">
-                <a16:creationId xmlns:a16="http://schemas.microsoft.com/office/drawing/2014/main" id="{4425ABA1-0A1C-40A1-BD61-3CF9D8353EF7}"/>
+                <a16:creationId xmlns:a16="http://schemas.microsoft.com/office/drawing/2014/main" id="{A988538B-FE82-428D-9EFB-441A3189F9A9}"/>
               </a:ext>
             </a:extLst>
           </p:cNvPr>
@@ -32692,7 +32690,7 @@
           <p:cNvPr id="49" name="">
             <a:extLst xmlns:a="http://schemas.openxmlformats.org/drawingml/2006/main">
               <a:ext uri="{FF2B5EF4-FFF2-40B4-BE49-F238E27FC236}">
-                <a16:creationId xmlns:a16="http://schemas.microsoft.com/office/drawing/2014/main" id="{A76588E9-006F-46D9-8BA5-644CC66F8346}"/>
+                <a16:creationId xmlns:a16="http://schemas.microsoft.com/office/drawing/2014/main" id="{EF3D54F5-6020-42F4-990B-0544A1F6B704}"/>
               </a:ext>
             </a:extLst>
           </p:cNvPr>
@@ -32756,7 +32754,7 @@
           <p:cNvPr id="50" name="">
             <a:extLst xmlns:a="http://schemas.openxmlformats.org/drawingml/2006/main">
               <a:ext uri="{FF2B5EF4-FFF2-40B4-BE49-F238E27FC236}">
-                <a16:creationId xmlns:a16="http://schemas.microsoft.com/office/drawing/2014/main" id="{15764496-9284-4939-B3E0-1825C956B108}"/>
+                <a16:creationId xmlns:a16="http://schemas.microsoft.com/office/drawing/2014/main" id="{64D82B68-46A9-4B65-9F4B-7CC23F1CD02B}"/>
               </a:ext>
             </a:extLst>
           </p:cNvPr>
@@ -32818,7 +32816,7 @@
     </p:spTree>
     <p:extLst>
       <p:ext uri="{BB962C8B-B14F-4D97-AF65-F5344CB8AC3E}">
-        <p14:creationId xmlns:p14="http://schemas.microsoft.com/office/powerpoint/2010/main" val="380652909"/>
+        <p14:creationId xmlns:p14="http://schemas.microsoft.com/office/powerpoint/2010/main" val="958471813"/>
       </p:ext>
     </p:extLst>
   </p:cSld>
